--- a/docs/test/stress/e2e-outputs/operating_basic_pr05.pptx
+++ b/docs/test/stress/e2e-outputs/operating_basic_pr05.pptx
@@ -2404,7 +2404,7 @@
         <p:spPr>
           <a:xfrm>
             <a:off x="502920" y="3090672"/>
-            <a:ext cx="7315200" cy="365760"/>
+            <a:ext cx="7315200" cy="329184"/>
           </a:xfrm>
           <a:prstGeom prst="rect">
             <a:avLst/>
@@ -2442,7 +2442,7 @@
         </p:nvSpPr>
         <p:spPr>
           <a:xfrm>
-            <a:off x="502920" y="3685032"/>
+            <a:off x="502920" y="3639312"/>
             <a:ext cx="1005840" cy="292608"/>
           </a:xfrm>
           <a:prstGeom prst="roundRect">
@@ -2464,7 +2464,7 @@
         </p:nvSpPr>
         <p:spPr>
           <a:xfrm>
-            <a:off x="502920" y="3685032"/>
+            <a:off x="502920" y="3639312"/>
             <a:ext cx="1005840" cy="292608"/>
           </a:xfrm>
           <a:prstGeom prst="rect">
@@ -2503,7 +2503,7 @@
         </p:nvSpPr>
         <p:spPr>
           <a:xfrm>
-            <a:off x="1600200" y="3685032"/>
+            <a:off x="1600200" y="3639312"/>
             <a:ext cx="1005840" cy="292608"/>
           </a:xfrm>
           <a:prstGeom prst="roundRect">
@@ -2525,7 +2525,7 @@
         </p:nvSpPr>
         <p:spPr>
           <a:xfrm>
-            <a:off x="1600200" y="3685032"/>
+            <a:off x="1600200" y="3639312"/>
             <a:ext cx="1005840" cy="292608"/>
           </a:xfrm>
           <a:prstGeom prst="rect">
@@ -2564,7 +2564,7 @@
         </p:nvSpPr>
         <p:spPr>
           <a:xfrm>
-            <a:off x="502920" y="4187952"/>
+            <a:off x="502920" y="4078224"/>
             <a:ext cx="6858000" cy="1051560"/>
           </a:xfrm>
           <a:prstGeom prst="roundRect">
@@ -2591,7 +2591,7 @@
         </p:nvSpPr>
         <p:spPr>
           <a:xfrm>
-            <a:off x="758952" y="4297680"/>
+            <a:off x="758952" y="4187952"/>
             <a:ext cx="6345936" cy="832104"/>
           </a:xfrm>
           <a:prstGeom prst="rect">
@@ -2733,7 +2733,7 @@
                 <a:ea typeface="Pretendard" pitchFamily="34" charset="-122"/>
                 <a:cs typeface="Pretendard" pitchFamily="34" charset="-120"/>
               </a:rPr>
-              <a:t>크리딜   |   </a:t>
+              <a:t>크리딜</a:t>
             </a:r>
             <a:endParaRPr lang="en-US" sz="800" dirty="0"/>
           </a:p>
@@ -3091,7 +3091,7 @@
                 <a:ea typeface="Pretendard" pitchFamily="34" charset="-122"/>
                 <a:cs typeface="Pretendard" pitchFamily="34" charset="-120"/>
               </a:rPr>
-              <a:t>450.0억 원</a:t>
+              <a:t>450억 원</a:t>
             </a:r>
             <a:endParaRPr lang="en-US" sz="1150" dirty="0"/>
           </a:p>
@@ -3198,7 +3198,7 @@
                 <a:ea typeface="Pretendard" pitchFamily="34" charset="-122"/>
                 <a:cs typeface="Pretendard" pitchFamily="34" charset="-120"/>
               </a:rPr>
-              <a:t>20.70억 원</a:t>
+              <a:t>20.7억 원</a:t>
             </a:r>
             <a:endParaRPr lang="en-US" sz="1150" dirty="0"/>
           </a:p>
@@ -3519,7 +3519,7 @@
                 <a:ea typeface="Pretendard" pitchFamily="34" charset="-122"/>
                 <a:cs typeface="Pretendard" pitchFamily="34" charset="-120"/>
               </a:rPr>
-              <a:t>0.0억 원</a:t>
+              <a:t>-</a:t>
             </a:r>
             <a:endParaRPr lang="en-US" sz="1150" dirty="0"/>
           </a:p>
@@ -3626,7 +3626,7 @@
                 <a:ea typeface="Pretendard" pitchFamily="34" charset="-122"/>
                 <a:cs typeface="Pretendard" pitchFamily="34" charset="-120"/>
               </a:rPr>
-              <a:t>225.0억 원</a:t>
+              <a:t>225억 원</a:t>
             </a:r>
             <a:endParaRPr lang="en-US" sz="1150" dirty="0"/>
           </a:p>
@@ -4357,7 +4357,7 @@
                           <a:ea typeface="Pretendard" pitchFamily="34" charset="-122"/>
                           <a:cs typeface="Pretendard" pitchFamily="34" charset="-120"/>
                         </a:rPr>
-                        <a:t>0.00%</a:t>
+                        <a:t>-</a:t>
                       </a:r>
                       <a:endParaRPr lang="en-US" sz="1100" dirty="0">
                         <a:latin typeface="Pretendard" charset="0"/>
@@ -4659,7 +4659,7 @@
                           <a:ea typeface="Pretendard" pitchFamily="34" charset="-122"/>
                           <a:cs typeface="Pretendard" pitchFamily="34" charset="-120"/>
                         </a:rPr>
-                        <a:t>0.00%</a:t>
+                        <a:t>-</a:t>
                       </a:r>
                       <a:endParaRPr lang="en-US" sz="1100" dirty="0">
                         <a:latin typeface="Pretendard" charset="0"/>
@@ -4961,7 +4961,7 @@
                           <a:ea typeface="Pretendard" pitchFamily="34" charset="-122"/>
                           <a:cs typeface="Pretendard" pitchFamily="34" charset="-120"/>
                         </a:rPr>
-                        <a:t>0.00%</a:t>
+                        <a:t>-</a:t>
                       </a:r>
                       <a:endParaRPr lang="en-US" sz="1100" dirty="0">
                         <a:latin typeface="Pretendard" charset="0"/>
@@ -5263,7 +5263,7 @@
                           <a:ea typeface="Pretendard" pitchFamily="34" charset="-122"/>
                           <a:cs typeface="Pretendard" pitchFamily="34" charset="-120"/>
                         </a:rPr>
-                        <a:t>0.00%</a:t>
+                        <a:t>-</a:t>
                       </a:r>
                       <a:endParaRPr lang="en-US" sz="1100" dirty="0">
                         <a:latin typeface="Pretendard" charset="0"/>
@@ -5475,7 +5475,7 @@
                 <a:ea typeface="Pretendard" pitchFamily="34" charset="-122"/>
                 <a:cs typeface="Pretendard" pitchFamily="34" charset="-120"/>
               </a:rPr>
-              <a:t>크리딜   |   </a:t>
+              <a:t>크리딜</a:t>
             </a:r>
             <a:endParaRPr lang="en-US" sz="800" dirty="0"/>
           </a:p>
@@ -5830,7 +5830,7 @@
                 <a:ea typeface="Pretendard" pitchFamily="34" charset="-122"/>
                 <a:cs typeface="Pretendard" pitchFamily="34" charset="-120"/>
               </a:rPr>
-              <a:t>크리딜   |   </a:t>
+              <a:t>크리딜</a:t>
             </a:r>
             <a:endParaRPr lang="en-US" sz="800" dirty="0"/>
           </a:p>
@@ -6315,7 +6315,7 @@
                 <a:ea typeface="Pretendard" pitchFamily="34" charset="-122"/>
                 <a:cs typeface="Pretendard" pitchFamily="34" charset="-120"/>
               </a:rPr>
-              <a:t>크리딜   |   </a:t>
+              <a:t>크리딜</a:t>
             </a:r>
             <a:endParaRPr lang="en-US" sz="800" dirty="0"/>
           </a:p>
@@ -6577,7 +6577,7 @@
         <p:spPr>
           <a:xfrm>
             <a:off x="502920" y="1719072"/>
-            <a:ext cx="5368900" cy="868680"/>
+            <a:ext cx="5368900" cy="749808"/>
           </a:xfrm>
           <a:prstGeom prst="rect">
             <a:avLst/>
@@ -6601,8 +6601,8 @@
         </p:nvSpPr>
         <p:spPr>
           <a:xfrm>
-            <a:off x="640080" y="1883664"/>
-            <a:ext cx="320040" cy="320040"/>
+            <a:off x="640080" y="1947672"/>
+            <a:ext cx="292608" cy="292608"/>
           </a:xfrm>
           <a:prstGeom prst="rect">
             <a:avLst/>
@@ -6621,8 +6621,8 @@
         </p:nvSpPr>
         <p:spPr>
           <a:xfrm>
-            <a:off x="640080" y="1883664"/>
-            <a:ext cx="320040" cy="320040"/>
+            <a:off x="640080" y="1947672"/>
+            <a:ext cx="292608" cy="292608"/>
           </a:xfrm>
           <a:prstGeom prst="rect">
             <a:avLst/>
@@ -6638,7 +6638,7 @@
               <a:buNone/>
             </a:pPr>
             <a:r>
-              <a:rPr lang="en-US" sz="1100" b="1" dirty="0">
+              <a:rPr lang="en-US" sz="1050" b="1" dirty="0">
                 <a:solidFill>
                   <a:srgbClr val="FFFFFF"/>
                 </a:solidFill>
@@ -6648,7 +6648,7 @@
               </a:rPr>
               <a:t>✓</a:t>
             </a:r>
-            <a:endParaRPr lang="en-US" sz="1100" dirty="0"/>
+            <a:endParaRPr lang="en-US" sz="1050" dirty="0"/>
           </a:p>
         </p:txBody>
       </p:sp>
@@ -6660,8 +6660,8 @@
         </p:nvSpPr>
         <p:spPr>
           <a:xfrm>
-            <a:off x="1051560" y="1810512"/>
-            <a:ext cx="4683100" cy="722376"/>
+            <a:off x="1033272" y="1792224"/>
+            <a:ext cx="4710532" cy="603504"/>
           </a:xfrm>
           <a:prstGeom prst="rect">
             <a:avLst/>
@@ -6702,8 +6702,8 @@
         </p:nvSpPr>
         <p:spPr>
           <a:xfrm>
-            <a:off x="502920" y="2715768"/>
-            <a:ext cx="5368900" cy="868680"/>
+            <a:off x="502920" y="2542032"/>
+            <a:ext cx="5368900" cy="749808"/>
           </a:xfrm>
           <a:prstGeom prst="rect">
             <a:avLst/>
@@ -6727,8 +6727,8 @@
         </p:nvSpPr>
         <p:spPr>
           <a:xfrm>
-            <a:off x="640080" y="2880360"/>
-            <a:ext cx="320040" cy="320040"/>
+            <a:off x="640080" y="2770632"/>
+            <a:ext cx="292608" cy="292608"/>
           </a:xfrm>
           <a:prstGeom prst="rect">
             <a:avLst/>
@@ -6747,8 +6747,8 @@
         </p:nvSpPr>
         <p:spPr>
           <a:xfrm>
-            <a:off x="640080" y="2880360"/>
-            <a:ext cx="320040" cy="320040"/>
+            <a:off x="640080" y="2770632"/>
+            <a:ext cx="292608" cy="292608"/>
           </a:xfrm>
           <a:prstGeom prst="rect">
             <a:avLst/>
@@ -6764,7 +6764,7 @@
               <a:buNone/>
             </a:pPr>
             <a:r>
-              <a:rPr lang="en-US" sz="1100" b="1" dirty="0">
+              <a:rPr lang="en-US" sz="1050" b="1" dirty="0">
                 <a:solidFill>
                   <a:srgbClr val="FFFFFF"/>
                 </a:solidFill>
@@ -6774,7 +6774,7 @@
               </a:rPr>
               <a:t>✓</a:t>
             </a:r>
-            <a:endParaRPr lang="en-US" sz="1100" dirty="0"/>
+            <a:endParaRPr lang="en-US" sz="1050" dirty="0"/>
           </a:p>
         </p:txBody>
       </p:sp>
@@ -6786,8 +6786,8 @@
         </p:nvSpPr>
         <p:spPr>
           <a:xfrm>
-            <a:off x="1051560" y="2807208"/>
-            <a:ext cx="4683100" cy="722376"/>
+            <a:off x="1033272" y="2615184"/>
+            <a:ext cx="4710532" cy="603504"/>
           </a:xfrm>
           <a:prstGeom prst="rect">
             <a:avLst/>
@@ -6828,8 +6828,8 @@
         </p:nvSpPr>
         <p:spPr>
           <a:xfrm>
-            <a:off x="502920" y="3712464"/>
-            <a:ext cx="5368900" cy="868680"/>
+            <a:off x="502920" y="3364992"/>
+            <a:ext cx="5368900" cy="749808"/>
           </a:xfrm>
           <a:prstGeom prst="rect">
             <a:avLst/>
@@ -6853,8 +6853,8 @@
         </p:nvSpPr>
         <p:spPr>
           <a:xfrm>
-            <a:off x="640080" y="3877056"/>
-            <a:ext cx="320040" cy="320040"/>
+            <a:off x="640080" y="3593592"/>
+            <a:ext cx="292608" cy="292608"/>
           </a:xfrm>
           <a:prstGeom prst="rect">
             <a:avLst/>
@@ -6873,8 +6873,8 @@
         </p:nvSpPr>
         <p:spPr>
           <a:xfrm>
-            <a:off x="640080" y="3877056"/>
-            <a:ext cx="320040" cy="320040"/>
+            <a:off x="640080" y="3593592"/>
+            <a:ext cx="292608" cy="292608"/>
           </a:xfrm>
           <a:prstGeom prst="rect">
             <a:avLst/>
@@ -6890,7 +6890,7 @@
               <a:buNone/>
             </a:pPr>
             <a:r>
-              <a:rPr lang="en-US" sz="1100" b="1" dirty="0">
+              <a:rPr lang="en-US" sz="1050" b="1" dirty="0">
                 <a:solidFill>
                   <a:srgbClr val="FFFFFF"/>
                 </a:solidFill>
@@ -6900,7 +6900,7 @@
               </a:rPr>
               <a:t>✓</a:t>
             </a:r>
-            <a:endParaRPr lang="en-US" sz="1100" dirty="0"/>
+            <a:endParaRPr lang="en-US" sz="1050" dirty="0"/>
           </a:p>
         </p:txBody>
       </p:sp>
@@ -6912,8 +6912,8 @@
         </p:nvSpPr>
         <p:spPr>
           <a:xfrm>
-            <a:off x="1051560" y="3803904"/>
-            <a:ext cx="4683100" cy="722376"/>
+            <a:off x="1033272" y="3438144"/>
+            <a:ext cx="4710532" cy="603504"/>
           </a:xfrm>
           <a:prstGeom prst="rect">
             <a:avLst/>
@@ -6955,7 +6955,7 @@
         <p:spPr>
           <a:xfrm>
             <a:off x="6191860" y="1719072"/>
-            <a:ext cx="5368900" cy="868680"/>
+            <a:ext cx="5368900" cy="749808"/>
           </a:xfrm>
           <a:prstGeom prst="rect">
             <a:avLst/>
@@ -6979,8 +6979,8 @@
         </p:nvSpPr>
         <p:spPr>
           <a:xfrm>
-            <a:off x="6329020" y="1883664"/>
-            <a:ext cx="320040" cy="320040"/>
+            <a:off x="6329020" y="1947672"/>
+            <a:ext cx="292608" cy="292608"/>
           </a:xfrm>
           <a:prstGeom prst="rect">
             <a:avLst/>
@@ -6999,8 +6999,8 @@
         </p:nvSpPr>
         <p:spPr>
           <a:xfrm>
-            <a:off x="6329020" y="1883664"/>
-            <a:ext cx="320040" cy="320040"/>
+            <a:off x="6329020" y="1947672"/>
+            <a:ext cx="292608" cy="292608"/>
           </a:xfrm>
           <a:prstGeom prst="rect">
             <a:avLst/>
@@ -7016,7 +7016,7 @@
               <a:buNone/>
             </a:pPr>
             <a:r>
-              <a:rPr lang="en-US" sz="1100" b="1" dirty="0">
+              <a:rPr lang="en-US" sz="1050" b="1" dirty="0">
                 <a:solidFill>
                   <a:srgbClr val="FFFFFF"/>
                 </a:solidFill>
@@ -7026,7 +7026,7 @@
               </a:rPr>
               <a:t>✓</a:t>
             </a:r>
-            <a:endParaRPr lang="en-US" sz="1100" dirty="0"/>
+            <a:endParaRPr lang="en-US" sz="1050" dirty="0"/>
           </a:p>
         </p:txBody>
       </p:sp>
@@ -7038,8 +7038,8 @@
         </p:nvSpPr>
         <p:spPr>
           <a:xfrm>
-            <a:off x="6740500" y="1810512"/>
-            <a:ext cx="4683100" cy="722376"/>
+            <a:off x="6722212" y="1792224"/>
+            <a:ext cx="4710532" cy="603504"/>
           </a:xfrm>
           <a:prstGeom prst="rect">
             <a:avLst/>
@@ -7080,8 +7080,8 @@
         </p:nvSpPr>
         <p:spPr>
           <a:xfrm>
-            <a:off x="6191860" y="2715768"/>
-            <a:ext cx="5368900" cy="868680"/>
+            <a:off x="6191860" y="2542032"/>
+            <a:ext cx="5368900" cy="749808"/>
           </a:xfrm>
           <a:prstGeom prst="rect">
             <a:avLst/>
@@ -7105,8 +7105,8 @@
         </p:nvSpPr>
         <p:spPr>
           <a:xfrm>
-            <a:off x="6329020" y="2880360"/>
-            <a:ext cx="320040" cy="320040"/>
+            <a:off x="6329020" y="2770632"/>
+            <a:ext cx="292608" cy="292608"/>
           </a:xfrm>
           <a:prstGeom prst="rect">
             <a:avLst/>
@@ -7125,8 +7125,8 @@
         </p:nvSpPr>
         <p:spPr>
           <a:xfrm>
-            <a:off x="6329020" y="2880360"/>
-            <a:ext cx="320040" cy="320040"/>
+            <a:off x="6329020" y="2770632"/>
+            <a:ext cx="292608" cy="292608"/>
           </a:xfrm>
           <a:prstGeom prst="rect">
             <a:avLst/>
@@ -7142,7 +7142,7 @@
               <a:buNone/>
             </a:pPr>
             <a:r>
-              <a:rPr lang="en-US" sz="1100" b="1" dirty="0">
+              <a:rPr lang="en-US" sz="1050" b="1" dirty="0">
                 <a:solidFill>
                   <a:srgbClr val="FFFFFF"/>
                 </a:solidFill>
@@ -7152,7 +7152,7 @@
               </a:rPr>
               <a:t>✓</a:t>
             </a:r>
-            <a:endParaRPr lang="en-US" sz="1100" dirty="0"/>
+            <a:endParaRPr lang="en-US" sz="1050" dirty="0"/>
           </a:p>
         </p:txBody>
       </p:sp>
@@ -7164,8 +7164,8 @@
         </p:nvSpPr>
         <p:spPr>
           <a:xfrm>
-            <a:off x="6740500" y="2807208"/>
-            <a:ext cx="4683100" cy="722376"/>
+            <a:off x="6722212" y="2615184"/>
+            <a:ext cx="4710532" cy="603504"/>
           </a:xfrm>
           <a:prstGeom prst="rect">
             <a:avLst/>
@@ -7206,8 +7206,8 @@
         </p:nvSpPr>
         <p:spPr>
           <a:xfrm>
-            <a:off x="6191860" y="3712464"/>
-            <a:ext cx="5368900" cy="868680"/>
+            <a:off x="6191860" y="3364992"/>
+            <a:ext cx="5368900" cy="749808"/>
           </a:xfrm>
           <a:prstGeom prst="rect">
             <a:avLst/>
@@ -7231,8 +7231,8 @@
         </p:nvSpPr>
         <p:spPr>
           <a:xfrm>
-            <a:off x="6329020" y="3877056"/>
-            <a:ext cx="320040" cy="320040"/>
+            <a:off x="6329020" y="3593592"/>
+            <a:ext cx="292608" cy="292608"/>
           </a:xfrm>
           <a:prstGeom prst="rect">
             <a:avLst/>
@@ -7251,8 +7251,8 @@
         </p:nvSpPr>
         <p:spPr>
           <a:xfrm>
-            <a:off x="6329020" y="3877056"/>
-            <a:ext cx="320040" cy="320040"/>
+            <a:off x="6329020" y="3593592"/>
+            <a:ext cx="292608" cy="292608"/>
           </a:xfrm>
           <a:prstGeom prst="rect">
             <a:avLst/>
@@ -7268,7 +7268,7 @@
               <a:buNone/>
             </a:pPr>
             <a:r>
-              <a:rPr lang="en-US" sz="1100" b="1" dirty="0">
+              <a:rPr lang="en-US" sz="1050" b="1" dirty="0">
                 <a:solidFill>
                   <a:srgbClr val="FFFFFF"/>
                 </a:solidFill>
@@ -7278,7 +7278,7 @@
               </a:rPr>
               <a:t>✓</a:t>
             </a:r>
-            <a:endParaRPr lang="en-US" sz="1100" dirty="0"/>
+            <a:endParaRPr lang="en-US" sz="1050" dirty="0"/>
           </a:p>
         </p:txBody>
       </p:sp>
@@ -7290,8 +7290,8 @@
         </p:nvSpPr>
         <p:spPr>
           <a:xfrm>
-            <a:off x="6740500" y="3803904"/>
-            <a:ext cx="4683100" cy="722376"/>
+            <a:off x="6722212" y="3438144"/>
+            <a:ext cx="4710532" cy="603504"/>
           </a:xfrm>
           <a:prstGeom prst="rect">
             <a:avLst/>
@@ -7416,7 +7416,7 @@
                 <a:ea typeface="Pretendard" pitchFamily="34" charset="-122"/>
                 <a:cs typeface="Pretendard" pitchFamily="34" charset="-120"/>
               </a:rPr>
-              <a:t>크리딜   |   </a:t>
+              <a:t>크리딜</a:t>
             </a:r>
             <a:endParaRPr lang="en-US" sz="800" dirty="0"/>
           </a:p>
@@ -7844,7 +7844,7 @@
                 <a:ea typeface="Pretendard" pitchFamily="34" charset="-122"/>
                 <a:cs typeface="Pretendard" pitchFamily="34" charset="-120"/>
               </a:rPr>
-              <a:t>크리딜   |   </a:t>
+              <a:t>크리딜</a:t>
             </a:r>
             <a:endParaRPr lang="en-US" sz="800" dirty="0"/>
           </a:p>
@@ -9347,7 +9347,7 @@
                 <a:ea typeface="Pretendard" pitchFamily="34" charset="-122"/>
                 <a:cs typeface="Pretendard" pitchFamily="34" charset="-120"/>
               </a:rPr>
-              <a:t>크리딜   |   </a:t>
+              <a:t>크리딜</a:t>
             </a:r>
             <a:endParaRPr lang="en-US" sz="800" dirty="0"/>
           </a:p>
@@ -9713,10 +9713,13 @@
           <a:lstStyle/>
           <a:p>
             <a:pPr indent="0" marL="0">
-              <a:buNone/>
-            </a:pPr>
-            <a:r>
-              <a:rPr lang="en-US" sz="1700" b="1" dirty="0">
+              <a:lnSpc>
+                <a:spcPct val="100000"/>
+              </a:lnSpc>
+              <a:buNone/>
+            </a:pPr>
+            <a:r>
+              <a:rPr lang="en-US" sz="2200" b="1" dirty="0">
                 <a:solidFill>
                   <a:srgbClr val="10161F"/>
                 </a:solidFill>
@@ -9726,7 +9729,7 @@
               </a:rPr>
               <a:t>-</a:t>
             </a:r>
-            <a:endParaRPr lang="en-US" sz="1700" dirty="0"/>
+            <a:endParaRPr lang="en-US" sz="2200" dirty="0"/>
           </a:p>
         </p:txBody>
       </p:sp>
@@ -9820,10 +9823,13 @@
           <a:lstStyle/>
           <a:p>
             <a:pPr indent="0" marL="0">
-              <a:buNone/>
-            </a:pPr>
-            <a:r>
-              <a:rPr lang="en-US" sz="1700" b="1" dirty="0">
+              <a:lnSpc>
+                <a:spcPct val="100000"/>
+              </a:lnSpc>
+              <a:buNone/>
+            </a:pPr>
+            <a:r>
+              <a:rPr lang="en-US" sz="2200" b="1" dirty="0">
                 <a:solidFill>
                   <a:srgbClr val="10161F"/>
                 </a:solidFill>
@@ -9833,7 +9839,7 @@
               </a:rPr>
               <a:t>3,000평</a:t>
             </a:r>
-            <a:endParaRPr lang="en-US" sz="1700" dirty="0"/>
+            <a:endParaRPr lang="en-US" sz="2200" dirty="0"/>
           </a:p>
         </p:txBody>
       </p:sp>
@@ -9927,10 +9933,13 @@
           <a:lstStyle/>
           <a:p>
             <a:pPr indent="0" marL="0">
-              <a:buNone/>
-            </a:pPr>
-            <a:r>
-              <a:rPr lang="en-US" sz="1700" b="1" dirty="0">
+              <a:lnSpc>
+                <a:spcPct val="100000"/>
+              </a:lnSpc>
+              <a:buNone/>
+            </a:pPr>
+            <a:r>
+              <a:rPr lang="en-US" sz="2200" b="1" dirty="0">
                 <a:solidFill>
                   <a:srgbClr val="10161F"/>
                 </a:solidFill>
@@ -9940,7 +9949,7 @@
               </a:rPr>
               <a:t>5,500평</a:t>
             </a:r>
-            <a:endParaRPr lang="en-US" sz="1700" dirty="0"/>
+            <a:endParaRPr lang="en-US" sz="2200" dirty="0"/>
           </a:p>
         </p:txBody>
       </p:sp>
@@ -10034,10 +10043,13 @@
           <a:lstStyle/>
           <a:p>
             <a:pPr indent="0" marL="0">
-              <a:buNone/>
-            </a:pPr>
-            <a:r>
-              <a:rPr lang="en-US" sz="1700" b="1" dirty="0">
+              <a:lnSpc>
+                <a:spcPct val="100000"/>
+              </a:lnSpc>
+              <a:buNone/>
+            </a:pPr>
+            <a:r>
+              <a:rPr lang="en-US" sz="2200" b="1" dirty="0">
                 <a:solidFill>
                   <a:srgbClr val="10161F"/>
                 </a:solidFill>
@@ -10047,7 +10059,7 @@
               </a:rPr>
               <a:t>12m</a:t>
             </a:r>
-            <a:endParaRPr lang="en-US" sz="1700" dirty="0"/>
+            <a:endParaRPr lang="en-US" sz="2200" dirty="0"/>
           </a:p>
         </p:txBody>
       </p:sp>
@@ -10141,10 +10153,13 @@
           <a:lstStyle/>
           <a:p>
             <a:pPr indent="0" marL="0">
-              <a:buNone/>
-            </a:pPr>
-            <a:r>
-              <a:rPr lang="en-US" sz="1700" b="1" dirty="0">
+              <a:lnSpc>
+                <a:spcPct val="100000"/>
+              </a:lnSpc>
+              <a:buNone/>
+            </a:pPr>
+            <a:r>
+              <a:rPr lang="en-US" sz="2200" b="1" dirty="0">
                 <a:solidFill>
                   <a:srgbClr val="10161F"/>
                 </a:solidFill>
@@ -10154,7 +10169,7 @@
               </a:rPr>
               <a:t>12개</a:t>
             </a:r>
-            <a:endParaRPr lang="en-US" sz="1700" dirty="0"/>
+            <a:endParaRPr lang="en-US" sz="2200" dirty="0"/>
           </a:p>
         </p:txBody>
       </p:sp>
@@ -10210,7 +10225,7 @@
               <a:buNone/>
             </a:pPr>
             <a:r>
-              <a:rPr lang="en-US" sz="950" dirty="0">
+              <a:rPr lang="en-US" sz="850" dirty="0">
                 <a:solidFill>
                   <a:srgbClr val="718096"/>
                 </a:solidFill>
@@ -10220,7 +10235,7 @@
               </a:rPr>
               <a:t>연 수익률(Cap Rate)</a:t>
             </a:r>
-            <a:endParaRPr lang="en-US" sz="950" dirty="0"/>
+            <a:endParaRPr lang="en-US" sz="850" dirty="0"/>
           </a:p>
         </p:txBody>
       </p:sp>
@@ -10248,10 +10263,13 @@
           <a:lstStyle/>
           <a:p>
             <a:pPr indent="0" marL="0">
-              <a:buNone/>
-            </a:pPr>
-            <a:r>
-              <a:rPr lang="en-US" sz="1700" b="1" dirty="0">
+              <a:lnSpc>
+                <a:spcPct val="100000"/>
+              </a:lnSpc>
+              <a:buNone/>
+            </a:pPr>
+            <a:r>
+              <a:rPr lang="en-US" sz="2200" b="1" dirty="0">
                 <a:solidFill>
                   <a:srgbClr val="10161F"/>
                 </a:solidFill>
@@ -10261,7 +10279,7 @@
               </a:rPr>
               <a:t>-</a:t>
             </a:r>
-            <a:endParaRPr lang="en-US" sz="1700" dirty="0"/>
+            <a:endParaRPr lang="en-US" sz="2200" dirty="0"/>
           </a:p>
         </p:txBody>
       </p:sp>
@@ -10355,10 +10373,13 @@
           <a:lstStyle/>
           <a:p>
             <a:pPr indent="0" marL="0">
-              <a:buNone/>
-            </a:pPr>
-            <a:r>
-              <a:rPr lang="en-US" sz="1700" b="1" dirty="0">
+              <a:lnSpc>
+                <a:spcPct val="100000"/>
+              </a:lnSpc>
+              <a:buNone/>
+            </a:pPr>
+            <a:r>
+              <a:rPr lang="en-US" sz="2200" b="1" dirty="0">
                 <a:solidFill>
                   <a:srgbClr val="10161F"/>
                 </a:solidFill>
@@ -10368,7 +10389,7 @@
               </a:rPr>
               <a:t>-</a:t>
             </a:r>
-            <a:endParaRPr lang="en-US" sz="1700" dirty="0"/>
+            <a:endParaRPr lang="en-US" sz="2200" dirty="0"/>
           </a:p>
         </p:txBody>
       </p:sp>
@@ -10462,10 +10483,13 @@
           <a:lstStyle/>
           <a:p>
             <a:pPr indent="0" marL="0">
-              <a:buNone/>
-            </a:pPr>
-            <a:r>
-              <a:rPr lang="en-US" sz="1700" b="1" dirty="0">
+              <a:lnSpc>
+                <a:spcPct val="100000"/>
+              </a:lnSpc>
+              <a:buNone/>
+            </a:pPr>
+            <a:r>
+              <a:rPr lang="en-US" sz="2200" b="1" dirty="0">
                 <a:solidFill>
                   <a:srgbClr val="10161F"/>
                 </a:solidFill>
@@ -10475,7 +10499,7 @@
               </a:rPr>
               <a:t>-</a:t>
             </a:r>
-            <a:endParaRPr lang="en-US" sz="1700" dirty="0"/>
+            <a:endParaRPr lang="en-US" sz="2200" dirty="0"/>
           </a:p>
         </p:txBody>
       </p:sp>
@@ -10947,7 +10971,7 @@
                 <a:ea typeface="Pretendard" pitchFamily="34" charset="-122"/>
                 <a:cs typeface="Pretendard" pitchFamily="34" charset="-120"/>
               </a:rPr>
-              <a:t>크리딜   |   </a:t>
+              <a:t>크리딜</a:t>
             </a:r>
             <a:endParaRPr lang="en-US" sz="800" dirty="0"/>
           </a:p>
@@ -11194,7 +11218,7 @@
         <p:spPr>
           <a:xfrm>
             <a:off x="5989320" y="1481328"/>
-            <a:ext cx="1560003" cy="493776"/>
+            <a:ext cx="1560003" cy="457200"/>
           </a:xfrm>
           <a:prstGeom prst="rect">
             <a:avLst/>
@@ -11213,7 +11237,7 @@
               <a:buNone/>
             </a:pPr>
             <a:r>
-              <a:rPr lang="en-US" sz="1300" dirty="0">
+              <a:rPr lang="en-US" sz="1250" dirty="0">
                 <a:solidFill>
                   <a:srgbClr val="718096"/>
                 </a:solidFill>
@@ -11223,7 +11247,7 @@
               </a:rPr>
               <a:t>대중교통</a:t>
             </a:r>
-            <a:endParaRPr lang="en-US" sz="1300" dirty="0"/>
+            <a:endParaRPr lang="en-US" sz="1250" dirty="0"/>
           </a:p>
         </p:txBody>
       </p:sp>
@@ -11236,7 +11260,7 @@
         <p:spPr>
           <a:xfrm>
             <a:off x="7549323" y="1481328"/>
-            <a:ext cx="4011436" cy="493776"/>
+            <a:ext cx="4011436" cy="457200"/>
           </a:xfrm>
           <a:prstGeom prst="rect">
             <a:avLst/>
@@ -11255,7 +11279,7 @@
               <a:buNone/>
             </a:pPr>
             <a:r>
-              <a:rPr lang="en-US" sz="1300" b="1" dirty="0">
+              <a:rPr lang="en-US" sz="1250" b="1" dirty="0">
                 <a:solidFill>
                   <a:srgbClr val="10161F"/>
                 </a:solidFill>
@@ -11263,9 +11287,9 @@
                 <a:ea typeface="Pretendard" pitchFamily="34" charset="-122"/>
                 <a:cs typeface="Pretendard" pitchFamily="34" charset="-120"/>
               </a:rPr>
-              <a:t>인접 지하철역 역세권 (상세 확인 필요)</a:t>
-            </a:r>
-            <a:endParaRPr lang="en-US" sz="1300" dirty="0"/>
+              <a:t>지하철 및 간선버스 인접</a:t>
+            </a:r>
+            <a:endParaRPr lang="en-US" sz="1250" dirty="0"/>
           </a:p>
         </p:txBody>
       </p:sp>
@@ -11277,7 +11301,7 @@
         </p:nvSpPr>
         <p:spPr>
           <a:xfrm>
-            <a:off x="5989320" y="1975104"/>
+            <a:off x="5989320" y="1938528"/>
             <a:ext cx="5571439" cy="0"/>
           </a:xfrm>
           <a:prstGeom prst="line">
@@ -11300,8 +11324,8 @@
         </p:nvSpPr>
         <p:spPr>
           <a:xfrm>
-            <a:off x="5989320" y="1975104"/>
-            <a:ext cx="1560003" cy="493776"/>
+            <a:off x="5989320" y="1938528"/>
+            <a:ext cx="1560003" cy="457200"/>
           </a:xfrm>
           <a:prstGeom prst="rect">
             <a:avLst/>
@@ -11320,7 +11344,7 @@
               <a:buNone/>
             </a:pPr>
             <a:r>
-              <a:rPr lang="en-US" sz="1300" dirty="0">
+              <a:rPr lang="en-US" sz="1250" dirty="0">
                 <a:solidFill>
                   <a:srgbClr val="718096"/>
                 </a:solidFill>
@@ -11330,7 +11354,7 @@
               </a:rPr>
               <a:t>상권권역</a:t>
             </a:r>
-            <a:endParaRPr lang="en-US" sz="1300" dirty="0"/>
+            <a:endParaRPr lang="en-US" sz="1250" dirty="0"/>
           </a:p>
         </p:txBody>
       </p:sp>
@@ -11342,8 +11366,8 @@
         </p:nvSpPr>
         <p:spPr>
           <a:xfrm>
-            <a:off x="7549323" y="1975104"/>
-            <a:ext cx="4011436" cy="493776"/>
+            <a:off x="7549323" y="1938528"/>
+            <a:ext cx="4011436" cy="457200"/>
           </a:xfrm>
           <a:prstGeom prst="rect">
             <a:avLst/>
@@ -11362,7 +11386,7 @@
               <a:buNone/>
             </a:pPr>
             <a:r>
-              <a:rPr lang="en-US" sz="1300" b="1" dirty="0">
+              <a:rPr lang="en-US" sz="1250" b="1" dirty="0">
                 <a:solidFill>
                   <a:srgbClr val="10161F"/>
                 </a:solidFill>
@@ -11372,7 +11396,7 @@
               </a:rPr>
               <a:t>이천권역 주요 상업·업무 권역</a:t>
             </a:r>
-            <a:endParaRPr lang="en-US" sz="1300" dirty="0"/>
+            <a:endParaRPr lang="en-US" sz="1250" dirty="0"/>
           </a:p>
         </p:txBody>
       </p:sp>
@@ -11384,7 +11408,7 @@
         </p:nvSpPr>
         <p:spPr>
           <a:xfrm>
-            <a:off x="5989320" y="2606040"/>
+            <a:off x="5989320" y="2505456"/>
             <a:ext cx="5571439" cy="658368"/>
           </a:xfrm>
           <a:prstGeom prst="roundRect">
@@ -11406,7 +11430,7 @@
         </p:nvSpPr>
         <p:spPr>
           <a:xfrm>
-            <a:off x="5989320" y="2660904"/>
+            <a:off x="5989320" y="2560320"/>
             <a:ext cx="36576" cy="548640"/>
           </a:xfrm>
           <a:prstGeom prst="rect">
@@ -11426,7 +11450,7 @@
         </p:nvSpPr>
         <p:spPr>
           <a:xfrm>
-            <a:off x="6135624" y="2697480"/>
+            <a:off x="6135624" y="2596896"/>
             <a:ext cx="5315407" cy="201168"/>
           </a:xfrm>
           <a:prstGeom prst="rect">
@@ -11465,7 +11489,7 @@
         </p:nvSpPr>
         <p:spPr>
           <a:xfrm>
-            <a:off x="6135624" y="2898648"/>
+            <a:off x="6135624" y="2798064"/>
             <a:ext cx="5315407" cy="329184"/>
           </a:xfrm>
           <a:prstGeom prst="rect">
@@ -11533,7 +11557,7 @@
                 <a:ea typeface="Pretendard" pitchFamily="34" charset="-122"/>
                 <a:cs typeface="Pretendard" pitchFamily="34" charset="-120"/>
               </a:rPr>
-              <a:t>크리딜   |   </a:t>
+              <a:t>크리딜</a:t>
             </a:r>
             <a:endParaRPr lang="en-US" sz="800" dirty="0"/>
           </a:p>
@@ -11795,7 +11819,7 @@
         <p:spPr>
           <a:xfrm>
             <a:off x="502920" y="1645920"/>
-            <a:ext cx="1920240" cy="420624"/>
+            <a:ext cx="1920240" cy="402336"/>
           </a:xfrm>
           <a:prstGeom prst="rect">
             <a:avLst/>
@@ -11837,7 +11861,7 @@
         <p:spPr>
           <a:xfrm>
             <a:off x="2423160" y="1645920"/>
-            <a:ext cx="4937760" cy="420624"/>
+            <a:ext cx="4937760" cy="402336"/>
           </a:xfrm>
           <a:prstGeom prst="rect">
             <a:avLst/>
@@ -11878,7 +11902,7 @@
         </p:nvSpPr>
         <p:spPr>
           <a:xfrm>
-            <a:off x="502920" y="2066544"/>
+            <a:off x="502920" y="2048256"/>
             <a:ext cx="6858000" cy="0"/>
           </a:xfrm>
           <a:prstGeom prst="line">
@@ -11901,8 +11925,8 @@
         </p:nvSpPr>
         <p:spPr>
           <a:xfrm>
-            <a:off x="502920" y="2066544"/>
-            <a:ext cx="1920240" cy="420624"/>
+            <a:off x="502920" y="2048256"/>
+            <a:ext cx="1920240" cy="402336"/>
           </a:xfrm>
           <a:prstGeom prst="rect">
             <a:avLst/>
@@ -11943,8 +11967,8 @@
         </p:nvSpPr>
         <p:spPr>
           <a:xfrm>
-            <a:off x="2423160" y="2066544"/>
-            <a:ext cx="4937760" cy="420624"/>
+            <a:off x="2423160" y="2048256"/>
+            <a:ext cx="4937760" cy="402336"/>
           </a:xfrm>
           <a:prstGeom prst="rect">
             <a:avLst/>
@@ -12075,7 +12099,7 @@
                 <a:ea typeface="Pretendard" pitchFamily="34" charset="-122"/>
                 <a:cs typeface="Pretendard" pitchFamily="34" charset="-120"/>
               </a:rPr>
-              <a:t>토지 및 건축 규제 포인트</a:t>
+              <a:t>토지 및 건축 규제</a:t>
             </a:r>
             <a:endParaRPr lang="en-US" sz="1050" dirty="0"/>
           </a:p>
@@ -12118,7 +12142,131 @@
                 <a:ea typeface="Pretendard" pitchFamily="34" charset="-122"/>
                 <a:cs typeface="Pretendard" pitchFamily="34" charset="-120"/>
               </a:rPr>
-              <a:t>용도지역·용도지구 기준 건폐율/용적률 상한 확인</a:t>
+              <a:t>토지이용계획 열람 및 건축 규제 확인 필요</a:t>
+            </a:r>
+            <a:endParaRPr lang="en-US" sz="980" dirty="0"/>
+          </a:p>
+        </p:txBody>
+      </p:sp>
+      <p:sp>
+        <p:nvSpPr>
+          <p:cNvPr id="17" name="Shape 15"/>
+          <p:cNvSpPr/>
+          <p:nvPr/>
+        </p:nvSpPr>
+        <p:spPr>
+          <a:xfrm>
+            <a:off x="7720279" y="3977640"/>
+            <a:ext cx="3840480" cy="2148840"/>
+          </a:xfrm>
+          <a:prstGeom prst="roundRect">
+            <a:avLst>
+              <a:gd name="adj" fmla="val 2553"/>
+            </a:avLst>
+          </a:prstGeom>
+          <a:solidFill>
+            <a:srgbClr val="BEE3F8"/>
+          </a:solidFill>
+          <a:ln/>
+        </p:spPr>
+      </p:sp>
+      <p:sp>
+        <p:nvSpPr>
+          <p:cNvPr id="18" name="Shape 16"/>
+          <p:cNvSpPr/>
+          <p:nvPr/>
+        </p:nvSpPr>
+        <p:spPr>
+          <a:xfrm>
+            <a:off x="7720279" y="4032504"/>
+            <a:ext cx="36576" cy="2039112"/>
+          </a:xfrm>
+          <a:prstGeom prst="rect">
+            <a:avLst/>
+          </a:prstGeom>
+          <a:solidFill>
+            <a:srgbClr val="2B6CB0"/>
+          </a:solidFill>
+          <a:ln/>
+        </p:spPr>
+      </p:sp>
+      <p:sp>
+        <p:nvSpPr>
+          <p:cNvPr id="19" name="Text 17"/>
+          <p:cNvSpPr/>
+          <p:nvPr/>
+        </p:nvSpPr>
+        <p:spPr>
+          <a:xfrm>
+            <a:off x="7866583" y="4069080"/>
+            <a:ext cx="3584448" cy="201168"/>
+          </a:xfrm>
+          <a:prstGeom prst="rect">
+            <a:avLst/>
+          </a:prstGeom>
+          <a:noFill/>
+          <a:ln/>
+        </p:spPr>
+        <p:txBody>
+          <a:bodyPr wrap="square" lIns="0" tIns="0" rIns="0" bIns="0" rtlCol="0" anchor="ctr"/>
+          <a:lstStyle/>
+          <a:p>
+            <a:pPr indent="0" marL="0">
+              <a:buNone/>
+            </a:pPr>
+            <a:r>
+              <a:rPr lang="en-US" sz="1050" b="1" dirty="0">
+                <a:solidFill>
+                  <a:srgbClr val="2B6CB0"/>
+                </a:solidFill>
+                <a:latin typeface="Pretendard" pitchFamily="34" charset="0"/>
+                <a:ea typeface="Pretendard" pitchFamily="34" charset="-122"/>
+                <a:cs typeface="Pretendard" pitchFamily="34" charset="-120"/>
+              </a:rPr>
+              <a:t>권리관계 및 공적장부</a:t>
+            </a:r>
+            <a:endParaRPr lang="en-US" sz="1050" dirty="0"/>
+          </a:p>
+        </p:txBody>
+      </p:sp>
+      <p:sp>
+        <p:nvSpPr>
+          <p:cNvPr id="20" name="Text 18"/>
+          <p:cNvSpPr/>
+          <p:nvPr/>
+        </p:nvSpPr>
+        <p:spPr>
+          <a:xfrm>
+            <a:off x="7866583" y="4270248"/>
+            <a:ext cx="3584448" cy="1819656"/>
+          </a:xfrm>
+          <a:prstGeom prst="rect">
+            <a:avLst/>
+          </a:prstGeom>
+          <a:noFill/>
+          <a:ln/>
+        </p:spPr>
+        <p:txBody>
+          <a:bodyPr wrap="square" lIns="0" tIns="0" rIns="0" bIns="0" rtlCol="0" anchor="t"/>
+          <a:lstStyle/>
+          <a:p>
+            <a:pPr marL="342900" indent="-342900">
+              <a:lnSpc>
+                <a:spcPct val="108000"/>
+              </a:lnSpc>
+              <a:buSzPct val="100000"/>
+              <a:buChar char="•"/>
+            </a:pPr>
+            <a:r>
+              <a:rPr lang="en-US" sz="980" dirty="0">
+                <a:solidFill>
+                  <a:srgbClr val="10161F"/>
+                </a:solidFill>
+                <a:latin typeface="Pretendard" pitchFamily="34" charset="0"/>
+                <a:ea typeface="Pretendard" pitchFamily="34" charset="-122"/>
+                <a:cs typeface="Pretendard" pitchFamily="34" charset="-120"/>
+              </a:rPr>
+              <a:t>등기부등본 갑구 소유권 확인</a:t>
             </a:r>
             <a:endParaRPr lang="en-US" sz="980" dirty="0"/>
           </a:p>
@@ -12142,7 +12290,7 @@
                 <a:ea typeface="Pretendard" pitchFamily="34" charset="-122"/>
                 <a:cs typeface="Pretendard" pitchFamily="34" charset="-120"/>
               </a:rPr>
-              <a:t>필지 형상 및 접도 조건에 따른 건축 가능 면적 검토</a:t>
+              <a:t>건축물대장 기재 사항 실물 대조</a:t>
             </a:r>
             <a:endParaRPr lang="en-US" sz="980" dirty="0"/>
           </a:p>
@@ -12166,179 +12314,7 @@
                 <a:ea typeface="Pretendard" pitchFamily="34" charset="-122"/>
                 <a:cs typeface="Pretendard" pitchFamily="34" charset="-120"/>
               </a:rPr>
-              <a:t>토지이용계획 열람 및 개발행위허가 제한 여부 확인</a:t>
-            </a:r>
-            <a:endParaRPr lang="en-US" sz="980" dirty="0"/>
-          </a:p>
-        </p:txBody>
-      </p:sp>
-      <p:sp>
-        <p:nvSpPr>
-          <p:cNvPr id="17" name="Shape 15"/>
-          <p:cNvSpPr/>
-          <p:nvPr/>
-        </p:nvSpPr>
-        <p:spPr>
-          <a:xfrm>
-            <a:off x="7720279" y="3977640"/>
-            <a:ext cx="3840480" cy="2148840"/>
-          </a:xfrm>
-          <a:prstGeom prst="roundRect">
-            <a:avLst>
-              <a:gd name="adj" fmla="val 2553"/>
-            </a:avLst>
-          </a:prstGeom>
-          <a:solidFill>
-            <a:srgbClr val="BEE3F8"/>
-          </a:solidFill>
-          <a:ln/>
-        </p:spPr>
-      </p:sp>
-      <p:sp>
-        <p:nvSpPr>
-          <p:cNvPr id="18" name="Shape 16"/>
-          <p:cNvSpPr/>
-          <p:nvPr/>
-        </p:nvSpPr>
-        <p:spPr>
-          <a:xfrm>
-            <a:off x="7720279" y="4032504"/>
-            <a:ext cx="36576" cy="2039112"/>
-          </a:xfrm>
-          <a:prstGeom prst="rect">
-            <a:avLst/>
-          </a:prstGeom>
-          <a:solidFill>
-            <a:srgbClr val="2B6CB0"/>
-          </a:solidFill>
-          <a:ln/>
-        </p:spPr>
-      </p:sp>
-      <p:sp>
-        <p:nvSpPr>
-          <p:cNvPr id="19" name="Text 17"/>
-          <p:cNvSpPr/>
-          <p:nvPr/>
-        </p:nvSpPr>
-        <p:spPr>
-          <a:xfrm>
-            <a:off x="7866583" y="4069080"/>
-            <a:ext cx="3584448" cy="201168"/>
-          </a:xfrm>
-          <a:prstGeom prst="rect">
-            <a:avLst/>
-          </a:prstGeom>
-          <a:noFill/>
-          <a:ln/>
-        </p:spPr>
-        <p:txBody>
-          <a:bodyPr wrap="square" lIns="0" tIns="0" rIns="0" bIns="0" rtlCol="0" anchor="ctr"/>
-          <a:lstStyle/>
-          <a:p>
-            <a:pPr indent="0" marL="0">
-              <a:buNone/>
-            </a:pPr>
-            <a:r>
-              <a:rPr lang="en-US" sz="1050" b="1" dirty="0">
-                <a:solidFill>
-                  <a:srgbClr val="2B6CB0"/>
-                </a:solidFill>
-                <a:latin typeface="Pretendard" pitchFamily="34" charset="0"/>
-                <a:ea typeface="Pretendard" pitchFamily="34" charset="-122"/>
-                <a:cs typeface="Pretendard" pitchFamily="34" charset="-120"/>
-              </a:rPr>
-              <a:t>권리관계 및 공적장부</a:t>
-            </a:r>
-            <a:endParaRPr lang="en-US" sz="1050" dirty="0"/>
-          </a:p>
-        </p:txBody>
-      </p:sp>
-      <p:sp>
-        <p:nvSpPr>
-          <p:cNvPr id="20" name="Text 18"/>
-          <p:cNvSpPr/>
-          <p:nvPr/>
-        </p:nvSpPr>
-        <p:spPr>
-          <a:xfrm>
-            <a:off x="7866583" y="4270248"/>
-            <a:ext cx="3584448" cy="1819656"/>
-          </a:xfrm>
-          <a:prstGeom prst="rect">
-            <a:avLst/>
-          </a:prstGeom>
-          <a:noFill/>
-          <a:ln/>
-        </p:spPr>
-        <p:txBody>
-          <a:bodyPr wrap="square" lIns="0" tIns="0" rIns="0" bIns="0" rtlCol="0" anchor="t"/>
-          <a:lstStyle/>
-          <a:p>
-            <a:pPr marL="342900" indent="-342900">
-              <a:lnSpc>
-                <a:spcPct val="108000"/>
-              </a:lnSpc>
-              <a:buSzPct val="100000"/>
-              <a:buChar char="•"/>
-            </a:pPr>
-            <a:r>
-              <a:rPr lang="en-US" sz="980" dirty="0">
-                <a:solidFill>
-                  <a:srgbClr val="10161F"/>
-                </a:solidFill>
-                <a:latin typeface="Pretendard" pitchFamily="34" charset="0"/>
-                <a:ea typeface="Pretendard" pitchFamily="34" charset="-122"/>
-                <a:cs typeface="Pretendard" pitchFamily="34" charset="-120"/>
-              </a:rPr>
-              <a:t>등기부등본 갑구 소유권 및 을구 근저당·가압류 확인</a:t>
-            </a:r>
-            <a:endParaRPr lang="en-US" sz="980" dirty="0"/>
-          </a:p>
-          <a:p>
-            <a:pPr marL="342900" indent="-342900">
-              <a:lnSpc>
-                <a:spcPct val="108000"/>
-              </a:lnSpc>
-              <a:spcBef>
-                <a:spcPts val="300"/>
-              </a:spcBef>
-              <a:buSzPct val="100000"/>
-              <a:buChar char="•"/>
-            </a:pPr>
-            <a:r>
-              <a:rPr lang="en-US" sz="980" dirty="0">
-                <a:solidFill>
-                  <a:srgbClr val="10161F"/>
-                </a:solidFill>
-                <a:latin typeface="Pretendard" pitchFamily="34" charset="0"/>
-                <a:ea typeface="Pretendard" pitchFamily="34" charset="-122"/>
-                <a:cs typeface="Pretendard" pitchFamily="34" charset="-120"/>
-              </a:rPr>
-              <a:t>건축물대장 기재 사항과 실물 현황 대조 점검</a:t>
-            </a:r>
-            <a:endParaRPr lang="en-US" sz="980" dirty="0"/>
-          </a:p>
-          <a:p>
-            <a:pPr marL="342900" indent="-342900">
-              <a:lnSpc>
-                <a:spcPct val="108000"/>
-              </a:lnSpc>
-              <a:spcBef>
-                <a:spcPts val="300"/>
-              </a:spcBef>
-              <a:buSzPct val="100000"/>
-              <a:buChar char="•"/>
-            </a:pPr>
-            <a:r>
-              <a:rPr lang="en-US" sz="980" dirty="0">
-                <a:solidFill>
-                  <a:srgbClr val="10161F"/>
-                </a:solidFill>
-                <a:latin typeface="Pretendard" pitchFamily="34" charset="0"/>
-                <a:ea typeface="Pretendard" pitchFamily="34" charset="-122"/>
-                <a:cs typeface="Pretendard" pitchFamily="34" charset="-120"/>
-              </a:rPr>
-              <a:t>개별공시지가 및 실거래가 비교 분석</a:t>
+              <a:t>개별공시지가 및 실거래가 비교</a:t>
             </a:r>
             <a:endParaRPr lang="en-US" sz="980" dirty="0"/>
           </a:p>
@@ -12377,7 +12353,7 @@
                 <a:ea typeface="Pretendard" pitchFamily="34" charset="-122"/>
                 <a:cs typeface="Pretendard" pitchFamily="34" charset="-120"/>
               </a:rPr>
-              <a:t>크리딜   |   </a:t>
+              <a:t>크리딜</a:t>
             </a:r>
             <a:endParaRPr lang="en-US" sz="800" dirty="0"/>
           </a:p>
@@ -12639,7 +12615,7 @@
         <p:spPr>
           <a:xfrm>
             <a:off x="502920" y="1645920"/>
-            <a:ext cx="1920240" cy="420624"/>
+            <a:ext cx="1920240" cy="402336"/>
           </a:xfrm>
           <a:prstGeom prst="rect">
             <a:avLst/>
@@ -12681,7 +12657,7 @@
         <p:spPr>
           <a:xfrm>
             <a:off x="2423160" y="1645920"/>
-            <a:ext cx="4937760" cy="420624"/>
+            <a:ext cx="4937760" cy="402336"/>
           </a:xfrm>
           <a:prstGeom prst="rect">
             <a:avLst/>
@@ -12722,7 +12698,7 @@
         </p:nvSpPr>
         <p:spPr>
           <a:xfrm>
-            <a:off x="502920" y="2066544"/>
+            <a:off x="502920" y="2048256"/>
             <a:ext cx="6858000" cy="0"/>
           </a:xfrm>
           <a:prstGeom prst="line">
@@ -12745,8 +12721,8 @@
         </p:nvSpPr>
         <p:spPr>
           <a:xfrm>
-            <a:off x="502920" y="2066544"/>
-            <a:ext cx="1920240" cy="420624"/>
+            <a:off x="502920" y="2048256"/>
+            <a:ext cx="1920240" cy="402336"/>
           </a:xfrm>
           <a:prstGeom prst="rect">
             <a:avLst/>
@@ -12787,8 +12763,8 @@
         </p:nvSpPr>
         <p:spPr>
           <a:xfrm>
-            <a:off x="2423160" y="2066544"/>
-            <a:ext cx="4937760" cy="420624"/>
+            <a:off x="2423160" y="2048256"/>
+            <a:ext cx="4937760" cy="402336"/>
           </a:xfrm>
           <a:prstGeom prst="rect">
             <a:avLst/>
@@ -12829,7 +12805,7 @@
         </p:nvSpPr>
         <p:spPr>
           <a:xfrm>
-            <a:off x="502920" y="2487168"/>
+            <a:off x="502920" y="2450592"/>
             <a:ext cx="6858000" cy="0"/>
           </a:xfrm>
           <a:prstGeom prst="line">
@@ -12852,8 +12828,8 @@
         </p:nvSpPr>
         <p:spPr>
           <a:xfrm>
-            <a:off x="502920" y="2487168"/>
-            <a:ext cx="1920240" cy="420624"/>
+            <a:off x="502920" y="2450592"/>
+            <a:ext cx="1920240" cy="402336"/>
           </a:xfrm>
           <a:prstGeom prst="rect">
             <a:avLst/>
@@ -12894,8 +12870,8 @@
         </p:nvSpPr>
         <p:spPr>
           <a:xfrm>
-            <a:off x="2423160" y="2487168"/>
-            <a:ext cx="4937760" cy="420624"/>
+            <a:off x="2423160" y="2450592"/>
+            <a:ext cx="4937760" cy="402336"/>
           </a:xfrm>
           <a:prstGeom prst="rect">
             <a:avLst/>
@@ -12936,7 +12912,7 @@
         </p:nvSpPr>
         <p:spPr>
           <a:xfrm>
-            <a:off x="502920" y="2907792"/>
+            <a:off x="502920" y="2852928"/>
             <a:ext cx="6858000" cy="0"/>
           </a:xfrm>
           <a:prstGeom prst="line">
@@ -12959,8 +12935,8 @@
         </p:nvSpPr>
         <p:spPr>
           <a:xfrm>
-            <a:off x="502920" y="2907792"/>
-            <a:ext cx="1920240" cy="420624"/>
+            <a:off x="502920" y="2852928"/>
+            <a:ext cx="1920240" cy="402336"/>
           </a:xfrm>
           <a:prstGeom prst="rect">
             <a:avLst/>
@@ -13001,8 +12977,8 @@
         </p:nvSpPr>
         <p:spPr>
           <a:xfrm>
-            <a:off x="2423160" y="2907792"/>
-            <a:ext cx="4937760" cy="420624"/>
+            <a:off x="2423160" y="2852928"/>
+            <a:ext cx="4937760" cy="402336"/>
           </a:xfrm>
           <a:prstGeom prst="rect">
             <a:avLst/>
@@ -13203,7 +13179,7 @@
                 <a:ea typeface="Pretendard" pitchFamily="34" charset="-122"/>
                 <a:cs typeface="Pretendard" pitchFamily="34" charset="-120"/>
               </a:rPr>
-              <a:t>크리딜   |   </a:t>
+              <a:t>크리딜</a:t>
             </a:r>
             <a:endParaRPr lang="en-US" sz="800" dirty="0"/>
           </a:p>
@@ -13635,7 +13611,7 @@
                 <a:ea typeface="Pretendard" pitchFamily="34" charset="-122"/>
                 <a:cs typeface="Pretendard" pitchFamily="34" charset="-120"/>
               </a:rPr>
-              <a:t>크리딜   |   </a:t>
+              <a:t>크리딜</a:t>
             </a:r>
             <a:endParaRPr lang="en-US" sz="800" dirty="0"/>
           </a:p>
@@ -14001,6 +13977,9 @@
           <a:lstStyle/>
           <a:p>
             <a:pPr indent="0" marL="0">
+              <a:lnSpc>
+                <a:spcPct val="100000"/>
+              </a:lnSpc>
               <a:buNone/>
             </a:pPr>
             <a:r>
@@ -14008,11 +13987,11 @@
                 <a:solidFill>
                   <a:srgbClr val="10161F"/>
                 </a:solidFill>
-                <a:latin typeface="Pretendard" pitchFamily="34" charset="0"/>
-                <a:ea typeface="Pretendard" pitchFamily="34" charset="-122"/>
-                <a:cs typeface="Pretendard" pitchFamily="34" charset="-120"/>
-              </a:rPr>
-              <a:t>확인 필요</a:t>
+                <a:latin typeface="Arial" pitchFamily="34" charset="0"/>
+                <a:ea typeface="Arial" pitchFamily="34" charset="-122"/>
+                <a:cs typeface="Arial" pitchFamily="34" charset="-120"/>
+              </a:rPr>
+              <a:t>-</a:t>
             </a:r>
             <a:endParaRPr lang="en-US" sz="2200" dirty="0"/>
           </a:p>
@@ -14108,6 +14087,9 @@
           <a:lstStyle/>
           <a:p>
             <a:pPr indent="0" marL="0">
+              <a:lnSpc>
+                <a:spcPct val="100000"/>
+              </a:lnSpc>
               <a:buNone/>
             </a:pPr>
             <a:r>
@@ -14115,11 +14097,11 @@
                 <a:solidFill>
                   <a:srgbClr val="10161F"/>
                 </a:solidFill>
-                <a:latin typeface="Pretendard" pitchFamily="34" charset="0"/>
-                <a:ea typeface="Pretendard" pitchFamily="34" charset="-122"/>
-                <a:cs typeface="Pretendard" pitchFamily="34" charset="-120"/>
-              </a:rPr>
-              <a:t>확인 필요</a:t>
+                <a:latin typeface="Arial" pitchFamily="34" charset="0"/>
+                <a:ea typeface="Arial" pitchFamily="34" charset="-122"/>
+                <a:cs typeface="Arial" pitchFamily="34" charset="-120"/>
+              </a:rPr>
+              <a:t>-</a:t>
             </a:r>
             <a:endParaRPr lang="en-US" sz="2200" dirty="0"/>
           </a:p>
@@ -14215,6 +14197,9 @@
           <a:lstStyle/>
           <a:p>
             <a:pPr indent="0" marL="0">
+              <a:lnSpc>
+                <a:spcPct val="100000"/>
+              </a:lnSpc>
               <a:buNone/>
             </a:pPr>
             <a:r>
@@ -14473,7 +14458,7 @@
                 <a:ea typeface="Pretendard" pitchFamily="34" charset="-122"/>
                 <a:cs typeface="Pretendard" pitchFamily="34" charset="-120"/>
               </a:rPr>
-              <a:t>운영 실적 데이터 확보 후 GOP 기반 Cap Rate 산출 필요</a:t>
+              <a:t>운영 실적 데이터 기반 GOP Cap Rate 산출</a:t>
             </a:r>
             <a:endParaRPr lang="en-US" sz="980" dirty="0"/>
           </a:p>
@@ -14536,7 +14521,7 @@
                 <a:ea typeface="Pretendard" pitchFamily="34" charset="-122"/>
                 <a:cs typeface="Pretendard" pitchFamily="34" charset="-120"/>
               </a:rPr>
-              <a:t>크리딜   |   </a:t>
+              <a:t>크리딜</a:t>
             </a:r>
             <a:endParaRPr lang="en-US" sz="800" dirty="0"/>
           </a:p>
@@ -14902,6 +14887,9 @@
           <a:lstStyle/>
           <a:p>
             <a:pPr indent="0" marL="0">
+              <a:lnSpc>
+                <a:spcPct val="100000"/>
+              </a:lnSpc>
               <a:buNone/>
             </a:pPr>
             <a:r>
@@ -14909,11 +14897,11 @@
                 <a:solidFill>
                   <a:srgbClr val="10161F"/>
                 </a:solidFill>
-                <a:latin typeface="Pretendard" pitchFamily="34" charset="0"/>
-                <a:ea typeface="Pretendard" pitchFamily="34" charset="-122"/>
-                <a:cs typeface="Pretendard" pitchFamily="34" charset="-120"/>
-              </a:rPr>
-              <a:t>확인 필요</a:t>
+                <a:latin typeface="Arial" pitchFamily="34" charset="0"/>
+                <a:ea typeface="Arial" pitchFamily="34" charset="-122"/>
+                <a:cs typeface="Arial" pitchFamily="34" charset="-120"/>
+              </a:rPr>
+              <a:t>-</a:t>
             </a:r>
             <a:endParaRPr lang="en-US" sz="2200" dirty="0"/>
           </a:p>
@@ -15160,7 +15148,7 @@
                 <a:ea typeface="Pretendard" pitchFamily="34" charset="-122"/>
                 <a:cs typeface="Pretendard" pitchFamily="34" charset="-120"/>
               </a:rPr>
-              <a:t>이천권역 소재 호텔의 계절성 분석 필요</a:t>
+              <a:t>이천권역 소재 호텔의 계절성 분석</a:t>
             </a:r>
             <a:endParaRPr lang="en-US" sz="980" dirty="0"/>
           </a:p>
@@ -15247,7 +15235,7 @@
                 <a:ea typeface="Pretendard" pitchFamily="34" charset="-122"/>
                 <a:cs typeface="Pretendard" pitchFamily="34" charset="-120"/>
               </a:rPr>
-              <a:t>크리딜   |   </a:t>
+              <a:t>크리딜</a:t>
             </a:r>
             <a:endParaRPr lang="en-US" sz="800" dirty="0"/>
           </a:p>
@@ -15470,11 +15458,11 @@
         <p:spPr>
           <a:xfrm>
             <a:off x="502920" y="1645920"/>
-            <a:ext cx="6858000" cy="1828800"/>
+            <a:ext cx="6858000" cy="1645920"/>
           </a:xfrm>
           <a:prstGeom prst="roundRect">
             <a:avLst>
-              <a:gd name="adj" fmla="val 3000"/>
+              <a:gd name="adj" fmla="val 3333"/>
             </a:avLst>
           </a:prstGeom>
           <a:solidFill>
@@ -15492,7 +15480,7 @@
         <p:spPr>
           <a:xfrm>
             <a:off x="502920" y="1700784"/>
-            <a:ext cx="36576" cy="1719072"/>
+            <a:ext cx="36576" cy="1536192"/>
           </a:xfrm>
           <a:prstGeom prst="rect">
             <a:avLst/>
@@ -15551,7 +15539,7 @@
         <p:spPr>
           <a:xfrm>
             <a:off x="649224" y="1938528"/>
-            <a:ext cx="6601968" cy="1499616"/>
+            <a:ext cx="6601968" cy="1316736"/>
           </a:xfrm>
           <a:prstGeom prst="rect">
             <a:avLst/>
@@ -15579,7 +15567,7 @@
                 <a:ea typeface="Pretendard" pitchFamily="34" charset="-122"/>
                 <a:cs typeface="Pretendard" pitchFamily="34" charset="-120"/>
               </a:rPr>
-              <a:t>등기부등본 갑구·을구 권리관계 확인 필요</a:t>
+              <a:t>등기부등본 갑구·을구 권리관계 공적장부 대조</a:t>
             </a:r>
             <a:endParaRPr lang="en-US" sz="980" dirty="0"/>
           </a:p>
@@ -15774,7 +15762,55 @@
                 <a:ea typeface="Pretendard" pitchFamily="34" charset="-122"/>
                 <a:cs typeface="Pretendard" pitchFamily="34" charset="-120"/>
               </a:rPr>
-              <a:t>투자 검토 대상 상업용 자산\n• 권리관계 및 임대차 현황 실사 확인 필요\n• 상세 인접 인프라 및 입지 환경 분석 권장</a:t>
+              <a:t>투자 검토 대상 상업용 자산</a:t>
+            </a:r>
+            <a:endParaRPr lang="en-US" sz="980" dirty="0"/>
+          </a:p>
+          <a:p>
+            <a:pPr marL="342900" indent="-342900">
+              <a:lnSpc>
+                <a:spcPct val="108000"/>
+              </a:lnSpc>
+              <a:spcBef>
+                <a:spcPts val="300"/>
+              </a:spcBef>
+              <a:buSzPct val="100000"/>
+              <a:buChar char="•"/>
+            </a:pPr>
+            <a:r>
+              <a:rPr lang="en-US" sz="980" dirty="0">
+                <a:solidFill>
+                  <a:srgbClr val="10161F"/>
+                </a:solidFill>
+                <a:latin typeface="Pretendard" pitchFamily="34" charset="0"/>
+                <a:ea typeface="Pretendard" pitchFamily="34" charset="-122"/>
+                <a:cs typeface="Pretendard" pitchFamily="34" charset="-120"/>
+              </a:rPr>
+              <a:t>권리관계 및 임대차 계약 구조 분석</a:t>
+            </a:r>
+            <a:endParaRPr lang="en-US" sz="980" dirty="0"/>
+          </a:p>
+          <a:p>
+            <a:pPr marL="342900" indent="-342900">
+              <a:lnSpc>
+                <a:spcPct val="108000"/>
+              </a:lnSpc>
+              <a:spcBef>
+                <a:spcPts val="300"/>
+              </a:spcBef>
+              <a:buSzPct val="100000"/>
+              <a:buChar char="•"/>
+            </a:pPr>
+            <a:r>
+              <a:rPr lang="en-US" sz="980" dirty="0">
+                <a:solidFill>
+                  <a:srgbClr val="10161F"/>
+                </a:solidFill>
+                <a:latin typeface="Pretendard" pitchFamily="34" charset="0"/>
+                <a:ea typeface="Pretendard" pitchFamily="34" charset="-122"/>
+                <a:cs typeface="Pretendard" pitchFamily="34" charset="-120"/>
+              </a:rPr>
+              <a:t>상세 인접 인프라 및 입지 환경 분석</a:t>
             </a:r>
             <a:endParaRPr lang="en-US" sz="980" dirty="0"/>
           </a:p>
@@ -15898,7 +15934,55 @@
                 <a:ea typeface="Pretendard" pitchFamily="34" charset="-122"/>
                 <a:cs typeface="Pretendard" pitchFamily="34" charset="-120"/>
               </a:rPr>
-              <a:t>투자 검토 대상 자산\n• 임대차 계약 현황 및 운영비 실사 확인 필요\n• 매입 후 운용 계획에 따른 수익성 분석 권장</a:t>
+              <a:t>투자 검토 대상 자산</a:t>
+            </a:r>
+            <a:endParaRPr lang="en-US" sz="980" dirty="0"/>
+          </a:p>
+          <a:p>
+            <a:pPr marL="342900" indent="-342900">
+              <a:lnSpc>
+                <a:spcPct val="108000"/>
+              </a:lnSpc>
+              <a:spcBef>
+                <a:spcPts val="300"/>
+              </a:spcBef>
+              <a:buSzPct val="100000"/>
+              <a:buChar char="•"/>
+            </a:pPr>
+            <a:r>
+              <a:rPr lang="en-US" sz="980" dirty="0">
+                <a:solidFill>
+                  <a:srgbClr val="10161F"/>
+                </a:solidFill>
+                <a:latin typeface="Pretendard" pitchFamily="34" charset="0"/>
+                <a:ea typeface="Pretendard" pitchFamily="34" charset="-122"/>
+                <a:cs typeface="Pretendard" pitchFamily="34" charset="-120"/>
+              </a:rPr>
+              <a:t>임대차 계약 조건 및 운영비 구조 분석</a:t>
+            </a:r>
+            <a:endParaRPr lang="en-US" sz="980" dirty="0"/>
+          </a:p>
+          <a:p>
+            <a:pPr marL="342900" indent="-342900">
+              <a:lnSpc>
+                <a:spcPct val="108000"/>
+              </a:lnSpc>
+              <a:spcBef>
+                <a:spcPts val="300"/>
+              </a:spcBef>
+              <a:buSzPct val="100000"/>
+              <a:buChar char="•"/>
+            </a:pPr>
+            <a:r>
+              <a:rPr lang="en-US" sz="980" dirty="0">
+                <a:solidFill>
+                  <a:srgbClr val="10161F"/>
+                </a:solidFill>
+                <a:latin typeface="Pretendard" pitchFamily="34" charset="0"/>
+                <a:ea typeface="Pretendard" pitchFamily="34" charset="-122"/>
+                <a:cs typeface="Pretendard" pitchFamily="34" charset="-120"/>
+              </a:rPr>
+              <a:t>매입 후 운용 계획에 따른 수익성 분석</a:t>
             </a:r>
             <a:endParaRPr lang="en-US" sz="980" dirty="0"/>
           </a:p>
@@ -15937,7 +16021,7 @@
                 <a:ea typeface="Pretendard" pitchFamily="34" charset="-122"/>
                 <a:cs typeface="Pretendard" pitchFamily="34" charset="-120"/>
               </a:rPr>
-              <a:t>크리딜   |   </a:t>
+              <a:t>크리딜</a:t>
             </a:r>
             <a:endParaRPr lang="en-US" sz="800" dirty="0"/>
           </a:p>

--- a/docs/test/stress/e2e-outputs/operating_basic_pr05.pptx
+++ b/docs/test/stress/e2e-outputs/operating_basic_pr05.pptx
@@ -6814,7 +6814,7 @@
                 <a:ea typeface="Pretendard" pitchFamily="34" charset="-122"/>
                 <a:cs typeface="Pretendard" pitchFamily="34" charset="-120"/>
               </a:rPr>
-              <a:t>임대차 원본 계약서 대조 (보증금, 월임대료, 관리비 실입금 내역 및 제소전화해조서)</a:t>
+              <a:t>임대차 원본 계약서 검토 (보증금, 월임대료, 관리비 실입금 내역 및 제소전화해조서)</a:t>
             </a:r>
             <a:endParaRPr lang="en-US" sz="950" dirty="0"/>
           </a:p>
@@ -13987,11 +13987,11 @@
                 <a:solidFill>
                   <a:srgbClr val="10161F"/>
                 </a:solidFill>
-                <a:latin typeface="Arial" pitchFamily="34" charset="0"/>
-                <a:ea typeface="Arial" pitchFamily="34" charset="-122"/>
-                <a:cs typeface="Arial" pitchFamily="34" charset="-120"/>
-              </a:rPr>
-              <a:t>-</a:t>
+                <a:latin typeface="Pretendard" pitchFamily="34" charset="0"/>
+                <a:ea typeface="Pretendard" pitchFamily="34" charset="-122"/>
+                <a:cs typeface="Pretendard" pitchFamily="34" charset="-120"/>
+              </a:rPr>
+              <a:t>확인 필요</a:t>
             </a:r>
             <a:endParaRPr lang="en-US" sz="2200" dirty="0"/>
           </a:p>
@@ -14097,11 +14097,11 @@
                 <a:solidFill>
                   <a:srgbClr val="10161F"/>
                 </a:solidFill>
-                <a:latin typeface="Arial" pitchFamily="34" charset="0"/>
-                <a:ea typeface="Arial" pitchFamily="34" charset="-122"/>
-                <a:cs typeface="Arial" pitchFamily="34" charset="-120"/>
-              </a:rPr>
-              <a:t>-</a:t>
+                <a:latin typeface="Pretendard" pitchFamily="34" charset="0"/>
+                <a:ea typeface="Pretendard" pitchFamily="34" charset="-122"/>
+                <a:cs typeface="Pretendard" pitchFamily="34" charset="-120"/>
+              </a:rPr>
+              <a:t>확인 필요</a:t>
             </a:r>
             <a:endParaRPr lang="en-US" sz="2200" dirty="0"/>
           </a:p>

--- a/docs/test/stress/e2e-outputs/operating_basic_pr05.pptx
+++ b/docs/test/stress/e2e-outputs/operating_basic_pr05.pptx
@@ -2272,7 +2272,7 @@
         </p:nvSpPr>
         <p:spPr>
           <a:xfrm>
-            <a:off x="502920" y="475488"/>
+            <a:off x="566928" y="475488"/>
             <a:ext cx="2743200" cy="365760"/>
           </a:xfrm>
           <a:prstGeom prst="rect">
@@ -2325,7 +2325,7 @@
         </p:nvSpPr>
         <p:spPr>
           <a:xfrm>
-            <a:off x="502920" y="2029968"/>
+            <a:off x="566928" y="2029968"/>
             <a:ext cx="7315200" cy="274320"/>
           </a:xfrm>
           <a:prstGeom prst="rect">
@@ -2364,8 +2364,8 @@
         </p:nvSpPr>
         <p:spPr>
           <a:xfrm>
-            <a:off x="502920" y="2304288"/>
-            <a:ext cx="7315200" cy="731520"/>
+            <a:off x="566928" y="2304288"/>
+            <a:ext cx="7315200" cy="1051560"/>
           </a:xfrm>
           <a:prstGeom prst="rect">
             <a:avLst/>
@@ -2381,7 +2381,7 @@
               <a:buNone/>
             </a:pPr>
             <a:r>
-              <a:rPr lang="en-US" sz="4000" b="1" dirty="0">
+              <a:rPr lang="en-US" sz="3000" b="1" dirty="0">
                 <a:solidFill>
                   <a:srgbClr val="FFFFFF"/>
                 </a:solidFill>
@@ -2391,7 +2391,7 @@
               </a:rPr>
               <a:t>operating 포스처 테스트 문서</a:t>
             </a:r>
-            <a:endParaRPr lang="en-US" sz="4000" dirty="0"/>
+            <a:endParaRPr lang="en-US" sz="3000" dirty="0"/>
           </a:p>
         </p:txBody>
       </p:sp>
@@ -2403,7 +2403,7 @@
         </p:nvSpPr>
         <p:spPr>
           <a:xfrm>
-            <a:off x="502920" y="3090672"/>
+            <a:off x="566928" y="3410712"/>
             <a:ext cx="7315200" cy="329184"/>
           </a:xfrm>
           <a:prstGeom prst="rect">
@@ -2442,7 +2442,7 @@
         </p:nvSpPr>
         <p:spPr>
           <a:xfrm>
-            <a:off x="502920" y="3639312"/>
+            <a:off x="566928" y="3959352"/>
             <a:ext cx="1005840" cy="292608"/>
           </a:xfrm>
           <a:prstGeom prst="roundRect">
@@ -2464,7 +2464,7 @@
         </p:nvSpPr>
         <p:spPr>
           <a:xfrm>
-            <a:off x="502920" y="3639312"/>
+            <a:off x="566928" y="3959352"/>
             <a:ext cx="1005840" cy="292608"/>
           </a:xfrm>
           <a:prstGeom prst="rect">
@@ -2503,7 +2503,7 @@
         </p:nvSpPr>
         <p:spPr>
           <a:xfrm>
-            <a:off x="1600200" y="3639312"/>
+            <a:off x="1664208" y="3959352"/>
             <a:ext cx="1005840" cy="292608"/>
           </a:xfrm>
           <a:prstGeom prst="roundRect">
@@ -2525,7 +2525,7 @@
         </p:nvSpPr>
         <p:spPr>
           <a:xfrm>
-            <a:off x="1600200" y="3639312"/>
+            <a:off x="1664208" y="3959352"/>
             <a:ext cx="1005840" cy="292608"/>
           </a:xfrm>
           <a:prstGeom prst="rect">
@@ -2564,7 +2564,7 @@
         </p:nvSpPr>
         <p:spPr>
           <a:xfrm>
-            <a:off x="502920" y="4078224"/>
+            <a:off x="566928" y="4398264"/>
             <a:ext cx="6858000" cy="1051560"/>
           </a:xfrm>
           <a:prstGeom prst="roundRect">
@@ -2591,7 +2591,7 @@
         </p:nvSpPr>
         <p:spPr>
           <a:xfrm>
-            <a:off x="758952" y="4187952"/>
+            <a:off x="822960" y="4507992"/>
             <a:ext cx="6345936" cy="832104"/>
           </a:xfrm>
           <a:prstGeom prst="rect">
@@ -2630,7 +2630,7 @@
         </p:nvSpPr>
         <p:spPr>
           <a:xfrm>
-            <a:off x="502920" y="1700784"/>
+            <a:off x="566928" y="1700784"/>
             <a:ext cx="7315200" cy="256032"/>
           </a:xfrm>
           <a:prstGeom prst="rect">
@@ -2669,8 +2669,8 @@
         </p:nvSpPr>
         <p:spPr>
           <a:xfrm>
-            <a:off x="502920" y="6035040"/>
-            <a:ext cx="11057839" cy="274320"/>
+            <a:off x="566928" y="5943600"/>
+            <a:ext cx="11057839" cy="201168"/>
           </a:xfrm>
           <a:prstGeom prst="rect">
             <a:avLst/>
@@ -2708,7 +2708,7 @@
         </p:nvSpPr>
         <p:spPr>
           <a:xfrm>
-            <a:off x="502920" y="6382512"/>
+            <a:off x="566928" y="6382512"/>
             <a:ext cx="7315200" cy="219456"/>
           </a:xfrm>
           <a:prstGeom prst="rect">
@@ -2747,7 +2747,7 @@
         </p:nvSpPr>
         <p:spPr>
           <a:xfrm>
-            <a:off x="10774375" y="6382512"/>
+            <a:off x="10710367" y="6382512"/>
             <a:ext cx="914400" cy="219456"/>
           </a:xfrm>
           <a:prstGeom prst="rect">
@@ -2818,7 +2818,7 @@
         </p:nvSpPr>
         <p:spPr>
           <a:xfrm>
-            <a:off x="502920" y="457200"/>
+            <a:off x="566928" y="457200"/>
             <a:ext cx="384048" cy="384048"/>
           </a:xfrm>
           <a:prstGeom prst="ellipse">
@@ -2838,7 +2838,7 @@
         </p:nvSpPr>
         <p:spPr>
           <a:xfrm>
-            <a:off x="502920" y="457200"/>
+            <a:off x="566928" y="457200"/>
             <a:ext cx="384048" cy="384048"/>
           </a:xfrm>
           <a:prstGeom prst="rect">
@@ -2877,7 +2877,7 @@
         </p:nvSpPr>
         <p:spPr>
           <a:xfrm>
-            <a:off x="1069848" y="457200"/>
+            <a:off x="1133856" y="457200"/>
             <a:ext cx="10490911" cy="182880"/>
           </a:xfrm>
           <a:prstGeom prst="rect">
@@ -2916,7 +2916,7 @@
         </p:nvSpPr>
         <p:spPr>
           <a:xfrm>
-            <a:off x="1069848" y="640080"/>
+            <a:off x="1133856" y="640080"/>
             <a:ext cx="10490911" cy="365760"/>
           </a:xfrm>
           <a:prstGeom prst="rect">
@@ -2926,7 +2926,9 @@
           <a:ln/>
         </p:spPr>
         <p:txBody>
-          <a:bodyPr wrap="square" lIns="0" tIns="0" rIns="0" bIns="0" rtlCol="0" anchor="ctr"/>
+          <a:bodyPr wrap="square" lIns="0" tIns="0" rIns="0" bIns="0" rtlCol="0" anchor="ctr">
+            <a:normAutofit/>
+          </a:bodyPr>
           <a:lstStyle/>
           <a:p>
             <a:pPr indent="0" marL="0">
@@ -2955,7 +2957,7 @@
         </p:nvSpPr>
         <p:spPr>
           <a:xfrm>
-            <a:off x="502920" y="1417320"/>
+            <a:off x="566928" y="1417320"/>
             <a:ext cx="5391760" cy="4389120"/>
           </a:xfrm>
           <a:prstGeom prst="roundRect">
@@ -2982,7 +2984,7 @@
         </p:nvSpPr>
         <p:spPr>
           <a:xfrm>
-            <a:off x="731520" y="1618488"/>
+            <a:off x="795528" y="1618488"/>
             <a:ext cx="4934560" cy="320040"/>
           </a:xfrm>
           <a:prstGeom prst="rect">
@@ -3021,7 +3023,7 @@
         </p:nvSpPr>
         <p:spPr>
           <a:xfrm>
-            <a:off x="731520" y="2011680"/>
+            <a:off x="795528" y="2011680"/>
             <a:ext cx="2269897" cy="475488"/>
           </a:xfrm>
           <a:prstGeom prst="rect">
@@ -3031,7 +3033,9 @@
           <a:ln/>
         </p:spPr>
         <p:txBody>
-          <a:bodyPr wrap="square" lIns="0" tIns="0" rIns="0" bIns="0" rtlCol="0" anchor="ctr"/>
+          <a:bodyPr wrap="square" lIns="0" tIns="0" rIns="0" bIns="0" rtlCol="0" anchor="ctr">
+            <a:normAutofit/>
+          </a:bodyPr>
           <a:lstStyle/>
           <a:p>
             <a:pPr indent="0" marL="0">
@@ -3063,7 +3067,7 @@
         </p:nvSpPr>
         <p:spPr>
           <a:xfrm>
-            <a:off x="3001417" y="2011680"/>
+            <a:off x="3065425" y="2011680"/>
             <a:ext cx="2664662" cy="475488"/>
           </a:xfrm>
           <a:prstGeom prst="rect">
@@ -3073,7 +3077,9 @@
           <a:ln/>
         </p:spPr>
         <p:txBody>
-          <a:bodyPr wrap="square" lIns="0" tIns="0" rIns="0" bIns="0" rtlCol="0" anchor="ctr"/>
+          <a:bodyPr wrap="square" lIns="0" tIns="0" rIns="0" bIns="0" rtlCol="0" anchor="ctr">
+            <a:normAutofit/>
+          </a:bodyPr>
           <a:lstStyle/>
           <a:p>
             <a:pPr indent="0" marL="0">
@@ -3105,7 +3111,7 @@
         </p:nvSpPr>
         <p:spPr>
           <a:xfrm>
-            <a:off x="731520" y="2487168"/>
+            <a:off x="795528" y="2487168"/>
             <a:ext cx="4934560" cy="0"/>
           </a:xfrm>
           <a:prstGeom prst="line">
@@ -3128,7 +3134,7 @@
         </p:nvSpPr>
         <p:spPr>
           <a:xfrm>
-            <a:off x="731520" y="2487168"/>
+            <a:off x="795528" y="2487168"/>
             <a:ext cx="2269897" cy="475488"/>
           </a:xfrm>
           <a:prstGeom prst="rect">
@@ -3138,7 +3144,9 @@
           <a:ln/>
         </p:spPr>
         <p:txBody>
-          <a:bodyPr wrap="square" lIns="0" tIns="0" rIns="0" bIns="0" rtlCol="0" anchor="ctr"/>
+          <a:bodyPr wrap="square" lIns="0" tIns="0" rIns="0" bIns="0" rtlCol="0" anchor="ctr">
+            <a:normAutofit/>
+          </a:bodyPr>
           <a:lstStyle/>
           <a:p>
             <a:pPr indent="0" marL="0">
@@ -3170,7 +3178,7 @@
         </p:nvSpPr>
         <p:spPr>
           <a:xfrm>
-            <a:off x="3001417" y="2487168"/>
+            <a:off x="3065425" y="2487168"/>
             <a:ext cx="2664662" cy="475488"/>
           </a:xfrm>
           <a:prstGeom prst="rect">
@@ -3180,7 +3188,9 @@
           <a:ln/>
         </p:spPr>
         <p:txBody>
-          <a:bodyPr wrap="square" lIns="0" tIns="0" rIns="0" bIns="0" rtlCol="0" anchor="ctr"/>
+          <a:bodyPr wrap="square" lIns="0" tIns="0" rIns="0" bIns="0" rtlCol="0" anchor="ctr">
+            <a:normAutofit/>
+          </a:bodyPr>
           <a:lstStyle/>
           <a:p>
             <a:pPr indent="0" marL="0">
@@ -3212,7 +3222,7 @@
         </p:nvSpPr>
         <p:spPr>
           <a:xfrm>
-            <a:off x="731520" y="2962656"/>
+            <a:off x="795528" y="2962656"/>
             <a:ext cx="4934560" cy="0"/>
           </a:xfrm>
           <a:prstGeom prst="line">
@@ -3235,7 +3245,7 @@
         </p:nvSpPr>
         <p:spPr>
           <a:xfrm>
-            <a:off x="731520" y="2962656"/>
+            <a:off x="795528" y="2962656"/>
             <a:ext cx="2269897" cy="475488"/>
           </a:xfrm>
           <a:prstGeom prst="rect">
@@ -3245,7 +3255,9 @@
           <a:ln/>
         </p:spPr>
         <p:txBody>
-          <a:bodyPr wrap="square" lIns="0" tIns="0" rIns="0" bIns="0" rtlCol="0" anchor="ctr"/>
+          <a:bodyPr wrap="square" lIns="0" tIns="0" rIns="0" bIns="0" rtlCol="0" anchor="ctr">
+            <a:normAutofit/>
+          </a:bodyPr>
           <a:lstStyle/>
           <a:p>
             <a:pPr indent="0" marL="0">
@@ -3277,7 +3289,7 @@
         </p:nvSpPr>
         <p:spPr>
           <a:xfrm>
-            <a:off x="3001417" y="2962656"/>
+            <a:off x="3065425" y="2962656"/>
             <a:ext cx="2664662" cy="475488"/>
           </a:xfrm>
           <a:prstGeom prst="rect">
@@ -3287,7 +3299,9 @@
           <a:ln/>
         </p:spPr>
         <p:txBody>
-          <a:bodyPr wrap="square" lIns="0" tIns="0" rIns="0" bIns="0" rtlCol="0" anchor="ctr"/>
+          <a:bodyPr wrap="square" lIns="0" tIns="0" rIns="0" bIns="0" rtlCol="0" anchor="ctr">
+            <a:normAutofit/>
+          </a:bodyPr>
           <a:lstStyle/>
           <a:p>
             <a:pPr indent="0" marL="0">
@@ -3319,7 +3333,7 @@
         </p:nvSpPr>
         <p:spPr>
           <a:xfrm>
-            <a:off x="731520" y="3438144"/>
+            <a:off x="795528" y="3438144"/>
             <a:ext cx="4934560" cy="0"/>
           </a:xfrm>
           <a:prstGeom prst="line">
@@ -3342,7 +3356,7 @@
         </p:nvSpPr>
         <p:spPr>
           <a:xfrm>
-            <a:off x="731520" y="3438144"/>
+            <a:off x="795528" y="3438144"/>
             <a:ext cx="2269897" cy="475488"/>
           </a:xfrm>
           <a:prstGeom prst="rect">
@@ -3352,7 +3366,9 @@
           <a:ln/>
         </p:spPr>
         <p:txBody>
-          <a:bodyPr wrap="square" lIns="0" tIns="0" rIns="0" bIns="0" rtlCol="0" anchor="ctr"/>
+          <a:bodyPr wrap="square" lIns="0" tIns="0" rIns="0" bIns="0" rtlCol="0" anchor="ctr">
+            <a:normAutofit/>
+          </a:bodyPr>
           <a:lstStyle/>
           <a:p>
             <a:pPr indent="0" marL="0">
@@ -3384,7 +3400,7 @@
         </p:nvSpPr>
         <p:spPr>
           <a:xfrm>
-            <a:off x="3001417" y="3438144"/>
+            <a:off x="3065425" y="3438144"/>
             <a:ext cx="2664662" cy="475488"/>
           </a:xfrm>
           <a:prstGeom prst="rect">
@@ -3394,7 +3410,9 @@
           <a:ln/>
         </p:spPr>
         <p:txBody>
-          <a:bodyPr wrap="square" lIns="0" tIns="0" rIns="0" bIns="0" rtlCol="0" anchor="ctr"/>
+          <a:bodyPr wrap="square" lIns="0" tIns="0" rIns="0" bIns="0" rtlCol="0" anchor="ctr">
+            <a:normAutofit/>
+          </a:bodyPr>
           <a:lstStyle/>
           <a:p>
             <a:pPr indent="0" marL="0">
@@ -3426,7 +3444,7 @@
         </p:nvSpPr>
         <p:spPr>
           <a:xfrm>
-            <a:off x="731520" y="3913632"/>
+            <a:off x="795528" y="3913632"/>
             <a:ext cx="4934560" cy="0"/>
           </a:xfrm>
           <a:prstGeom prst="line">
@@ -3449,7 +3467,7 @@
         </p:nvSpPr>
         <p:spPr>
           <a:xfrm>
-            <a:off x="731520" y="3913632"/>
+            <a:off x="795528" y="3913632"/>
             <a:ext cx="2269897" cy="475488"/>
           </a:xfrm>
           <a:prstGeom prst="rect">
@@ -3459,7 +3477,9 @@
           <a:ln/>
         </p:spPr>
         <p:txBody>
-          <a:bodyPr wrap="square" lIns="0" tIns="0" rIns="0" bIns="0" rtlCol="0" anchor="ctr"/>
+          <a:bodyPr wrap="square" lIns="0" tIns="0" rIns="0" bIns="0" rtlCol="0" anchor="ctr">
+            <a:normAutofit/>
+          </a:bodyPr>
           <a:lstStyle/>
           <a:p>
             <a:pPr indent="0" marL="0">
@@ -3491,7 +3511,7 @@
         </p:nvSpPr>
         <p:spPr>
           <a:xfrm>
-            <a:off x="3001417" y="3913632"/>
+            <a:off x="3065425" y="3913632"/>
             <a:ext cx="2664662" cy="475488"/>
           </a:xfrm>
           <a:prstGeom prst="rect">
@@ -3501,7 +3521,9 @@
           <a:ln/>
         </p:spPr>
         <p:txBody>
-          <a:bodyPr wrap="square" lIns="0" tIns="0" rIns="0" bIns="0" rtlCol="0" anchor="ctr"/>
+          <a:bodyPr wrap="square" lIns="0" tIns="0" rIns="0" bIns="0" rtlCol="0" anchor="ctr">
+            <a:normAutofit/>
+          </a:bodyPr>
           <a:lstStyle/>
           <a:p>
             <a:pPr indent="0" marL="0">
@@ -3533,7 +3555,7 @@
         </p:nvSpPr>
         <p:spPr>
           <a:xfrm>
-            <a:off x="731520" y="4389120"/>
+            <a:off x="795528" y="4389120"/>
             <a:ext cx="4934560" cy="0"/>
           </a:xfrm>
           <a:prstGeom prst="line">
@@ -3556,7 +3578,7 @@
         </p:nvSpPr>
         <p:spPr>
           <a:xfrm>
-            <a:off x="731520" y="4389120"/>
+            <a:off x="795528" y="4389120"/>
             <a:ext cx="2269897" cy="475488"/>
           </a:xfrm>
           <a:prstGeom prst="rect">
@@ -3566,7 +3588,9 @@
           <a:ln/>
         </p:spPr>
         <p:txBody>
-          <a:bodyPr wrap="square" lIns="0" tIns="0" rIns="0" bIns="0" rtlCol="0" anchor="ctr"/>
+          <a:bodyPr wrap="square" lIns="0" tIns="0" rIns="0" bIns="0" rtlCol="0" anchor="ctr">
+            <a:normAutofit/>
+          </a:bodyPr>
           <a:lstStyle/>
           <a:p>
             <a:pPr indent="0" marL="0">
@@ -3598,7 +3622,7 @@
         </p:nvSpPr>
         <p:spPr>
           <a:xfrm>
-            <a:off x="3001417" y="4389120"/>
+            <a:off x="3065425" y="4389120"/>
             <a:ext cx="2664662" cy="475488"/>
           </a:xfrm>
           <a:prstGeom prst="rect">
@@ -3608,7 +3632,9 @@
           <a:ln/>
         </p:spPr>
         <p:txBody>
-          <a:bodyPr wrap="square" lIns="0" tIns="0" rIns="0" bIns="0" rtlCol="0" anchor="ctr"/>
+          <a:bodyPr wrap="square" lIns="0" tIns="0" rIns="0" bIns="0" rtlCol="0" anchor="ctr">
+            <a:normAutofit/>
+          </a:bodyPr>
           <a:lstStyle/>
           <a:p>
             <a:pPr indent="0" marL="0">
@@ -3640,7 +3666,7 @@
         </p:nvSpPr>
         <p:spPr>
           <a:xfrm>
-            <a:off x="731520" y="4864608"/>
+            <a:off x="795528" y="4864608"/>
             <a:ext cx="4934560" cy="0"/>
           </a:xfrm>
           <a:prstGeom prst="line">
@@ -3663,7 +3689,7 @@
         </p:nvSpPr>
         <p:spPr>
           <a:xfrm>
-            <a:off x="731520" y="4864608"/>
+            <a:off x="795528" y="4864608"/>
             <a:ext cx="2269897" cy="475488"/>
           </a:xfrm>
           <a:prstGeom prst="rect">
@@ -3673,7 +3699,9 @@
           <a:ln/>
         </p:spPr>
         <p:txBody>
-          <a:bodyPr wrap="square" lIns="0" tIns="0" rIns="0" bIns="0" rtlCol="0" anchor="ctr"/>
+          <a:bodyPr wrap="square" lIns="0" tIns="0" rIns="0" bIns="0" rtlCol="0" anchor="ctr">
+            <a:normAutofit/>
+          </a:bodyPr>
           <a:lstStyle/>
           <a:p>
             <a:pPr indent="0" marL="0">
@@ -3705,7 +3733,7 @@
         </p:nvSpPr>
         <p:spPr>
           <a:xfrm>
-            <a:off x="3001417" y="4864608"/>
+            <a:off x="3065425" y="4864608"/>
             <a:ext cx="2664662" cy="475488"/>
           </a:xfrm>
           <a:prstGeom prst="rect">
@@ -3715,7 +3743,9 @@
           <a:ln/>
         </p:spPr>
         <p:txBody>
-          <a:bodyPr wrap="square" lIns="0" tIns="0" rIns="0" bIns="0" rtlCol="0" anchor="ctr"/>
+          <a:bodyPr wrap="square" lIns="0" tIns="0" rIns="0" bIns="0" rtlCol="0" anchor="ctr">
+            <a:normAutofit/>
+          </a:bodyPr>
           <a:lstStyle/>
           <a:p>
             <a:pPr indent="0" marL="0">
@@ -3747,7 +3777,7 @@
         </p:nvSpPr>
         <p:spPr>
           <a:xfrm>
-            <a:off x="6169000" y="1417320"/>
+            <a:off x="6233008" y="1417320"/>
             <a:ext cx="5391760" cy="4389120"/>
           </a:xfrm>
           <a:prstGeom prst="roundRect">
@@ -3774,7 +3804,7 @@
         </p:nvSpPr>
         <p:spPr>
           <a:xfrm>
-            <a:off x="6397600" y="1618488"/>
+            <a:off x="6461608" y="1618488"/>
             <a:ext cx="4934560" cy="320040"/>
           </a:xfrm>
           <a:prstGeom prst="rect">
@@ -3820,7 +3850,7 @@
           </p:nvPr>
         </p:nvGraphicFramePr>
         <p:xfrm>
-          <a:off x="6397600" y="2057400"/>
+          <a:off x="6461608" y="2057400"/>
           <a:ext cx="4934560" cy="914400"/>
         </p:xfrm>
         <a:graphic>
@@ -5327,7 +5357,7 @@
         </p:nvSpPr>
         <p:spPr>
           <a:xfrm>
-            <a:off x="6397600" y="4069080"/>
+            <a:off x="6461608" y="4069080"/>
             <a:ext cx="4934560" cy="1463040"/>
           </a:xfrm>
           <a:prstGeom prst="roundRect">
@@ -5349,7 +5379,7 @@
         </p:nvSpPr>
         <p:spPr>
           <a:xfrm>
-            <a:off x="6397600" y="4123944"/>
+            <a:off x="6461608" y="4123944"/>
             <a:ext cx="36576" cy="1353312"/>
           </a:xfrm>
           <a:prstGeom prst="rect">
@@ -5369,7 +5399,7 @@
         </p:nvSpPr>
         <p:spPr>
           <a:xfrm>
-            <a:off x="6543904" y="4160520"/>
+            <a:off x="6607912" y="4160520"/>
             <a:ext cx="4678528" cy="201168"/>
           </a:xfrm>
           <a:prstGeom prst="rect">
@@ -5408,7 +5438,7 @@
         </p:nvSpPr>
         <p:spPr>
           <a:xfrm>
-            <a:off x="6543904" y="4361688"/>
+            <a:off x="6607912" y="4361688"/>
             <a:ext cx="4678528" cy="1133856"/>
           </a:xfrm>
           <a:prstGeom prst="rect">
@@ -5450,7 +5480,7 @@
         </p:nvSpPr>
         <p:spPr>
           <a:xfrm>
-            <a:off x="502920" y="6382512"/>
+            <a:off x="566928" y="6382512"/>
             <a:ext cx="7315200" cy="219456"/>
           </a:xfrm>
           <a:prstGeom prst="rect">
@@ -5489,7 +5519,7 @@
         </p:nvSpPr>
         <p:spPr>
           <a:xfrm>
-            <a:off x="10774375" y="6382512"/>
+            <a:off x="10710367" y="6382512"/>
             <a:ext cx="914400" cy="219456"/>
           </a:xfrm>
           <a:prstGeom prst="rect">
@@ -5560,7 +5590,7 @@
         </p:nvSpPr>
         <p:spPr>
           <a:xfrm>
-            <a:off x="502920" y="457200"/>
+            <a:off x="566928" y="457200"/>
             <a:ext cx="384048" cy="384048"/>
           </a:xfrm>
           <a:prstGeom prst="ellipse">
@@ -5580,7 +5610,7 @@
         </p:nvSpPr>
         <p:spPr>
           <a:xfrm>
-            <a:off x="502920" y="457200"/>
+            <a:off x="566928" y="457200"/>
             <a:ext cx="384048" cy="384048"/>
           </a:xfrm>
           <a:prstGeom prst="rect">
@@ -5619,7 +5649,7 @@
         </p:nvSpPr>
         <p:spPr>
           <a:xfrm>
-            <a:off x="1069848" y="457200"/>
+            <a:off x="1133856" y="457200"/>
             <a:ext cx="10490911" cy="182880"/>
           </a:xfrm>
           <a:prstGeom prst="rect">
@@ -5658,7 +5688,7 @@
         </p:nvSpPr>
         <p:spPr>
           <a:xfrm>
-            <a:off x="1069848" y="640080"/>
+            <a:off x="1133856" y="640080"/>
             <a:ext cx="10490911" cy="365760"/>
           </a:xfrm>
           <a:prstGeom prst="rect">
@@ -5668,7 +5698,9 @@
           <a:ln/>
         </p:spPr>
         <p:txBody>
-          <a:bodyPr wrap="square" lIns="0" tIns="0" rIns="0" bIns="0" rtlCol="0" anchor="ctr"/>
+          <a:bodyPr wrap="square" lIns="0" tIns="0" rIns="0" bIns="0" rtlCol="0" anchor="ctr">
+            <a:normAutofit/>
+          </a:bodyPr>
           <a:lstStyle/>
           <a:p>
             <a:pPr indent="0" marL="0">
@@ -5697,7 +5729,7 @@
         </p:nvSpPr>
         <p:spPr>
           <a:xfrm>
-            <a:off x="502920" y="4937760"/>
+            <a:off x="566928" y="4937760"/>
             <a:ext cx="11057839" cy="804672"/>
           </a:xfrm>
           <a:prstGeom prst="roundRect">
@@ -5724,7 +5756,7 @@
         </p:nvSpPr>
         <p:spPr>
           <a:xfrm>
-            <a:off x="685800" y="5047488"/>
+            <a:off x="749808" y="5047488"/>
             <a:ext cx="1691640" cy="256032"/>
           </a:xfrm>
           <a:prstGeom prst="rect">
@@ -5763,7 +5795,7 @@
         </p:nvSpPr>
         <p:spPr>
           <a:xfrm>
-            <a:off x="2423160" y="5010912"/>
+            <a:off x="2487168" y="5010912"/>
             <a:ext cx="8954719" cy="658368"/>
           </a:xfrm>
           <a:prstGeom prst="rect">
@@ -5805,7 +5837,7 @@
         </p:nvSpPr>
         <p:spPr>
           <a:xfrm>
-            <a:off x="502920" y="6382512"/>
+            <a:off x="566928" y="6382512"/>
             <a:ext cx="7315200" cy="219456"/>
           </a:xfrm>
           <a:prstGeom prst="rect">
@@ -5844,7 +5876,7 @@
         </p:nvSpPr>
         <p:spPr>
           <a:xfrm>
-            <a:off x="10774375" y="6382512"/>
+            <a:off x="10710367" y="6382512"/>
             <a:ext cx="914400" cy="219456"/>
           </a:xfrm>
           <a:prstGeom prst="rect">
@@ -5915,7 +5947,7 @@
         </p:nvSpPr>
         <p:spPr>
           <a:xfrm>
-            <a:off x="502920" y="457200"/>
+            <a:off x="566928" y="457200"/>
             <a:ext cx="384048" cy="384048"/>
           </a:xfrm>
           <a:prstGeom prst="ellipse">
@@ -5935,7 +5967,7 @@
         </p:nvSpPr>
         <p:spPr>
           <a:xfrm>
-            <a:off x="502920" y="457200"/>
+            <a:off x="566928" y="457200"/>
             <a:ext cx="384048" cy="384048"/>
           </a:xfrm>
           <a:prstGeom prst="rect">
@@ -5974,7 +6006,7 @@
         </p:nvSpPr>
         <p:spPr>
           <a:xfrm>
-            <a:off x="1069848" y="457200"/>
+            <a:off x="1133856" y="457200"/>
             <a:ext cx="10490911" cy="182880"/>
           </a:xfrm>
           <a:prstGeom prst="rect">
@@ -6013,7 +6045,7 @@
         </p:nvSpPr>
         <p:spPr>
           <a:xfrm>
-            <a:off x="1069848" y="640080"/>
+            <a:off x="1133856" y="640080"/>
             <a:ext cx="10490911" cy="365760"/>
           </a:xfrm>
           <a:prstGeom prst="rect">
@@ -6023,7 +6055,9 @@
           <a:ln/>
         </p:spPr>
         <p:txBody>
-          <a:bodyPr wrap="square" lIns="0" tIns="0" rIns="0" bIns="0" rtlCol="0" anchor="ctr"/>
+          <a:bodyPr wrap="square" lIns="0" tIns="0" rIns="0" bIns="0" rtlCol="0" anchor="ctr">
+            <a:normAutofit/>
+          </a:bodyPr>
           <a:lstStyle/>
           <a:p>
             <a:pPr indent="0" marL="0">
@@ -6052,7 +6086,7 @@
         </p:nvSpPr>
         <p:spPr>
           <a:xfrm>
-            <a:off x="502920" y="1417320"/>
+            <a:off x="566928" y="1417320"/>
             <a:ext cx="11057839" cy="3657600"/>
           </a:xfrm>
           <a:prstGeom prst="roundRect">
@@ -6079,7 +6113,7 @@
         </p:nvSpPr>
         <p:spPr>
           <a:xfrm>
-            <a:off x="502920" y="1417320"/>
+            <a:off x="566928" y="1417320"/>
             <a:ext cx="11057839" cy="45720"/>
           </a:xfrm>
           <a:prstGeom prst="rect">
@@ -6099,7 +6133,7 @@
         </p:nvSpPr>
         <p:spPr>
           <a:xfrm>
-            <a:off x="731520" y="1618488"/>
+            <a:off x="795528" y="1618488"/>
             <a:ext cx="10600639" cy="292608"/>
           </a:xfrm>
           <a:prstGeom prst="rect">
@@ -6138,7 +6172,7 @@
         </p:nvSpPr>
         <p:spPr>
           <a:xfrm>
-            <a:off x="731520" y="1947672"/>
+            <a:off x="795528" y="1947672"/>
             <a:ext cx="10600639" cy="365760"/>
           </a:xfrm>
           <a:prstGeom prst="rect">
@@ -6179,7 +6213,7 @@
         </p:nvSpPr>
         <p:spPr>
           <a:xfrm>
-            <a:off x="731520" y="2377440"/>
+            <a:off x="795528" y="2377440"/>
             <a:ext cx="10600639" cy="2606040"/>
           </a:xfrm>
           <a:prstGeom prst="rect">
@@ -6224,7 +6258,7 @@
         </p:nvSpPr>
         <p:spPr>
           <a:xfrm>
-            <a:off x="502920" y="5193792"/>
+            <a:off x="566928" y="5193792"/>
             <a:ext cx="11057839" cy="621792"/>
           </a:xfrm>
           <a:prstGeom prst="roundRect">
@@ -6251,7 +6285,7 @@
         </p:nvSpPr>
         <p:spPr>
           <a:xfrm>
-            <a:off x="731520" y="5193792"/>
+            <a:off x="795528" y="5193792"/>
             <a:ext cx="10600639" cy="621792"/>
           </a:xfrm>
           <a:prstGeom prst="rect">
@@ -6290,7 +6324,7 @@
         </p:nvSpPr>
         <p:spPr>
           <a:xfrm>
-            <a:off x="502920" y="6382512"/>
+            <a:off x="566928" y="6382512"/>
             <a:ext cx="7315200" cy="219456"/>
           </a:xfrm>
           <a:prstGeom prst="rect">
@@ -6329,7 +6363,7 @@
         </p:nvSpPr>
         <p:spPr>
           <a:xfrm>
-            <a:off x="10774375" y="6382512"/>
+            <a:off x="10710367" y="6382512"/>
             <a:ext cx="914400" cy="219456"/>
           </a:xfrm>
           <a:prstGeom prst="rect">
@@ -6400,7 +6434,7 @@
         </p:nvSpPr>
         <p:spPr>
           <a:xfrm>
-            <a:off x="502920" y="457200"/>
+            <a:off x="566928" y="457200"/>
             <a:ext cx="384048" cy="384048"/>
           </a:xfrm>
           <a:prstGeom prst="ellipse">
@@ -6420,7 +6454,7 @@
         </p:nvSpPr>
         <p:spPr>
           <a:xfrm>
-            <a:off x="502920" y="457200"/>
+            <a:off x="566928" y="457200"/>
             <a:ext cx="384048" cy="384048"/>
           </a:xfrm>
           <a:prstGeom prst="rect">
@@ -6459,7 +6493,7 @@
         </p:nvSpPr>
         <p:spPr>
           <a:xfrm>
-            <a:off x="1069848" y="457200"/>
+            <a:off x="1133856" y="457200"/>
             <a:ext cx="10490911" cy="182880"/>
           </a:xfrm>
           <a:prstGeom prst="rect">
@@ -6498,7 +6532,7 @@
         </p:nvSpPr>
         <p:spPr>
           <a:xfrm>
-            <a:off x="1069848" y="640080"/>
+            <a:off x="1133856" y="640080"/>
             <a:ext cx="10490911" cy="365760"/>
           </a:xfrm>
           <a:prstGeom prst="rect">
@@ -6508,6 +6542,47 @@
           <a:ln/>
         </p:spPr>
         <p:txBody>
+          <a:bodyPr wrap="square" lIns="0" tIns="0" rIns="0" bIns="0" rtlCol="0" anchor="ctr">
+            <a:normAutofit/>
+          </a:bodyPr>
+          <a:lstStyle/>
+          <a:p>
+            <a:pPr indent="0" marL="0">
+              <a:buNone/>
+            </a:pPr>
+            <a:r>
+              <a:rPr lang="en-US" sz="2300" b="1" dirty="0">
+                <a:solidFill>
+                  <a:srgbClr val="10161F"/>
+                </a:solidFill>
+                <a:latin typeface="Pretendard" pitchFamily="34" charset="0"/>
+                <a:ea typeface="Pretendard" pitchFamily="34" charset="-122"/>
+                <a:cs typeface="Pretendard" pitchFamily="34" charset="-120"/>
+              </a:rPr>
+              <a:t>실사 체크리스트</a:t>
+            </a:r>
+            <a:endParaRPr lang="en-US" sz="2300" dirty="0"/>
+          </a:p>
+        </p:txBody>
+      </p:sp>
+      <p:sp>
+        <p:nvSpPr>
+          <p:cNvPr id="6" name="Text 4"/>
+          <p:cNvSpPr/>
+          <p:nvPr/>
+        </p:nvSpPr>
+        <p:spPr>
+          <a:xfrm>
+            <a:off x="566928" y="1371600"/>
+            <a:ext cx="11057839" cy="237744"/>
+          </a:xfrm>
+          <a:prstGeom prst="rect">
+            <a:avLst/>
+          </a:prstGeom>
+          <a:noFill/>
+          <a:ln/>
+        </p:spPr>
+        <p:txBody>
           <a:bodyPr wrap="square" lIns="0" tIns="0" rIns="0" bIns="0" rtlCol="0" anchor="ctr"/>
           <a:lstStyle/>
           <a:p>
@@ -6515,7 +6590,7 @@
               <a:buNone/>
             </a:pPr>
             <a:r>
-              <a:rPr lang="en-US" sz="2300" b="1" dirty="0">
+              <a:rPr lang="en-US" sz="1100" b="1" dirty="0">
                 <a:solidFill>
                   <a:srgbClr val="10161F"/>
                 </a:solidFill>
@@ -6523,45 +6598,6 @@
                 <a:ea typeface="Pretendard" pitchFamily="34" charset="-122"/>
                 <a:cs typeface="Pretendard" pitchFamily="34" charset="-120"/>
               </a:rPr>
-              <a:t>실사 체크리스트</a:t>
-            </a:r>
-            <a:endParaRPr lang="en-US" sz="2300" dirty="0"/>
-          </a:p>
-        </p:txBody>
-      </p:sp>
-      <p:sp>
-        <p:nvSpPr>
-          <p:cNvPr id="6" name="Text 4"/>
-          <p:cNvSpPr/>
-          <p:nvPr/>
-        </p:nvSpPr>
-        <p:spPr>
-          <a:xfrm>
-            <a:off x="502920" y="1371600"/>
-            <a:ext cx="11057839" cy="237744"/>
-          </a:xfrm>
-          <a:prstGeom prst="rect">
-            <a:avLst/>
-          </a:prstGeom>
-          <a:noFill/>
-          <a:ln/>
-        </p:spPr>
-        <p:txBody>
-          <a:bodyPr wrap="square" lIns="0" tIns="0" rIns="0" bIns="0" rtlCol="0" anchor="ctr"/>
-          <a:lstStyle/>
-          <a:p>
-            <a:pPr indent="0" marL="0">
-              <a:buNone/>
-            </a:pPr>
-            <a:r>
-              <a:rPr lang="en-US" sz="1100" b="1" dirty="0">
-                <a:solidFill>
-                  <a:srgbClr val="10161F"/>
-                </a:solidFill>
-                <a:latin typeface="Pretendard" pitchFamily="34" charset="0"/>
-                <a:ea typeface="Pretendard" pitchFamily="34" charset="-122"/>
-                <a:cs typeface="Pretendard" pitchFamily="34" charset="-120"/>
-              </a:rPr>
               <a:t>거래 안정성 확보를 위한 필수 법률·물리·임대차 실사 점검 항목 (총 6건)</a:t>
             </a:r>
             <a:endParaRPr lang="en-US" sz="1100" dirty="0"/>
@@ -6576,7 +6612,7 @@
         </p:nvSpPr>
         <p:spPr>
           <a:xfrm>
-            <a:off x="502920" y="1719072"/>
+            <a:off x="566928" y="1719072"/>
             <a:ext cx="5368900" cy="749808"/>
           </a:xfrm>
           <a:prstGeom prst="rect">
@@ -6601,7 +6637,7 @@
         </p:nvSpPr>
         <p:spPr>
           <a:xfrm>
-            <a:off x="640080" y="1947672"/>
+            <a:off x="704088" y="1947672"/>
             <a:ext cx="292608" cy="292608"/>
           </a:xfrm>
           <a:prstGeom prst="rect">
@@ -6621,7 +6657,7 @@
         </p:nvSpPr>
         <p:spPr>
           <a:xfrm>
-            <a:off x="640080" y="1947672"/>
+            <a:off x="704088" y="1947672"/>
             <a:ext cx="292608" cy="292608"/>
           </a:xfrm>
           <a:prstGeom prst="rect">
@@ -6660,7 +6696,7 @@
         </p:nvSpPr>
         <p:spPr>
           <a:xfrm>
-            <a:off x="1033272" y="1792224"/>
+            <a:off x="1097280" y="1792224"/>
             <a:ext cx="4710532" cy="603504"/>
           </a:xfrm>
           <a:prstGeom prst="rect">
@@ -6702,7 +6738,7 @@
         </p:nvSpPr>
         <p:spPr>
           <a:xfrm>
-            <a:off x="502920" y="2542032"/>
+            <a:off x="566928" y="2542032"/>
             <a:ext cx="5368900" cy="749808"/>
           </a:xfrm>
           <a:prstGeom prst="rect">
@@ -6727,7 +6763,7 @@
         </p:nvSpPr>
         <p:spPr>
           <a:xfrm>
-            <a:off x="640080" y="2770632"/>
+            <a:off x="704088" y="2770632"/>
             <a:ext cx="292608" cy="292608"/>
           </a:xfrm>
           <a:prstGeom prst="rect">
@@ -6747,7 +6783,7 @@
         </p:nvSpPr>
         <p:spPr>
           <a:xfrm>
-            <a:off x="640080" y="2770632"/>
+            <a:off x="704088" y="2770632"/>
             <a:ext cx="292608" cy="292608"/>
           </a:xfrm>
           <a:prstGeom prst="rect">
@@ -6786,7 +6822,7 @@
         </p:nvSpPr>
         <p:spPr>
           <a:xfrm>
-            <a:off x="1033272" y="2615184"/>
+            <a:off x="1097280" y="2615184"/>
             <a:ext cx="4710532" cy="603504"/>
           </a:xfrm>
           <a:prstGeom prst="rect">
@@ -6828,7 +6864,7 @@
         </p:nvSpPr>
         <p:spPr>
           <a:xfrm>
-            <a:off x="502920" y="3364992"/>
+            <a:off x="566928" y="3364992"/>
             <a:ext cx="5368900" cy="749808"/>
           </a:xfrm>
           <a:prstGeom prst="rect">
@@ -6853,7 +6889,7 @@
         </p:nvSpPr>
         <p:spPr>
           <a:xfrm>
-            <a:off x="640080" y="3593592"/>
+            <a:off x="704088" y="3593592"/>
             <a:ext cx="292608" cy="292608"/>
           </a:xfrm>
           <a:prstGeom prst="rect">
@@ -6873,7 +6909,7 @@
         </p:nvSpPr>
         <p:spPr>
           <a:xfrm>
-            <a:off x="640080" y="3593592"/>
+            <a:off x="704088" y="3593592"/>
             <a:ext cx="292608" cy="292608"/>
           </a:xfrm>
           <a:prstGeom prst="rect">
@@ -6912,7 +6948,7 @@
         </p:nvSpPr>
         <p:spPr>
           <a:xfrm>
-            <a:off x="1033272" y="3438144"/>
+            <a:off x="1097280" y="3438144"/>
             <a:ext cx="4710532" cy="603504"/>
           </a:xfrm>
           <a:prstGeom prst="rect">
@@ -6954,7 +6990,7 @@
         </p:nvSpPr>
         <p:spPr>
           <a:xfrm>
-            <a:off x="6191860" y="1719072"/>
+            <a:off x="6255868" y="1719072"/>
             <a:ext cx="5368900" cy="749808"/>
           </a:xfrm>
           <a:prstGeom prst="rect">
@@ -6979,7 +7015,7 @@
         </p:nvSpPr>
         <p:spPr>
           <a:xfrm>
-            <a:off x="6329020" y="1947672"/>
+            <a:off x="6393028" y="1947672"/>
             <a:ext cx="292608" cy="292608"/>
           </a:xfrm>
           <a:prstGeom prst="rect">
@@ -6999,7 +7035,7 @@
         </p:nvSpPr>
         <p:spPr>
           <a:xfrm>
-            <a:off x="6329020" y="1947672"/>
+            <a:off x="6393028" y="1947672"/>
             <a:ext cx="292608" cy="292608"/>
           </a:xfrm>
           <a:prstGeom prst="rect">
@@ -7038,7 +7074,7 @@
         </p:nvSpPr>
         <p:spPr>
           <a:xfrm>
-            <a:off x="6722212" y="1792224"/>
+            <a:off x="6786220" y="1792224"/>
             <a:ext cx="4710532" cy="603504"/>
           </a:xfrm>
           <a:prstGeom prst="rect">
@@ -7080,7 +7116,7 @@
         </p:nvSpPr>
         <p:spPr>
           <a:xfrm>
-            <a:off x="6191860" y="2542032"/>
+            <a:off x="6255868" y="2542032"/>
             <a:ext cx="5368900" cy="749808"/>
           </a:xfrm>
           <a:prstGeom prst="rect">
@@ -7105,7 +7141,7 @@
         </p:nvSpPr>
         <p:spPr>
           <a:xfrm>
-            <a:off x="6329020" y="2770632"/>
+            <a:off x="6393028" y="2770632"/>
             <a:ext cx="292608" cy="292608"/>
           </a:xfrm>
           <a:prstGeom prst="rect">
@@ -7125,7 +7161,7 @@
         </p:nvSpPr>
         <p:spPr>
           <a:xfrm>
-            <a:off x="6329020" y="2770632"/>
+            <a:off x="6393028" y="2770632"/>
             <a:ext cx="292608" cy="292608"/>
           </a:xfrm>
           <a:prstGeom prst="rect">
@@ -7164,7 +7200,7 @@
         </p:nvSpPr>
         <p:spPr>
           <a:xfrm>
-            <a:off x="6722212" y="2615184"/>
+            <a:off x="6786220" y="2615184"/>
             <a:ext cx="4710532" cy="603504"/>
           </a:xfrm>
           <a:prstGeom prst="rect">
@@ -7206,7 +7242,7 @@
         </p:nvSpPr>
         <p:spPr>
           <a:xfrm>
-            <a:off x="6191860" y="3364992"/>
+            <a:off x="6255868" y="3364992"/>
             <a:ext cx="5368900" cy="749808"/>
           </a:xfrm>
           <a:prstGeom prst="rect">
@@ -7231,7 +7267,7 @@
         </p:nvSpPr>
         <p:spPr>
           <a:xfrm>
-            <a:off x="6329020" y="3593592"/>
+            <a:off x="6393028" y="3593592"/>
             <a:ext cx="292608" cy="292608"/>
           </a:xfrm>
           <a:prstGeom prst="rect">
@@ -7251,7 +7287,7 @@
         </p:nvSpPr>
         <p:spPr>
           <a:xfrm>
-            <a:off x="6329020" y="3593592"/>
+            <a:off x="6393028" y="3593592"/>
             <a:ext cx="292608" cy="292608"/>
           </a:xfrm>
           <a:prstGeom prst="rect">
@@ -7290,7 +7326,7 @@
         </p:nvSpPr>
         <p:spPr>
           <a:xfrm>
-            <a:off x="6722212" y="3438144"/>
+            <a:off x="6786220" y="3438144"/>
             <a:ext cx="4710532" cy="603504"/>
           </a:xfrm>
           <a:prstGeom prst="rect">
@@ -7332,7 +7368,7 @@
         </p:nvSpPr>
         <p:spPr>
           <a:xfrm>
-            <a:off x="502920" y="5349240"/>
+            <a:off x="566928" y="5349240"/>
             <a:ext cx="11057839" cy="457200"/>
           </a:xfrm>
           <a:prstGeom prst="rect">
@@ -7352,7 +7388,7 @@
         </p:nvSpPr>
         <p:spPr>
           <a:xfrm>
-            <a:off x="685800" y="5422392"/>
+            <a:off x="749808" y="5422392"/>
             <a:ext cx="10692079" cy="310896"/>
           </a:xfrm>
           <a:prstGeom prst="rect">
@@ -7391,7 +7427,7 @@
         </p:nvSpPr>
         <p:spPr>
           <a:xfrm>
-            <a:off x="502920" y="6382512"/>
+            <a:off x="566928" y="6382512"/>
             <a:ext cx="7315200" cy="219456"/>
           </a:xfrm>
           <a:prstGeom prst="rect">
@@ -7430,7 +7466,7 @@
         </p:nvSpPr>
         <p:spPr>
           <a:xfrm>
-            <a:off x="10774375" y="6382512"/>
+            <a:off x="10710367" y="6382512"/>
             <a:ext cx="914400" cy="219456"/>
           </a:xfrm>
           <a:prstGeom prst="rect">
@@ -7501,7 +7537,7 @@
         </p:nvSpPr>
         <p:spPr>
           <a:xfrm>
-            <a:off x="502920" y="457200"/>
+            <a:off x="566928" y="457200"/>
             <a:ext cx="384048" cy="384048"/>
           </a:xfrm>
           <a:prstGeom prst="ellipse">
@@ -7521,7 +7557,7 @@
         </p:nvSpPr>
         <p:spPr>
           <a:xfrm>
-            <a:off x="502920" y="457200"/>
+            <a:off x="566928" y="457200"/>
             <a:ext cx="384048" cy="384048"/>
           </a:xfrm>
           <a:prstGeom prst="rect">
@@ -7560,7 +7596,7 @@
         </p:nvSpPr>
         <p:spPr>
           <a:xfrm>
-            <a:off x="1069848" y="457200"/>
+            <a:off x="1133856" y="457200"/>
             <a:ext cx="10490911" cy="182880"/>
           </a:xfrm>
           <a:prstGeom prst="rect">
@@ -7599,7 +7635,7 @@
         </p:nvSpPr>
         <p:spPr>
           <a:xfrm>
-            <a:off x="1069848" y="640080"/>
+            <a:off x="1133856" y="640080"/>
             <a:ext cx="10490911" cy="365760"/>
           </a:xfrm>
           <a:prstGeom prst="rect">
@@ -7609,7 +7645,9 @@
           <a:ln/>
         </p:spPr>
         <p:txBody>
-          <a:bodyPr wrap="square" lIns="0" tIns="0" rIns="0" bIns="0" rtlCol="0" anchor="ctr"/>
+          <a:bodyPr wrap="square" lIns="0" tIns="0" rIns="0" bIns="0" rtlCol="0" anchor="ctr">
+            <a:normAutofit/>
+          </a:bodyPr>
           <a:lstStyle/>
           <a:p>
             <a:pPr indent="0" marL="0">
@@ -7638,7 +7676,7 @@
         </p:nvSpPr>
         <p:spPr>
           <a:xfrm>
-            <a:off x="502920" y="1572768"/>
+            <a:off x="566928" y="1572768"/>
             <a:ext cx="11057839" cy="3200400"/>
           </a:xfrm>
           <a:prstGeom prst="roundRect">
@@ -7665,7 +7703,7 @@
         </p:nvSpPr>
         <p:spPr>
           <a:xfrm>
-            <a:off x="722376" y="1792224"/>
+            <a:off x="786384" y="1792224"/>
             <a:ext cx="438912" cy="438912"/>
           </a:xfrm>
           <a:prstGeom prst="ellipse">
@@ -7685,7 +7723,7 @@
         </p:nvSpPr>
         <p:spPr>
           <a:xfrm>
-            <a:off x="722376" y="1792224"/>
+            <a:off x="786384" y="1792224"/>
             <a:ext cx="438912" cy="438912"/>
           </a:xfrm>
           <a:prstGeom prst="rect">
@@ -7724,7 +7762,7 @@
         </p:nvSpPr>
         <p:spPr>
           <a:xfrm>
-            <a:off x="722376" y="2304288"/>
+            <a:off x="786384" y="2304288"/>
             <a:ext cx="10618927" cy="365760"/>
           </a:xfrm>
           <a:prstGeom prst="rect">
@@ -7763,7 +7801,7 @@
         </p:nvSpPr>
         <p:spPr>
           <a:xfrm>
-            <a:off x="722376" y="2761488"/>
+            <a:off x="786384" y="2761488"/>
             <a:ext cx="10618927" cy="1828800"/>
           </a:xfrm>
           <a:prstGeom prst="rect">
@@ -7819,7 +7857,7 @@
         </p:nvSpPr>
         <p:spPr>
           <a:xfrm>
-            <a:off x="502920" y="6382512"/>
+            <a:off x="566928" y="6382512"/>
             <a:ext cx="7315200" cy="219456"/>
           </a:xfrm>
           <a:prstGeom prst="rect">
@@ -7858,7 +7896,7 @@
         </p:nvSpPr>
         <p:spPr>
           <a:xfrm>
-            <a:off x="10774375" y="6382512"/>
+            <a:off x="10710367" y="6382512"/>
             <a:ext cx="914400" cy="219456"/>
           </a:xfrm>
           <a:prstGeom prst="rect">
@@ -7929,7 +7967,7 @@
         </p:nvSpPr>
         <p:spPr>
           <a:xfrm>
-            <a:off x="502920" y="457200"/>
+            <a:off x="566928" y="457200"/>
             <a:ext cx="384048" cy="384048"/>
           </a:xfrm>
           <a:prstGeom prst="ellipse">
@@ -7949,7 +7987,7 @@
         </p:nvSpPr>
         <p:spPr>
           <a:xfrm>
-            <a:off x="502920" y="457200"/>
+            <a:off x="566928" y="457200"/>
             <a:ext cx="384048" cy="384048"/>
           </a:xfrm>
           <a:prstGeom prst="rect">
@@ -7988,7 +8026,7 @@
         </p:nvSpPr>
         <p:spPr>
           <a:xfrm>
-            <a:off x="1069848" y="457200"/>
+            <a:off x="1133856" y="457200"/>
             <a:ext cx="10490911" cy="182880"/>
           </a:xfrm>
           <a:prstGeom prst="rect">
@@ -8027,7 +8065,7 @@
         </p:nvSpPr>
         <p:spPr>
           <a:xfrm>
-            <a:off x="1069848" y="658368"/>
+            <a:off x="1133856" y="658368"/>
             <a:ext cx="10490911" cy="420624"/>
           </a:xfrm>
           <a:prstGeom prst="rect">
@@ -8037,7 +8075,9 @@
           <a:ln/>
         </p:spPr>
         <p:txBody>
-          <a:bodyPr wrap="square" lIns="0" tIns="0" rIns="0" bIns="0" rtlCol="0" anchor="ctr"/>
+          <a:bodyPr wrap="square" lIns="0" tIns="0" rIns="0" bIns="0" rtlCol="0" anchor="ctr">
+            <a:normAutofit/>
+          </a:bodyPr>
           <a:lstStyle/>
           <a:p>
             <a:pPr indent="0" marL="0">
@@ -8066,7 +8106,7 @@
         </p:nvSpPr>
         <p:spPr>
           <a:xfrm>
-            <a:off x="502920" y="1463040"/>
+            <a:off x="566928" y="1463040"/>
             <a:ext cx="3588410" cy="658368"/>
           </a:xfrm>
           <a:prstGeom prst="roundRect">
@@ -8088,7 +8128,7 @@
         </p:nvSpPr>
         <p:spPr>
           <a:xfrm>
-            <a:off x="612648" y="1572768"/>
+            <a:off x="676656" y="1572768"/>
             <a:ext cx="438912" cy="438912"/>
           </a:xfrm>
           <a:prstGeom prst="ellipse">
@@ -8108,7 +8148,7 @@
         </p:nvSpPr>
         <p:spPr>
           <a:xfrm>
-            <a:off x="612648" y="1572768"/>
+            <a:off x="676656" y="1572768"/>
             <a:ext cx="438912" cy="438912"/>
           </a:xfrm>
           <a:prstGeom prst="rect">
@@ -8147,7 +8187,7 @@
         </p:nvSpPr>
         <p:spPr>
           <a:xfrm>
-            <a:off x="1161288" y="1554480"/>
+            <a:off x="1225296" y="1554480"/>
             <a:ext cx="2820314" cy="237744"/>
           </a:xfrm>
           <a:prstGeom prst="rect">
@@ -8186,7 +8226,7 @@
         </p:nvSpPr>
         <p:spPr>
           <a:xfrm>
-            <a:off x="1161288" y="1792224"/>
+            <a:off x="1225296" y="1792224"/>
             <a:ext cx="2820314" cy="256032"/>
           </a:xfrm>
           <a:prstGeom prst="rect">
@@ -8225,7 +8265,7 @@
         </p:nvSpPr>
         <p:spPr>
           <a:xfrm>
-            <a:off x="4091330" y="1600200"/>
+            <a:off x="4155338" y="1600200"/>
             <a:ext cx="146304" cy="384048"/>
           </a:xfrm>
           <a:prstGeom prst="rect">
@@ -8264,7 +8304,7 @@
         </p:nvSpPr>
         <p:spPr>
           <a:xfrm>
-            <a:off x="4237634" y="1463040"/>
+            <a:off x="4301642" y="1463040"/>
             <a:ext cx="3588410" cy="658368"/>
           </a:xfrm>
           <a:prstGeom prst="roundRect">
@@ -8286,7 +8326,7 @@
         </p:nvSpPr>
         <p:spPr>
           <a:xfrm>
-            <a:off x="4347362" y="1572768"/>
+            <a:off x="4411370" y="1572768"/>
             <a:ext cx="438912" cy="438912"/>
           </a:xfrm>
           <a:prstGeom prst="ellipse">
@@ -8306,7 +8346,7 @@
         </p:nvSpPr>
         <p:spPr>
           <a:xfrm>
-            <a:off x="4347362" y="1572768"/>
+            <a:off x="4411370" y="1572768"/>
             <a:ext cx="438912" cy="438912"/>
           </a:xfrm>
           <a:prstGeom prst="rect">
@@ -8345,7 +8385,7 @@
         </p:nvSpPr>
         <p:spPr>
           <a:xfrm>
-            <a:off x="4896002" y="1554480"/>
+            <a:off x="4960010" y="1554480"/>
             <a:ext cx="2820314" cy="237744"/>
           </a:xfrm>
           <a:prstGeom prst="rect">
@@ -8384,7 +8424,7 @@
         </p:nvSpPr>
         <p:spPr>
           <a:xfrm>
-            <a:off x="4896002" y="1792224"/>
+            <a:off x="4960010" y="1792224"/>
             <a:ext cx="2820314" cy="256032"/>
           </a:xfrm>
           <a:prstGeom prst="rect">
@@ -8423,7 +8463,7 @@
         </p:nvSpPr>
         <p:spPr>
           <a:xfrm>
-            <a:off x="7826045" y="1600200"/>
+            <a:off x="7890053" y="1600200"/>
             <a:ext cx="146304" cy="384048"/>
           </a:xfrm>
           <a:prstGeom prst="rect">
@@ -8462,7 +8502,7 @@
         </p:nvSpPr>
         <p:spPr>
           <a:xfrm>
-            <a:off x="7972349" y="1463040"/>
+            <a:off x="8036357" y="1463040"/>
             <a:ext cx="3588410" cy="658368"/>
           </a:xfrm>
           <a:prstGeom prst="roundRect">
@@ -8484,7 +8524,7 @@
         </p:nvSpPr>
         <p:spPr>
           <a:xfrm>
-            <a:off x="8082077" y="1572768"/>
+            <a:off x="8146085" y="1572768"/>
             <a:ext cx="438912" cy="438912"/>
           </a:xfrm>
           <a:prstGeom prst="ellipse">
@@ -8504,7 +8544,7 @@
         </p:nvSpPr>
         <p:spPr>
           <a:xfrm>
-            <a:off x="8082077" y="1572768"/>
+            <a:off x="8146085" y="1572768"/>
             <a:ext cx="438912" cy="438912"/>
           </a:xfrm>
           <a:prstGeom prst="rect">
@@ -8543,7 +8583,7 @@
         </p:nvSpPr>
         <p:spPr>
           <a:xfrm>
-            <a:off x="8630717" y="1554480"/>
+            <a:off x="8694725" y="1554480"/>
             <a:ext cx="2820314" cy="237744"/>
           </a:xfrm>
           <a:prstGeom prst="rect">
@@ -8582,7 +8622,7 @@
         </p:nvSpPr>
         <p:spPr>
           <a:xfrm>
-            <a:off x="8630717" y="1792224"/>
+            <a:off x="8694725" y="1792224"/>
             <a:ext cx="2820314" cy="256032"/>
           </a:xfrm>
           <a:prstGeom prst="rect">
@@ -8621,7 +8661,7 @@
         </p:nvSpPr>
         <p:spPr>
           <a:xfrm>
-            <a:off x="502920" y="2395728"/>
+            <a:off x="566928" y="2395728"/>
             <a:ext cx="5486400" cy="237744"/>
           </a:xfrm>
           <a:prstGeom prst="rect">
@@ -8660,7 +8700,7 @@
         </p:nvSpPr>
         <p:spPr>
           <a:xfrm>
-            <a:off x="502920" y="2724912"/>
+            <a:off x="566928" y="2724912"/>
             <a:ext cx="1280160" cy="292608"/>
           </a:xfrm>
           <a:prstGeom prst="roundRect">
@@ -8682,7 +8722,7 @@
         </p:nvSpPr>
         <p:spPr>
           <a:xfrm>
-            <a:off x="502920" y="2724912"/>
+            <a:off x="566928" y="2724912"/>
             <a:ext cx="1280160" cy="292608"/>
           </a:xfrm>
           <a:prstGeom prst="rect">
@@ -8721,7 +8761,7 @@
         </p:nvSpPr>
         <p:spPr>
           <a:xfrm>
-            <a:off x="1929384" y="2706624"/>
+            <a:off x="1993392" y="2706624"/>
             <a:ext cx="3840480" cy="329184"/>
           </a:xfrm>
           <a:prstGeom prst="rect">
@@ -8760,7 +8800,7 @@
         </p:nvSpPr>
         <p:spPr>
           <a:xfrm>
-            <a:off x="502920" y="3127248"/>
+            <a:off x="566928" y="3127248"/>
             <a:ext cx="1280160" cy="292608"/>
           </a:xfrm>
           <a:prstGeom prst="roundRect">
@@ -8782,7 +8822,7 @@
         </p:nvSpPr>
         <p:spPr>
           <a:xfrm>
-            <a:off x="502920" y="3127248"/>
+            <a:off x="566928" y="3127248"/>
             <a:ext cx="1280160" cy="292608"/>
           </a:xfrm>
           <a:prstGeom prst="rect">
@@ -8821,7 +8861,7 @@
         </p:nvSpPr>
         <p:spPr>
           <a:xfrm>
-            <a:off x="1929384" y="3108960"/>
+            <a:off x="1993392" y="3108960"/>
             <a:ext cx="3840480" cy="329184"/>
           </a:xfrm>
           <a:prstGeom prst="rect">
@@ -8860,7 +8900,7 @@
         </p:nvSpPr>
         <p:spPr>
           <a:xfrm>
-            <a:off x="502920" y="3529584"/>
+            <a:off x="566928" y="3529584"/>
             <a:ext cx="1280160" cy="292608"/>
           </a:xfrm>
           <a:prstGeom prst="roundRect">
@@ -8882,7 +8922,7 @@
         </p:nvSpPr>
         <p:spPr>
           <a:xfrm>
-            <a:off x="502920" y="3529584"/>
+            <a:off x="566928" y="3529584"/>
             <a:ext cx="1280160" cy="292608"/>
           </a:xfrm>
           <a:prstGeom prst="rect">
@@ -8921,7 +8961,7 @@
         </p:nvSpPr>
         <p:spPr>
           <a:xfrm>
-            <a:off x="1929384" y="3511296"/>
+            <a:off x="1993392" y="3511296"/>
             <a:ext cx="3840480" cy="329184"/>
           </a:xfrm>
           <a:prstGeom prst="rect">
@@ -8960,7 +9000,7 @@
         </p:nvSpPr>
         <p:spPr>
           <a:xfrm>
-            <a:off x="502920" y="3931920"/>
+            <a:off x="566928" y="3931920"/>
             <a:ext cx="1280160" cy="292608"/>
           </a:xfrm>
           <a:prstGeom prst="roundRect">
@@ -8982,7 +9022,7 @@
         </p:nvSpPr>
         <p:spPr>
           <a:xfrm>
-            <a:off x="502920" y="3931920"/>
+            <a:off x="566928" y="3931920"/>
             <a:ext cx="1280160" cy="292608"/>
           </a:xfrm>
           <a:prstGeom prst="rect">
@@ -9021,7 +9061,7 @@
         </p:nvSpPr>
         <p:spPr>
           <a:xfrm>
-            <a:off x="1929384" y="3913632"/>
+            <a:off x="1993392" y="3913632"/>
             <a:ext cx="3840480" cy="329184"/>
           </a:xfrm>
           <a:prstGeom prst="rect">
@@ -9060,7 +9100,7 @@
         </p:nvSpPr>
         <p:spPr>
           <a:xfrm>
-            <a:off x="502920" y="4334256"/>
+            <a:off x="566928" y="4334256"/>
             <a:ext cx="1280160" cy="292608"/>
           </a:xfrm>
           <a:prstGeom prst="roundRect">
@@ -9082,7 +9122,7 @@
         </p:nvSpPr>
         <p:spPr>
           <a:xfrm>
-            <a:off x="502920" y="4334256"/>
+            <a:off x="566928" y="4334256"/>
             <a:ext cx="1280160" cy="292608"/>
           </a:xfrm>
           <a:prstGeom prst="rect">
@@ -9121,7 +9161,7 @@
         </p:nvSpPr>
         <p:spPr>
           <a:xfrm>
-            <a:off x="1929384" y="4315968"/>
+            <a:off x="1993392" y="4315968"/>
             <a:ext cx="3840480" cy="329184"/>
           </a:xfrm>
           <a:prstGeom prst="rect">
@@ -9263,7 +9303,7 @@
         </p:nvSpPr>
         <p:spPr>
           <a:xfrm>
-            <a:off x="502920" y="5760720"/>
+            <a:off x="566928" y="5760720"/>
             <a:ext cx="11057839" cy="457200"/>
           </a:xfrm>
           <a:prstGeom prst="rect">
@@ -9283,7 +9323,7 @@
         </p:nvSpPr>
         <p:spPr>
           <a:xfrm>
-            <a:off x="685800" y="5806440"/>
+            <a:off x="749808" y="5806440"/>
             <a:ext cx="10692079" cy="365760"/>
           </a:xfrm>
           <a:prstGeom prst="rect">
@@ -9322,7 +9362,7 @@
         </p:nvSpPr>
         <p:spPr>
           <a:xfrm>
-            <a:off x="502920" y="6382512"/>
+            <a:off x="566928" y="6382512"/>
             <a:ext cx="7315200" cy="219456"/>
           </a:xfrm>
           <a:prstGeom prst="rect">
@@ -9361,7 +9401,7 @@
         </p:nvSpPr>
         <p:spPr>
           <a:xfrm>
-            <a:off x="10774375" y="6382512"/>
+            <a:off x="10710367" y="6382512"/>
             <a:ext cx="914400" cy="219456"/>
           </a:xfrm>
           <a:prstGeom prst="rect">
@@ -9432,7 +9472,7 @@
         </p:nvSpPr>
         <p:spPr>
           <a:xfrm>
-            <a:off x="502920" y="457200"/>
+            <a:off x="566928" y="457200"/>
             <a:ext cx="384048" cy="384048"/>
           </a:xfrm>
           <a:prstGeom prst="ellipse">
@@ -9452,7 +9492,7 @@
         </p:nvSpPr>
         <p:spPr>
           <a:xfrm>
-            <a:off x="502920" y="457200"/>
+            <a:off x="566928" y="457200"/>
             <a:ext cx="384048" cy="384048"/>
           </a:xfrm>
           <a:prstGeom prst="rect">
@@ -9491,7 +9531,7 @@
         </p:nvSpPr>
         <p:spPr>
           <a:xfrm>
-            <a:off x="1069848" y="457200"/>
+            <a:off x="1133856" y="457200"/>
             <a:ext cx="10490911" cy="182880"/>
           </a:xfrm>
           <a:prstGeom prst="rect">
@@ -9530,7 +9570,7 @@
         </p:nvSpPr>
         <p:spPr>
           <a:xfrm>
-            <a:off x="1069848" y="640080"/>
+            <a:off x="1133856" y="640080"/>
             <a:ext cx="10490911" cy="365760"/>
           </a:xfrm>
           <a:prstGeom prst="rect">
@@ -9540,7 +9580,9 @@
           <a:ln/>
         </p:spPr>
         <p:txBody>
-          <a:bodyPr wrap="square" lIns="0" tIns="0" rIns="0" bIns="0" rtlCol="0" anchor="ctr"/>
+          <a:bodyPr wrap="square" lIns="0" tIns="0" rIns="0" bIns="0" rtlCol="0" anchor="ctr">
+            <a:normAutofit/>
+          </a:bodyPr>
           <a:lstStyle/>
           <a:p>
             <a:pPr indent="0" marL="0">
@@ -9569,17 +9611,19 @@
         </p:nvSpPr>
         <p:spPr>
           <a:xfrm>
-            <a:off x="502920" y="1188720"/>
-            <a:ext cx="11057839" cy="457200"/>
-          </a:xfrm>
-          <a:prstGeom prst="rect">
-            <a:avLst/>
-          </a:prstGeom>
-          <a:noFill/>
-          <a:ln/>
-        </p:spPr>
-        <p:txBody>
-          <a:bodyPr wrap="square" rtlCol="0" anchor="ctr"/>
+            <a:off x="566928" y="1188720"/>
+            <a:ext cx="11057839" cy="219075"/>
+          </a:xfrm>
+          <a:prstGeom prst="rect">
+            <a:avLst/>
+          </a:prstGeom>
+          <a:noFill/>
+          <a:ln/>
+        </p:spPr>
+        <p:txBody>
+          <a:bodyPr wrap="square" lIns="0" tIns="0" rIns="0" bIns="0" rtlCol="0" anchor="ctr">
+            <a:normAutofit/>
+          </a:bodyPr>
           <a:lstStyle/>
           <a:p>
             <a:pPr indent="0" marL="0">
@@ -9608,7 +9652,7 @@
         </p:nvSpPr>
         <p:spPr>
           <a:xfrm>
-            <a:off x="502920" y="1691640"/>
+            <a:off x="566928" y="1480947"/>
             <a:ext cx="11057839" cy="0"/>
           </a:xfrm>
           <a:prstGeom prst="line">
@@ -9631,7 +9675,7 @@
         </p:nvSpPr>
         <p:spPr>
           <a:xfrm>
-            <a:off x="502920" y="1965960"/>
+            <a:off x="566928" y="1618107"/>
             <a:ext cx="2641016" cy="960120"/>
           </a:xfrm>
           <a:prstGeom prst="roundRect">
@@ -9658,7 +9702,7 @@
         </p:nvSpPr>
         <p:spPr>
           <a:xfrm>
-            <a:off x="667512" y="2093976"/>
+            <a:off x="731520" y="1746123"/>
             <a:ext cx="2311832" cy="201168"/>
           </a:xfrm>
           <a:prstGeom prst="rect">
@@ -9668,7 +9712,9 @@
           <a:ln/>
         </p:spPr>
         <p:txBody>
-          <a:bodyPr wrap="square" lIns="0" tIns="0" rIns="0" bIns="0" rtlCol="0" anchor="ctr"/>
+          <a:bodyPr wrap="square" lIns="0" tIns="0" rIns="0" bIns="0" rtlCol="0" anchor="ctr">
+            <a:normAutofit/>
+          </a:bodyPr>
           <a:lstStyle/>
           <a:p>
             <a:pPr indent="0" marL="0">
@@ -9697,8 +9743,8 @@
         </p:nvSpPr>
         <p:spPr>
           <a:xfrm>
-            <a:off x="667512" y="2313432"/>
-            <a:ext cx="2311832" cy="274320"/>
+            <a:off x="731520" y="1965579"/>
+            <a:ext cx="2311832" cy="279400"/>
           </a:xfrm>
           <a:prstGeom prst="rect">
             <a:avLst/>
@@ -9741,7 +9787,7 @@
         </p:nvSpPr>
         <p:spPr>
           <a:xfrm>
-            <a:off x="3308528" y="1965960"/>
+            <a:off x="3372536" y="1618107"/>
             <a:ext cx="2641016" cy="960120"/>
           </a:xfrm>
           <a:prstGeom prst="roundRect">
@@ -9768,7 +9814,7 @@
         </p:nvSpPr>
         <p:spPr>
           <a:xfrm>
-            <a:off x="3473120" y="2093976"/>
+            <a:off x="3537128" y="1746123"/>
             <a:ext cx="2311832" cy="201168"/>
           </a:xfrm>
           <a:prstGeom prst="rect">
@@ -9778,7 +9824,9 @@
           <a:ln/>
         </p:spPr>
         <p:txBody>
-          <a:bodyPr wrap="square" lIns="0" tIns="0" rIns="0" bIns="0" rtlCol="0" anchor="ctr"/>
+          <a:bodyPr wrap="square" lIns="0" tIns="0" rIns="0" bIns="0" rtlCol="0" anchor="ctr">
+            <a:normAutofit/>
+          </a:bodyPr>
           <a:lstStyle/>
           <a:p>
             <a:pPr indent="0" marL="0">
@@ -9807,8 +9855,8 @@
         </p:nvSpPr>
         <p:spPr>
           <a:xfrm>
-            <a:off x="3473120" y="2313432"/>
-            <a:ext cx="2311832" cy="274320"/>
+            <a:off x="3537128" y="1965579"/>
+            <a:ext cx="2311832" cy="279400"/>
           </a:xfrm>
           <a:prstGeom prst="rect">
             <a:avLst/>
@@ -9851,7 +9899,7 @@
         </p:nvSpPr>
         <p:spPr>
           <a:xfrm>
-            <a:off x="6114136" y="1965960"/>
+            <a:off x="6178144" y="1618107"/>
             <a:ext cx="2641016" cy="960120"/>
           </a:xfrm>
           <a:prstGeom prst="roundRect">
@@ -9878,7 +9926,7 @@
         </p:nvSpPr>
         <p:spPr>
           <a:xfrm>
-            <a:off x="6278728" y="2093976"/>
+            <a:off x="6342736" y="1746123"/>
             <a:ext cx="2311832" cy="201168"/>
           </a:xfrm>
           <a:prstGeom prst="rect">
@@ -9888,7 +9936,9 @@
           <a:ln/>
         </p:spPr>
         <p:txBody>
-          <a:bodyPr wrap="square" lIns="0" tIns="0" rIns="0" bIns="0" rtlCol="0" anchor="ctr"/>
+          <a:bodyPr wrap="square" lIns="0" tIns="0" rIns="0" bIns="0" rtlCol="0" anchor="ctr">
+            <a:normAutofit/>
+          </a:bodyPr>
           <a:lstStyle/>
           <a:p>
             <a:pPr indent="0" marL="0">
@@ -9917,8 +9967,8 @@
         </p:nvSpPr>
         <p:spPr>
           <a:xfrm>
-            <a:off x="6278728" y="2313432"/>
-            <a:ext cx="2311832" cy="274320"/>
+            <a:off x="6342736" y="1965579"/>
+            <a:ext cx="2311832" cy="279400"/>
           </a:xfrm>
           <a:prstGeom prst="rect">
             <a:avLst/>
@@ -9961,7 +10011,7 @@
         </p:nvSpPr>
         <p:spPr>
           <a:xfrm>
-            <a:off x="8919743" y="1965960"/>
+            <a:off x="8983751" y="1618107"/>
             <a:ext cx="2641016" cy="960120"/>
           </a:xfrm>
           <a:prstGeom prst="roundRect">
@@ -9988,7 +10038,7 @@
         </p:nvSpPr>
         <p:spPr>
           <a:xfrm>
-            <a:off x="9084335" y="2093976"/>
+            <a:off x="9148343" y="1746123"/>
             <a:ext cx="2311832" cy="201168"/>
           </a:xfrm>
           <a:prstGeom prst="rect">
@@ -9998,7 +10048,9 @@
           <a:ln/>
         </p:spPr>
         <p:txBody>
-          <a:bodyPr wrap="square" lIns="0" tIns="0" rIns="0" bIns="0" rtlCol="0" anchor="ctr"/>
+          <a:bodyPr wrap="square" lIns="0" tIns="0" rIns="0" bIns="0" rtlCol="0" anchor="ctr">
+            <a:normAutofit/>
+          </a:bodyPr>
           <a:lstStyle/>
           <a:p>
             <a:pPr indent="0" marL="0">
@@ -10027,8 +10079,8 @@
         </p:nvSpPr>
         <p:spPr>
           <a:xfrm>
-            <a:off x="9084335" y="2313432"/>
-            <a:ext cx="2311832" cy="274320"/>
+            <a:off x="9148343" y="1965579"/>
+            <a:ext cx="2311832" cy="279400"/>
           </a:xfrm>
           <a:prstGeom prst="rect">
             <a:avLst/>
@@ -10071,7 +10123,7 @@
         </p:nvSpPr>
         <p:spPr>
           <a:xfrm>
-            <a:off x="502920" y="3090672"/>
+            <a:off x="566928" y="2742819"/>
             <a:ext cx="2641016" cy="960120"/>
           </a:xfrm>
           <a:prstGeom prst="roundRect">
@@ -10098,7 +10150,7 @@
         </p:nvSpPr>
         <p:spPr>
           <a:xfrm>
-            <a:off x="667512" y="3218688"/>
+            <a:off x="731520" y="2870835"/>
             <a:ext cx="2311832" cy="201168"/>
           </a:xfrm>
           <a:prstGeom prst="rect">
@@ -10108,7 +10160,9 @@
           <a:ln/>
         </p:spPr>
         <p:txBody>
-          <a:bodyPr wrap="square" lIns="0" tIns="0" rIns="0" bIns="0" rtlCol="0" anchor="ctr"/>
+          <a:bodyPr wrap="square" lIns="0" tIns="0" rIns="0" bIns="0" rtlCol="0" anchor="ctr">
+            <a:normAutofit/>
+          </a:bodyPr>
           <a:lstStyle/>
           <a:p>
             <a:pPr indent="0" marL="0">
@@ -10137,8 +10191,8 @@
         </p:nvSpPr>
         <p:spPr>
           <a:xfrm>
-            <a:off x="667512" y="3438144"/>
-            <a:ext cx="2311832" cy="274320"/>
+            <a:off x="731520" y="3090291"/>
+            <a:ext cx="2311832" cy="279400"/>
           </a:xfrm>
           <a:prstGeom prst="rect">
             <a:avLst/>
@@ -10181,7 +10235,7 @@
         </p:nvSpPr>
         <p:spPr>
           <a:xfrm>
-            <a:off x="3308528" y="3090672"/>
+            <a:off x="3372536" y="2742819"/>
             <a:ext cx="2641016" cy="960120"/>
           </a:xfrm>
           <a:prstGeom prst="roundRect">
@@ -10208,7 +10262,7 @@
         </p:nvSpPr>
         <p:spPr>
           <a:xfrm>
-            <a:off x="3473120" y="3218688"/>
+            <a:off x="3537128" y="2870835"/>
             <a:ext cx="2311832" cy="201168"/>
           </a:xfrm>
           <a:prstGeom prst="rect">
@@ -10218,7 +10272,9 @@
           <a:ln/>
         </p:spPr>
         <p:txBody>
-          <a:bodyPr wrap="square" lIns="0" tIns="0" rIns="0" bIns="0" rtlCol="0" anchor="ctr"/>
+          <a:bodyPr wrap="square" lIns="0" tIns="0" rIns="0" bIns="0" rtlCol="0" anchor="ctr">
+            <a:normAutofit/>
+          </a:bodyPr>
           <a:lstStyle/>
           <a:p>
             <a:pPr indent="0" marL="0">
@@ -10247,8 +10303,8 @@
         </p:nvSpPr>
         <p:spPr>
           <a:xfrm>
-            <a:off x="3473120" y="3438144"/>
-            <a:ext cx="2311832" cy="274320"/>
+            <a:off x="3537128" y="3090291"/>
+            <a:ext cx="2311832" cy="279400"/>
           </a:xfrm>
           <a:prstGeom prst="rect">
             <a:avLst/>
@@ -10291,7 +10347,7 @@
         </p:nvSpPr>
         <p:spPr>
           <a:xfrm>
-            <a:off x="6114136" y="3090672"/>
+            <a:off x="6178144" y="2742819"/>
             <a:ext cx="2641016" cy="960120"/>
           </a:xfrm>
           <a:prstGeom prst="roundRect">
@@ -10318,7 +10374,7 @@
         </p:nvSpPr>
         <p:spPr>
           <a:xfrm>
-            <a:off x="6278728" y="3218688"/>
+            <a:off x="6342736" y="2870835"/>
             <a:ext cx="2311832" cy="201168"/>
           </a:xfrm>
           <a:prstGeom prst="rect">
@@ -10328,7 +10384,9 @@
           <a:ln/>
         </p:spPr>
         <p:txBody>
-          <a:bodyPr wrap="square" lIns="0" tIns="0" rIns="0" bIns="0" rtlCol="0" anchor="ctr"/>
+          <a:bodyPr wrap="square" lIns="0" tIns="0" rIns="0" bIns="0" rtlCol="0" anchor="ctr">
+            <a:normAutofit/>
+          </a:bodyPr>
           <a:lstStyle/>
           <a:p>
             <a:pPr indent="0" marL="0">
@@ -10357,8 +10415,8 @@
         </p:nvSpPr>
         <p:spPr>
           <a:xfrm>
-            <a:off x="6278728" y="3438144"/>
-            <a:ext cx="2311832" cy="274320"/>
+            <a:off x="6342736" y="3090291"/>
+            <a:ext cx="2311832" cy="279400"/>
           </a:xfrm>
           <a:prstGeom prst="rect">
             <a:avLst/>
@@ -10401,7 +10459,7 @@
         </p:nvSpPr>
         <p:spPr>
           <a:xfrm>
-            <a:off x="8919743" y="3090672"/>
+            <a:off x="8983751" y="2742819"/>
             <a:ext cx="2641016" cy="960120"/>
           </a:xfrm>
           <a:prstGeom prst="roundRect">
@@ -10428,7 +10486,7 @@
         </p:nvSpPr>
         <p:spPr>
           <a:xfrm>
-            <a:off x="9084335" y="3218688"/>
+            <a:off x="9148343" y="2870835"/>
             <a:ext cx="2311832" cy="201168"/>
           </a:xfrm>
           <a:prstGeom prst="rect">
@@ -10438,7 +10496,9 @@
           <a:ln/>
         </p:spPr>
         <p:txBody>
-          <a:bodyPr wrap="square" lIns="0" tIns="0" rIns="0" bIns="0" rtlCol="0" anchor="ctr"/>
+          <a:bodyPr wrap="square" lIns="0" tIns="0" rIns="0" bIns="0" rtlCol="0" anchor="ctr">
+            <a:normAutofit/>
+          </a:bodyPr>
           <a:lstStyle/>
           <a:p>
             <a:pPr indent="0" marL="0">
@@ -10467,8 +10527,8 @@
         </p:nvSpPr>
         <p:spPr>
           <a:xfrm>
-            <a:off x="9084335" y="3438144"/>
-            <a:ext cx="2311832" cy="274320"/>
+            <a:off x="9148343" y="3090291"/>
+            <a:ext cx="2311832" cy="279400"/>
           </a:xfrm>
           <a:prstGeom prst="rect">
             <a:avLst/>
@@ -10511,7 +10571,7 @@
         </p:nvSpPr>
         <p:spPr>
           <a:xfrm>
-            <a:off x="502920" y="4306824"/>
+            <a:off x="566928" y="3958971"/>
             <a:ext cx="11057839" cy="274320"/>
           </a:xfrm>
           <a:prstGeom prst="rect">
@@ -10550,12 +10610,12 @@
         </p:nvSpPr>
         <p:spPr>
           <a:xfrm>
-            <a:off x="502920" y="4636008"/>
-            <a:ext cx="11057839" cy="396240"/>
+            <a:off x="566928" y="4288155"/>
+            <a:ext cx="11057839" cy="512191"/>
           </a:xfrm>
           <a:prstGeom prst="roundRect">
             <a:avLst>
-              <a:gd name="adj" fmla="val 11538"/>
+              <a:gd name="adj" fmla="val 8926"/>
             </a:avLst>
           </a:prstGeom>
           <a:solidFill>
@@ -10577,12 +10637,12 @@
         </p:nvSpPr>
         <p:spPr>
           <a:xfrm>
-            <a:off x="612648" y="4709160"/>
-            <a:ext cx="411480" cy="249936"/>
+            <a:off x="676656" y="4361371"/>
+            <a:ext cx="411480" cy="365760"/>
           </a:xfrm>
           <a:prstGeom prst="roundRect">
             <a:avLst>
-              <a:gd name="adj" fmla="val 14634"/>
+              <a:gd name="adj" fmla="val 10000"/>
             </a:avLst>
           </a:prstGeom>
           <a:solidFill>
@@ -10604,8 +10664,8 @@
         </p:nvSpPr>
         <p:spPr>
           <a:xfrm>
-            <a:off x="612648" y="4709160"/>
-            <a:ext cx="411480" cy="249936"/>
+            <a:off x="676656" y="4361371"/>
+            <a:ext cx="411480" cy="365760"/>
           </a:xfrm>
           <a:prstGeom prst="rect">
             <a:avLst/>
@@ -10643,8 +10703,8 @@
         </p:nvSpPr>
         <p:spPr>
           <a:xfrm>
-            <a:off x="1143000" y="4672584"/>
-            <a:ext cx="10280599" cy="323088"/>
+            <a:off x="1207008" y="4324731"/>
+            <a:ext cx="10280599" cy="439039"/>
           </a:xfrm>
           <a:prstGeom prst="rect">
             <a:avLst/>
@@ -10660,7 +10720,7 @@
               <a:buNone/>
             </a:pPr>
             <a:r>
-              <a:rPr lang="en-US" sz="1000" dirty="0">
+              <a:rPr lang="en-US" sz="1150" dirty="0">
                 <a:solidFill>
                   <a:srgbClr val="10161F"/>
                 </a:solidFill>
@@ -10670,7 +10730,7 @@
               </a:rPr>
               <a:t>입지 가치: 대중교통 역세권 입지, 해당 권역 업무·상업 중심지 배후 수요 확보</a:t>
             </a:r>
-            <a:endParaRPr lang="en-US" sz="1000" dirty="0"/>
+            <a:endParaRPr lang="en-US" sz="1150" dirty="0"/>
           </a:p>
         </p:txBody>
       </p:sp>
@@ -10682,12 +10742,12 @@
         </p:nvSpPr>
         <p:spPr>
           <a:xfrm>
-            <a:off x="502920" y="5114544"/>
-            <a:ext cx="11057839" cy="396240"/>
+            <a:off x="566928" y="4882642"/>
+            <a:ext cx="11057839" cy="512191"/>
           </a:xfrm>
           <a:prstGeom prst="roundRect">
             <a:avLst>
-              <a:gd name="adj" fmla="val 11538"/>
+              <a:gd name="adj" fmla="val 8926"/>
             </a:avLst>
           </a:prstGeom>
           <a:solidFill>
@@ -10709,12 +10769,12 @@
         </p:nvSpPr>
         <p:spPr>
           <a:xfrm>
-            <a:off x="612648" y="5187696"/>
-            <a:ext cx="411480" cy="249936"/>
+            <a:off x="676656" y="4955858"/>
+            <a:ext cx="411480" cy="365760"/>
           </a:xfrm>
           <a:prstGeom prst="roundRect">
             <a:avLst>
-              <a:gd name="adj" fmla="val 14634"/>
+              <a:gd name="adj" fmla="val 10000"/>
             </a:avLst>
           </a:prstGeom>
           <a:solidFill>
@@ -10736,8 +10796,8 @@
         </p:nvSpPr>
         <p:spPr>
           <a:xfrm>
-            <a:off x="612648" y="5187696"/>
-            <a:ext cx="411480" cy="249936"/>
+            <a:off x="676656" y="4955858"/>
+            <a:ext cx="411480" cy="365760"/>
           </a:xfrm>
           <a:prstGeom prst="rect">
             <a:avLst/>
@@ -10775,8 +10835,8 @@
         </p:nvSpPr>
         <p:spPr>
           <a:xfrm>
-            <a:off x="1143000" y="5151120"/>
-            <a:ext cx="10280599" cy="323088"/>
+            <a:off x="1207008" y="4919218"/>
+            <a:ext cx="10280599" cy="439039"/>
           </a:xfrm>
           <a:prstGeom prst="rect">
             <a:avLst/>
@@ -10792,7 +10852,7 @@
               <a:buNone/>
             </a:pPr>
             <a:r>
-              <a:rPr lang="en-US" sz="1000" dirty="0">
+              <a:rPr lang="en-US" sz="1150" dirty="0">
                 <a:solidFill>
                   <a:srgbClr val="10161F"/>
                 </a:solidFill>
@@ -10802,7 +10862,7 @@
               </a:rPr>
               <a:t>자산 규모: 해당 권역 소재 단독 빌딩 매입 기회</a:t>
             </a:r>
-            <a:endParaRPr lang="en-US" sz="1000" dirty="0"/>
+            <a:endParaRPr lang="en-US" sz="1150" dirty="0"/>
           </a:p>
         </p:txBody>
       </p:sp>
@@ -10814,12 +10874,12 @@
         </p:nvSpPr>
         <p:spPr>
           <a:xfrm>
-            <a:off x="502920" y="5593080"/>
-            <a:ext cx="11057839" cy="396240"/>
+            <a:off x="566928" y="5477129"/>
+            <a:ext cx="11057839" cy="512191"/>
           </a:xfrm>
           <a:prstGeom prst="roundRect">
             <a:avLst>
-              <a:gd name="adj" fmla="val 11538"/>
+              <a:gd name="adj" fmla="val 8926"/>
             </a:avLst>
           </a:prstGeom>
           <a:solidFill>
@@ -10841,12 +10901,12 @@
         </p:nvSpPr>
         <p:spPr>
           <a:xfrm>
-            <a:off x="612648" y="5666232"/>
-            <a:ext cx="411480" cy="249936"/>
+            <a:off x="676656" y="5550345"/>
+            <a:ext cx="411480" cy="365760"/>
           </a:xfrm>
           <a:prstGeom prst="roundRect">
             <a:avLst>
-              <a:gd name="adj" fmla="val 14634"/>
+              <a:gd name="adj" fmla="val 10000"/>
             </a:avLst>
           </a:prstGeom>
           <a:solidFill>
@@ -10868,8 +10928,8 @@
         </p:nvSpPr>
         <p:spPr>
           <a:xfrm>
-            <a:off x="612648" y="5666232"/>
-            <a:ext cx="411480" cy="249936"/>
+            <a:off x="676656" y="5550345"/>
+            <a:ext cx="411480" cy="365760"/>
           </a:xfrm>
           <a:prstGeom prst="rect">
             <a:avLst/>
@@ -10907,8 +10967,8 @@
         </p:nvSpPr>
         <p:spPr>
           <a:xfrm>
-            <a:off x="1143000" y="5629656"/>
-            <a:ext cx="10280599" cy="323088"/>
+            <a:off x="1207008" y="5513705"/>
+            <a:ext cx="10280599" cy="439039"/>
           </a:xfrm>
           <a:prstGeom prst="rect">
             <a:avLst/>
@@ -10924,7 +10984,7 @@
               <a:buNone/>
             </a:pPr>
             <a:r>
-              <a:rPr lang="en-US" sz="1000" dirty="0">
+              <a:rPr lang="en-US" sz="1150" dirty="0">
                 <a:solidFill>
                   <a:srgbClr val="10161F"/>
                 </a:solidFill>
@@ -10934,7 +10994,7 @@
               </a:rPr>
               <a:t>수익 안정성: 안정적 임대수익 기반 투자 매물</a:t>
             </a:r>
-            <a:endParaRPr lang="en-US" sz="1000" dirty="0"/>
+            <a:endParaRPr lang="en-US" sz="1150" dirty="0"/>
           </a:p>
         </p:txBody>
       </p:sp>
@@ -10946,7 +11006,7 @@
         </p:nvSpPr>
         <p:spPr>
           <a:xfrm>
-            <a:off x="502920" y="6382512"/>
+            <a:off x="566928" y="6382512"/>
             <a:ext cx="7315200" cy="219456"/>
           </a:xfrm>
           <a:prstGeom prst="rect">
@@ -10985,7 +11045,7 @@
         </p:nvSpPr>
         <p:spPr>
           <a:xfrm>
-            <a:off x="10774375" y="6382512"/>
+            <a:off x="10710367" y="6382512"/>
             <a:ext cx="914400" cy="219456"/>
           </a:xfrm>
           <a:prstGeom prst="rect">
@@ -11056,7 +11116,7 @@
         </p:nvSpPr>
         <p:spPr>
           <a:xfrm>
-            <a:off x="502920" y="457200"/>
+            <a:off x="566928" y="457200"/>
             <a:ext cx="384048" cy="384048"/>
           </a:xfrm>
           <a:prstGeom prst="ellipse">
@@ -11076,7 +11136,7 @@
         </p:nvSpPr>
         <p:spPr>
           <a:xfrm>
-            <a:off x="502920" y="457200"/>
+            <a:off x="566928" y="457200"/>
             <a:ext cx="384048" cy="384048"/>
           </a:xfrm>
           <a:prstGeom prst="rect">
@@ -11115,7 +11175,7 @@
         </p:nvSpPr>
         <p:spPr>
           <a:xfrm>
-            <a:off x="1069848" y="457200"/>
+            <a:off x="1133856" y="457200"/>
             <a:ext cx="10490911" cy="182880"/>
           </a:xfrm>
           <a:prstGeom prst="rect">
@@ -11154,7 +11214,7 @@
         </p:nvSpPr>
         <p:spPr>
           <a:xfrm>
-            <a:off x="1069848" y="640080"/>
+            <a:off x="1133856" y="640080"/>
             <a:ext cx="10490911" cy="365760"/>
           </a:xfrm>
           <a:prstGeom prst="rect">
@@ -11164,7 +11224,9 @@
           <a:ln/>
         </p:spPr>
         <p:txBody>
-          <a:bodyPr wrap="square" lIns="0" tIns="0" rIns="0" bIns="0" rtlCol="0" anchor="ctr"/>
+          <a:bodyPr wrap="square" lIns="0" tIns="0" rIns="0" bIns="0" rtlCol="0" anchor="ctr">
+            <a:normAutofit/>
+          </a:bodyPr>
           <a:lstStyle/>
           <a:p>
             <a:pPr indent="0" marL="0">
@@ -11201,7 +11263,7 @@
         </p:blipFill>
         <p:spPr>
           <a:xfrm>
-            <a:off x="502920" y="1481328"/>
+            <a:off x="566928" y="1481328"/>
             <a:ext cx="5120640" cy="4114800"/>
           </a:xfrm>
           <a:prstGeom prst="rect">
@@ -11217,7 +11279,7 @@
         </p:nvSpPr>
         <p:spPr>
           <a:xfrm>
-            <a:off x="5989320" y="1481328"/>
+            <a:off x="6053328" y="1481328"/>
             <a:ext cx="1560003" cy="457200"/>
           </a:xfrm>
           <a:prstGeom prst="rect">
@@ -11227,7 +11289,9 @@
           <a:ln/>
         </p:spPr>
         <p:txBody>
-          <a:bodyPr wrap="square" lIns="0" tIns="0" rIns="0" bIns="0" rtlCol="0" anchor="ctr"/>
+          <a:bodyPr wrap="square" lIns="0" tIns="0" rIns="0" bIns="0" rtlCol="0" anchor="ctr">
+            <a:normAutofit/>
+          </a:bodyPr>
           <a:lstStyle/>
           <a:p>
             <a:pPr indent="0" marL="0">
@@ -11259,7 +11323,7 @@
         </p:nvSpPr>
         <p:spPr>
           <a:xfrm>
-            <a:off x="7549323" y="1481328"/>
+            <a:off x="7613331" y="1481328"/>
             <a:ext cx="4011436" cy="457200"/>
           </a:xfrm>
           <a:prstGeom prst="rect">
@@ -11269,7 +11333,9 @@
           <a:ln/>
         </p:spPr>
         <p:txBody>
-          <a:bodyPr wrap="square" lIns="0" tIns="0" rIns="0" bIns="0" rtlCol="0" anchor="ctr"/>
+          <a:bodyPr wrap="square" lIns="0" tIns="0" rIns="0" bIns="0" rtlCol="0" anchor="ctr">
+            <a:normAutofit/>
+          </a:bodyPr>
           <a:lstStyle/>
           <a:p>
             <a:pPr indent="0" marL="0">
@@ -11301,7 +11367,7 @@
         </p:nvSpPr>
         <p:spPr>
           <a:xfrm>
-            <a:off x="5989320" y="1938528"/>
+            <a:off x="6053328" y="1938528"/>
             <a:ext cx="5571439" cy="0"/>
           </a:xfrm>
           <a:prstGeom prst="line">
@@ -11324,7 +11390,7 @@
         </p:nvSpPr>
         <p:spPr>
           <a:xfrm>
-            <a:off x="5989320" y="1938528"/>
+            <a:off x="6053328" y="1938528"/>
             <a:ext cx="1560003" cy="457200"/>
           </a:xfrm>
           <a:prstGeom prst="rect">
@@ -11334,7 +11400,9 @@
           <a:ln/>
         </p:spPr>
         <p:txBody>
-          <a:bodyPr wrap="square" lIns="0" tIns="0" rIns="0" bIns="0" rtlCol="0" anchor="ctr"/>
+          <a:bodyPr wrap="square" lIns="0" tIns="0" rIns="0" bIns="0" rtlCol="0" anchor="ctr">
+            <a:normAutofit/>
+          </a:bodyPr>
           <a:lstStyle/>
           <a:p>
             <a:pPr indent="0" marL="0">
@@ -11366,7 +11434,7 @@
         </p:nvSpPr>
         <p:spPr>
           <a:xfrm>
-            <a:off x="7549323" y="1938528"/>
+            <a:off x="7613331" y="1938528"/>
             <a:ext cx="4011436" cy="457200"/>
           </a:xfrm>
           <a:prstGeom prst="rect">
@@ -11376,7 +11444,9 @@
           <a:ln/>
         </p:spPr>
         <p:txBody>
-          <a:bodyPr wrap="square" lIns="0" tIns="0" rIns="0" bIns="0" rtlCol="0" anchor="ctr"/>
+          <a:bodyPr wrap="square" lIns="0" tIns="0" rIns="0" bIns="0" rtlCol="0" anchor="ctr">
+            <a:normAutofit/>
+          </a:bodyPr>
           <a:lstStyle/>
           <a:p>
             <a:pPr indent="0" marL="0">
@@ -11408,7 +11478,7 @@
         </p:nvSpPr>
         <p:spPr>
           <a:xfrm>
-            <a:off x="5989320" y="2505456"/>
+            <a:off x="6053328" y="2505456"/>
             <a:ext cx="5571439" cy="658368"/>
           </a:xfrm>
           <a:prstGeom prst="roundRect">
@@ -11430,7 +11500,7 @@
         </p:nvSpPr>
         <p:spPr>
           <a:xfrm>
-            <a:off x="5989320" y="2560320"/>
+            <a:off x="6053328" y="2560320"/>
             <a:ext cx="36576" cy="548640"/>
           </a:xfrm>
           <a:prstGeom prst="rect">
@@ -11450,7 +11520,7 @@
         </p:nvSpPr>
         <p:spPr>
           <a:xfrm>
-            <a:off x="6135624" y="2596896"/>
+            <a:off x="6199632" y="2596896"/>
             <a:ext cx="5315407" cy="201168"/>
           </a:xfrm>
           <a:prstGeom prst="rect">
@@ -11489,7 +11559,7 @@
         </p:nvSpPr>
         <p:spPr>
           <a:xfrm>
-            <a:off x="6135624" y="2798064"/>
+            <a:off x="6199632" y="2798064"/>
             <a:ext cx="5315407" cy="329184"/>
           </a:xfrm>
           <a:prstGeom prst="rect">
@@ -11532,7 +11602,7 @@
         </p:nvSpPr>
         <p:spPr>
           <a:xfrm>
-            <a:off x="502920" y="6382512"/>
+            <a:off x="566928" y="6382512"/>
             <a:ext cx="7315200" cy="219456"/>
           </a:xfrm>
           <a:prstGeom prst="rect">
@@ -11571,7 +11641,7 @@
         </p:nvSpPr>
         <p:spPr>
           <a:xfrm>
-            <a:off x="10774375" y="6382512"/>
+            <a:off x="10710367" y="6382512"/>
             <a:ext cx="914400" cy="219456"/>
           </a:xfrm>
           <a:prstGeom prst="rect">
@@ -11642,7 +11712,7 @@
         </p:nvSpPr>
         <p:spPr>
           <a:xfrm>
-            <a:off x="502920" y="457200"/>
+            <a:off x="566928" y="457200"/>
             <a:ext cx="384048" cy="384048"/>
           </a:xfrm>
           <a:prstGeom prst="ellipse">
@@ -11662,7 +11732,7 @@
         </p:nvSpPr>
         <p:spPr>
           <a:xfrm>
-            <a:off x="502920" y="457200"/>
+            <a:off x="566928" y="457200"/>
             <a:ext cx="384048" cy="384048"/>
           </a:xfrm>
           <a:prstGeom prst="rect">
@@ -11701,7 +11771,7 @@
         </p:nvSpPr>
         <p:spPr>
           <a:xfrm>
-            <a:off x="1069848" y="457200"/>
+            <a:off x="1133856" y="457200"/>
             <a:ext cx="10490911" cy="182880"/>
           </a:xfrm>
           <a:prstGeom prst="rect">
@@ -11740,7 +11810,7 @@
         </p:nvSpPr>
         <p:spPr>
           <a:xfrm>
-            <a:off x="1069848" y="640080"/>
+            <a:off x="1133856" y="640080"/>
             <a:ext cx="10490911" cy="365760"/>
           </a:xfrm>
           <a:prstGeom prst="rect">
@@ -11750,6 +11820,47 @@
           <a:ln/>
         </p:spPr>
         <p:txBody>
+          <a:bodyPr wrap="square" lIns="0" tIns="0" rIns="0" bIns="0" rtlCol="0" anchor="ctr">
+            <a:normAutofit/>
+          </a:bodyPr>
+          <a:lstStyle/>
+          <a:p>
+            <a:pPr indent="0" marL="0">
+              <a:buNone/>
+            </a:pPr>
+            <a:r>
+              <a:rPr lang="en-US" sz="2300" b="1" dirty="0">
+                <a:solidFill>
+                  <a:srgbClr val="10161F"/>
+                </a:solidFill>
+                <a:latin typeface="Pretendard" pitchFamily="34" charset="0"/>
+                <a:ea typeface="Pretendard" pitchFamily="34" charset="-122"/>
+                <a:cs typeface="Pretendard" pitchFamily="34" charset="-120"/>
+              </a:rPr>
+              <a:t>토지 현황</a:t>
+            </a:r>
+            <a:endParaRPr lang="en-US" sz="2300" dirty="0"/>
+          </a:p>
+        </p:txBody>
+      </p:sp>
+      <p:sp>
+        <p:nvSpPr>
+          <p:cNvPr id="6" name="Text 4"/>
+          <p:cNvSpPr/>
+          <p:nvPr/>
+        </p:nvSpPr>
+        <p:spPr>
+          <a:xfrm>
+            <a:off x="566928" y="1371600"/>
+            <a:ext cx="6858000" cy="237744"/>
+          </a:xfrm>
+          <a:prstGeom prst="rect">
+            <a:avLst/>
+          </a:prstGeom>
+          <a:noFill/>
+          <a:ln/>
+        </p:spPr>
+        <p:txBody>
           <a:bodyPr wrap="square" lIns="0" tIns="0" rIns="0" bIns="0" rtlCol="0" anchor="ctr"/>
           <a:lstStyle/>
           <a:p>
@@ -11757,7 +11868,7 @@
               <a:buNone/>
             </a:pPr>
             <a:r>
-              <a:rPr lang="en-US" sz="2300" b="1" dirty="0">
+              <a:rPr lang="en-US" sz="1100" b="1" dirty="0">
                 <a:solidFill>
                   <a:srgbClr val="10161F"/>
                 </a:solidFill>
@@ -11767,45 +11878,6 @@
               </a:rPr>
               <a:t>토지 현황</a:t>
             </a:r>
-            <a:endParaRPr lang="en-US" sz="2300" dirty="0"/>
-          </a:p>
-        </p:txBody>
-      </p:sp>
-      <p:sp>
-        <p:nvSpPr>
-          <p:cNvPr id="6" name="Text 4"/>
-          <p:cNvSpPr/>
-          <p:nvPr/>
-        </p:nvSpPr>
-        <p:spPr>
-          <a:xfrm>
-            <a:off x="502920" y="1371600"/>
-            <a:ext cx="6858000" cy="237744"/>
-          </a:xfrm>
-          <a:prstGeom prst="rect">
-            <a:avLst/>
-          </a:prstGeom>
-          <a:noFill/>
-          <a:ln/>
-        </p:spPr>
-        <p:txBody>
-          <a:bodyPr wrap="square" lIns="0" tIns="0" rIns="0" bIns="0" rtlCol="0" anchor="ctr"/>
-          <a:lstStyle/>
-          <a:p>
-            <a:pPr indent="0" marL="0">
-              <a:buNone/>
-            </a:pPr>
-            <a:r>
-              <a:rPr lang="en-US" sz="1100" b="1" dirty="0">
-                <a:solidFill>
-                  <a:srgbClr val="10161F"/>
-                </a:solidFill>
-                <a:latin typeface="Pretendard" pitchFamily="34" charset="0"/>
-                <a:ea typeface="Pretendard" pitchFamily="34" charset="-122"/>
-                <a:cs typeface="Pretendard" pitchFamily="34" charset="-120"/>
-              </a:rPr>
-              <a:t>토지 현황</a:t>
-            </a:r>
             <a:endParaRPr lang="en-US" sz="1100" dirty="0"/>
           </a:p>
         </p:txBody>
@@ -11818,7 +11890,7 @@
         </p:nvSpPr>
         <p:spPr>
           <a:xfrm>
-            <a:off x="502920" y="1645920"/>
+            <a:off x="566928" y="1645920"/>
             <a:ext cx="1920240" cy="402336"/>
           </a:xfrm>
           <a:prstGeom prst="rect">
@@ -11828,7 +11900,9 @@
           <a:ln/>
         </p:spPr>
         <p:txBody>
-          <a:bodyPr wrap="square" lIns="0" tIns="0" rIns="0" bIns="0" rtlCol="0" anchor="ctr"/>
+          <a:bodyPr wrap="square" lIns="0" tIns="0" rIns="0" bIns="0" rtlCol="0" anchor="ctr">
+            <a:normAutofit/>
+          </a:bodyPr>
           <a:lstStyle/>
           <a:p>
             <a:pPr indent="0" marL="0">
@@ -11860,7 +11934,7 @@
         </p:nvSpPr>
         <p:spPr>
           <a:xfrm>
-            <a:off x="2423160" y="1645920"/>
+            <a:off x="2487168" y="1645920"/>
             <a:ext cx="4937760" cy="402336"/>
           </a:xfrm>
           <a:prstGeom prst="rect">
@@ -11870,7 +11944,9 @@
           <a:ln/>
         </p:spPr>
         <p:txBody>
-          <a:bodyPr wrap="square" lIns="0" tIns="0" rIns="0" bIns="0" rtlCol="0" anchor="ctr"/>
+          <a:bodyPr wrap="square" lIns="0" tIns="0" rIns="0" bIns="0" rtlCol="0" anchor="ctr">
+            <a:normAutofit/>
+          </a:bodyPr>
           <a:lstStyle/>
           <a:p>
             <a:pPr indent="0" marL="0">
@@ -11902,7 +11978,7 @@
         </p:nvSpPr>
         <p:spPr>
           <a:xfrm>
-            <a:off x="502920" y="2048256"/>
+            <a:off x="566928" y="2048256"/>
             <a:ext cx="6858000" cy="0"/>
           </a:xfrm>
           <a:prstGeom prst="line">
@@ -11925,7 +12001,7 @@
         </p:nvSpPr>
         <p:spPr>
           <a:xfrm>
-            <a:off x="502920" y="2048256"/>
+            <a:off x="566928" y="2048256"/>
             <a:ext cx="1920240" cy="402336"/>
           </a:xfrm>
           <a:prstGeom prst="rect">
@@ -11935,7 +12011,9 @@
           <a:ln/>
         </p:spPr>
         <p:txBody>
-          <a:bodyPr wrap="square" lIns="0" tIns="0" rIns="0" bIns="0" rtlCol="0" anchor="ctr"/>
+          <a:bodyPr wrap="square" lIns="0" tIns="0" rIns="0" bIns="0" rtlCol="0" anchor="ctr">
+            <a:normAutofit/>
+          </a:bodyPr>
           <a:lstStyle/>
           <a:p>
             <a:pPr indent="0" marL="0">
@@ -11967,7 +12045,7 @@
         </p:nvSpPr>
         <p:spPr>
           <a:xfrm>
-            <a:off x="2423160" y="2048256"/>
+            <a:off x="2487168" y="2048256"/>
             <a:ext cx="4937760" cy="402336"/>
           </a:xfrm>
           <a:prstGeom prst="rect">
@@ -11977,7 +12055,9 @@
           <a:ln/>
         </p:spPr>
         <p:txBody>
-          <a:bodyPr wrap="square" lIns="0" tIns="0" rIns="0" bIns="0" rtlCol="0" anchor="ctr"/>
+          <a:bodyPr wrap="square" lIns="0" tIns="0" rIns="0" bIns="0" rtlCol="0" anchor="ctr">
+            <a:normAutofit/>
+          </a:bodyPr>
           <a:lstStyle/>
           <a:p>
             <a:pPr indent="0" marL="0">
@@ -12009,7 +12089,7 @@
         </p:nvSpPr>
         <p:spPr>
           <a:xfrm>
-            <a:off x="7540600" y="1371600"/>
+            <a:off x="7604608" y="1371600"/>
             <a:ext cx="0" cy="4754880"/>
           </a:xfrm>
           <a:prstGeom prst="line">
@@ -12032,7 +12112,7 @@
         </p:nvSpPr>
         <p:spPr>
           <a:xfrm>
-            <a:off x="7720279" y="1645920"/>
+            <a:off x="7784287" y="1645920"/>
             <a:ext cx="3840480" cy="2103120"/>
           </a:xfrm>
           <a:prstGeom prst="roundRect">
@@ -12054,7 +12134,7 @@
         </p:nvSpPr>
         <p:spPr>
           <a:xfrm>
-            <a:off x="7720279" y="1700784"/>
+            <a:off x="7784287" y="1700784"/>
             <a:ext cx="36576" cy="1993392"/>
           </a:xfrm>
           <a:prstGeom prst="rect">
@@ -12074,7 +12154,7 @@
         </p:nvSpPr>
         <p:spPr>
           <a:xfrm>
-            <a:off x="7866583" y="1737360"/>
+            <a:off x="7930591" y="1737360"/>
             <a:ext cx="3584448" cy="201168"/>
           </a:xfrm>
           <a:prstGeom prst="rect">
@@ -12113,7 +12193,7 @@
         </p:nvSpPr>
         <p:spPr>
           <a:xfrm>
-            <a:off x="7866583" y="1938528"/>
+            <a:off x="7930591" y="1938528"/>
             <a:ext cx="3584448" cy="1773936"/>
           </a:xfrm>
           <a:prstGeom prst="rect">
@@ -12156,7 +12236,7 @@
         </p:nvSpPr>
         <p:spPr>
           <a:xfrm>
-            <a:off x="7720279" y="3977640"/>
+            <a:off x="7784287" y="3977640"/>
             <a:ext cx="3840480" cy="2148840"/>
           </a:xfrm>
           <a:prstGeom prst="roundRect">
@@ -12178,7 +12258,7 @@
         </p:nvSpPr>
         <p:spPr>
           <a:xfrm>
-            <a:off x="7720279" y="4032504"/>
+            <a:off x="7784287" y="4032504"/>
             <a:ext cx="36576" cy="2039112"/>
           </a:xfrm>
           <a:prstGeom prst="rect">
@@ -12198,7 +12278,7 @@
         </p:nvSpPr>
         <p:spPr>
           <a:xfrm>
-            <a:off x="7866583" y="4069080"/>
+            <a:off x="7930591" y="4069080"/>
             <a:ext cx="3584448" cy="201168"/>
           </a:xfrm>
           <a:prstGeom prst="rect">
@@ -12237,7 +12317,7 @@
         </p:nvSpPr>
         <p:spPr>
           <a:xfrm>
-            <a:off x="7866583" y="4270248"/>
+            <a:off x="7930591" y="4270248"/>
             <a:ext cx="3584448" cy="1819656"/>
           </a:xfrm>
           <a:prstGeom prst="rect">
@@ -12328,7 +12408,7 @@
         </p:nvSpPr>
         <p:spPr>
           <a:xfrm>
-            <a:off x="502920" y="6382512"/>
+            <a:off x="566928" y="6382512"/>
             <a:ext cx="7315200" cy="219456"/>
           </a:xfrm>
           <a:prstGeom prst="rect">
@@ -12367,7 +12447,7 @@
         </p:nvSpPr>
         <p:spPr>
           <a:xfrm>
-            <a:off x="10774375" y="6382512"/>
+            <a:off x="10710367" y="6382512"/>
             <a:ext cx="914400" cy="219456"/>
           </a:xfrm>
           <a:prstGeom prst="rect">
@@ -12438,7 +12518,7 @@
         </p:nvSpPr>
         <p:spPr>
           <a:xfrm>
-            <a:off x="502920" y="457200"/>
+            <a:off x="566928" y="457200"/>
             <a:ext cx="384048" cy="384048"/>
           </a:xfrm>
           <a:prstGeom prst="ellipse">
@@ -12458,7 +12538,7 @@
         </p:nvSpPr>
         <p:spPr>
           <a:xfrm>
-            <a:off x="502920" y="457200"/>
+            <a:off x="566928" y="457200"/>
             <a:ext cx="384048" cy="384048"/>
           </a:xfrm>
           <a:prstGeom prst="rect">
@@ -12497,7 +12577,7 @@
         </p:nvSpPr>
         <p:spPr>
           <a:xfrm>
-            <a:off x="1069848" y="457200"/>
+            <a:off x="1133856" y="457200"/>
             <a:ext cx="10490911" cy="182880"/>
           </a:xfrm>
           <a:prstGeom prst="rect">
@@ -12536,7 +12616,7 @@
         </p:nvSpPr>
         <p:spPr>
           <a:xfrm>
-            <a:off x="1069848" y="640080"/>
+            <a:off x="1133856" y="640080"/>
             <a:ext cx="10490911" cy="365760"/>
           </a:xfrm>
           <a:prstGeom prst="rect">
@@ -12546,6 +12626,47 @@
           <a:ln/>
         </p:spPr>
         <p:txBody>
+          <a:bodyPr wrap="square" lIns="0" tIns="0" rIns="0" bIns="0" rtlCol="0" anchor="ctr">
+            <a:normAutofit/>
+          </a:bodyPr>
+          <a:lstStyle/>
+          <a:p>
+            <a:pPr indent="0" marL="0">
+              <a:buNone/>
+            </a:pPr>
+            <a:r>
+              <a:rPr lang="en-US" sz="2300" b="1" dirty="0">
+                <a:solidFill>
+                  <a:srgbClr val="10161F"/>
+                </a:solidFill>
+                <a:latin typeface="Pretendard" pitchFamily="34" charset="0"/>
+                <a:ea typeface="Pretendard" pitchFamily="34" charset="-122"/>
+                <a:cs typeface="Pretendard" pitchFamily="34" charset="-120"/>
+              </a:rPr>
+              <a:t>건물 개요</a:t>
+            </a:r>
+            <a:endParaRPr lang="en-US" sz="2300" dirty="0"/>
+          </a:p>
+        </p:txBody>
+      </p:sp>
+      <p:sp>
+        <p:nvSpPr>
+          <p:cNvPr id="6" name="Text 4"/>
+          <p:cNvSpPr/>
+          <p:nvPr/>
+        </p:nvSpPr>
+        <p:spPr>
+          <a:xfrm>
+            <a:off x="566928" y="1371600"/>
+            <a:ext cx="6858000" cy="237744"/>
+          </a:xfrm>
+          <a:prstGeom prst="rect">
+            <a:avLst/>
+          </a:prstGeom>
+          <a:noFill/>
+          <a:ln/>
+        </p:spPr>
+        <p:txBody>
           <a:bodyPr wrap="square" lIns="0" tIns="0" rIns="0" bIns="0" rtlCol="0" anchor="ctr"/>
           <a:lstStyle/>
           <a:p>
@@ -12553,7 +12674,7 @@
               <a:buNone/>
             </a:pPr>
             <a:r>
-              <a:rPr lang="en-US" sz="2300" b="1" dirty="0">
+              <a:rPr lang="en-US" sz="1100" b="1" dirty="0">
                 <a:solidFill>
                   <a:srgbClr val="10161F"/>
                 </a:solidFill>
@@ -12561,45 +12682,6 @@
                 <a:ea typeface="Pretendard" pitchFamily="34" charset="-122"/>
                 <a:cs typeface="Pretendard" pitchFamily="34" charset="-120"/>
               </a:rPr>
-              <a:t>건물 개요</a:t>
-            </a:r>
-            <a:endParaRPr lang="en-US" sz="2300" dirty="0"/>
-          </a:p>
-        </p:txBody>
-      </p:sp>
-      <p:sp>
-        <p:nvSpPr>
-          <p:cNvPr id="6" name="Text 4"/>
-          <p:cNvSpPr/>
-          <p:nvPr/>
-        </p:nvSpPr>
-        <p:spPr>
-          <a:xfrm>
-            <a:off x="502920" y="1371600"/>
-            <a:ext cx="6858000" cy="237744"/>
-          </a:xfrm>
-          <a:prstGeom prst="rect">
-            <a:avLst/>
-          </a:prstGeom>
-          <a:noFill/>
-          <a:ln/>
-        </p:spPr>
-        <p:txBody>
-          <a:bodyPr wrap="square" lIns="0" tIns="0" rIns="0" bIns="0" rtlCol="0" anchor="ctr"/>
-          <a:lstStyle/>
-          <a:p>
-            <a:pPr indent="0" marL="0">
-              <a:buNone/>
-            </a:pPr>
-            <a:r>
-              <a:rPr lang="en-US" sz="1100" b="1" dirty="0">
-                <a:solidFill>
-                  <a:srgbClr val="10161F"/>
-                </a:solidFill>
-                <a:latin typeface="Pretendard" pitchFamily="34" charset="0"/>
-                <a:ea typeface="Pretendard" pitchFamily="34" charset="-122"/>
-                <a:cs typeface="Pretendard" pitchFamily="34" charset="-120"/>
-              </a:rPr>
               <a:t>건축물 개요 및 물리 스펙</a:t>
             </a:r>
             <a:endParaRPr lang="en-US" sz="1100" dirty="0"/>
@@ -12614,7 +12696,7 @@
         </p:nvSpPr>
         <p:spPr>
           <a:xfrm>
-            <a:off x="502920" y="1645920"/>
+            <a:off x="566928" y="1645920"/>
             <a:ext cx="1920240" cy="402336"/>
           </a:xfrm>
           <a:prstGeom prst="rect">
@@ -12624,7 +12706,9 @@
           <a:ln/>
         </p:spPr>
         <p:txBody>
-          <a:bodyPr wrap="square" lIns="0" tIns="0" rIns="0" bIns="0" rtlCol="0" anchor="ctr"/>
+          <a:bodyPr wrap="square" lIns="0" tIns="0" rIns="0" bIns="0" rtlCol="0" anchor="ctr">
+            <a:normAutofit/>
+          </a:bodyPr>
           <a:lstStyle/>
           <a:p>
             <a:pPr indent="0" marL="0">
@@ -12656,7 +12740,7 @@
         </p:nvSpPr>
         <p:spPr>
           <a:xfrm>
-            <a:off x="2423160" y="1645920"/>
+            <a:off x="2487168" y="1645920"/>
             <a:ext cx="4937760" cy="402336"/>
           </a:xfrm>
           <a:prstGeom prst="rect">
@@ -12666,7 +12750,9 @@
           <a:ln/>
         </p:spPr>
         <p:txBody>
-          <a:bodyPr wrap="square" lIns="0" tIns="0" rIns="0" bIns="0" rtlCol="0" anchor="ctr"/>
+          <a:bodyPr wrap="square" lIns="0" tIns="0" rIns="0" bIns="0" rtlCol="0" anchor="ctr">
+            <a:normAutofit/>
+          </a:bodyPr>
           <a:lstStyle/>
           <a:p>
             <a:pPr indent="0" marL="0">
@@ -12698,7 +12784,7 @@
         </p:nvSpPr>
         <p:spPr>
           <a:xfrm>
-            <a:off x="502920" y="2048256"/>
+            <a:off x="566928" y="2048256"/>
             <a:ext cx="6858000" cy="0"/>
           </a:xfrm>
           <a:prstGeom prst="line">
@@ -12721,7 +12807,7 @@
         </p:nvSpPr>
         <p:spPr>
           <a:xfrm>
-            <a:off x="502920" y="2048256"/>
+            <a:off x="566928" y="2048256"/>
             <a:ext cx="1920240" cy="402336"/>
           </a:xfrm>
           <a:prstGeom prst="rect">
@@ -12731,7 +12817,9 @@
           <a:ln/>
         </p:spPr>
         <p:txBody>
-          <a:bodyPr wrap="square" lIns="0" tIns="0" rIns="0" bIns="0" rtlCol="0" anchor="ctr"/>
+          <a:bodyPr wrap="square" lIns="0" tIns="0" rIns="0" bIns="0" rtlCol="0" anchor="ctr">
+            <a:normAutofit/>
+          </a:bodyPr>
           <a:lstStyle/>
           <a:p>
             <a:pPr indent="0" marL="0">
@@ -12763,7 +12851,7 @@
         </p:nvSpPr>
         <p:spPr>
           <a:xfrm>
-            <a:off x="2423160" y="2048256"/>
+            <a:off x="2487168" y="2048256"/>
             <a:ext cx="4937760" cy="402336"/>
           </a:xfrm>
           <a:prstGeom prst="rect">
@@ -12773,7 +12861,9 @@
           <a:ln/>
         </p:spPr>
         <p:txBody>
-          <a:bodyPr wrap="square" lIns="0" tIns="0" rIns="0" bIns="0" rtlCol="0" anchor="ctr"/>
+          <a:bodyPr wrap="square" lIns="0" tIns="0" rIns="0" bIns="0" rtlCol="0" anchor="ctr">
+            <a:normAutofit/>
+          </a:bodyPr>
           <a:lstStyle/>
           <a:p>
             <a:pPr indent="0" marL="0">
@@ -12805,7 +12895,7 @@
         </p:nvSpPr>
         <p:spPr>
           <a:xfrm>
-            <a:off x="502920" y="2450592"/>
+            <a:off x="566928" y="2450592"/>
             <a:ext cx="6858000" cy="0"/>
           </a:xfrm>
           <a:prstGeom prst="line">
@@ -12828,7 +12918,7 @@
         </p:nvSpPr>
         <p:spPr>
           <a:xfrm>
-            <a:off x="502920" y="2450592"/>
+            <a:off x="566928" y="2450592"/>
             <a:ext cx="1920240" cy="402336"/>
           </a:xfrm>
           <a:prstGeom prst="rect">
@@ -12838,7 +12928,9 @@
           <a:ln/>
         </p:spPr>
         <p:txBody>
-          <a:bodyPr wrap="square" lIns="0" tIns="0" rIns="0" bIns="0" rtlCol="0" anchor="ctr"/>
+          <a:bodyPr wrap="square" lIns="0" tIns="0" rIns="0" bIns="0" rtlCol="0" anchor="ctr">
+            <a:normAutofit/>
+          </a:bodyPr>
           <a:lstStyle/>
           <a:p>
             <a:pPr indent="0" marL="0">
@@ -12870,7 +12962,7 @@
         </p:nvSpPr>
         <p:spPr>
           <a:xfrm>
-            <a:off x="2423160" y="2450592"/>
+            <a:off x="2487168" y="2450592"/>
             <a:ext cx="4937760" cy="402336"/>
           </a:xfrm>
           <a:prstGeom prst="rect">
@@ -12880,7 +12972,9 @@
           <a:ln/>
         </p:spPr>
         <p:txBody>
-          <a:bodyPr wrap="square" lIns="0" tIns="0" rIns="0" bIns="0" rtlCol="0" anchor="ctr"/>
+          <a:bodyPr wrap="square" lIns="0" tIns="0" rIns="0" bIns="0" rtlCol="0" anchor="ctr">
+            <a:normAutofit/>
+          </a:bodyPr>
           <a:lstStyle/>
           <a:p>
             <a:pPr indent="0" marL="0">
@@ -12912,7 +13006,7 @@
         </p:nvSpPr>
         <p:spPr>
           <a:xfrm>
-            <a:off x="502920" y="2852928"/>
+            <a:off x="566928" y="2852928"/>
             <a:ext cx="6858000" cy="0"/>
           </a:xfrm>
           <a:prstGeom prst="line">
@@ -12935,7 +13029,7 @@
         </p:nvSpPr>
         <p:spPr>
           <a:xfrm>
-            <a:off x="502920" y="2852928"/>
+            <a:off x="566928" y="2852928"/>
             <a:ext cx="1920240" cy="402336"/>
           </a:xfrm>
           <a:prstGeom prst="rect">
@@ -12945,7 +13039,9 @@
           <a:ln/>
         </p:spPr>
         <p:txBody>
-          <a:bodyPr wrap="square" lIns="0" tIns="0" rIns="0" bIns="0" rtlCol="0" anchor="ctr"/>
+          <a:bodyPr wrap="square" lIns="0" tIns="0" rIns="0" bIns="0" rtlCol="0" anchor="ctr">
+            <a:normAutofit/>
+          </a:bodyPr>
           <a:lstStyle/>
           <a:p>
             <a:pPr indent="0" marL="0">
@@ -12977,7 +13073,7 @@
         </p:nvSpPr>
         <p:spPr>
           <a:xfrm>
-            <a:off x="2423160" y="2852928"/>
+            <a:off x="2487168" y="2852928"/>
             <a:ext cx="4937760" cy="402336"/>
           </a:xfrm>
           <a:prstGeom prst="rect">
@@ -12987,7 +13083,9 @@
           <a:ln/>
         </p:spPr>
         <p:txBody>
-          <a:bodyPr wrap="square" lIns="0" tIns="0" rIns="0" bIns="0" rtlCol="0" anchor="ctr"/>
+          <a:bodyPr wrap="square" lIns="0" tIns="0" rIns="0" bIns="0" rtlCol="0" anchor="ctr">
+            <a:normAutofit/>
+          </a:bodyPr>
           <a:lstStyle/>
           <a:p>
             <a:pPr indent="0" marL="0">
@@ -13019,7 +13117,7 @@
         </p:nvSpPr>
         <p:spPr>
           <a:xfrm>
-            <a:off x="7540600" y="1371600"/>
+            <a:off x="7604608" y="1371600"/>
             <a:ext cx="0" cy="4754880"/>
           </a:xfrm>
           <a:prstGeom prst="line">
@@ -13042,7 +13140,7 @@
         </p:nvSpPr>
         <p:spPr>
           <a:xfrm>
-            <a:off x="7720279" y="1645920"/>
+            <a:off x="7784287" y="1645920"/>
             <a:ext cx="3840480" cy="1645920"/>
           </a:xfrm>
           <a:prstGeom prst="roundRect">
@@ -13064,7 +13162,7 @@
         </p:nvSpPr>
         <p:spPr>
           <a:xfrm>
-            <a:off x="7720279" y="1700784"/>
+            <a:off x="7784287" y="1700784"/>
             <a:ext cx="36576" cy="1536192"/>
           </a:xfrm>
           <a:prstGeom prst="rect">
@@ -13084,7 +13182,7 @@
         </p:nvSpPr>
         <p:spPr>
           <a:xfrm>
-            <a:off x="7866583" y="1737360"/>
+            <a:off x="7930591" y="1737360"/>
             <a:ext cx="3584448" cy="201168"/>
           </a:xfrm>
           <a:prstGeom prst="rect">
@@ -13112,7 +13210,7 @@
         </p:nvSpPr>
         <p:spPr>
           <a:xfrm>
-            <a:off x="7866583" y="1938528"/>
+            <a:off x="7930591" y="1938528"/>
             <a:ext cx="3584448" cy="1316736"/>
           </a:xfrm>
           <a:prstGeom prst="rect">
@@ -13154,7 +13252,7 @@
         </p:nvSpPr>
         <p:spPr>
           <a:xfrm>
-            <a:off x="502920" y="6382512"/>
+            <a:off x="566928" y="6382512"/>
             <a:ext cx="7315200" cy="219456"/>
           </a:xfrm>
           <a:prstGeom prst="rect">
@@ -13193,7 +13291,7 @@
         </p:nvSpPr>
         <p:spPr>
           <a:xfrm>
-            <a:off x="10774375" y="6382512"/>
+            <a:off x="10710367" y="6382512"/>
             <a:ext cx="914400" cy="219456"/>
           </a:xfrm>
           <a:prstGeom prst="rect">
@@ -13264,7 +13362,7 @@
         </p:nvSpPr>
         <p:spPr>
           <a:xfrm>
-            <a:off x="502920" y="457200"/>
+            <a:off x="566928" y="457200"/>
             <a:ext cx="384048" cy="384048"/>
           </a:xfrm>
           <a:prstGeom prst="ellipse">
@@ -13284,7 +13382,7 @@
         </p:nvSpPr>
         <p:spPr>
           <a:xfrm>
-            <a:off x="502920" y="457200"/>
+            <a:off x="566928" y="457200"/>
             <a:ext cx="384048" cy="384048"/>
           </a:xfrm>
           <a:prstGeom prst="rect">
@@ -13323,7 +13421,7 @@
         </p:nvSpPr>
         <p:spPr>
           <a:xfrm>
-            <a:off x="1069848" y="457200"/>
+            <a:off x="1133856" y="457200"/>
             <a:ext cx="10490911" cy="182880"/>
           </a:xfrm>
           <a:prstGeom prst="rect">
@@ -13362,7 +13460,7 @@
         </p:nvSpPr>
         <p:spPr>
           <a:xfrm>
-            <a:off x="1069848" y="640080"/>
+            <a:off x="1133856" y="640080"/>
             <a:ext cx="10490911" cy="365760"/>
           </a:xfrm>
           <a:prstGeom prst="rect">
@@ -13372,6 +13470,47 @@
           <a:ln/>
         </p:spPr>
         <p:txBody>
+          <a:bodyPr wrap="square" lIns="0" tIns="0" rIns="0" bIns="0" rtlCol="0" anchor="ctr">
+            <a:normAutofit/>
+          </a:bodyPr>
+          <a:lstStyle/>
+          <a:p>
+            <a:pPr indent="0" marL="0">
+              <a:buNone/>
+            </a:pPr>
+            <a:r>
+              <a:rPr lang="en-US" sz="2300" b="1" dirty="0">
+                <a:solidFill>
+                  <a:srgbClr val="10161F"/>
+                </a:solidFill>
+                <a:latin typeface="Pretendard" pitchFamily="34" charset="0"/>
+                <a:ea typeface="Pretendard" pitchFamily="34" charset="-122"/>
+                <a:cs typeface="Pretendard" pitchFamily="34" charset="-120"/>
+              </a:rPr>
+              <a:t>운영지표</a:t>
+            </a:r>
+            <a:endParaRPr lang="en-US" sz="2300" dirty="0"/>
+          </a:p>
+        </p:txBody>
+      </p:sp>
+      <p:sp>
+        <p:nvSpPr>
+          <p:cNvPr id="6" name="Text 4"/>
+          <p:cNvSpPr/>
+          <p:nvPr/>
+        </p:nvSpPr>
+        <p:spPr>
+          <a:xfrm>
+            <a:off x="566928" y="1325880"/>
+            <a:ext cx="6675120" cy="237744"/>
+          </a:xfrm>
+          <a:prstGeom prst="rect">
+            <a:avLst/>
+          </a:prstGeom>
+          <a:noFill/>
+          <a:ln/>
+        </p:spPr>
+        <p:txBody>
           <a:bodyPr wrap="square" lIns="0" tIns="0" rIns="0" bIns="0" rtlCol="0" anchor="ctr"/>
           <a:lstStyle/>
           <a:p>
@@ -13379,7 +13518,7 @@
               <a:buNone/>
             </a:pPr>
             <a:r>
-              <a:rPr lang="en-US" sz="2300" b="1" dirty="0">
+              <a:rPr lang="en-US" sz="1100" b="1" dirty="0">
                 <a:solidFill>
                   <a:srgbClr val="10161F"/>
                 </a:solidFill>
@@ -13387,45 +13526,6 @@
                 <a:ea typeface="Pretendard" pitchFamily="34" charset="-122"/>
                 <a:cs typeface="Pretendard" pitchFamily="34" charset="-120"/>
               </a:rPr>
-              <a:t>운영지표</a:t>
-            </a:r>
-            <a:endParaRPr lang="en-US" sz="2300" dirty="0"/>
-          </a:p>
-        </p:txBody>
-      </p:sp>
-      <p:sp>
-        <p:nvSpPr>
-          <p:cNvPr id="6" name="Text 4"/>
-          <p:cNvSpPr/>
-          <p:nvPr/>
-        </p:nvSpPr>
-        <p:spPr>
-          <a:xfrm>
-            <a:off x="502920" y="1325880"/>
-            <a:ext cx="6675120" cy="237744"/>
-          </a:xfrm>
-          <a:prstGeom prst="rect">
-            <a:avLst/>
-          </a:prstGeom>
-          <a:noFill/>
-          <a:ln/>
-        </p:spPr>
-        <p:txBody>
-          <a:bodyPr wrap="square" lIns="0" tIns="0" rIns="0" bIns="0" rtlCol="0" anchor="ctr"/>
-          <a:lstStyle/>
-          <a:p>
-            <a:pPr indent="0" marL="0">
-              <a:buNone/>
-            </a:pPr>
-            <a:r>
-              <a:rPr lang="en-US" sz="1100" b="1" dirty="0">
-                <a:solidFill>
-                  <a:srgbClr val="10161F"/>
-                </a:solidFill>
-                <a:latin typeface="Pretendard" pitchFamily="34" charset="0"/>
-                <a:ea typeface="Pretendard" pitchFamily="34" charset="-122"/>
-                <a:cs typeface="Pretendard" pitchFamily="34" charset="-120"/>
-              </a:rPr>
               <a:t>이천권역 호텔 운영 핵심 지표</a:t>
             </a:r>
             <a:endParaRPr lang="en-US" sz="1100" dirty="0"/>
@@ -13440,7 +13540,7 @@
         </p:nvSpPr>
         <p:spPr>
           <a:xfrm>
-            <a:off x="502920" y="4754880"/>
+            <a:off x="566928" y="4754880"/>
             <a:ext cx="6675120" cy="1234440"/>
           </a:xfrm>
           <a:prstGeom prst="roundRect">
@@ -13462,7 +13562,7 @@
         </p:nvSpPr>
         <p:spPr>
           <a:xfrm>
-            <a:off x="502920" y="4809744"/>
+            <a:off x="566928" y="4809744"/>
             <a:ext cx="36576" cy="1124712"/>
           </a:xfrm>
           <a:prstGeom prst="rect">
@@ -13482,7 +13582,7 @@
         </p:nvSpPr>
         <p:spPr>
           <a:xfrm>
-            <a:off x="649224" y="4846320"/>
+            <a:off x="713232" y="4846320"/>
             <a:ext cx="6419088" cy="201168"/>
           </a:xfrm>
           <a:prstGeom prst="rect">
@@ -13521,7 +13621,7 @@
         </p:nvSpPr>
         <p:spPr>
           <a:xfrm>
-            <a:off x="649224" y="5047488"/>
+            <a:off x="713232" y="5047488"/>
             <a:ext cx="6419088" cy="905256"/>
           </a:xfrm>
           <a:prstGeom prst="rect">
@@ -13563,7 +13663,7 @@
         </p:nvSpPr>
         <p:spPr>
           <a:xfrm>
-            <a:off x="7360920" y="1371600"/>
+            <a:off x="7424928" y="1371600"/>
             <a:ext cx="0" cy="4754880"/>
           </a:xfrm>
           <a:prstGeom prst="line">
@@ -13586,7 +13686,7 @@
         </p:nvSpPr>
         <p:spPr>
           <a:xfrm>
-            <a:off x="502920" y="6382512"/>
+            <a:off x="566928" y="6382512"/>
             <a:ext cx="7315200" cy="219456"/>
           </a:xfrm>
           <a:prstGeom prst="rect">
@@ -13625,7 +13725,7 @@
         </p:nvSpPr>
         <p:spPr>
           <a:xfrm>
-            <a:off x="10774375" y="6382512"/>
+            <a:off x="10710367" y="6382512"/>
             <a:ext cx="914400" cy="219456"/>
           </a:xfrm>
           <a:prstGeom prst="rect">
@@ -13696,7 +13796,7 @@
         </p:nvSpPr>
         <p:spPr>
           <a:xfrm>
-            <a:off x="502920" y="457200"/>
+            <a:off x="566928" y="457200"/>
             <a:ext cx="384048" cy="384048"/>
           </a:xfrm>
           <a:prstGeom prst="ellipse">
@@ -13716,7 +13816,7 @@
         </p:nvSpPr>
         <p:spPr>
           <a:xfrm>
-            <a:off x="502920" y="457200"/>
+            <a:off x="566928" y="457200"/>
             <a:ext cx="384048" cy="384048"/>
           </a:xfrm>
           <a:prstGeom prst="rect">
@@ -13755,7 +13855,7 @@
         </p:nvSpPr>
         <p:spPr>
           <a:xfrm>
-            <a:off x="1069848" y="457200"/>
+            <a:off x="1133856" y="457200"/>
             <a:ext cx="10490911" cy="182880"/>
           </a:xfrm>
           <a:prstGeom prst="rect">
@@ -13794,7 +13894,7 @@
         </p:nvSpPr>
         <p:spPr>
           <a:xfrm>
-            <a:off x="1069848" y="640080"/>
+            <a:off x="1133856" y="640080"/>
             <a:ext cx="10490911" cy="365760"/>
           </a:xfrm>
           <a:prstGeom prst="rect">
@@ -13804,6 +13904,47 @@
           <a:ln/>
         </p:spPr>
         <p:txBody>
+          <a:bodyPr wrap="square" lIns="0" tIns="0" rIns="0" bIns="0" rtlCol="0" anchor="ctr">
+            <a:normAutofit/>
+          </a:bodyPr>
+          <a:lstStyle/>
+          <a:p>
+            <a:pPr indent="0" marL="0">
+              <a:buNone/>
+            </a:pPr>
+            <a:r>
+              <a:rPr lang="en-US" sz="2300" b="1" dirty="0">
+                <a:solidFill>
+                  <a:srgbClr val="10161F"/>
+                </a:solidFill>
+                <a:latin typeface="Pretendard" pitchFamily="34" charset="0"/>
+                <a:ea typeface="Pretendard" pitchFamily="34" charset="-122"/>
+                <a:cs typeface="Pretendard" pitchFamily="34" charset="-120"/>
+              </a:rPr>
+              <a:t>매출</a:t>
+            </a:r>
+            <a:endParaRPr lang="en-US" sz="2300" dirty="0"/>
+          </a:p>
+        </p:txBody>
+      </p:sp>
+      <p:sp>
+        <p:nvSpPr>
+          <p:cNvPr id="6" name="Text 4"/>
+          <p:cNvSpPr/>
+          <p:nvPr/>
+        </p:nvSpPr>
+        <p:spPr>
+          <a:xfrm>
+            <a:off x="566928" y="1325880"/>
+            <a:ext cx="11057839" cy="237744"/>
+          </a:xfrm>
+          <a:prstGeom prst="rect">
+            <a:avLst/>
+          </a:prstGeom>
+          <a:noFill/>
+          <a:ln/>
+        </p:spPr>
+        <p:txBody>
           <a:bodyPr wrap="square" lIns="0" tIns="0" rIns="0" bIns="0" rtlCol="0" anchor="ctr"/>
           <a:lstStyle/>
           <a:p>
@@ -13811,7 +13952,7 @@
               <a:buNone/>
             </a:pPr>
             <a:r>
-              <a:rPr lang="en-US" sz="2300" b="1" dirty="0">
+              <a:rPr lang="en-US" sz="1100" b="1" dirty="0">
                 <a:solidFill>
                   <a:srgbClr val="10161F"/>
                 </a:solidFill>
@@ -13819,45 +13960,6 @@
                 <a:ea typeface="Pretendard" pitchFamily="34" charset="-122"/>
                 <a:cs typeface="Pretendard" pitchFamily="34" charset="-120"/>
               </a:rPr>
-              <a:t>매출</a:t>
-            </a:r>
-            <a:endParaRPr lang="en-US" sz="2300" dirty="0"/>
-          </a:p>
-        </p:txBody>
-      </p:sp>
-      <p:sp>
-        <p:nvSpPr>
-          <p:cNvPr id="6" name="Text 4"/>
-          <p:cNvSpPr/>
-          <p:nvPr/>
-        </p:nvSpPr>
-        <p:spPr>
-          <a:xfrm>
-            <a:off x="502920" y="1325880"/>
-            <a:ext cx="11057839" cy="237744"/>
-          </a:xfrm>
-          <a:prstGeom prst="rect">
-            <a:avLst/>
-          </a:prstGeom>
-          <a:noFill/>
-          <a:ln/>
-        </p:spPr>
-        <p:txBody>
-          <a:bodyPr wrap="square" lIns="0" tIns="0" rIns="0" bIns="0" rtlCol="0" anchor="ctr"/>
-          <a:lstStyle/>
-          <a:p>
-            <a:pPr indent="0" marL="0">
-              <a:buNone/>
-            </a:pPr>
-            <a:r>
-              <a:rPr lang="en-US" sz="1100" b="1" dirty="0">
-                <a:solidFill>
-                  <a:srgbClr val="10161F"/>
-                </a:solidFill>
-                <a:latin typeface="Pretendard" pitchFamily="34" charset="0"/>
-                <a:ea typeface="Pretendard" pitchFamily="34" charset="-122"/>
-                <a:cs typeface="Pretendard" pitchFamily="34" charset="-120"/>
-              </a:rPr>
               <a:t>이천권역 호텔 수익 구조 분석</a:t>
             </a:r>
             <a:endParaRPr lang="en-US" sz="1100" dirty="0"/>
@@ -13872,7 +13974,7 @@
         </p:nvSpPr>
         <p:spPr>
           <a:xfrm>
-            <a:off x="502920" y="1737360"/>
+            <a:off x="566928" y="1737360"/>
             <a:ext cx="11057839" cy="0"/>
           </a:xfrm>
           <a:prstGeom prst="line">
@@ -13895,7 +13997,7 @@
         </p:nvSpPr>
         <p:spPr>
           <a:xfrm>
-            <a:off x="502920" y="1965960"/>
+            <a:off x="566928" y="1965960"/>
             <a:ext cx="3576218" cy="1188720"/>
           </a:xfrm>
           <a:prstGeom prst="roundRect">
@@ -13922,7 +14024,7 @@
         </p:nvSpPr>
         <p:spPr>
           <a:xfrm>
-            <a:off x="667512" y="2093976"/>
+            <a:off x="731520" y="2093976"/>
             <a:ext cx="3247034" cy="201168"/>
           </a:xfrm>
           <a:prstGeom prst="rect">
@@ -13932,7 +14034,9 @@
           <a:ln/>
         </p:spPr>
         <p:txBody>
-          <a:bodyPr wrap="square" lIns="0" tIns="0" rIns="0" bIns="0" rtlCol="0" anchor="ctr"/>
+          <a:bodyPr wrap="square" lIns="0" tIns="0" rIns="0" bIns="0" rtlCol="0" anchor="ctr">
+            <a:normAutofit/>
+          </a:bodyPr>
           <a:lstStyle/>
           <a:p>
             <a:pPr indent="0" marL="0">
@@ -13961,8 +14065,8 @@
         </p:nvSpPr>
         <p:spPr>
           <a:xfrm>
-            <a:off x="667512" y="2313432"/>
-            <a:ext cx="3247034" cy="402336"/>
+            <a:off x="731520" y="2313432"/>
+            <a:ext cx="3247034" cy="279400"/>
           </a:xfrm>
           <a:prstGeom prst="rect">
             <a:avLst/>
@@ -13987,11 +14091,11 @@
                 <a:solidFill>
                   <a:srgbClr val="10161F"/>
                 </a:solidFill>
-                <a:latin typeface="Pretendard" pitchFamily="34" charset="0"/>
-                <a:ea typeface="Pretendard" pitchFamily="34" charset="-122"/>
-                <a:cs typeface="Pretendard" pitchFamily="34" charset="-120"/>
-              </a:rPr>
-              <a:t>확인 필요</a:t>
+                <a:latin typeface="Arial" pitchFamily="34" charset="0"/>
+                <a:ea typeface="Arial" pitchFamily="34" charset="-122"/>
+                <a:cs typeface="Arial" pitchFamily="34" charset="-120"/>
+              </a:rPr>
+              <a:t>-</a:t>
             </a:r>
             <a:endParaRPr lang="en-US" sz="2200" dirty="0"/>
           </a:p>
@@ -14005,7 +14109,7 @@
         </p:nvSpPr>
         <p:spPr>
           <a:xfrm>
-            <a:off x="4243730" y="1965960"/>
+            <a:off x="4307738" y="1965960"/>
             <a:ext cx="3576218" cy="1188720"/>
           </a:xfrm>
           <a:prstGeom prst="roundRect">
@@ -14032,7 +14136,7 @@
         </p:nvSpPr>
         <p:spPr>
           <a:xfrm>
-            <a:off x="4408322" y="2093976"/>
+            <a:off x="4472330" y="2093976"/>
             <a:ext cx="3247034" cy="201168"/>
           </a:xfrm>
           <a:prstGeom prst="rect">
@@ -14042,7 +14146,9 @@
           <a:ln/>
         </p:spPr>
         <p:txBody>
-          <a:bodyPr wrap="square" lIns="0" tIns="0" rIns="0" bIns="0" rtlCol="0" anchor="ctr"/>
+          <a:bodyPr wrap="square" lIns="0" tIns="0" rIns="0" bIns="0" rtlCol="0" anchor="ctr">
+            <a:normAutofit/>
+          </a:bodyPr>
           <a:lstStyle/>
           <a:p>
             <a:pPr indent="0" marL="0">
@@ -14071,8 +14177,8 @@
         </p:nvSpPr>
         <p:spPr>
           <a:xfrm>
-            <a:off x="4408322" y="2313432"/>
-            <a:ext cx="3247034" cy="402336"/>
+            <a:off x="4472330" y="2313432"/>
+            <a:ext cx="3247034" cy="279400"/>
           </a:xfrm>
           <a:prstGeom prst="rect">
             <a:avLst/>
@@ -14097,11 +14203,11 @@
                 <a:solidFill>
                   <a:srgbClr val="10161F"/>
                 </a:solidFill>
-                <a:latin typeface="Pretendard" pitchFamily="34" charset="0"/>
-                <a:ea typeface="Pretendard" pitchFamily="34" charset="-122"/>
-                <a:cs typeface="Pretendard" pitchFamily="34" charset="-120"/>
-              </a:rPr>
-              <a:t>확인 필요</a:t>
+                <a:latin typeface="Arial" pitchFamily="34" charset="0"/>
+                <a:ea typeface="Arial" pitchFamily="34" charset="-122"/>
+                <a:cs typeface="Arial" pitchFamily="34" charset="-120"/>
+              </a:rPr>
+              <a:t>-</a:t>
             </a:r>
             <a:endParaRPr lang="en-US" sz="2200" dirty="0"/>
           </a:p>
@@ -14115,7 +14221,7 @@
         </p:nvSpPr>
         <p:spPr>
           <a:xfrm>
-            <a:off x="7984541" y="1965960"/>
+            <a:off x="8048549" y="1965960"/>
             <a:ext cx="3576218" cy="1188720"/>
           </a:xfrm>
           <a:prstGeom prst="roundRect">
@@ -14142,7 +14248,7 @@
         </p:nvSpPr>
         <p:spPr>
           <a:xfrm>
-            <a:off x="8149133" y="2093976"/>
+            <a:off x="8213141" y="2093976"/>
             <a:ext cx="3247034" cy="201168"/>
           </a:xfrm>
           <a:prstGeom prst="rect">
@@ -14152,7 +14258,9 @@
           <a:ln/>
         </p:spPr>
         <p:txBody>
-          <a:bodyPr wrap="square" lIns="0" tIns="0" rIns="0" bIns="0" rtlCol="0" anchor="ctr"/>
+          <a:bodyPr wrap="square" lIns="0" tIns="0" rIns="0" bIns="0" rtlCol="0" anchor="ctr">
+            <a:normAutofit/>
+          </a:bodyPr>
           <a:lstStyle/>
           <a:p>
             <a:pPr indent="0" marL="0">
@@ -14181,8 +14289,8 @@
         </p:nvSpPr>
         <p:spPr>
           <a:xfrm>
-            <a:off x="8149133" y="2313432"/>
-            <a:ext cx="3247034" cy="402336"/>
+            <a:off x="8213141" y="2313432"/>
+            <a:ext cx="3247034" cy="279400"/>
           </a:xfrm>
           <a:prstGeom prst="rect">
             <a:avLst/>
@@ -14225,7 +14333,7 @@
         </p:nvSpPr>
         <p:spPr>
           <a:xfrm>
-            <a:off x="502920" y="3410712"/>
+            <a:off x="566928" y="3410712"/>
             <a:ext cx="5437480" cy="1280160"/>
           </a:xfrm>
           <a:prstGeom prst="roundRect">
@@ -14247,7 +14355,7 @@
         </p:nvSpPr>
         <p:spPr>
           <a:xfrm>
-            <a:off x="502920" y="3465576"/>
+            <a:off x="566928" y="3465576"/>
             <a:ext cx="36576" cy="1170432"/>
           </a:xfrm>
           <a:prstGeom prst="rect">
@@ -14267,7 +14375,7 @@
         </p:nvSpPr>
         <p:spPr>
           <a:xfrm>
-            <a:off x="649224" y="3502152"/>
+            <a:off x="713232" y="3502152"/>
             <a:ext cx="5181448" cy="201168"/>
           </a:xfrm>
           <a:prstGeom prst="rect">
@@ -14306,7 +14414,7 @@
         </p:nvSpPr>
         <p:spPr>
           <a:xfrm>
-            <a:off x="649224" y="3703320"/>
+            <a:off x="713232" y="3703320"/>
             <a:ext cx="5181448" cy="950976"/>
           </a:xfrm>
           <a:prstGeom prst="rect">
@@ -14348,7 +14456,7 @@
         </p:nvSpPr>
         <p:spPr>
           <a:xfrm>
-            <a:off x="6123280" y="3410712"/>
+            <a:off x="6187288" y="3410712"/>
             <a:ext cx="5437480" cy="1280160"/>
           </a:xfrm>
           <a:prstGeom prst="roundRect">
@@ -14370,7 +14478,7 @@
         </p:nvSpPr>
         <p:spPr>
           <a:xfrm>
-            <a:off x="6123280" y="3465576"/>
+            <a:off x="6187288" y="3465576"/>
             <a:ext cx="36576" cy="1170432"/>
           </a:xfrm>
           <a:prstGeom prst="rect">
@@ -14390,7 +14498,7 @@
         </p:nvSpPr>
         <p:spPr>
           <a:xfrm>
-            <a:off x="6269584" y="3502152"/>
+            <a:off x="6333592" y="3502152"/>
             <a:ext cx="5181448" cy="201168"/>
           </a:xfrm>
           <a:prstGeom prst="rect">
@@ -14429,7 +14537,7 @@
         </p:nvSpPr>
         <p:spPr>
           <a:xfrm>
-            <a:off x="6269584" y="3703320"/>
+            <a:off x="6333592" y="3703320"/>
             <a:ext cx="5181448" cy="950976"/>
           </a:xfrm>
           <a:prstGeom prst="rect">
@@ -14496,7 +14604,7 @@
         </p:nvSpPr>
         <p:spPr>
           <a:xfrm>
-            <a:off x="502920" y="6382512"/>
+            <a:off x="566928" y="6382512"/>
             <a:ext cx="7315200" cy="219456"/>
           </a:xfrm>
           <a:prstGeom prst="rect">
@@ -14535,7 +14643,7 @@
         </p:nvSpPr>
         <p:spPr>
           <a:xfrm>
-            <a:off x="10774375" y="6382512"/>
+            <a:off x="10710367" y="6382512"/>
             <a:ext cx="914400" cy="219456"/>
           </a:xfrm>
           <a:prstGeom prst="rect">
@@ -14606,7 +14714,7 @@
         </p:nvSpPr>
         <p:spPr>
           <a:xfrm>
-            <a:off x="502920" y="457200"/>
+            <a:off x="566928" y="457200"/>
             <a:ext cx="384048" cy="384048"/>
           </a:xfrm>
           <a:prstGeom prst="ellipse">
@@ -14626,7 +14734,7 @@
         </p:nvSpPr>
         <p:spPr>
           <a:xfrm>
-            <a:off x="502920" y="457200"/>
+            <a:off x="566928" y="457200"/>
             <a:ext cx="384048" cy="384048"/>
           </a:xfrm>
           <a:prstGeom prst="rect">
@@ -14665,7 +14773,7 @@
         </p:nvSpPr>
         <p:spPr>
           <a:xfrm>
-            <a:off x="1069848" y="457200"/>
+            <a:off x="1133856" y="457200"/>
             <a:ext cx="10490911" cy="182880"/>
           </a:xfrm>
           <a:prstGeom prst="rect">
@@ -14704,7 +14812,7 @@
         </p:nvSpPr>
         <p:spPr>
           <a:xfrm>
-            <a:off x="1069848" y="640080"/>
+            <a:off x="1133856" y="640080"/>
             <a:ext cx="10490911" cy="365760"/>
           </a:xfrm>
           <a:prstGeom prst="rect">
@@ -14714,6 +14822,47 @@
           <a:ln/>
         </p:spPr>
         <p:txBody>
+          <a:bodyPr wrap="square" lIns="0" tIns="0" rIns="0" bIns="0" rtlCol="0" anchor="ctr">
+            <a:normAutofit/>
+          </a:bodyPr>
+          <a:lstStyle/>
+          <a:p>
+            <a:pPr indent="0" marL="0">
+              <a:buNone/>
+            </a:pPr>
+            <a:r>
+              <a:rPr lang="en-US" sz="2300" b="1" dirty="0">
+                <a:solidFill>
+                  <a:srgbClr val="10161F"/>
+                </a:solidFill>
+                <a:latin typeface="Pretendard" pitchFamily="34" charset="0"/>
+                <a:ea typeface="Pretendard" pitchFamily="34" charset="-122"/>
+                <a:cs typeface="Pretendard" pitchFamily="34" charset="-120"/>
+              </a:rPr>
+              <a:t>계절성</a:t>
+            </a:r>
+            <a:endParaRPr lang="en-US" sz="2300" dirty="0"/>
+          </a:p>
+        </p:txBody>
+      </p:sp>
+      <p:sp>
+        <p:nvSpPr>
+          <p:cNvPr id="6" name="Text 4"/>
+          <p:cNvSpPr/>
+          <p:nvPr/>
+        </p:nvSpPr>
+        <p:spPr>
+          <a:xfrm>
+            <a:off x="566928" y="1325880"/>
+            <a:ext cx="11057839" cy="237744"/>
+          </a:xfrm>
+          <a:prstGeom prst="rect">
+            <a:avLst/>
+          </a:prstGeom>
+          <a:noFill/>
+          <a:ln/>
+        </p:spPr>
+        <p:txBody>
           <a:bodyPr wrap="square" lIns="0" tIns="0" rIns="0" bIns="0" rtlCol="0" anchor="ctr"/>
           <a:lstStyle/>
           <a:p>
@@ -14721,7 +14870,7 @@
               <a:buNone/>
             </a:pPr>
             <a:r>
-              <a:rPr lang="en-US" sz="2300" b="1" dirty="0">
+              <a:rPr lang="en-US" sz="1100" b="1" dirty="0">
                 <a:solidFill>
                   <a:srgbClr val="10161F"/>
                 </a:solidFill>
@@ -14729,45 +14878,6 @@
                 <a:ea typeface="Pretendard" pitchFamily="34" charset="-122"/>
                 <a:cs typeface="Pretendard" pitchFamily="34" charset="-120"/>
               </a:rPr>
-              <a:t>계절성</a:t>
-            </a:r>
-            <a:endParaRPr lang="en-US" sz="2300" dirty="0"/>
-          </a:p>
-        </p:txBody>
-      </p:sp>
-      <p:sp>
-        <p:nvSpPr>
-          <p:cNvPr id="6" name="Text 4"/>
-          <p:cNvSpPr/>
-          <p:nvPr/>
-        </p:nvSpPr>
-        <p:spPr>
-          <a:xfrm>
-            <a:off x="502920" y="1325880"/>
-            <a:ext cx="11057839" cy="237744"/>
-          </a:xfrm>
-          <a:prstGeom prst="rect">
-            <a:avLst/>
-          </a:prstGeom>
-          <a:noFill/>
-          <a:ln/>
-        </p:spPr>
-        <p:txBody>
-          <a:bodyPr wrap="square" lIns="0" tIns="0" rIns="0" bIns="0" rtlCol="0" anchor="ctr"/>
-          <a:lstStyle/>
-          <a:p>
-            <a:pPr indent="0" marL="0">
-              <a:buNone/>
-            </a:pPr>
-            <a:r>
-              <a:rPr lang="en-US" sz="1100" b="1" dirty="0">
-                <a:solidFill>
-                  <a:srgbClr val="10161F"/>
-                </a:solidFill>
-                <a:latin typeface="Pretendard" pitchFamily="34" charset="0"/>
-                <a:ea typeface="Pretendard" pitchFamily="34" charset="-122"/>
-                <a:cs typeface="Pretendard" pitchFamily="34" charset="-120"/>
-              </a:rPr>
               <a:t>이천권역 호텔 계절성 및 변동성 분석</a:t>
             </a:r>
             <a:endParaRPr lang="en-US" sz="1100" dirty="0"/>
@@ -14782,7 +14892,7 @@
         </p:nvSpPr>
         <p:spPr>
           <a:xfrm>
-            <a:off x="502920" y="1737360"/>
+            <a:off x="566928" y="1737360"/>
             <a:ext cx="11057839" cy="0"/>
           </a:xfrm>
           <a:prstGeom prst="line">
@@ -14805,7 +14915,7 @@
         </p:nvSpPr>
         <p:spPr>
           <a:xfrm>
-            <a:off x="502920" y="1965960"/>
+            <a:off x="566928" y="1965960"/>
             <a:ext cx="3576218" cy="1188720"/>
           </a:xfrm>
           <a:prstGeom prst="roundRect">
@@ -14832,7 +14942,7 @@
         </p:nvSpPr>
         <p:spPr>
           <a:xfrm>
-            <a:off x="667512" y="2093976"/>
+            <a:off x="731520" y="2093976"/>
             <a:ext cx="3247034" cy="201168"/>
           </a:xfrm>
           <a:prstGeom prst="rect">
@@ -14842,7 +14952,9 @@
           <a:ln/>
         </p:spPr>
         <p:txBody>
-          <a:bodyPr wrap="square" lIns="0" tIns="0" rIns="0" bIns="0" rtlCol="0" anchor="ctr"/>
+          <a:bodyPr wrap="square" lIns="0" tIns="0" rIns="0" bIns="0" rtlCol="0" anchor="ctr">
+            <a:normAutofit/>
+          </a:bodyPr>
           <a:lstStyle/>
           <a:p>
             <a:pPr indent="0" marL="0">
@@ -14871,8 +14983,8 @@
         </p:nvSpPr>
         <p:spPr>
           <a:xfrm>
-            <a:off x="667512" y="2313432"/>
-            <a:ext cx="3247034" cy="402336"/>
+            <a:off x="731520" y="2313432"/>
+            <a:ext cx="3247034" cy="279400"/>
           </a:xfrm>
           <a:prstGeom prst="rect">
             <a:avLst/>
@@ -14915,7 +15027,7 @@
         </p:nvSpPr>
         <p:spPr>
           <a:xfrm>
-            <a:off x="502920" y="3410712"/>
+            <a:off x="566928" y="3410712"/>
             <a:ext cx="5437480" cy="1280160"/>
           </a:xfrm>
           <a:prstGeom prst="roundRect">
@@ -14937,7 +15049,7 @@
         </p:nvSpPr>
         <p:spPr>
           <a:xfrm>
-            <a:off x="502920" y="3465576"/>
+            <a:off x="566928" y="3465576"/>
             <a:ext cx="36576" cy="1170432"/>
           </a:xfrm>
           <a:prstGeom prst="rect">
@@ -14957,7 +15069,7 @@
         </p:nvSpPr>
         <p:spPr>
           <a:xfrm>
-            <a:off x="649224" y="3502152"/>
+            <a:off x="713232" y="3502152"/>
             <a:ext cx="5181448" cy="201168"/>
           </a:xfrm>
           <a:prstGeom prst="rect">
@@ -14996,7 +15108,7 @@
         </p:nvSpPr>
         <p:spPr>
           <a:xfrm>
-            <a:off x="649224" y="3703320"/>
+            <a:off x="713232" y="3703320"/>
             <a:ext cx="5181448" cy="950976"/>
           </a:xfrm>
           <a:prstGeom prst="rect">
@@ -15038,7 +15150,7 @@
         </p:nvSpPr>
         <p:spPr>
           <a:xfrm>
-            <a:off x="6123280" y="3410712"/>
+            <a:off x="6187288" y="3410712"/>
             <a:ext cx="5437480" cy="1280160"/>
           </a:xfrm>
           <a:prstGeom prst="roundRect">
@@ -15060,7 +15172,7 @@
         </p:nvSpPr>
         <p:spPr>
           <a:xfrm>
-            <a:off x="6123280" y="3465576"/>
+            <a:off x="6187288" y="3465576"/>
             <a:ext cx="36576" cy="1170432"/>
           </a:xfrm>
           <a:prstGeom prst="rect">
@@ -15080,7 +15192,7 @@
         </p:nvSpPr>
         <p:spPr>
           <a:xfrm>
-            <a:off x="6269584" y="3502152"/>
+            <a:off x="6333592" y="3502152"/>
             <a:ext cx="5181448" cy="201168"/>
           </a:xfrm>
           <a:prstGeom prst="rect">
@@ -15119,7 +15231,7 @@
         </p:nvSpPr>
         <p:spPr>
           <a:xfrm>
-            <a:off x="6269584" y="3703320"/>
+            <a:off x="6333592" y="3703320"/>
             <a:ext cx="5181448" cy="950976"/>
           </a:xfrm>
           <a:prstGeom prst="rect">
@@ -15210,7 +15322,7 @@
         </p:nvSpPr>
         <p:spPr>
           <a:xfrm>
-            <a:off x="502920" y="6382512"/>
+            <a:off x="566928" y="6382512"/>
             <a:ext cx="7315200" cy="219456"/>
           </a:xfrm>
           <a:prstGeom prst="rect">
@@ -15249,7 +15361,7 @@
         </p:nvSpPr>
         <p:spPr>
           <a:xfrm>
-            <a:off x="10774375" y="6382512"/>
+            <a:off x="10710367" y="6382512"/>
             <a:ext cx="914400" cy="219456"/>
           </a:xfrm>
           <a:prstGeom prst="rect">
@@ -15320,7 +15432,7 @@
         </p:nvSpPr>
         <p:spPr>
           <a:xfrm>
-            <a:off x="502920" y="457200"/>
+            <a:off x="566928" y="457200"/>
             <a:ext cx="384048" cy="384048"/>
           </a:xfrm>
           <a:prstGeom prst="ellipse">
@@ -15340,7 +15452,7 @@
         </p:nvSpPr>
         <p:spPr>
           <a:xfrm>
-            <a:off x="502920" y="457200"/>
+            <a:off x="566928" y="457200"/>
             <a:ext cx="384048" cy="384048"/>
           </a:xfrm>
           <a:prstGeom prst="rect">
@@ -15379,7 +15491,7 @@
         </p:nvSpPr>
         <p:spPr>
           <a:xfrm>
-            <a:off x="1069848" y="457200"/>
+            <a:off x="1133856" y="457200"/>
             <a:ext cx="10490911" cy="182880"/>
           </a:xfrm>
           <a:prstGeom prst="rect">
@@ -15418,7 +15530,7 @@
         </p:nvSpPr>
         <p:spPr>
           <a:xfrm>
-            <a:off x="1069848" y="640080"/>
+            <a:off x="1133856" y="640080"/>
             <a:ext cx="10490911" cy="365760"/>
           </a:xfrm>
           <a:prstGeom prst="rect">
@@ -15428,7 +15540,9 @@
           <a:ln/>
         </p:spPr>
         <p:txBody>
-          <a:bodyPr wrap="square" lIns="0" tIns="0" rIns="0" bIns="0" rtlCol="0" anchor="ctr"/>
+          <a:bodyPr wrap="square" lIns="0" tIns="0" rIns="0" bIns="0" rtlCol="0" anchor="ctr">
+            <a:normAutofit/>
+          </a:bodyPr>
           <a:lstStyle/>
           <a:p>
             <a:pPr indent="0" marL="0">
@@ -15457,7 +15571,7 @@
         </p:nvSpPr>
         <p:spPr>
           <a:xfrm>
-            <a:off x="502920" y="1645920"/>
+            <a:off x="566928" y="1645920"/>
             <a:ext cx="6858000" cy="1645920"/>
           </a:xfrm>
           <a:prstGeom prst="roundRect">
@@ -15479,7 +15593,7 @@
         </p:nvSpPr>
         <p:spPr>
           <a:xfrm>
-            <a:off x="502920" y="1700784"/>
+            <a:off x="566928" y="1700784"/>
             <a:ext cx="36576" cy="1536192"/>
           </a:xfrm>
           <a:prstGeom prst="rect">
@@ -15499,7 +15613,7 @@
         </p:nvSpPr>
         <p:spPr>
           <a:xfrm>
-            <a:off x="649224" y="1737360"/>
+            <a:off x="713232" y="1737360"/>
             <a:ext cx="6601968" cy="201168"/>
           </a:xfrm>
           <a:prstGeom prst="rect">
@@ -15538,7 +15652,7 @@
         </p:nvSpPr>
         <p:spPr>
           <a:xfrm>
-            <a:off x="649224" y="1938528"/>
+            <a:off x="713232" y="1938528"/>
             <a:ext cx="6601968" cy="1316736"/>
           </a:xfrm>
           <a:prstGeom prst="rect">
@@ -15629,7 +15743,7 @@
         </p:nvSpPr>
         <p:spPr>
           <a:xfrm>
-            <a:off x="7540600" y="1371600"/>
+            <a:off x="7604608" y="1371600"/>
             <a:ext cx="0" cy="4754880"/>
           </a:xfrm>
           <a:prstGeom prst="line">
@@ -15652,7 +15766,7 @@
         </p:nvSpPr>
         <p:spPr>
           <a:xfrm>
-            <a:off x="7720279" y="1645920"/>
+            <a:off x="7784287" y="1645920"/>
             <a:ext cx="3840480" cy="2103120"/>
           </a:xfrm>
           <a:prstGeom prst="roundRect">
@@ -15674,7 +15788,7 @@
         </p:nvSpPr>
         <p:spPr>
           <a:xfrm>
-            <a:off x="7720279" y="1700784"/>
+            <a:off x="7784287" y="1700784"/>
             <a:ext cx="36576" cy="1993392"/>
           </a:xfrm>
           <a:prstGeom prst="rect">
@@ -15694,7 +15808,7 @@
         </p:nvSpPr>
         <p:spPr>
           <a:xfrm>
-            <a:off x="7866583" y="1737360"/>
+            <a:off x="7930591" y="1737360"/>
             <a:ext cx="3584448" cy="201168"/>
           </a:xfrm>
           <a:prstGeom prst="rect">
@@ -15733,7 +15847,7 @@
         </p:nvSpPr>
         <p:spPr>
           <a:xfrm>
-            <a:off x="7866583" y="1938528"/>
+            <a:off x="7930591" y="1938528"/>
             <a:ext cx="3584448" cy="1773936"/>
           </a:xfrm>
           <a:prstGeom prst="rect">
@@ -15824,7 +15938,7 @@
         </p:nvSpPr>
         <p:spPr>
           <a:xfrm>
-            <a:off x="7720279" y="3977640"/>
+            <a:off x="7784287" y="3977640"/>
             <a:ext cx="3840480" cy="2148840"/>
           </a:xfrm>
           <a:prstGeom prst="roundRect">
@@ -15846,7 +15960,7 @@
         </p:nvSpPr>
         <p:spPr>
           <a:xfrm>
-            <a:off x="7720279" y="4032504"/>
+            <a:off x="7784287" y="4032504"/>
             <a:ext cx="36576" cy="2039112"/>
           </a:xfrm>
           <a:prstGeom prst="rect">
@@ -15866,7 +15980,7 @@
         </p:nvSpPr>
         <p:spPr>
           <a:xfrm>
-            <a:off x="7866583" y="4069080"/>
+            <a:off x="7930591" y="4069080"/>
             <a:ext cx="3584448" cy="201168"/>
           </a:xfrm>
           <a:prstGeom prst="rect">
@@ -15905,7 +16019,7 @@
         </p:nvSpPr>
         <p:spPr>
           <a:xfrm>
-            <a:off x="7866583" y="4270248"/>
+            <a:off x="7930591" y="4270248"/>
             <a:ext cx="3584448" cy="1819656"/>
           </a:xfrm>
           <a:prstGeom prst="rect">
@@ -15996,7 +16110,7 @@
         </p:nvSpPr>
         <p:spPr>
           <a:xfrm>
-            <a:off x="502920" y="6382512"/>
+            <a:off x="566928" y="6382512"/>
             <a:ext cx="7315200" cy="219456"/>
           </a:xfrm>
           <a:prstGeom prst="rect">
@@ -16035,7 +16149,7 @@
         </p:nvSpPr>
         <p:spPr>
           <a:xfrm>
-            <a:off x="10774375" y="6382512"/>
+            <a:off x="10710367" y="6382512"/>
             <a:ext cx="914400" cy="219456"/>
           </a:xfrm>
           <a:prstGeom prst="rect">

--- a/docs/test/stress/e2e-outputs/operating_basic_pr05.pptx
+++ b/docs/test/stress/e2e-outputs/operating_basic_pr05.pptx
@@ -19,10 +19,9 @@
     <p:sldId id="267" r:id="rId13"/>
     <p:sldId id="268" r:id="rId14"/>
     <p:sldId id="269" r:id="rId15"/>
-    <p:sldId id="270" r:id="rId16"/>
   </p:sldIdLst>
   <p:notesMasterIdLst>
-    <p:notesMasterId r:id="rId17"/>
+    <p:notesMasterId r:id="rId16"/>
   </p:notesMasterIdLst>
   <p:sldSz cx="12192000" cy="6858000"/>
   <p:notesSz cx="6858000" cy="12192000"/>
@@ -980,94 +979,6 @@
             <a:fld id="{F7021451-1387-4CA6-816F-3879F97B5CBC}" type="slidenum">
               <a:rPr lang="en-US"/>
               <a:t>14</a:t>
-            </a:fld>
-            <a:endParaRPr lang="en-US"/>
-          </a:p>
-        </p:txBody>
-      </p:sp>
-    </p:spTree>
-    <p:extLst>
-      <p:ext uri="{BB962C8B-B14F-4D97-AF65-F5344CB8AC3E}">
-        <p14:creationId xmlns:p14="http://schemas.microsoft.com/office/powerpoint/2010/main" val="1024086991"/>
-      </p:ext>
-    </p:extLst>
-  </p:cSld>
-  <p:clrMapOvr>
-    <a:masterClrMapping/>
-  </p:clrMapOvr>
-</p:notes>
-</file>
-
-<file path=ppt/notesSlides/notesSlide15.xml><?xml version="1.0" encoding="utf-8"?>
-<p:notes xmlns:a="http://schemas.openxmlformats.org/drawingml/2006/main" xmlns:r="http://schemas.openxmlformats.org/officeDocument/2006/relationships" xmlns:p="http://schemas.openxmlformats.org/presentationml/2006/main">
-  <p:cSld>
-    <p:spTree>
-      <p:nvGrpSpPr>
-        <p:cNvPr id="1" name=""/>
-        <p:cNvGrpSpPr/>
-        <p:nvPr/>
-      </p:nvGrpSpPr>
-      <p:grpSpPr>
-        <a:xfrm>
-          <a:off x="0" y="0"/>
-          <a:ext cx="0" cy="0"/>
-          <a:chOff x="0" y="0"/>
-          <a:chExt cx="0" cy="0"/>
-        </a:xfrm>
-      </p:grpSpPr>
-      <p:sp>
-        <p:nvSpPr>
-          <p:cNvPr id="2" name="Slide Image Placeholder 1"/>
-          <p:cNvSpPr>
-            <a:spLocks noGrp="1" noRot="1" noChangeAspect="1"/>
-          </p:cNvSpPr>
-          <p:nvPr>
-            <p:ph type="sldImg"/>
-          </p:nvPr>
-        </p:nvSpPr>
-        <p:spPr/>
-      </p:sp>
-      <p:sp>
-        <p:nvSpPr>
-          <p:cNvPr id="3" name="Notes Placeholder 2"/>
-          <p:cNvSpPr>
-            <a:spLocks noGrp="1"/>
-          </p:cNvSpPr>
-          <p:nvPr>
-            <p:ph type="body" idx="1"/>
-          </p:nvPr>
-        </p:nvSpPr>
-        <p:spPr/>
-        <p:txBody>
-          <a:bodyPr/>
-          <a:lstStyle/>
-          <a:p>
-            <a:r>
-              <a:rPr lang="en-US" dirty="0"/>
-              <a:t/>
-            </a:r>
-            <a:endParaRPr lang="en-US" dirty="0"/>
-          </a:p>
-        </p:txBody>
-      </p:sp>
-      <p:sp>
-        <p:nvSpPr>
-          <p:cNvPr id="4" name="Slide Number Placeholder 3"/>
-          <p:cNvSpPr>
-            <a:spLocks noGrp="1"/>
-          </p:cNvSpPr>
-          <p:nvPr>
-            <p:ph type="sldNum" sz="quarter" idx="10"/>
-          </p:nvPr>
-        </p:nvSpPr>
-        <p:spPr/>
-        <p:txBody>
-          <a:bodyPr/>
-          <a:lstStyle/>
-          <a:p>
-            <a:fld id="{F7021451-1387-4CA6-816F-3879F97B5CBC}" type="slidenum">
-              <a:rPr lang="en-US"/>
-              <a:t>15</a:t>
             </a:fld>
             <a:endParaRPr lang="en-US"/>
           </a:p>
@@ -2374,10 +2285,15 @@
           <a:ln/>
         </p:spPr>
         <p:txBody>
-          <a:bodyPr wrap="square" lIns="0" tIns="0" rIns="0" bIns="0" rtlCol="0" anchor="ctr"/>
+          <a:bodyPr wrap="square" lIns="0" tIns="0" rIns="0" bIns="0" rtlCol="0" anchor="ctr">
+            <a:normAutofit/>
+          </a:bodyPr>
           <a:lstStyle/>
           <a:p>
             <a:pPr algn="l" indent="0" marL="0">
+              <a:lnSpc>
+                <a:spcPct val="100000"/>
+              </a:lnSpc>
               <a:buNone/>
             </a:pPr>
             <a:r>
@@ -2902,7 +2818,7 @@
                 <a:ea typeface="Arial" pitchFamily="34" charset="-122"/>
                 <a:cs typeface="Arial" pitchFamily="34" charset="-120"/>
               </a:rPr>
-              <a:t>Capital</a:t>
+              <a:t>Thesis</a:t>
             </a:r>
             <a:endParaRPr lang="en-US" sz="950" dirty="0"/>
           </a:p>
@@ -2943,7 +2859,7 @@
                 <a:ea typeface="Pretendard" pitchFamily="34" charset="-122"/>
                 <a:cs typeface="Pretendard" pitchFamily="34" charset="-120"/>
               </a:rPr>
-              <a:t>자본구조</a:t>
+              <a:t>투자 논거</a:t>
             </a:r>
             <a:endParaRPr lang="en-US" sz="2300" dirty="0"/>
           </a:p>
@@ -2957,20 +2873,20 @@
         </p:nvSpPr>
         <p:spPr>
           <a:xfrm>
-            <a:off x="566928" y="1417320"/>
-            <a:ext cx="5391760" cy="4389120"/>
+            <a:off x="566928" y="4937760"/>
+            <a:ext cx="11057839" cy="804672"/>
           </a:xfrm>
           <a:prstGeom prst="roundRect">
             <a:avLst>
-              <a:gd name="adj" fmla="val 1250"/>
+              <a:gd name="adj" fmla="val 6818"/>
             </a:avLst>
           </a:prstGeom>
           <a:solidFill>
-            <a:srgbClr val="F7FAFC"/>
+            <a:srgbClr val="F3EBDA"/>
           </a:solidFill>
-          <a:ln w="6350">
+          <a:ln w="10160">
             <a:solidFill>
-              <a:srgbClr val="CBD5E0"/>
+              <a:srgbClr val="D9B668"/>
             </a:solidFill>
             <a:prstDash val="solid"/>
           </a:ln>
@@ -2984,8 +2900,8 @@
         </p:nvSpPr>
         <p:spPr>
           <a:xfrm>
-            <a:off x="795528" y="1618488"/>
-            <a:ext cx="4934560" cy="320040"/>
+            <a:off x="749808" y="5047488"/>
+            <a:ext cx="1691640" cy="256032"/>
           </a:xfrm>
           <a:prstGeom prst="rect">
             <a:avLst/>
@@ -3001,7 +2917,7 @@
               <a:buNone/>
             </a:pPr>
             <a:r>
-              <a:rPr lang="en-US" sz="1350" b="1" dirty="0">
+              <a:rPr lang="en-US" sz="1050" b="1" dirty="0">
                 <a:solidFill>
                   <a:srgbClr val="977024"/>
                 </a:solidFill>
@@ -3009,9 +2925,9 @@
                 <a:ea typeface="Pretendard" pitchFamily="34" charset="-122"/>
                 <a:cs typeface="Pretendard" pitchFamily="34" charset="-120"/>
               </a:rPr>
-              <a:t>1. 총취득원가 및 자기자본 소요</a:t>
-            </a:r>
-            <a:endParaRPr lang="en-US" sz="1350" dirty="0"/>
+              <a:t>종합 가치 제안</a:t>
+            </a:r>
+            <a:endParaRPr lang="en-US" sz="1050" dirty="0"/>
           </a:p>
         </p:txBody>
       </p:sp>
@@ -3023,2458 +2939,43 @@
         </p:nvSpPr>
         <p:spPr>
           <a:xfrm>
-            <a:off x="795528" y="2011680"/>
-            <a:ext cx="2269897" cy="475488"/>
-          </a:xfrm>
-          <a:prstGeom prst="rect">
-            <a:avLst/>
-          </a:prstGeom>
-          <a:noFill/>
-          <a:ln/>
-        </p:spPr>
-        <p:txBody>
-          <a:bodyPr wrap="square" lIns="0" tIns="0" rIns="0" bIns="0" rtlCol="0" anchor="ctr">
-            <a:normAutofit/>
-          </a:bodyPr>
+            <a:off x="2487168" y="5010912"/>
+            <a:ext cx="8954719" cy="658368"/>
+          </a:xfrm>
+          <a:prstGeom prst="rect">
+            <a:avLst/>
+          </a:prstGeom>
+          <a:noFill/>
+          <a:ln/>
+        </p:spPr>
+        <p:txBody>
+          <a:bodyPr wrap="square" lIns="0" tIns="0" rIns="0" bIns="0" rtlCol="0" anchor="ctr"/>
           <a:lstStyle/>
           <a:p>
             <a:pPr indent="0" marL="0">
               <a:lnSpc>
-                <a:spcPct val="115000"/>
+                <a:spcPct val="125000"/>
               </a:lnSpc>
               <a:buNone/>
             </a:pPr>
             <a:r>
-              <a:rPr lang="en-US" sz="1150" dirty="0">
-                <a:solidFill>
-                  <a:srgbClr val="718096"/>
-                </a:solidFill>
-                <a:latin typeface="Pretendard" pitchFamily="34" charset="0"/>
-                <a:ea typeface="Pretendard" pitchFamily="34" charset="-122"/>
-                <a:cs typeface="Pretendard" pitchFamily="34" charset="-120"/>
-              </a:rPr>
-              <a:t>매매 희망가 (A)</a:t>
-            </a:r>
-            <a:endParaRPr lang="en-US" sz="1150" dirty="0"/>
+              <a:rPr lang="en-US" sz="1100" dirty="0">
+                <a:solidFill>
+                  <a:srgbClr val="10161F"/>
+                </a:solidFill>
+                <a:latin typeface="Pretendard" pitchFamily="34" charset="0"/>
+                <a:ea typeface="Pretendard" pitchFamily="34" charset="-122"/>
+                <a:cs typeface="Pretendard" pitchFamily="34" charset="-120"/>
+              </a:rPr>
+              <a:t>3PL 대형 임차인의 장기 안정수익과 냉동냉장 특화 시설의 희소성이 핵심입니다.</a:t>
+            </a:r>
+            <a:endParaRPr lang="en-US" sz="1100" dirty="0"/>
           </a:p>
         </p:txBody>
       </p:sp>
       <p:sp>
         <p:nvSpPr>
           <p:cNvPr id="9" name="Text 7"/>
-          <p:cNvSpPr/>
-          <p:nvPr/>
-        </p:nvSpPr>
-        <p:spPr>
-          <a:xfrm>
-            <a:off x="3065425" y="2011680"/>
-            <a:ext cx="2664662" cy="475488"/>
-          </a:xfrm>
-          <a:prstGeom prst="rect">
-            <a:avLst/>
-          </a:prstGeom>
-          <a:noFill/>
-          <a:ln/>
-        </p:spPr>
-        <p:txBody>
-          <a:bodyPr wrap="square" lIns="0" tIns="0" rIns="0" bIns="0" rtlCol="0" anchor="ctr">
-            <a:normAutofit/>
-          </a:bodyPr>
-          <a:lstStyle/>
-          <a:p>
-            <a:pPr indent="0" marL="0">
-              <a:lnSpc>
-                <a:spcPct val="115000"/>
-              </a:lnSpc>
-              <a:buNone/>
-            </a:pPr>
-            <a:r>
-              <a:rPr lang="en-US" sz="1150" b="1" dirty="0">
-                <a:solidFill>
-                  <a:srgbClr val="10161F"/>
-                </a:solidFill>
-                <a:latin typeface="Pretendard" pitchFamily="34" charset="0"/>
-                <a:ea typeface="Pretendard" pitchFamily="34" charset="-122"/>
-                <a:cs typeface="Pretendard" pitchFamily="34" charset="-120"/>
-              </a:rPr>
-              <a:t>450억 원</a:t>
-            </a:r>
-            <a:endParaRPr lang="en-US" sz="1150" dirty="0"/>
-          </a:p>
-        </p:txBody>
-      </p:sp>
-      <p:sp>
-        <p:nvSpPr>
-          <p:cNvPr id="10" name="Shape 8"/>
-          <p:cNvSpPr/>
-          <p:nvPr/>
-        </p:nvSpPr>
-        <p:spPr>
-          <a:xfrm>
-            <a:off x="795528" y="2487168"/>
-            <a:ext cx="4934560" cy="0"/>
-          </a:xfrm>
-          <a:prstGeom prst="line">
-            <a:avLst/>
-          </a:prstGeom>
-          <a:noFill/>
-          <a:ln w="3810">
-            <a:solidFill>
-              <a:srgbClr val="CBD5E0"/>
-            </a:solidFill>
-            <a:prstDash val="solid"/>
-          </a:ln>
-        </p:spPr>
-      </p:sp>
-      <p:sp>
-        <p:nvSpPr>
-          <p:cNvPr id="11" name="Text 9"/>
-          <p:cNvSpPr/>
-          <p:nvPr/>
-        </p:nvSpPr>
-        <p:spPr>
-          <a:xfrm>
-            <a:off x="795528" y="2487168"/>
-            <a:ext cx="2269897" cy="475488"/>
-          </a:xfrm>
-          <a:prstGeom prst="rect">
-            <a:avLst/>
-          </a:prstGeom>
-          <a:noFill/>
-          <a:ln/>
-        </p:spPr>
-        <p:txBody>
-          <a:bodyPr wrap="square" lIns="0" tIns="0" rIns="0" bIns="0" rtlCol="0" anchor="ctr">
-            <a:normAutofit/>
-          </a:bodyPr>
-          <a:lstStyle/>
-          <a:p>
-            <a:pPr indent="0" marL="0">
-              <a:lnSpc>
-                <a:spcPct val="115000"/>
-              </a:lnSpc>
-              <a:buNone/>
-            </a:pPr>
-            <a:r>
-              <a:rPr lang="en-US" sz="1150" dirty="0">
-                <a:solidFill>
-                  <a:srgbClr val="718096"/>
-                </a:solidFill>
-                <a:latin typeface="Pretendard" pitchFamily="34" charset="0"/>
-                <a:ea typeface="Pretendard" pitchFamily="34" charset="-122"/>
-                <a:cs typeface="Pretendard" pitchFamily="34" charset="-120"/>
-              </a:rPr>
-              <a:t>취득세 (4.6% 법정)</a:t>
-            </a:r>
-            <a:endParaRPr lang="en-US" sz="1150" dirty="0"/>
-          </a:p>
-        </p:txBody>
-      </p:sp>
-      <p:sp>
-        <p:nvSpPr>
-          <p:cNvPr id="12" name="Text 10"/>
-          <p:cNvSpPr/>
-          <p:nvPr/>
-        </p:nvSpPr>
-        <p:spPr>
-          <a:xfrm>
-            <a:off x="3065425" y="2487168"/>
-            <a:ext cx="2664662" cy="475488"/>
-          </a:xfrm>
-          <a:prstGeom prst="rect">
-            <a:avLst/>
-          </a:prstGeom>
-          <a:noFill/>
-          <a:ln/>
-        </p:spPr>
-        <p:txBody>
-          <a:bodyPr wrap="square" lIns="0" tIns="0" rIns="0" bIns="0" rtlCol="0" anchor="ctr">
-            <a:normAutofit/>
-          </a:bodyPr>
-          <a:lstStyle/>
-          <a:p>
-            <a:pPr indent="0" marL="0">
-              <a:lnSpc>
-                <a:spcPct val="115000"/>
-              </a:lnSpc>
-              <a:buNone/>
-            </a:pPr>
-            <a:r>
-              <a:rPr lang="en-US" sz="1150" b="1" dirty="0">
-                <a:solidFill>
-                  <a:srgbClr val="10161F"/>
-                </a:solidFill>
-                <a:latin typeface="Pretendard" pitchFamily="34" charset="0"/>
-                <a:ea typeface="Pretendard" pitchFamily="34" charset="-122"/>
-                <a:cs typeface="Pretendard" pitchFamily="34" charset="-120"/>
-              </a:rPr>
-              <a:t>20.7억 원</a:t>
-            </a:r>
-            <a:endParaRPr lang="en-US" sz="1150" dirty="0"/>
-          </a:p>
-        </p:txBody>
-      </p:sp>
-      <p:sp>
-        <p:nvSpPr>
-          <p:cNvPr id="13" name="Shape 11"/>
-          <p:cNvSpPr/>
-          <p:nvPr/>
-        </p:nvSpPr>
-        <p:spPr>
-          <a:xfrm>
-            <a:off x="795528" y="2962656"/>
-            <a:ext cx="4934560" cy="0"/>
-          </a:xfrm>
-          <a:prstGeom prst="line">
-            <a:avLst/>
-          </a:prstGeom>
-          <a:noFill/>
-          <a:ln w="3810">
-            <a:solidFill>
-              <a:srgbClr val="CBD5E0"/>
-            </a:solidFill>
-            <a:prstDash val="solid"/>
-          </a:ln>
-        </p:spPr>
-      </p:sp>
-      <p:sp>
-        <p:nvSpPr>
-          <p:cNvPr id="14" name="Text 12"/>
-          <p:cNvSpPr/>
-          <p:nvPr/>
-        </p:nvSpPr>
-        <p:spPr>
-          <a:xfrm>
-            <a:off x="795528" y="2962656"/>
-            <a:ext cx="2269897" cy="475488"/>
-          </a:xfrm>
-          <a:prstGeom prst="rect">
-            <a:avLst/>
-          </a:prstGeom>
-          <a:noFill/>
-          <a:ln/>
-        </p:spPr>
-        <p:txBody>
-          <a:bodyPr wrap="square" lIns="0" tIns="0" rIns="0" bIns="0" rtlCol="0" anchor="ctr">
-            <a:normAutofit/>
-          </a:bodyPr>
-          <a:lstStyle/>
-          <a:p>
-            <a:pPr indent="0" marL="0">
-              <a:lnSpc>
-                <a:spcPct val="115000"/>
-              </a:lnSpc>
-              <a:buNone/>
-            </a:pPr>
-            <a:r>
-              <a:rPr lang="en-US" sz="1150" dirty="0">
-                <a:solidFill>
-                  <a:srgbClr val="718096"/>
-                </a:solidFill>
-                <a:latin typeface="Pretendard" pitchFamily="34" charset="0"/>
-                <a:ea typeface="Pretendard" pitchFamily="34" charset="-122"/>
-                <a:cs typeface="Pretendard" pitchFamily="34" charset="-120"/>
-              </a:rPr>
-              <a:t>중개보수 (0.9% 한도)</a:t>
-            </a:r>
-            <a:endParaRPr lang="en-US" sz="1150" dirty="0"/>
-          </a:p>
-        </p:txBody>
-      </p:sp>
-      <p:sp>
-        <p:nvSpPr>
-          <p:cNvPr id="15" name="Text 13"/>
-          <p:cNvSpPr/>
-          <p:nvPr/>
-        </p:nvSpPr>
-        <p:spPr>
-          <a:xfrm>
-            <a:off x="3065425" y="2962656"/>
-            <a:ext cx="2664662" cy="475488"/>
-          </a:xfrm>
-          <a:prstGeom prst="rect">
-            <a:avLst/>
-          </a:prstGeom>
-          <a:noFill/>
-          <a:ln/>
-        </p:spPr>
-        <p:txBody>
-          <a:bodyPr wrap="square" lIns="0" tIns="0" rIns="0" bIns="0" rtlCol="0" anchor="ctr">
-            <a:normAutofit/>
-          </a:bodyPr>
-          <a:lstStyle/>
-          <a:p>
-            <a:pPr indent="0" marL="0">
-              <a:lnSpc>
-                <a:spcPct val="115000"/>
-              </a:lnSpc>
-              <a:buNone/>
-            </a:pPr>
-            <a:r>
-              <a:rPr lang="en-US" sz="1150" b="1" dirty="0">
-                <a:solidFill>
-                  <a:srgbClr val="10161F"/>
-                </a:solidFill>
-                <a:latin typeface="Pretendard" pitchFamily="34" charset="0"/>
-                <a:ea typeface="Pretendard" pitchFamily="34" charset="-122"/>
-                <a:cs typeface="Pretendard" pitchFamily="34" charset="-120"/>
-              </a:rPr>
-              <a:t>4.05억 원</a:t>
-            </a:r>
-            <a:endParaRPr lang="en-US" sz="1150" dirty="0"/>
-          </a:p>
-        </p:txBody>
-      </p:sp>
-      <p:sp>
-        <p:nvSpPr>
-          <p:cNvPr id="16" name="Shape 14"/>
-          <p:cNvSpPr/>
-          <p:nvPr/>
-        </p:nvSpPr>
-        <p:spPr>
-          <a:xfrm>
-            <a:off x="795528" y="3438144"/>
-            <a:ext cx="4934560" cy="0"/>
-          </a:xfrm>
-          <a:prstGeom prst="line">
-            <a:avLst/>
-          </a:prstGeom>
-          <a:noFill/>
-          <a:ln w="3810">
-            <a:solidFill>
-              <a:srgbClr val="CBD5E0"/>
-            </a:solidFill>
-            <a:prstDash val="solid"/>
-          </a:ln>
-        </p:spPr>
-      </p:sp>
-      <p:sp>
-        <p:nvSpPr>
-          <p:cNvPr id="17" name="Text 15"/>
-          <p:cNvSpPr/>
-          <p:nvPr/>
-        </p:nvSpPr>
-        <p:spPr>
-          <a:xfrm>
-            <a:off x="795528" y="3438144"/>
-            <a:ext cx="2269897" cy="475488"/>
-          </a:xfrm>
-          <a:prstGeom prst="rect">
-            <a:avLst/>
-          </a:prstGeom>
-          <a:noFill/>
-          <a:ln/>
-        </p:spPr>
-        <p:txBody>
-          <a:bodyPr wrap="square" lIns="0" tIns="0" rIns="0" bIns="0" rtlCol="0" anchor="ctr">
-            <a:normAutofit/>
-          </a:bodyPr>
-          <a:lstStyle/>
-          <a:p>
-            <a:pPr indent="0" marL="0">
-              <a:lnSpc>
-                <a:spcPct val="115000"/>
-              </a:lnSpc>
-              <a:buNone/>
-            </a:pPr>
-            <a:r>
-              <a:rPr lang="en-US" sz="1150" dirty="0">
-                <a:solidFill>
-                  <a:srgbClr val="718096"/>
-                </a:solidFill>
-                <a:latin typeface="Pretendard" pitchFamily="34" charset="0"/>
-                <a:ea typeface="Pretendard" pitchFamily="34" charset="-122"/>
-                <a:cs typeface="Pretendard" pitchFamily="34" charset="-120"/>
-              </a:rPr>
-              <a:t>총취득원가 (A + 세/비용)</a:t>
-            </a:r>
-            <a:endParaRPr lang="en-US" sz="1150" dirty="0"/>
-          </a:p>
-        </p:txBody>
-      </p:sp>
-      <p:sp>
-        <p:nvSpPr>
-          <p:cNvPr id="18" name="Text 16"/>
-          <p:cNvSpPr/>
-          <p:nvPr/>
-        </p:nvSpPr>
-        <p:spPr>
-          <a:xfrm>
-            <a:off x="3065425" y="3438144"/>
-            <a:ext cx="2664662" cy="475488"/>
-          </a:xfrm>
-          <a:prstGeom prst="rect">
-            <a:avLst/>
-          </a:prstGeom>
-          <a:noFill/>
-          <a:ln/>
-        </p:spPr>
-        <p:txBody>
-          <a:bodyPr wrap="square" lIns="0" tIns="0" rIns="0" bIns="0" rtlCol="0" anchor="ctr">
-            <a:normAutofit/>
-          </a:bodyPr>
-          <a:lstStyle/>
-          <a:p>
-            <a:pPr indent="0" marL="0">
-              <a:lnSpc>
-                <a:spcPct val="115000"/>
-              </a:lnSpc>
-              <a:buNone/>
-            </a:pPr>
-            <a:r>
-              <a:rPr lang="en-US" sz="1150" b="1" dirty="0">
-                <a:solidFill>
-                  <a:srgbClr val="10161F"/>
-                </a:solidFill>
-                <a:latin typeface="Pretendard" pitchFamily="34" charset="0"/>
-                <a:ea typeface="Pretendard" pitchFamily="34" charset="-122"/>
-                <a:cs typeface="Pretendard" pitchFamily="34" charset="-120"/>
-              </a:rPr>
-              <a:t>474.8억 원</a:t>
-            </a:r>
-            <a:endParaRPr lang="en-US" sz="1150" dirty="0"/>
-          </a:p>
-        </p:txBody>
-      </p:sp>
-      <p:sp>
-        <p:nvSpPr>
-          <p:cNvPr id="19" name="Shape 17"/>
-          <p:cNvSpPr/>
-          <p:nvPr/>
-        </p:nvSpPr>
-        <p:spPr>
-          <a:xfrm>
-            <a:off x="795528" y="3913632"/>
-            <a:ext cx="4934560" cy="0"/>
-          </a:xfrm>
-          <a:prstGeom prst="line">
-            <a:avLst/>
-          </a:prstGeom>
-          <a:noFill/>
-          <a:ln w="3810">
-            <a:solidFill>
-              <a:srgbClr val="CBD5E0"/>
-            </a:solidFill>
-            <a:prstDash val="solid"/>
-          </a:ln>
-        </p:spPr>
-      </p:sp>
-      <p:sp>
-        <p:nvSpPr>
-          <p:cNvPr id="20" name="Text 18"/>
-          <p:cNvSpPr/>
-          <p:nvPr/>
-        </p:nvSpPr>
-        <p:spPr>
-          <a:xfrm>
-            <a:off x="795528" y="3913632"/>
-            <a:ext cx="2269897" cy="475488"/>
-          </a:xfrm>
-          <a:prstGeom prst="rect">
-            <a:avLst/>
-          </a:prstGeom>
-          <a:noFill/>
-          <a:ln/>
-        </p:spPr>
-        <p:txBody>
-          <a:bodyPr wrap="square" lIns="0" tIns="0" rIns="0" bIns="0" rtlCol="0" anchor="ctr">
-            <a:normAutofit/>
-          </a:bodyPr>
-          <a:lstStyle/>
-          <a:p>
-            <a:pPr indent="0" marL="0">
-              <a:lnSpc>
-                <a:spcPct val="115000"/>
-              </a:lnSpc>
-              <a:buNone/>
-            </a:pPr>
-            <a:r>
-              <a:rPr lang="en-US" sz="1150" dirty="0">
-                <a:solidFill>
-                  <a:srgbClr val="718096"/>
-                </a:solidFill>
-                <a:latin typeface="Pretendard" pitchFamily="34" charset="0"/>
-                <a:ea typeface="Pretendard" pitchFamily="34" charset="-122"/>
-                <a:cs typeface="Pretendard" pitchFamily="34" charset="-120"/>
-              </a:rPr>
-              <a:t>(-) 임대보증금 승계</a:t>
-            </a:r>
-            <a:endParaRPr lang="en-US" sz="1150" dirty="0"/>
-          </a:p>
-        </p:txBody>
-      </p:sp>
-      <p:sp>
-        <p:nvSpPr>
-          <p:cNvPr id="21" name="Text 19"/>
-          <p:cNvSpPr/>
-          <p:nvPr/>
-        </p:nvSpPr>
-        <p:spPr>
-          <a:xfrm>
-            <a:off x="3065425" y="3913632"/>
-            <a:ext cx="2664662" cy="475488"/>
-          </a:xfrm>
-          <a:prstGeom prst="rect">
-            <a:avLst/>
-          </a:prstGeom>
-          <a:noFill/>
-          <a:ln/>
-        </p:spPr>
-        <p:txBody>
-          <a:bodyPr wrap="square" lIns="0" tIns="0" rIns="0" bIns="0" rtlCol="0" anchor="ctr">
-            <a:normAutofit/>
-          </a:bodyPr>
-          <a:lstStyle/>
-          <a:p>
-            <a:pPr indent="0" marL="0">
-              <a:lnSpc>
-                <a:spcPct val="115000"/>
-              </a:lnSpc>
-              <a:buNone/>
-            </a:pPr>
-            <a:r>
-              <a:rPr lang="en-US" sz="1150" b="1" dirty="0">
-                <a:solidFill>
-                  <a:srgbClr val="10161F"/>
-                </a:solidFill>
-                <a:latin typeface="Pretendard" pitchFamily="34" charset="0"/>
-                <a:ea typeface="Pretendard" pitchFamily="34" charset="-122"/>
-                <a:cs typeface="Pretendard" pitchFamily="34" charset="-120"/>
-              </a:rPr>
-              <a:t>-</a:t>
-            </a:r>
-            <a:endParaRPr lang="en-US" sz="1150" dirty="0"/>
-          </a:p>
-        </p:txBody>
-      </p:sp>
-      <p:sp>
-        <p:nvSpPr>
-          <p:cNvPr id="22" name="Shape 20"/>
-          <p:cNvSpPr/>
-          <p:nvPr/>
-        </p:nvSpPr>
-        <p:spPr>
-          <a:xfrm>
-            <a:off x="795528" y="4389120"/>
-            <a:ext cx="4934560" cy="0"/>
-          </a:xfrm>
-          <a:prstGeom prst="line">
-            <a:avLst/>
-          </a:prstGeom>
-          <a:noFill/>
-          <a:ln w="3810">
-            <a:solidFill>
-              <a:srgbClr val="CBD5E0"/>
-            </a:solidFill>
-            <a:prstDash val="solid"/>
-          </a:ln>
-        </p:spPr>
-      </p:sp>
-      <p:sp>
-        <p:nvSpPr>
-          <p:cNvPr id="23" name="Text 21"/>
-          <p:cNvSpPr/>
-          <p:nvPr/>
-        </p:nvSpPr>
-        <p:spPr>
-          <a:xfrm>
-            <a:off x="795528" y="4389120"/>
-            <a:ext cx="2269897" cy="475488"/>
-          </a:xfrm>
-          <a:prstGeom prst="rect">
-            <a:avLst/>
-          </a:prstGeom>
-          <a:noFill/>
-          <a:ln/>
-        </p:spPr>
-        <p:txBody>
-          <a:bodyPr wrap="square" lIns="0" tIns="0" rIns="0" bIns="0" rtlCol="0" anchor="ctr">
-            <a:normAutofit/>
-          </a:bodyPr>
-          <a:lstStyle/>
-          <a:p>
-            <a:pPr indent="0" marL="0">
-              <a:lnSpc>
-                <a:spcPct val="115000"/>
-              </a:lnSpc>
-              <a:buNone/>
-            </a:pPr>
-            <a:r>
-              <a:rPr lang="en-US" sz="1150" dirty="0">
-                <a:solidFill>
-                  <a:srgbClr val="718096"/>
-                </a:solidFill>
-                <a:latin typeface="Pretendard" pitchFamily="34" charset="0"/>
-                <a:ea typeface="Pretendard" pitchFamily="34" charset="-122"/>
-                <a:cs typeface="Pretendard" pitchFamily="34" charset="-120"/>
-              </a:rPr>
-              <a:t>(-) 담보대출 조달</a:t>
-            </a:r>
-            <a:endParaRPr lang="en-US" sz="1150" dirty="0"/>
-          </a:p>
-        </p:txBody>
-      </p:sp>
-      <p:sp>
-        <p:nvSpPr>
-          <p:cNvPr id="24" name="Text 22"/>
-          <p:cNvSpPr/>
-          <p:nvPr/>
-        </p:nvSpPr>
-        <p:spPr>
-          <a:xfrm>
-            <a:off x="3065425" y="4389120"/>
-            <a:ext cx="2664662" cy="475488"/>
-          </a:xfrm>
-          <a:prstGeom prst="rect">
-            <a:avLst/>
-          </a:prstGeom>
-          <a:noFill/>
-          <a:ln/>
-        </p:spPr>
-        <p:txBody>
-          <a:bodyPr wrap="square" lIns="0" tIns="0" rIns="0" bIns="0" rtlCol="0" anchor="ctr">
-            <a:normAutofit/>
-          </a:bodyPr>
-          <a:lstStyle/>
-          <a:p>
-            <a:pPr indent="0" marL="0">
-              <a:lnSpc>
-                <a:spcPct val="115000"/>
-              </a:lnSpc>
-              <a:buNone/>
-            </a:pPr>
-            <a:r>
-              <a:rPr lang="en-US" sz="1150" b="1" dirty="0">
-                <a:solidFill>
-                  <a:srgbClr val="10161F"/>
-                </a:solidFill>
-                <a:latin typeface="Pretendard" pitchFamily="34" charset="0"/>
-                <a:ea typeface="Pretendard" pitchFamily="34" charset="-122"/>
-                <a:cs typeface="Pretendard" pitchFamily="34" charset="-120"/>
-              </a:rPr>
-              <a:t>225억 원</a:t>
-            </a:r>
-            <a:endParaRPr lang="en-US" sz="1150" dirty="0"/>
-          </a:p>
-        </p:txBody>
-      </p:sp>
-      <p:sp>
-        <p:nvSpPr>
-          <p:cNvPr id="25" name="Shape 23"/>
-          <p:cNvSpPr/>
-          <p:nvPr/>
-        </p:nvSpPr>
-        <p:spPr>
-          <a:xfrm>
-            <a:off x="795528" y="4864608"/>
-            <a:ext cx="4934560" cy="0"/>
-          </a:xfrm>
-          <a:prstGeom prst="line">
-            <a:avLst/>
-          </a:prstGeom>
-          <a:noFill/>
-          <a:ln w="3810">
-            <a:solidFill>
-              <a:srgbClr val="CBD5E0"/>
-            </a:solidFill>
-            <a:prstDash val="solid"/>
-          </a:ln>
-        </p:spPr>
-      </p:sp>
-      <p:sp>
-        <p:nvSpPr>
-          <p:cNvPr id="26" name="Text 24"/>
-          <p:cNvSpPr/>
-          <p:nvPr/>
-        </p:nvSpPr>
-        <p:spPr>
-          <a:xfrm>
-            <a:off x="795528" y="4864608"/>
-            <a:ext cx="2269897" cy="475488"/>
-          </a:xfrm>
-          <a:prstGeom prst="rect">
-            <a:avLst/>
-          </a:prstGeom>
-          <a:noFill/>
-          <a:ln/>
-        </p:spPr>
-        <p:txBody>
-          <a:bodyPr wrap="square" lIns="0" tIns="0" rIns="0" bIns="0" rtlCol="0" anchor="ctr">
-            <a:normAutofit/>
-          </a:bodyPr>
-          <a:lstStyle/>
-          <a:p>
-            <a:pPr indent="0" marL="0">
-              <a:lnSpc>
-                <a:spcPct val="115000"/>
-              </a:lnSpc>
-              <a:buNone/>
-            </a:pPr>
-            <a:r>
-              <a:rPr lang="en-US" sz="1150" dirty="0">
-                <a:solidFill>
-                  <a:srgbClr val="718096"/>
-                </a:solidFill>
-                <a:latin typeface="Pretendard" pitchFamily="34" charset="0"/>
-                <a:ea typeface="Pretendard" pitchFamily="34" charset="-122"/>
-                <a:cs typeface="Pretendard" pitchFamily="34" charset="-120"/>
-              </a:rPr>
-              <a:t>실투자금 (Net Equity)</a:t>
-            </a:r>
-            <a:endParaRPr lang="en-US" sz="1150" dirty="0"/>
-          </a:p>
-        </p:txBody>
-      </p:sp>
-      <p:sp>
-        <p:nvSpPr>
-          <p:cNvPr id="27" name="Text 25"/>
-          <p:cNvSpPr/>
-          <p:nvPr/>
-        </p:nvSpPr>
-        <p:spPr>
-          <a:xfrm>
-            <a:off x="3065425" y="4864608"/>
-            <a:ext cx="2664662" cy="475488"/>
-          </a:xfrm>
-          <a:prstGeom prst="rect">
-            <a:avLst/>
-          </a:prstGeom>
-          <a:noFill/>
-          <a:ln/>
-        </p:spPr>
-        <p:txBody>
-          <a:bodyPr wrap="square" lIns="0" tIns="0" rIns="0" bIns="0" rtlCol="0" anchor="ctr">
-            <a:normAutofit/>
-          </a:bodyPr>
-          <a:lstStyle/>
-          <a:p>
-            <a:pPr indent="0" marL="0">
-              <a:lnSpc>
-                <a:spcPct val="115000"/>
-              </a:lnSpc>
-              <a:buNone/>
-            </a:pPr>
-            <a:r>
-              <a:rPr lang="en-US" sz="1150" b="1" dirty="0">
-                <a:solidFill>
-                  <a:srgbClr val="10161F"/>
-                </a:solidFill>
-                <a:latin typeface="Pretendard" pitchFamily="34" charset="0"/>
-                <a:ea typeface="Pretendard" pitchFamily="34" charset="-122"/>
-                <a:cs typeface="Pretendard" pitchFamily="34" charset="-120"/>
-              </a:rPr>
-              <a:t>249.8억 원</a:t>
-            </a:r>
-            <a:endParaRPr lang="en-US" sz="1150" dirty="0"/>
-          </a:p>
-        </p:txBody>
-      </p:sp>
-      <p:sp>
-        <p:nvSpPr>
-          <p:cNvPr id="28" name="Shape 26"/>
-          <p:cNvSpPr/>
-          <p:nvPr/>
-        </p:nvSpPr>
-        <p:spPr>
-          <a:xfrm>
-            <a:off x="6233008" y="1417320"/>
-            <a:ext cx="5391760" cy="4389120"/>
-          </a:xfrm>
-          <a:prstGeom prst="roundRect">
-            <a:avLst>
-              <a:gd name="adj" fmla="val 1250"/>
-            </a:avLst>
-          </a:prstGeom>
-          <a:solidFill>
-            <a:srgbClr val="F7FAFC"/>
-          </a:solidFill>
-          <a:ln w="6350">
-            <a:solidFill>
-              <a:srgbClr val="CBD5E0"/>
-            </a:solidFill>
-            <a:prstDash val="solid"/>
-          </a:ln>
-        </p:spPr>
-      </p:sp>
-      <p:sp>
-        <p:nvSpPr>
-          <p:cNvPr id="29" name="Text 27"/>
-          <p:cNvSpPr/>
-          <p:nvPr/>
-        </p:nvSpPr>
-        <p:spPr>
-          <a:xfrm>
-            <a:off x="6461608" y="1618488"/>
-            <a:ext cx="4934560" cy="320040"/>
-          </a:xfrm>
-          <a:prstGeom prst="rect">
-            <a:avLst/>
-          </a:prstGeom>
-          <a:noFill/>
-          <a:ln/>
-        </p:spPr>
-        <p:txBody>
-          <a:bodyPr wrap="square" lIns="0" tIns="0" rIns="0" bIns="0" rtlCol="0" anchor="ctr"/>
-          <a:lstStyle/>
-          <a:p>
-            <a:pPr indent="0" marL="0">
-              <a:buNone/>
-            </a:pPr>
-            <a:r>
-              <a:rPr lang="en-US" sz="1350" b="1" dirty="0">
-                <a:solidFill>
-                  <a:srgbClr val="977024"/>
-                </a:solidFill>
-                <a:latin typeface="Pretendard" pitchFamily="34" charset="0"/>
-                <a:ea typeface="Pretendard" pitchFamily="34" charset="-122"/>
-                <a:cs typeface="Pretendard" pitchFamily="34" charset="-120"/>
-              </a:rPr>
-              <a:t>2. LTV 시나리오별 레버리지 효과</a:t>
-            </a:r>
-            <a:endParaRPr lang="en-US" sz="1350" dirty="0"/>
-          </a:p>
-        </p:txBody>
-      </p:sp>
-      <p:graphicFrame>
-        <p:nvGraphicFramePr>
-          <p:cNvPr id="11" name="Table 0"/>
-          <p:cNvGraphicFramePr>
-            <a:graphicFrameLocks noGrp="1"/>
-          </p:cNvGraphicFramePr>
-          <p:nvPr>
-            <p:extLst>
-              <p:ext uri="{D42A27DB-BD31-4B8C-83A1-F6EECF244321}">
-                <p14:modId xmlns:p14="http://schemas.microsoft.com/office/powerpoint/2010/main" val="1579011935"/>
-              </p:ext>
-            </p:extLst>
-          </p:nvPr>
-        </p:nvGraphicFramePr>
-        <p:xfrm>
-          <a:off x="6461608" y="2057400"/>
-          <a:ext cx="4934560" cy="914400"/>
-        </p:xfrm>
-        <a:graphic>
-          <a:graphicData uri="http://schemas.openxmlformats.org/drawingml/2006/table">
-            <a:tbl>
-              <a:tblPr/>
-              <a:tblGrid>
-                <a:gridCol w="1463040"/>
-                <a:gridCol w="1005840"/>
-                <a:gridCol w="1280160"/>
-                <a:gridCol w="1280160"/>
-              </a:tblGrid>
-              <a:tr h="457200">
-                <a:tc>
-                  <a:txBody>
-                    <a:bodyPr/>
-                    <a:lstStyle/>
-                    <a:p>
-                      <a:pPr indent="0" marL="0">
-                        <a:buNone/>
-                      </a:pPr>
-                      <a:r>
-                        <a:rPr lang="en-US" sz="1100" b="1" dirty="0">
-                          <a:solidFill>
-                            <a:srgbClr val="FFFFFF"/>
-                          </a:solidFill>
-                          <a:latin typeface="Pretendard" pitchFamily="34" charset="0"/>
-                          <a:ea typeface="Pretendard" pitchFamily="34" charset="-122"/>
-                          <a:cs typeface="Pretendard" pitchFamily="34" charset="-120"/>
-                        </a:rPr>
-                        <a:t>구분</a:t>
-                      </a:r>
-                      <a:endParaRPr lang="en-US" sz="1100" dirty="0">
-                        <a:latin typeface="Pretendard" charset="0"/>
-                        <a:ea typeface="Pretendard" charset="0"/>
-                        <a:cs typeface="Pretendard" charset="0"/>
-                      </a:endParaRPr>
-                    </a:p>
-                  </a:txBody>
-                  <a:tcPr marL="50800" marR="50800" marT="25400" marB="25400" anchor="ctr">
-                    <a:lnL w="3810" cap="flat" cmpd="sng" algn="ctr">
-                      <a:solidFill>
-                        <a:srgbClr val="CBD5E0"/>
-                      </a:solidFill>
-                      <a:prstDash val="solid"/>
-                      <a:round/>
-                      <a:headEnd type="none" w="med" len="med"/>
-                      <a:tailEnd type="none" w="med" len="med"/>
-                    </a:lnL>
-                    <a:lnR w="3810" cap="flat" cmpd="sng" algn="ctr">
-                      <a:solidFill>
-                        <a:srgbClr val="CBD5E0"/>
-                      </a:solidFill>
-                      <a:prstDash val="solid"/>
-                      <a:round/>
-                      <a:headEnd type="none" w="med" len="med"/>
-                      <a:tailEnd type="none" w="med" len="med"/>
-                    </a:lnR>
-                    <a:lnT w="3810" cap="flat" cmpd="sng" algn="ctr">
-                      <a:solidFill>
-                        <a:srgbClr val="CBD5E0"/>
-                      </a:solidFill>
-                      <a:prstDash val="solid"/>
-                      <a:round/>
-                      <a:headEnd type="none" w="med" len="med"/>
-                      <a:tailEnd type="none" w="med" len="med"/>
-                    </a:lnT>
-                    <a:lnB w="3810" cap="flat" cmpd="sng" algn="ctr">
-                      <a:solidFill>
-                        <a:srgbClr val="CBD5E0"/>
-                      </a:solidFill>
-                      <a:prstDash val="solid"/>
-                      <a:round/>
-                      <a:headEnd type="none" w="med" len="med"/>
-                      <a:tailEnd type="none" w="med" len="med"/>
-                    </a:lnB>
-                    <a:solidFill>
-                      <a:srgbClr val="10161F"/>
-                    </a:solidFill>
-                  </a:tcPr>
-                </a:tc>
-                <a:tc>
-                  <a:txBody>
-                    <a:bodyPr/>
-                    <a:lstStyle/>
-                    <a:p>
-                      <a:pPr indent="0" marL="0">
-                        <a:buNone/>
-                      </a:pPr>
-                      <a:r>
-                        <a:rPr lang="en-US" sz="1100" b="1" dirty="0">
-                          <a:solidFill>
-                            <a:srgbClr val="FFFFFF"/>
-                          </a:solidFill>
-                          <a:latin typeface="Pretendard" pitchFamily="34" charset="0"/>
-                          <a:ea typeface="Pretendard" pitchFamily="34" charset="-122"/>
-                          <a:cs typeface="Pretendard" pitchFamily="34" charset="-120"/>
-                        </a:rPr>
-                        <a:t>대출비율</a:t>
-                      </a:r>
-                      <a:endParaRPr lang="en-US" sz="1100" dirty="0">
-                        <a:latin typeface="Pretendard" charset="0"/>
-                        <a:ea typeface="Pretendard" charset="0"/>
-                        <a:cs typeface="Pretendard" charset="0"/>
-                      </a:endParaRPr>
-                    </a:p>
-                  </a:txBody>
-                  <a:tcPr marL="50800" marR="50800" marT="25400" marB="25400" anchor="ctr">
-                    <a:lnL w="3810" cap="flat" cmpd="sng" algn="ctr">
-                      <a:solidFill>
-                        <a:srgbClr val="CBD5E0"/>
-                      </a:solidFill>
-                      <a:prstDash val="solid"/>
-                      <a:round/>
-                      <a:headEnd type="none" w="med" len="med"/>
-                      <a:tailEnd type="none" w="med" len="med"/>
-                    </a:lnL>
-                    <a:lnR w="3810" cap="flat" cmpd="sng" algn="ctr">
-                      <a:solidFill>
-                        <a:srgbClr val="CBD5E0"/>
-                      </a:solidFill>
-                      <a:prstDash val="solid"/>
-                      <a:round/>
-                      <a:headEnd type="none" w="med" len="med"/>
-                      <a:tailEnd type="none" w="med" len="med"/>
-                    </a:lnR>
-                    <a:lnT w="3810" cap="flat" cmpd="sng" algn="ctr">
-                      <a:solidFill>
-                        <a:srgbClr val="CBD5E0"/>
-                      </a:solidFill>
-                      <a:prstDash val="solid"/>
-                      <a:round/>
-                      <a:headEnd type="none" w="med" len="med"/>
-                      <a:tailEnd type="none" w="med" len="med"/>
-                    </a:lnT>
-                    <a:lnB w="3810" cap="flat" cmpd="sng" algn="ctr">
-                      <a:solidFill>
-                        <a:srgbClr val="CBD5E0"/>
-                      </a:solidFill>
-                      <a:prstDash val="solid"/>
-                      <a:round/>
-                      <a:headEnd type="none" w="med" len="med"/>
-                      <a:tailEnd type="none" w="med" len="med"/>
-                    </a:lnB>
-                    <a:solidFill>
-                      <a:srgbClr val="10161F"/>
-                    </a:solidFill>
-                  </a:tcPr>
-                </a:tc>
-                <a:tc>
-                  <a:txBody>
-                    <a:bodyPr/>
-                    <a:lstStyle/>
-                    <a:p>
-                      <a:pPr indent="0" marL="0">
-                        <a:buNone/>
-                      </a:pPr>
-                      <a:r>
-                        <a:rPr lang="en-US" sz="1100" b="1" dirty="0">
-                          <a:solidFill>
-                            <a:srgbClr val="FFFFFF"/>
-                          </a:solidFill>
-                          <a:latin typeface="Pretendard" pitchFamily="34" charset="0"/>
-                          <a:ea typeface="Pretendard" pitchFamily="34" charset="-122"/>
-                          <a:cs typeface="Pretendard" pitchFamily="34" charset="-120"/>
-                        </a:rPr>
-                        <a:t>실투자금</a:t>
-                      </a:r>
-                      <a:endParaRPr lang="en-US" sz="1100" dirty="0">
-                        <a:latin typeface="Pretendard" charset="0"/>
-                        <a:ea typeface="Pretendard" charset="0"/>
-                        <a:cs typeface="Pretendard" charset="0"/>
-                      </a:endParaRPr>
-                    </a:p>
-                  </a:txBody>
-                  <a:tcPr marL="50800" marR="50800" marT="25400" marB="25400" anchor="ctr">
-                    <a:lnL w="3810" cap="flat" cmpd="sng" algn="ctr">
-                      <a:solidFill>
-                        <a:srgbClr val="CBD5E0"/>
-                      </a:solidFill>
-                      <a:prstDash val="solid"/>
-                      <a:round/>
-                      <a:headEnd type="none" w="med" len="med"/>
-                      <a:tailEnd type="none" w="med" len="med"/>
-                    </a:lnL>
-                    <a:lnR w="3810" cap="flat" cmpd="sng" algn="ctr">
-                      <a:solidFill>
-                        <a:srgbClr val="CBD5E0"/>
-                      </a:solidFill>
-                      <a:prstDash val="solid"/>
-                      <a:round/>
-                      <a:headEnd type="none" w="med" len="med"/>
-                      <a:tailEnd type="none" w="med" len="med"/>
-                    </a:lnR>
-                    <a:lnT w="3810" cap="flat" cmpd="sng" algn="ctr">
-                      <a:solidFill>
-                        <a:srgbClr val="CBD5E0"/>
-                      </a:solidFill>
-                      <a:prstDash val="solid"/>
-                      <a:round/>
-                      <a:headEnd type="none" w="med" len="med"/>
-                      <a:tailEnd type="none" w="med" len="med"/>
-                    </a:lnT>
-                    <a:lnB w="3810" cap="flat" cmpd="sng" algn="ctr">
-                      <a:solidFill>
-                        <a:srgbClr val="CBD5E0"/>
-                      </a:solidFill>
-                      <a:prstDash val="solid"/>
-                      <a:round/>
-                      <a:headEnd type="none" w="med" len="med"/>
-                      <a:tailEnd type="none" w="med" len="med"/>
-                    </a:lnB>
-                    <a:solidFill>
-                      <a:srgbClr val="10161F"/>
-                    </a:solidFill>
-                  </a:tcPr>
-                </a:tc>
-                <a:tc>
-                  <a:txBody>
-                    <a:bodyPr/>
-                    <a:lstStyle/>
-                    <a:p>
-                      <a:pPr indent="0" marL="0">
-                        <a:buNone/>
-                      </a:pPr>
-                      <a:r>
-                        <a:rPr lang="en-US" sz="1100" b="1" dirty="0">
-                          <a:solidFill>
-                            <a:srgbClr val="FFFFFF"/>
-                          </a:solidFill>
-                          <a:latin typeface="Pretendard" pitchFamily="34" charset="0"/>
-                          <a:ea typeface="Pretendard" pitchFamily="34" charset="-122"/>
-                          <a:cs typeface="Pretendard" pitchFamily="34" charset="-120"/>
-                        </a:rPr>
-                        <a:t>예상수익률</a:t>
-                      </a:r>
-                      <a:endParaRPr lang="en-US" sz="1100" dirty="0">
-                        <a:latin typeface="Pretendard" charset="0"/>
-                        <a:ea typeface="Pretendard" charset="0"/>
-                        <a:cs typeface="Pretendard" charset="0"/>
-                      </a:endParaRPr>
-                    </a:p>
-                  </a:txBody>
-                  <a:tcPr marL="50800" marR="50800" marT="25400" marB="25400" anchor="ctr">
-                    <a:lnL w="3810" cap="flat" cmpd="sng" algn="ctr">
-                      <a:solidFill>
-                        <a:srgbClr val="CBD5E0"/>
-                      </a:solidFill>
-                      <a:prstDash val="solid"/>
-                      <a:round/>
-                      <a:headEnd type="none" w="med" len="med"/>
-                      <a:tailEnd type="none" w="med" len="med"/>
-                    </a:lnL>
-                    <a:lnR w="3810" cap="flat" cmpd="sng" algn="ctr">
-                      <a:solidFill>
-                        <a:srgbClr val="CBD5E0"/>
-                      </a:solidFill>
-                      <a:prstDash val="solid"/>
-                      <a:round/>
-                      <a:headEnd type="none" w="med" len="med"/>
-                      <a:tailEnd type="none" w="med" len="med"/>
-                    </a:lnR>
-                    <a:lnT w="3810" cap="flat" cmpd="sng" algn="ctr">
-                      <a:solidFill>
-                        <a:srgbClr val="CBD5E0"/>
-                      </a:solidFill>
-                      <a:prstDash val="solid"/>
-                      <a:round/>
-                      <a:headEnd type="none" w="med" len="med"/>
-                      <a:tailEnd type="none" w="med" len="med"/>
-                    </a:lnT>
-                    <a:lnB w="3810" cap="flat" cmpd="sng" algn="ctr">
-                      <a:solidFill>
-                        <a:srgbClr val="CBD5E0"/>
-                      </a:solidFill>
-                      <a:prstDash val="solid"/>
-                      <a:round/>
-                      <a:headEnd type="none" w="med" len="med"/>
-                      <a:tailEnd type="none" w="med" len="med"/>
-                    </a:lnB>
-                    <a:solidFill>
-                      <a:srgbClr val="10161F"/>
-                    </a:solidFill>
-                  </a:tcPr>
-                </a:tc>
-              </a:tr>
-              <a:tr h="457200">
-                <a:tc>
-                  <a:txBody>
-                    <a:bodyPr/>
-                    <a:lstStyle/>
-                    <a:p>
-                      <a:pPr indent="0" marL="0">
-                        <a:buNone/>
-                      </a:pPr>
-                      <a:r>
-                        <a:rPr lang="en-US" sz="1100" b="1" dirty="0">
-                          <a:solidFill>
-                            <a:srgbClr val="10161F"/>
-                          </a:solidFill>
-                          <a:latin typeface="Pretendard" pitchFamily="34" charset="0"/>
-                          <a:ea typeface="Pretendard" pitchFamily="34" charset="-122"/>
-                          <a:cs typeface="Pretendard" pitchFamily="34" charset="-120"/>
-                        </a:rPr>
-                        <a:t>전액 </a:t>
-                      </a:r>
-                      <a:pPr indent="0" marL="0">
-                        <a:buNone/>
-                      </a:pPr>
-                      <a:r>
-                        <a:rPr lang="en-US" sz="1100" b="1" dirty="0">
-                          <a:solidFill>
-                            <a:srgbClr val="10161F"/>
-                          </a:solidFill>
-                          <a:latin typeface="Pretendard" pitchFamily="34" charset="0"/>
-                          <a:ea typeface="Pretendard" pitchFamily="34" charset="-122"/>
-                          <a:cs typeface="Pretendard" pitchFamily="34" charset="-120"/>
-                        </a:rPr>
-                        <a:t>자기자본 </a:t>
-                      </a:r>
-                      <a:pPr indent="0" marL="0">
-                        <a:buNone/>
-                      </a:pPr>
-                      <a:r>
-                        <a:rPr lang="en-US" sz="1100" b="1" dirty="0">
-                          <a:solidFill>
-                            <a:srgbClr val="10161F"/>
-                          </a:solidFill>
-                          <a:latin typeface="Pretendard" pitchFamily="34" charset="0"/>
-                          <a:ea typeface="Pretendard" pitchFamily="34" charset="-122"/>
-                          <a:cs typeface="Pretendard" pitchFamily="34" charset="-120"/>
-                        </a:rPr>
-                        <a:t>(무차입)</a:t>
-                      </a:r>
-                      <a:endParaRPr lang="en-US" sz="1100" dirty="0">
-                        <a:latin typeface="Pretendard" charset="0"/>
-                        <a:ea typeface="Pretendard" charset="0"/>
-                        <a:cs typeface="Pretendard" charset="0"/>
-                      </a:endParaRPr>
-                    </a:p>
-                  </a:txBody>
-                  <a:tcPr marL="50800" marR="50800" marT="25400" marB="25400" anchor="ctr">
-                    <a:lnL w="3810" cap="flat" cmpd="sng" algn="ctr">
-                      <a:solidFill>
-                        <a:srgbClr val="CBD5E0"/>
-                      </a:solidFill>
-                      <a:prstDash val="solid"/>
-                      <a:round/>
-                      <a:headEnd type="none" w="med" len="med"/>
-                      <a:tailEnd type="none" w="med" len="med"/>
-                    </a:lnL>
-                    <a:lnR w="3810" cap="flat" cmpd="sng" algn="ctr">
-                      <a:solidFill>
-                        <a:srgbClr val="CBD5E0"/>
-                      </a:solidFill>
-                      <a:prstDash val="solid"/>
-                      <a:round/>
-                      <a:headEnd type="none" w="med" len="med"/>
-                      <a:tailEnd type="none" w="med" len="med"/>
-                    </a:lnR>
-                    <a:lnT w="3810" cap="flat" cmpd="sng" algn="ctr">
-                      <a:solidFill>
-                        <a:srgbClr val="CBD5E0"/>
-                      </a:solidFill>
-                      <a:prstDash val="solid"/>
-                      <a:round/>
-                      <a:headEnd type="none" w="med" len="med"/>
-                      <a:tailEnd type="none" w="med" len="med"/>
-                    </a:lnT>
-                    <a:lnB w="3810" cap="flat" cmpd="sng" algn="ctr">
-                      <a:solidFill>
-                        <a:srgbClr val="CBD5E0"/>
-                      </a:solidFill>
-                      <a:prstDash val="solid"/>
-                      <a:round/>
-                      <a:headEnd type="none" w="med" len="med"/>
-                      <a:tailEnd type="none" w="med" len="med"/>
-                    </a:lnB>
-                    <a:solidFill>
-                      <a:srgbClr val="FFFFFF"/>
-                    </a:solidFill>
-                  </a:tcPr>
-                </a:tc>
-                <a:tc>
-                  <a:txBody>
-                    <a:bodyPr/>
-                    <a:lstStyle/>
-                    <a:p>
-                      <a:pPr indent="0" marL="0">
-                        <a:buNone/>
-                      </a:pPr>
-                      <a:r>
-                        <a:rPr lang="en-US" sz="1100" dirty="0">
-                          <a:solidFill>
-                            <a:srgbClr val="10161F"/>
-                          </a:solidFill>
-                          <a:latin typeface="Pretendard" pitchFamily="34" charset="0"/>
-                          <a:ea typeface="Pretendard" pitchFamily="34" charset="-122"/>
-                          <a:cs typeface="Pretendard" pitchFamily="34" charset="-120"/>
-                        </a:rPr>
-                        <a:t>0%</a:t>
-                      </a:r>
-                      <a:endParaRPr lang="en-US" sz="1100" dirty="0">
-                        <a:latin typeface="Pretendard" charset="0"/>
-                        <a:ea typeface="Pretendard" charset="0"/>
-                        <a:cs typeface="Pretendard" charset="0"/>
-                      </a:endParaRPr>
-                    </a:p>
-                  </a:txBody>
-                  <a:tcPr marL="50800" marR="50800" marT="25400" marB="25400" anchor="ctr">
-                    <a:lnL w="3810" cap="flat" cmpd="sng" algn="ctr">
-                      <a:solidFill>
-                        <a:srgbClr val="CBD5E0"/>
-                      </a:solidFill>
-                      <a:prstDash val="solid"/>
-                      <a:round/>
-                      <a:headEnd type="none" w="med" len="med"/>
-                      <a:tailEnd type="none" w="med" len="med"/>
-                    </a:lnL>
-                    <a:lnR w="3810" cap="flat" cmpd="sng" algn="ctr">
-                      <a:solidFill>
-                        <a:srgbClr val="CBD5E0"/>
-                      </a:solidFill>
-                      <a:prstDash val="solid"/>
-                      <a:round/>
-                      <a:headEnd type="none" w="med" len="med"/>
-                      <a:tailEnd type="none" w="med" len="med"/>
-                    </a:lnR>
-                    <a:lnT w="3810" cap="flat" cmpd="sng" algn="ctr">
-                      <a:solidFill>
-                        <a:srgbClr val="CBD5E0"/>
-                      </a:solidFill>
-                      <a:prstDash val="solid"/>
-                      <a:round/>
-                      <a:headEnd type="none" w="med" len="med"/>
-                      <a:tailEnd type="none" w="med" len="med"/>
-                    </a:lnT>
-                    <a:lnB w="3810" cap="flat" cmpd="sng" algn="ctr">
-                      <a:solidFill>
-                        <a:srgbClr val="CBD5E0"/>
-                      </a:solidFill>
-                      <a:prstDash val="solid"/>
-                      <a:round/>
-                      <a:headEnd type="none" w="med" len="med"/>
-                      <a:tailEnd type="none" w="med" len="med"/>
-                    </a:lnB>
-                    <a:solidFill>
-                      <a:srgbClr val="FFFFFF"/>
-                    </a:solidFill>
-                  </a:tcPr>
-                </a:tc>
-                <a:tc>
-                  <a:txBody>
-                    <a:bodyPr/>
-                    <a:lstStyle/>
-                    <a:p>
-                      <a:pPr indent="0" marL="0">
-                        <a:buNone/>
-                      </a:pPr>
-                      <a:r>
-                        <a:rPr lang="en-US" sz="1100" dirty="0">
-                          <a:solidFill>
-                            <a:srgbClr val="10161F"/>
-                          </a:solidFill>
-                          <a:latin typeface="Pretendard" pitchFamily="34" charset="0"/>
-                          <a:ea typeface="Pretendard" pitchFamily="34" charset="-122"/>
-                          <a:cs typeface="Pretendard" pitchFamily="34" charset="-120"/>
-                        </a:rPr>
-                        <a:t>474.8억</a:t>
-                      </a:r>
-                      <a:endParaRPr lang="en-US" sz="1100" dirty="0">
-                        <a:latin typeface="Pretendard" charset="0"/>
-                        <a:ea typeface="Pretendard" charset="0"/>
-                        <a:cs typeface="Pretendard" charset="0"/>
-                      </a:endParaRPr>
-                    </a:p>
-                  </a:txBody>
-                  <a:tcPr marL="50800" marR="50800" marT="25400" marB="25400" anchor="ctr">
-                    <a:lnL w="3810" cap="flat" cmpd="sng" algn="ctr">
-                      <a:solidFill>
-                        <a:srgbClr val="CBD5E0"/>
-                      </a:solidFill>
-                      <a:prstDash val="solid"/>
-                      <a:round/>
-                      <a:headEnd type="none" w="med" len="med"/>
-                      <a:tailEnd type="none" w="med" len="med"/>
-                    </a:lnL>
-                    <a:lnR w="3810" cap="flat" cmpd="sng" algn="ctr">
-                      <a:solidFill>
-                        <a:srgbClr val="CBD5E0"/>
-                      </a:solidFill>
-                      <a:prstDash val="solid"/>
-                      <a:round/>
-                      <a:headEnd type="none" w="med" len="med"/>
-                      <a:tailEnd type="none" w="med" len="med"/>
-                    </a:lnR>
-                    <a:lnT w="3810" cap="flat" cmpd="sng" algn="ctr">
-                      <a:solidFill>
-                        <a:srgbClr val="CBD5E0"/>
-                      </a:solidFill>
-                      <a:prstDash val="solid"/>
-                      <a:round/>
-                      <a:headEnd type="none" w="med" len="med"/>
-                      <a:tailEnd type="none" w="med" len="med"/>
-                    </a:lnT>
-                    <a:lnB w="3810" cap="flat" cmpd="sng" algn="ctr">
-                      <a:solidFill>
-                        <a:srgbClr val="CBD5E0"/>
-                      </a:solidFill>
-                      <a:prstDash val="solid"/>
-                      <a:round/>
-                      <a:headEnd type="none" w="med" len="med"/>
-                      <a:tailEnd type="none" w="med" len="med"/>
-                    </a:lnB>
-                    <a:solidFill>
-                      <a:srgbClr val="FFFFFF"/>
-                    </a:solidFill>
-                  </a:tcPr>
-                </a:tc>
-                <a:tc>
-                  <a:txBody>
-                    <a:bodyPr/>
-                    <a:lstStyle/>
-                    <a:p>
-                      <a:pPr indent="0" marL="0">
-                        <a:buNone/>
-                      </a:pPr>
-                      <a:r>
-                        <a:rPr lang="en-US" sz="1100" dirty="0">
-                          <a:solidFill>
-                            <a:srgbClr val="10161F"/>
-                          </a:solidFill>
-                          <a:latin typeface="Pretendard" pitchFamily="34" charset="0"/>
-                          <a:ea typeface="Pretendard" pitchFamily="34" charset="-122"/>
-                          <a:cs typeface="Pretendard" pitchFamily="34" charset="-120"/>
-                        </a:rPr>
-                        <a:t>-</a:t>
-                      </a:r>
-                      <a:endParaRPr lang="en-US" sz="1100" dirty="0">
-                        <a:latin typeface="Pretendard" charset="0"/>
-                        <a:ea typeface="Pretendard" charset="0"/>
-                        <a:cs typeface="Pretendard" charset="0"/>
-                      </a:endParaRPr>
-                    </a:p>
-                  </a:txBody>
-                  <a:tcPr marL="50800" marR="50800" marT="25400" marB="25400" anchor="ctr">
-                    <a:lnL w="3810" cap="flat" cmpd="sng" algn="ctr">
-                      <a:solidFill>
-                        <a:srgbClr val="CBD5E0"/>
-                      </a:solidFill>
-                      <a:prstDash val="solid"/>
-                      <a:round/>
-                      <a:headEnd type="none" w="med" len="med"/>
-                      <a:tailEnd type="none" w="med" len="med"/>
-                    </a:lnL>
-                    <a:lnR w="3810" cap="flat" cmpd="sng" algn="ctr">
-                      <a:solidFill>
-                        <a:srgbClr val="CBD5E0"/>
-                      </a:solidFill>
-                      <a:prstDash val="solid"/>
-                      <a:round/>
-                      <a:headEnd type="none" w="med" len="med"/>
-                      <a:tailEnd type="none" w="med" len="med"/>
-                    </a:lnR>
-                    <a:lnT w="3810" cap="flat" cmpd="sng" algn="ctr">
-                      <a:solidFill>
-                        <a:srgbClr val="CBD5E0"/>
-                      </a:solidFill>
-                      <a:prstDash val="solid"/>
-                      <a:round/>
-                      <a:headEnd type="none" w="med" len="med"/>
-                      <a:tailEnd type="none" w="med" len="med"/>
-                    </a:lnT>
-                    <a:lnB w="3810" cap="flat" cmpd="sng" algn="ctr">
-                      <a:solidFill>
-                        <a:srgbClr val="CBD5E0"/>
-                      </a:solidFill>
-                      <a:prstDash val="solid"/>
-                      <a:round/>
-                      <a:headEnd type="none" w="med" len="med"/>
-                      <a:tailEnd type="none" w="med" len="med"/>
-                    </a:lnB>
-                    <a:solidFill>
-                      <a:srgbClr val="FFFFFF"/>
-                    </a:solidFill>
-                  </a:tcPr>
-                </a:tc>
-              </a:tr>
-              <a:tr h="457200">
-                <a:tc>
-                  <a:txBody>
-                    <a:bodyPr/>
-                    <a:lstStyle/>
-                    <a:p>
-                      <a:pPr indent="0" marL="0">
-                        <a:buNone/>
-                      </a:pPr>
-                      <a:r>
-                        <a:rPr lang="en-US" sz="1100" b="1" dirty="0">
-                          <a:solidFill>
-                            <a:srgbClr val="10161F"/>
-                          </a:solidFill>
-                          <a:latin typeface="Pretendard" pitchFamily="34" charset="0"/>
-                          <a:ea typeface="Pretendard" pitchFamily="34" charset="-122"/>
-                          <a:cs typeface="Pretendard" pitchFamily="34" charset="-120"/>
-                        </a:rPr>
-                        <a:t>보수적 </a:t>
-                      </a:r>
-                      <a:pPr indent="0" marL="0">
-                        <a:buNone/>
-                      </a:pPr>
-                      <a:r>
-                        <a:rPr lang="en-US" sz="1100" b="1" dirty="0">
-                          <a:solidFill>
-                            <a:srgbClr val="10161F"/>
-                          </a:solidFill>
-                          <a:latin typeface="Pretendard" pitchFamily="34" charset="0"/>
-                          <a:ea typeface="Pretendard" pitchFamily="34" charset="-122"/>
-                          <a:cs typeface="Pretendard" pitchFamily="34" charset="-120"/>
-                        </a:rPr>
-                        <a:t>차입 </a:t>
-                      </a:r>
-                      <a:pPr indent="0" marL="0">
-                        <a:buNone/>
-                      </a:pPr>
-                      <a:r>
-                        <a:rPr lang="en-US" sz="1100" b="1" dirty="0">
-                          <a:solidFill>
-                            <a:srgbClr val="10161F"/>
-                          </a:solidFill>
-                          <a:latin typeface="Pretendard" pitchFamily="34" charset="0"/>
-                          <a:ea typeface="Pretendard" pitchFamily="34" charset="-122"/>
-                          <a:cs typeface="Pretendard" pitchFamily="34" charset="-120"/>
-                        </a:rPr>
-                        <a:t>(안정형)</a:t>
-                      </a:r>
-                      <a:endParaRPr lang="en-US" sz="1100" dirty="0">
-                        <a:latin typeface="Pretendard" charset="0"/>
-                        <a:ea typeface="Pretendard" charset="0"/>
-                        <a:cs typeface="Pretendard" charset="0"/>
-                      </a:endParaRPr>
-                    </a:p>
-                  </a:txBody>
-                  <a:tcPr marL="50800" marR="50800" marT="25400" marB="25400" anchor="ctr">
-                    <a:lnL w="3810" cap="flat" cmpd="sng" algn="ctr">
-                      <a:solidFill>
-                        <a:srgbClr val="CBD5E0"/>
-                      </a:solidFill>
-                      <a:prstDash val="solid"/>
-                      <a:round/>
-                      <a:headEnd type="none" w="med" len="med"/>
-                      <a:tailEnd type="none" w="med" len="med"/>
-                    </a:lnL>
-                    <a:lnR w="3810" cap="flat" cmpd="sng" algn="ctr">
-                      <a:solidFill>
-                        <a:srgbClr val="CBD5E0"/>
-                      </a:solidFill>
-                      <a:prstDash val="solid"/>
-                      <a:round/>
-                      <a:headEnd type="none" w="med" len="med"/>
-                      <a:tailEnd type="none" w="med" len="med"/>
-                    </a:lnR>
-                    <a:lnT w="3810" cap="flat" cmpd="sng" algn="ctr">
-                      <a:solidFill>
-                        <a:srgbClr val="CBD5E0"/>
-                      </a:solidFill>
-                      <a:prstDash val="solid"/>
-                      <a:round/>
-                      <a:headEnd type="none" w="med" len="med"/>
-                      <a:tailEnd type="none" w="med" len="med"/>
-                    </a:lnT>
-                    <a:lnB w="3810" cap="flat" cmpd="sng" algn="ctr">
-                      <a:solidFill>
-                        <a:srgbClr val="CBD5E0"/>
-                      </a:solidFill>
-                      <a:prstDash val="solid"/>
-                      <a:round/>
-                      <a:headEnd type="none" w="med" len="med"/>
-                      <a:tailEnd type="none" w="med" len="med"/>
-                    </a:lnB>
-                    <a:solidFill>
-                      <a:srgbClr val="F7FAFC"/>
-                    </a:solidFill>
-                  </a:tcPr>
-                </a:tc>
-                <a:tc>
-                  <a:txBody>
-                    <a:bodyPr/>
-                    <a:lstStyle/>
-                    <a:p>
-                      <a:pPr indent="0" marL="0">
-                        <a:buNone/>
-                      </a:pPr>
-                      <a:r>
-                        <a:rPr lang="en-US" sz="1100" dirty="0">
-                          <a:solidFill>
-                            <a:srgbClr val="10161F"/>
-                          </a:solidFill>
-                          <a:latin typeface="Pretendard" pitchFamily="34" charset="0"/>
-                          <a:ea typeface="Pretendard" pitchFamily="34" charset="-122"/>
-                          <a:cs typeface="Pretendard" pitchFamily="34" charset="-120"/>
-                        </a:rPr>
-                        <a:t>40%</a:t>
-                      </a:r>
-                      <a:endParaRPr lang="en-US" sz="1100" dirty="0">
-                        <a:latin typeface="Pretendard" charset="0"/>
-                        <a:ea typeface="Pretendard" charset="0"/>
-                        <a:cs typeface="Pretendard" charset="0"/>
-                      </a:endParaRPr>
-                    </a:p>
-                  </a:txBody>
-                  <a:tcPr marL="50800" marR="50800" marT="25400" marB="25400" anchor="ctr">
-                    <a:lnL w="3810" cap="flat" cmpd="sng" algn="ctr">
-                      <a:solidFill>
-                        <a:srgbClr val="CBD5E0"/>
-                      </a:solidFill>
-                      <a:prstDash val="solid"/>
-                      <a:round/>
-                      <a:headEnd type="none" w="med" len="med"/>
-                      <a:tailEnd type="none" w="med" len="med"/>
-                    </a:lnL>
-                    <a:lnR w="3810" cap="flat" cmpd="sng" algn="ctr">
-                      <a:solidFill>
-                        <a:srgbClr val="CBD5E0"/>
-                      </a:solidFill>
-                      <a:prstDash val="solid"/>
-                      <a:round/>
-                      <a:headEnd type="none" w="med" len="med"/>
-                      <a:tailEnd type="none" w="med" len="med"/>
-                    </a:lnR>
-                    <a:lnT w="3810" cap="flat" cmpd="sng" algn="ctr">
-                      <a:solidFill>
-                        <a:srgbClr val="CBD5E0"/>
-                      </a:solidFill>
-                      <a:prstDash val="solid"/>
-                      <a:round/>
-                      <a:headEnd type="none" w="med" len="med"/>
-                      <a:tailEnd type="none" w="med" len="med"/>
-                    </a:lnT>
-                    <a:lnB w="3810" cap="flat" cmpd="sng" algn="ctr">
-                      <a:solidFill>
-                        <a:srgbClr val="CBD5E0"/>
-                      </a:solidFill>
-                      <a:prstDash val="solid"/>
-                      <a:round/>
-                      <a:headEnd type="none" w="med" len="med"/>
-                      <a:tailEnd type="none" w="med" len="med"/>
-                    </a:lnB>
-                    <a:solidFill>
-                      <a:srgbClr val="F7FAFC"/>
-                    </a:solidFill>
-                  </a:tcPr>
-                </a:tc>
-                <a:tc>
-                  <a:txBody>
-                    <a:bodyPr/>
-                    <a:lstStyle/>
-                    <a:p>
-                      <a:pPr indent="0" marL="0">
-                        <a:buNone/>
-                      </a:pPr>
-                      <a:r>
-                        <a:rPr lang="en-US" sz="1100" dirty="0">
-                          <a:solidFill>
-                            <a:srgbClr val="10161F"/>
-                          </a:solidFill>
-                          <a:latin typeface="Pretendard" pitchFamily="34" charset="0"/>
-                          <a:ea typeface="Pretendard" pitchFamily="34" charset="-122"/>
-                          <a:cs typeface="Pretendard" pitchFamily="34" charset="-120"/>
-                        </a:rPr>
-                        <a:t>294.8억</a:t>
-                      </a:r>
-                      <a:endParaRPr lang="en-US" sz="1100" dirty="0">
-                        <a:latin typeface="Pretendard" charset="0"/>
-                        <a:ea typeface="Pretendard" charset="0"/>
-                        <a:cs typeface="Pretendard" charset="0"/>
-                      </a:endParaRPr>
-                    </a:p>
-                  </a:txBody>
-                  <a:tcPr marL="50800" marR="50800" marT="25400" marB="25400" anchor="ctr">
-                    <a:lnL w="3810" cap="flat" cmpd="sng" algn="ctr">
-                      <a:solidFill>
-                        <a:srgbClr val="CBD5E0"/>
-                      </a:solidFill>
-                      <a:prstDash val="solid"/>
-                      <a:round/>
-                      <a:headEnd type="none" w="med" len="med"/>
-                      <a:tailEnd type="none" w="med" len="med"/>
-                    </a:lnL>
-                    <a:lnR w="3810" cap="flat" cmpd="sng" algn="ctr">
-                      <a:solidFill>
-                        <a:srgbClr val="CBD5E0"/>
-                      </a:solidFill>
-                      <a:prstDash val="solid"/>
-                      <a:round/>
-                      <a:headEnd type="none" w="med" len="med"/>
-                      <a:tailEnd type="none" w="med" len="med"/>
-                    </a:lnR>
-                    <a:lnT w="3810" cap="flat" cmpd="sng" algn="ctr">
-                      <a:solidFill>
-                        <a:srgbClr val="CBD5E0"/>
-                      </a:solidFill>
-                      <a:prstDash val="solid"/>
-                      <a:round/>
-                      <a:headEnd type="none" w="med" len="med"/>
-                      <a:tailEnd type="none" w="med" len="med"/>
-                    </a:lnT>
-                    <a:lnB w="3810" cap="flat" cmpd="sng" algn="ctr">
-                      <a:solidFill>
-                        <a:srgbClr val="CBD5E0"/>
-                      </a:solidFill>
-                      <a:prstDash val="solid"/>
-                      <a:round/>
-                      <a:headEnd type="none" w="med" len="med"/>
-                      <a:tailEnd type="none" w="med" len="med"/>
-                    </a:lnB>
-                    <a:solidFill>
-                      <a:srgbClr val="F7FAFC"/>
-                    </a:solidFill>
-                  </a:tcPr>
-                </a:tc>
-                <a:tc>
-                  <a:txBody>
-                    <a:bodyPr/>
-                    <a:lstStyle/>
-                    <a:p>
-                      <a:pPr indent="0" marL="0">
-                        <a:buNone/>
-                      </a:pPr>
-                      <a:r>
-                        <a:rPr lang="en-US" sz="1100" dirty="0">
-                          <a:solidFill>
-                            <a:srgbClr val="10161F"/>
-                          </a:solidFill>
-                          <a:latin typeface="Pretendard" pitchFamily="34" charset="0"/>
-                          <a:ea typeface="Pretendard" pitchFamily="34" charset="-122"/>
-                          <a:cs typeface="Pretendard" pitchFamily="34" charset="-120"/>
-                        </a:rPr>
-                        <a:t>-</a:t>
-                      </a:r>
-                      <a:endParaRPr lang="en-US" sz="1100" dirty="0">
-                        <a:latin typeface="Pretendard" charset="0"/>
-                        <a:ea typeface="Pretendard" charset="0"/>
-                        <a:cs typeface="Pretendard" charset="0"/>
-                      </a:endParaRPr>
-                    </a:p>
-                  </a:txBody>
-                  <a:tcPr marL="50800" marR="50800" marT="25400" marB="25400" anchor="ctr">
-                    <a:lnL w="3810" cap="flat" cmpd="sng" algn="ctr">
-                      <a:solidFill>
-                        <a:srgbClr val="CBD5E0"/>
-                      </a:solidFill>
-                      <a:prstDash val="solid"/>
-                      <a:round/>
-                      <a:headEnd type="none" w="med" len="med"/>
-                      <a:tailEnd type="none" w="med" len="med"/>
-                    </a:lnL>
-                    <a:lnR w="3810" cap="flat" cmpd="sng" algn="ctr">
-                      <a:solidFill>
-                        <a:srgbClr val="CBD5E0"/>
-                      </a:solidFill>
-                      <a:prstDash val="solid"/>
-                      <a:round/>
-                      <a:headEnd type="none" w="med" len="med"/>
-                      <a:tailEnd type="none" w="med" len="med"/>
-                    </a:lnR>
-                    <a:lnT w="3810" cap="flat" cmpd="sng" algn="ctr">
-                      <a:solidFill>
-                        <a:srgbClr val="CBD5E0"/>
-                      </a:solidFill>
-                      <a:prstDash val="solid"/>
-                      <a:round/>
-                      <a:headEnd type="none" w="med" len="med"/>
-                      <a:tailEnd type="none" w="med" len="med"/>
-                    </a:lnT>
-                    <a:lnB w="3810" cap="flat" cmpd="sng" algn="ctr">
-                      <a:solidFill>
-                        <a:srgbClr val="CBD5E0"/>
-                      </a:solidFill>
-                      <a:prstDash val="solid"/>
-                      <a:round/>
-                      <a:headEnd type="none" w="med" len="med"/>
-                      <a:tailEnd type="none" w="med" len="med"/>
-                    </a:lnB>
-                    <a:solidFill>
-                      <a:srgbClr val="F7FAFC"/>
-                    </a:solidFill>
-                  </a:tcPr>
-                </a:tc>
-              </a:tr>
-              <a:tr h="457200">
-                <a:tc>
-                  <a:txBody>
-                    <a:bodyPr/>
-                    <a:lstStyle/>
-                    <a:p>
-                      <a:pPr indent="0" marL="0">
-                        <a:buNone/>
-                      </a:pPr>
-                      <a:r>
-                        <a:rPr lang="en-US" sz="1100" b="1" dirty="0">
-                          <a:solidFill>
-                            <a:srgbClr val="10161F"/>
-                          </a:solidFill>
-                          <a:latin typeface="Pretendard" pitchFamily="34" charset="0"/>
-                          <a:ea typeface="Pretendard" pitchFamily="34" charset="-122"/>
-                          <a:cs typeface="Pretendard" pitchFamily="34" charset="-120"/>
-                        </a:rPr>
-                        <a:t>표준 </a:t>
-                      </a:r>
-                      <a:pPr indent="0" marL="0">
-                        <a:buNone/>
-                      </a:pPr>
-                      <a:r>
-                        <a:rPr lang="en-US" sz="1100" b="1" dirty="0">
-                          <a:solidFill>
-                            <a:srgbClr val="10161F"/>
-                          </a:solidFill>
-                          <a:latin typeface="Pretendard" pitchFamily="34" charset="0"/>
-                          <a:ea typeface="Pretendard" pitchFamily="34" charset="-122"/>
-                          <a:cs typeface="Pretendard" pitchFamily="34" charset="-120"/>
-                        </a:rPr>
-                        <a:t>차입 </a:t>
-                      </a:r>
-                      <a:pPr indent="0" marL="0">
-                        <a:buNone/>
-                      </a:pPr>
-                      <a:r>
-                        <a:rPr lang="en-US" sz="1100" b="1" dirty="0">
-                          <a:solidFill>
-                            <a:srgbClr val="10161F"/>
-                          </a:solidFill>
-                          <a:latin typeface="Pretendard" pitchFamily="34" charset="0"/>
-                          <a:ea typeface="Pretendard" pitchFamily="34" charset="-122"/>
-                          <a:cs typeface="Pretendard" pitchFamily="34" charset="-120"/>
-                        </a:rPr>
-                        <a:t>(기본형)</a:t>
-                      </a:r>
-                      <a:endParaRPr lang="en-US" sz="1100" dirty="0">
-                        <a:latin typeface="Pretendard" charset="0"/>
-                        <a:ea typeface="Pretendard" charset="0"/>
-                        <a:cs typeface="Pretendard" charset="0"/>
-                      </a:endParaRPr>
-                    </a:p>
-                  </a:txBody>
-                  <a:tcPr marL="50800" marR="50800" marT="25400" marB="25400" anchor="ctr">
-                    <a:lnL w="3810" cap="flat" cmpd="sng" algn="ctr">
-                      <a:solidFill>
-                        <a:srgbClr val="CBD5E0"/>
-                      </a:solidFill>
-                      <a:prstDash val="solid"/>
-                      <a:round/>
-                      <a:headEnd type="none" w="med" len="med"/>
-                      <a:tailEnd type="none" w="med" len="med"/>
-                    </a:lnL>
-                    <a:lnR w="3810" cap="flat" cmpd="sng" algn="ctr">
-                      <a:solidFill>
-                        <a:srgbClr val="CBD5E0"/>
-                      </a:solidFill>
-                      <a:prstDash val="solid"/>
-                      <a:round/>
-                      <a:headEnd type="none" w="med" len="med"/>
-                      <a:tailEnd type="none" w="med" len="med"/>
-                    </a:lnR>
-                    <a:lnT w="3810" cap="flat" cmpd="sng" algn="ctr">
-                      <a:solidFill>
-                        <a:srgbClr val="CBD5E0"/>
-                      </a:solidFill>
-                      <a:prstDash val="solid"/>
-                      <a:round/>
-                      <a:headEnd type="none" w="med" len="med"/>
-                      <a:tailEnd type="none" w="med" len="med"/>
-                    </a:lnT>
-                    <a:lnB w="3810" cap="flat" cmpd="sng" algn="ctr">
-                      <a:solidFill>
-                        <a:srgbClr val="CBD5E0"/>
-                      </a:solidFill>
-                      <a:prstDash val="solid"/>
-                      <a:round/>
-                      <a:headEnd type="none" w="med" len="med"/>
-                      <a:tailEnd type="none" w="med" len="med"/>
-                    </a:lnB>
-                    <a:solidFill>
-                      <a:srgbClr val="FFFFFF"/>
-                    </a:solidFill>
-                  </a:tcPr>
-                </a:tc>
-                <a:tc>
-                  <a:txBody>
-                    <a:bodyPr/>
-                    <a:lstStyle/>
-                    <a:p>
-                      <a:pPr indent="0" marL="0">
-                        <a:buNone/>
-                      </a:pPr>
-                      <a:r>
-                        <a:rPr lang="en-US" sz="1100" dirty="0">
-                          <a:solidFill>
-                            <a:srgbClr val="10161F"/>
-                          </a:solidFill>
-                          <a:latin typeface="Pretendard" pitchFamily="34" charset="0"/>
-                          <a:ea typeface="Pretendard" pitchFamily="34" charset="-122"/>
-                          <a:cs typeface="Pretendard" pitchFamily="34" charset="-120"/>
-                        </a:rPr>
-                        <a:t>50%</a:t>
-                      </a:r>
-                      <a:endParaRPr lang="en-US" sz="1100" dirty="0">
-                        <a:latin typeface="Pretendard" charset="0"/>
-                        <a:ea typeface="Pretendard" charset="0"/>
-                        <a:cs typeface="Pretendard" charset="0"/>
-                      </a:endParaRPr>
-                    </a:p>
-                  </a:txBody>
-                  <a:tcPr marL="50800" marR="50800" marT="25400" marB="25400" anchor="ctr">
-                    <a:lnL w="3810" cap="flat" cmpd="sng" algn="ctr">
-                      <a:solidFill>
-                        <a:srgbClr val="CBD5E0"/>
-                      </a:solidFill>
-                      <a:prstDash val="solid"/>
-                      <a:round/>
-                      <a:headEnd type="none" w="med" len="med"/>
-                      <a:tailEnd type="none" w="med" len="med"/>
-                    </a:lnL>
-                    <a:lnR w="3810" cap="flat" cmpd="sng" algn="ctr">
-                      <a:solidFill>
-                        <a:srgbClr val="CBD5E0"/>
-                      </a:solidFill>
-                      <a:prstDash val="solid"/>
-                      <a:round/>
-                      <a:headEnd type="none" w="med" len="med"/>
-                      <a:tailEnd type="none" w="med" len="med"/>
-                    </a:lnR>
-                    <a:lnT w="3810" cap="flat" cmpd="sng" algn="ctr">
-                      <a:solidFill>
-                        <a:srgbClr val="CBD5E0"/>
-                      </a:solidFill>
-                      <a:prstDash val="solid"/>
-                      <a:round/>
-                      <a:headEnd type="none" w="med" len="med"/>
-                      <a:tailEnd type="none" w="med" len="med"/>
-                    </a:lnT>
-                    <a:lnB w="3810" cap="flat" cmpd="sng" algn="ctr">
-                      <a:solidFill>
-                        <a:srgbClr val="CBD5E0"/>
-                      </a:solidFill>
-                      <a:prstDash val="solid"/>
-                      <a:round/>
-                      <a:headEnd type="none" w="med" len="med"/>
-                      <a:tailEnd type="none" w="med" len="med"/>
-                    </a:lnB>
-                    <a:solidFill>
-                      <a:srgbClr val="FFFFFF"/>
-                    </a:solidFill>
-                  </a:tcPr>
-                </a:tc>
-                <a:tc>
-                  <a:txBody>
-                    <a:bodyPr/>
-                    <a:lstStyle/>
-                    <a:p>
-                      <a:pPr indent="0" marL="0">
-                        <a:buNone/>
-                      </a:pPr>
-                      <a:r>
-                        <a:rPr lang="en-US" sz="1100" dirty="0">
-                          <a:solidFill>
-                            <a:srgbClr val="10161F"/>
-                          </a:solidFill>
-                          <a:latin typeface="Pretendard" pitchFamily="34" charset="0"/>
-                          <a:ea typeface="Pretendard" pitchFamily="34" charset="-122"/>
-                          <a:cs typeface="Pretendard" pitchFamily="34" charset="-120"/>
-                        </a:rPr>
-                        <a:t>249.8억</a:t>
-                      </a:r>
-                      <a:endParaRPr lang="en-US" sz="1100" dirty="0">
-                        <a:latin typeface="Pretendard" charset="0"/>
-                        <a:ea typeface="Pretendard" charset="0"/>
-                        <a:cs typeface="Pretendard" charset="0"/>
-                      </a:endParaRPr>
-                    </a:p>
-                  </a:txBody>
-                  <a:tcPr marL="50800" marR="50800" marT="25400" marB="25400" anchor="ctr">
-                    <a:lnL w="3810" cap="flat" cmpd="sng" algn="ctr">
-                      <a:solidFill>
-                        <a:srgbClr val="CBD5E0"/>
-                      </a:solidFill>
-                      <a:prstDash val="solid"/>
-                      <a:round/>
-                      <a:headEnd type="none" w="med" len="med"/>
-                      <a:tailEnd type="none" w="med" len="med"/>
-                    </a:lnL>
-                    <a:lnR w="3810" cap="flat" cmpd="sng" algn="ctr">
-                      <a:solidFill>
-                        <a:srgbClr val="CBD5E0"/>
-                      </a:solidFill>
-                      <a:prstDash val="solid"/>
-                      <a:round/>
-                      <a:headEnd type="none" w="med" len="med"/>
-                      <a:tailEnd type="none" w="med" len="med"/>
-                    </a:lnR>
-                    <a:lnT w="3810" cap="flat" cmpd="sng" algn="ctr">
-                      <a:solidFill>
-                        <a:srgbClr val="CBD5E0"/>
-                      </a:solidFill>
-                      <a:prstDash val="solid"/>
-                      <a:round/>
-                      <a:headEnd type="none" w="med" len="med"/>
-                      <a:tailEnd type="none" w="med" len="med"/>
-                    </a:lnT>
-                    <a:lnB w="3810" cap="flat" cmpd="sng" algn="ctr">
-                      <a:solidFill>
-                        <a:srgbClr val="CBD5E0"/>
-                      </a:solidFill>
-                      <a:prstDash val="solid"/>
-                      <a:round/>
-                      <a:headEnd type="none" w="med" len="med"/>
-                      <a:tailEnd type="none" w="med" len="med"/>
-                    </a:lnB>
-                    <a:solidFill>
-                      <a:srgbClr val="FFFFFF"/>
-                    </a:solidFill>
-                  </a:tcPr>
-                </a:tc>
-                <a:tc>
-                  <a:txBody>
-                    <a:bodyPr/>
-                    <a:lstStyle/>
-                    <a:p>
-                      <a:pPr indent="0" marL="0">
-                        <a:buNone/>
-                      </a:pPr>
-                      <a:r>
-                        <a:rPr lang="en-US" sz="1100" dirty="0">
-                          <a:solidFill>
-                            <a:srgbClr val="10161F"/>
-                          </a:solidFill>
-                          <a:latin typeface="Pretendard" pitchFamily="34" charset="0"/>
-                          <a:ea typeface="Pretendard" pitchFamily="34" charset="-122"/>
-                          <a:cs typeface="Pretendard" pitchFamily="34" charset="-120"/>
-                        </a:rPr>
-                        <a:t>-</a:t>
-                      </a:r>
-                      <a:endParaRPr lang="en-US" sz="1100" dirty="0">
-                        <a:latin typeface="Pretendard" charset="0"/>
-                        <a:ea typeface="Pretendard" charset="0"/>
-                        <a:cs typeface="Pretendard" charset="0"/>
-                      </a:endParaRPr>
-                    </a:p>
-                  </a:txBody>
-                  <a:tcPr marL="50800" marR="50800" marT="25400" marB="25400" anchor="ctr">
-                    <a:lnL w="3810" cap="flat" cmpd="sng" algn="ctr">
-                      <a:solidFill>
-                        <a:srgbClr val="CBD5E0"/>
-                      </a:solidFill>
-                      <a:prstDash val="solid"/>
-                      <a:round/>
-                      <a:headEnd type="none" w="med" len="med"/>
-                      <a:tailEnd type="none" w="med" len="med"/>
-                    </a:lnL>
-                    <a:lnR w="3810" cap="flat" cmpd="sng" algn="ctr">
-                      <a:solidFill>
-                        <a:srgbClr val="CBD5E0"/>
-                      </a:solidFill>
-                      <a:prstDash val="solid"/>
-                      <a:round/>
-                      <a:headEnd type="none" w="med" len="med"/>
-                      <a:tailEnd type="none" w="med" len="med"/>
-                    </a:lnR>
-                    <a:lnT w="3810" cap="flat" cmpd="sng" algn="ctr">
-                      <a:solidFill>
-                        <a:srgbClr val="CBD5E0"/>
-                      </a:solidFill>
-                      <a:prstDash val="solid"/>
-                      <a:round/>
-                      <a:headEnd type="none" w="med" len="med"/>
-                      <a:tailEnd type="none" w="med" len="med"/>
-                    </a:lnT>
-                    <a:lnB w="3810" cap="flat" cmpd="sng" algn="ctr">
-                      <a:solidFill>
-                        <a:srgbClr val="CBD5E0"/>
-                      </a:solidFill>
-                      <a:prstDash val="solid"/>
-                      <a:round/>
-                      <a:headEnd type="none" w="med" len="med"/>
-                      <a:tailEnd type="none" w="med" len="med"/>
-                    </a:lnB>
-                    <a:solidFill>
-                      <a:srgbClr val="FFFFFF"/>
-                    </a:solidFill>
-                  </a:tcPr>
-                </a:tc>
-              </a:tr>
-              <a:tr h="457200">
-                <a:tc>
-                  <a:txBody>
-                    <a:bodyPr/>
-                    <a:lstStyle/>
-                    <a:p>
-                      <a:pPr indent="0" marL="0">
-                        <a:buNone/>
-                      </a:pPr>
-                      <a:r>
-                        <a:rPr lang="en-US" sz="1100" b="1" dirty="0">
-                          <a:solidFill>
-                            <a:srgbClr val="10161F"/>
-                          </a:solidFill>
-                          <a:latin typeface="Pretendard" pitchFamily="34" charset="0"/>
-                          <a:ea typeface="Pretendard" pitchFamily="34" charset="-122"/>
-                          <a:cs typeface="Pretendard" pitchFamily="34" charset="-120"/>
-                        </a:rPr>
-                        <a:t>적극적 </a:t>
-                      </a:r>
-                      <a:pPr indent="0" marL="0">
-                        <a:buNone/>
-                      </a:pPr>
-                      <a:r>
-                        <a:rPr lang="en-US" sz="1100" b="1" dirty="0">
-                          <a:solidFill>
-                            <a:srgbClr val="10161F"/>
-                          </a:solidFill>
-                          <a:latin typeface="Pretendard" pitchFamily="34" charset="0"/>
-                          <a:ea typeface="Pretendard" pitchFamily="34" charset="-122"/>
-                          <a:cs typeface="Pretendard" pitchFamily="34" charset="-120"/>
-                        </a:rPr>
-                        <a:t>차입 </a:t>
-                      </a:r>
-                      <a:pPr indent="0" marL="0">
-                        <a:buNone/>
-                      </a:pPr>
-                      <a:r>
-                        <a:rPr lang="en-US" sz="1100" b="1" dirty="0">
-                          <a:solidFill>
-                            <a:srgbClr val="10161F"/>
-                          </a:solidFill>
-                          <a:latin typeface="Pretendard" pitchFamily="34" charset="0"/>
-                          <a:ea typeface="Pretendard" pitchFamily="34" charset="-122"/>
-                          <a:cs typeface="Pretendard" pitchFamily="34" charset="-120"/>
-                        </a:rPr>
-                        <a:t>(레버리지)</a:t>
-                      </a:r>
-                      <a:endParaRPr lang="en-US" sz="1100" dirty="0">
-                        <a:latin typeface="Pretendard" charset="0"/>
-                        <a:ea typeface="Pretendard" charset="0"/>
-                        <a:cs typeface="Pretendard" charset="0"/>
-                      </a:endParaRPr>
-                    </a:p>
-                  </a:txBody>
-                  <a:tcPr marL="50800" marR="50800" marT="25400" marB="25400" anchor="ctr">
-                    <a:lnL w="3810" cap="flat" cmpd="sng" algn="ctr">
-                      <a:solidFill>
-                        <a:srgbClr val="CBD5E0"/>
-                      </a:solidFill>
-                      <a:prstDash val="solid"/>
-                      <a:round/>
-                      <a:headEnd type="none" w="med" len="med"/>
-                      <a:tailEnd type="none" w="med" len="med"/>
-                    </a:lnL>
-                    <a:lnR w="3810" cap="flat" cmpd="sng" algn="ctr">
-                      <a:solidFill>
-                        <a:srgbClr val="CBD5E0"/>
-                      </a:solidFill>
-                      <a:prstDash val="solid"/>
-                      <a:round/>
-                      <a:headEnd type="none" w="med" len="med"/>
-                      <a:tailEnd type="none" w="med" len="med"/>
-                    </a:lnR>
-                    <a:lnT w="3810" cap="flat" cmpd="sng" algn="ctr">
-                      <a:solidFill>
-                        <a:srgbClr val="CBD5E0"/>
-                      </a:solidFill>
-                      <a:prstDash val="solid"/>
-                      <a:round/>
-                      <a:headEnd type="none" w="med" len="med"/>
-                      <a:tailEnd type="none" w="med" len="med"/>
-                    </a:lnT>
-                    <a:lnB w="3810" cap="flat" cmpd="sng" algn="ctr">
-                      <a:solidFill>
-                        <a:srgbClr val="CBD5E0"/>
-                      </a:solidFill>
-                      <a:prstDash val="solid"/>
-                      <a:round/>
-                      <a:headEnd type="none" w="med" len="med"/>
-                      <a:tailEnd type="none" w="med" len="med"/>
-                    </a:lnB>
-                    <a:solidFill>
-                      <a:srgbClr val="F7FAFC"/>
-                    </a:solidFill>
-                  </a:tcPr>
-                </a:tc>
-                <a:tc>
-                  <a:txBody>
-                    <a:bodyPr/>
-                    <a:lstStyle/>
-                    <a:p>
-                      <a:pPr indent="0" marL="0">
-                        <a:buNone/>
-                      </a:pPr>
-                      <a:r>
-                        <a:rPr lang="en-US" sz="1100" dirty="0">
-                          <a:solidFill>
-                            <a:srgbClr val="10161F"/>
-                          </a:solidFill>
-                          <a:latin typeface="Pretendard" pitchFamily="34" charset="0"/>
-                          <a:ea typeface="Pretendard" pitchFamily="34" charset="-122"/>
-                          <a:cs typeface="Pretendard" pitchFamily="34" charset="-120"/>
-                        </a:rPr>
-                        <a:t>60%</a:t>
-                      </a:r>
-                      <a:endParaRPr lang="en-US" sz="1100" dirty="0">
-                        <a:latin typeface="Pretendard" charset="0"/>
-                        <a:ea typeface="Pretendard" charset="0"/>
-                        <a:cs typeface="Pretendard" charset="0"/>
-                      </a:endParaRPr>
-                    </a:p>
-                  </a:txBody>
-                  <a:tcPr marL="50800" marR="50800" marT="25400" marB="25400" anchor="ctr">
-                    <a:lnL w="3810" cap="flat" cmpd="sng" algn="ctr">
-                      <a:solidFill>
-                        <a:srgbClr val="CBD5E0"/>
-                      </a:solidFill>
-                      <a:prstDash val="solid"/>
-                      <a:round/>
-                      <a:headEnd type="none" w="med" len="med"/>
-                      <a:tailEnd type="none" w="med" len="med"/>
-                    </a:lnL>
-                    <a:lnR w="3810" cap="flat" cmpd="sng" algn="ctr">
-                      <a:solidFill>
-                        <a:srgbClr val="CBD5E0"/>
-                      </a:solidFill>
-                      <a:prstDash val="solid"/>
-                      <a:round/>
-                      <a:headEnd type="none" w="med" len="med"/>
-                      <a:tailEnd type="none" w="med" len="med"/>
-                    </a:lnR>
-                    <a:lnT w="3810" cap="flat" cmpd="sng" algn="ctr">
-                      <a:solidFill>
-                        <a:srgbClr val="CBD5E0"/>
-                      </a:solidFill>
-                      <a:prstDash val="solid"/>
-                      <a:round/>
-                      <a:headEnd type="none" w="med" len="med"/>
-                      <a:tailEnd type="none" w="med" len="med"/>
-                    </a:lnT>
-                    <a:lnB w="3810" cap="flat" cmpd="sng" algn="ctr">
-                      <a:solidFill>
-                        <a:srgbClr val="CBD5E0"/>
-                      </a:solidFill>
-                      <a:prstDash val="solid"/>
-                      <a:round/>
-                      <a:headEnd type="none" w="med" len="med"/>
-                      <a:tailEnd type="none" w="med" len="med"/>
-                    </a:lnB>
-                    <a:solidFill>
-                      <a:srgbClr val="F7FAFC"/>
-                    </a:solidFill>
-                  </a:tcPr>
-                </a:tc>
-                <a:tc>
-                  <a:txBody>
-                    <a:bodyPr/>
-                    <a:lstStyle/>
-                    <a:p>
-                      <a:pPr indent="0" marL="0">
-                        <a:buNone/>
-                      </a:pPr>
-                      <a:r>
-                        <a:rPr lang="en-US" sz="1100" dirty="0">
-                          <a:solidFill>
-                            <a:srgbClr val="10161F"/>
-                          </a:solidFill>
-                          <a:latin typeface="Pretendard" pitchFamily="34" charset="0"/>
-                          <a:ea typeface="Pretendard" pitchFamily="34" charset="-122"/>
-                          <a:cs typeface="Pretendard" pitchFamily="34" charset="-120"/>
-                        </a:rPr>
-                        <a:t>204.8억</a:t>
-                      </a:r>
-                      <a:endParaRPr lang="en-US" sz="1100" dirty="0">
-                        <a:latin typeface="Pretendard" charset="0"/>
-                        <a:ea typeface="Pretendard" charset="0"/>
-                        <a:cs typeface="Pretendard" charset="0"/>
-                      </a:endParaRPr>
-                    </a:p>
-                  </a:txBody>
-                  <a:tcPr marL="50800" marR="50800" marT="25400" marB="25400" anchor="ctr">
-                    <a:lnL w="3810" cap="flat" cmpd="sng" algn="ctr">
-                      <a:solidFill>
-                        <a:srgbClr val="CBD5E0"/>
-                      </a:solidFill>
-                      <a:prstDash val="solid"/>
-                      <a:round/>
-                      <a:headEnd type="none" w="med" len="med"/>
-                      <a:tailEnd type="none" w="med" len="med"/>
-                    </a:lnL>
-                    <a:lnR w="3810" cap="flat" cmpd="sng" algn="ctr">
-                      <a:solidFill>
-                        <a:srgbClr val="CBD5E0"/>
-                      </a:solidFill>
-                      <a:prstDash val="solid"/>
-                      <a:round/>
-                      <a:headEnd type="none" w="med" len="med"/>
-                      <a:tailEnd type="none" w="med" len="med"/>
-                    </a:lnR>
-                    <a:lnT w="3810" cap="flat" cmpd="sng" algn="ctr">
-                      <a:solidFill>
-                        <a:srgbClr val="CBD5E0"/>
-                      </a:solidFill>
-                      <a:prstDash val="solid"/>
-                      <a:round/>
-                      <a:headEnd type="none" w="med" len="med"/>
-                      <a:tailEnd type="none" w="med" len="med"/>
-                    </a:lnT>
-                    <a:lnB w="3810" cap="flat" cmpd="sng" algn="ctr">
-                      <a:solidFill>
-                        <a:srgbClr val="CBD5E0"/>
-                      </a:solidFill>
-                      <a:prstDash val="solid"/>
-                      <a:round/>
-                      <a:headEnd type="none" w="med" len="med"/>
-                      <a:tailEnd type="none" w="med" len="med"/>
-                    </a:lnB>
-                    <a:solidFill>
-                      <a:srgbClr val="F7FAFC"/>
-                    </a:solidFill>
-                  </a:tcPr>
-                </a:tc>
-                <a:tc>
-                  <a:txBody>
-                    <a:bodyPr/>
-                    <a:lstStyle/>
-                    <a:p>
-                      <a:pPr indent="0" marL="0">
-                        <a:buNone/>
-                      </a:pPr>
-                      <a:r>
-                        <a:rPr lang="en-US" sz="1100" dirty="0">
-                          <a:solidFill>
-                            <a:srgbClr val="10161F"/>
-                          </a:solidFill>
-                          <a:latin typeface="Pretendard" pitchFamily="34" charset="0"/>
-                          <a:ea typeface="Pretendard" pitchFamily="34" charset="-122"/>
-                          <a:cs typeface="Pretendard" pitchFamily="34" charset="-120"/>
-                        </a:rPr>
-                        <a:t>-</a:t>
-                      </a:r>
-                      <a:endParaRPr lang="en-US" sz="1100" dirty="0">
-                        <a:latin typeface="Pretendard" charset="0"/>
-                        <a:ea typeface="Pretendard" charset="0"/>
-                        <a:cs typeface="Pretendard" charset="0"/>
-                      </a:endParaRPr>
-                    </a:p>
-                  </a:txBody>
-                  <a:tcPr marL="50800" marR="50800" marT="25400" marB="25400" anchor="ctr">
-                    <a:lnL w="3810" cap="flat" cmpd="sng" algn="ctr">
-                      <a:solidFill>
-                        <a:srgbClr val="CBD5E0"/>
-                      </a:solidFill>
-                      <a:prstDash val="solid"/>
-                      <a:round/>
-                      <a:headEnd type="none" w="med" len="med"/>
-                      <a:tailEnd type="none" w="med" len="med"/>
-                    </a:lnL>
-                    <a:lnR w="3810" cap="flat" cmpd="sng" algn="ctr">
-                      <a:solidFill>
-                        <a:srgbClr val="CBD5E0"/>
-                      </a:solidFill>
-                      <a:prstDash val="solid"/>
-                      <a:round/>
-                      <a:headEnd type="none" w="med" len="med"/>
-                      <a:tailEnd type="none" w="med" len="med"/>
-                    </a:lnR>
-                    <a:lnT w="3810" cap="flat" cmpd="sng" algn="ctr">
-                      <a:solidFill>
-                        <a:srgbClr val="CBD5E0"/>
-                      </a:solidFill>
-                      <a:prstDash val="solid"/>
-                      <a:round/>
-                      <a:headEnd type="none" w="med" len="med"/>
-                      <a:tailEnd type="none" w="med" len="med"/>
-                    </a:lnT>
-                    <a:lnB w="3810" cap="flat" cmpd="sng" algn="ctr">
-                      <a:solidFill>
-                        <a:srgbClr val="CBD5E0"/>
-                      </a:solidFill>
-                      <a:prstDash val="solid"/>
-                      <a:round/>
-                      <a:headEnd type="none" w="med" len="med"/>
-                      <a:tailEnd type="none" w="med" len="med"/>
-                    </a:lnB>
-                    <a:solidFill>
-                      <a:srgbClr val="F7FAFC"/>
-                    </a:solidFill>
-                  </a:tcPr>
-                </a:tc>
-              </a:tr>
-            </a:tbl>
-          </a:graphicData>
-        </a:graphic>
-      </p:graphicFrame>
-      <p:sp>
-        <p:nvSpPr>
-          <p:cNvPr id="31" name="Shape 28"/>
-          <p:cNvSpPr/>
-          <p:nvPr/>
-        </p:nvSpPr>
-        <p:spPr>
-          <a:xfrm>
-            <a:off x="6461608" y="4069080"/>
-            <a:ext cx="4934560" cy="1463040"/>
-          </a:xfrm>
-          <a:prstGeom prst="roundRect">
-            <a:avLst>
-              <a:gd name="adj" fmla="val 3750"/>
-            </a:avLst>
-          </a:prstGeom>
-          <a:solidFill>
-            <a:srgbClr val="FEEBC8"/>
-          </a:solidFill>
-          <a:ln/>
-        </p:spPr>
-      </p:sp>
-      <p:sp>
-        <p:nvSpPr>
-          <p:cNvPr id="32" name="Shape 29"/>
-          <p:cNvSpPr/>
-          <p:nvPr/>
-        </p:nvSpPr>
-        <p:spPr>
-          <a:xfrm>
-            <a:off x="6461608" y="4123944"/>
-            <a:ext cx="36576" cy="1353312"/>
-          </a:xfrm>
-          <a:prstGeom prst="rect">
-            <a:avLst/>
-          </a:prstGeom>
-          <a:solidFill>
-            <a:srgbClr val="9C4221"/>
-          </a:solidFill>
-          <a:ln/>
-        </p:spPr>
-      </p:sp>
-      <p:sp>
-        <p:nvSpPr>
-          <p:cNvPr id="33" name="Text 30"/>
-          <p:cNvSpPr/>
-          <p:nvPr/>
-        </p:nvSpPr>
-        <p:spPr>
-          <a:xfrm>
-            <a:off x="6607912" y="4160520"/>
-            <a:ext cx="4678528" cy="201168"/>
-          </a:xfrm>
-          <a:prstGeom prst="rect">
-            <a:avLst/>
-          </a:prstGeom>
-          <a:noFill/>
-          <a:ln/>
-        </p:spPr>
-        <p:txBody>
-          <a:bodyPr wrap="square" lIns="0" tIns="0" rIns="0" bIns="0" rtlCol="0" anchor="ctr"/>
-          <a:lstStyle/>
-          <a:p>
-            <a:pPr indent="0" marL="0">
-              <a:buNone/>
-            </a:pPr>
-            <a:r>
-              <a:rPr lang="en-US" sz="1050" b="1" dirty="0">
-                <a:solidFill>
-                  <a:srgbClr val="9C4221"/>
-                </a:solidFill>
-                <a:latin typeface="Pretendard" pitchFamily="34" charset="0"/>
-                <a:ea typeface="Pretendard" pitchFamily="34" charset="-122"/>
-                <a:cs typeface="Pretendard" pitchFamily="34" charset="-120"/>
-              </a:rPr>
-              <a:t>역레버리지 유의 구간</a:t>
-            </a:r>
-            <a:endParaRPr lang="en-US" sz="1050" dirty="0"/>
-          </a:p>
-        </p:txBody>
-      </p:sp>
-      <p:sp>
-        <p:nvSpPr>
-          <p:cNvPr id="34" name="Text 31"/>
-          <p:cNvSpPr/>
-          <p:nvPr/>
-        </p:nvSpPr>
-        <p:spPr>
-          <a:xfrm>
-            <a:off x="6607912" y="4361688"/>
-            <a:ext cx="4678528" cy="1133856"/>
-          </a:xfrm>
-          <a:prstGeom prst="rect">
-            <a:avLst/>
-          </a:prstGeom>
-          <a:noFill/>
-          <a:ln/>
-        </p:spPr>
-        <p:txBody>
-          <a:bodyPr wrap="square" lIns="0" tIns="0" rIns="0" bIns="0" rtlCol="0" anchor="t"/>
-          <a:lstStyle/>
-          <a:p>
-            <a:pPr indent="0" marL="0">
-              <a:lnSpc>
-                <a:spcPct val="108000"/>
-              </a:lnSpc>
-              <a:buNone/>
-            </a:pPr>
-            <a:r>
-              <a:rPr lang="en-US" sz="980" dirty="0">
-                <a:solidFill>
-                  <a:srgbClr val="10161F"/>
-                </a:solidFill>
-                <a:latin typeface="Pretendard" pitchFamily="34" charset="0"/>
-                <a:ea typeface="Pretendard" pitchFamily="34" charset="-122"/>
-                <a:cs typeface="Pretendard" pitchFamily="34" charset="-120"/>
-              </a:rPr>
-              <a:t>차입 금리가 자산 총수익률을 상회하여 대출 실행 시 자기자본수익률이 하락할 수 있습니다. 에쿼티 비중 확대를 권장합니다.</a:t>
-            </a:r>
-            <a:endParaRPr lang="en-US" sz="980" dirty="0"/>
-          </a:p>
-        </p:txBody>
-      </p:sp>
-      <p:sp>
-        <p:nvSpPr>
-          <p:cNvPr id="35" name="Text 32"/>
           <p:cNvSpPr/>
           <p:nvPr/>
         </p:nvSpPr>
@@ -5513,7 +3014,7 @@
       </p:sp>
       <p:sp>
         <p:nvSpPr>
-          <p:cNvPr id="36" name="Text 33"/>
+          <p:cNvPr id="10" name="Text 8"/>
           <p:cNvSpPr/>
           <p:nvPr/>
         </p:nvSpPr>
@@ -5674,7 +3175,7 @@
                 <a:ea typeface="Arial" pitchFamily="34" charset="-122"/>
                 <a:cs typeface="Arial" pitchFamily="34" charset="-120"/>
               </a:rPr>
-              <a:t>Thesis</a:t>
+              <a:t>Risk</a:t>
             </a:r>
             <a:endParaRPr lang="en-US" sz="950" dirty="0"/>
           </a:p>
@@ -5715,7 +3216,7 @@
                 <a:ea typeface="Pretendard" pitchFamily="34" charset="-122"/>
                 <a:cs typeface="Pretendard" pitchFamily="34" charset="-120"/>
               </a:rPr>
-              <a:t>투자 논거</a:t>
+              <a:t>리스크</a:t>
             </a:r>
             <a:endParaRPr lang="en-US" sz="2300" dirty="0"/>
           </a:p>
@@ -5729,20 +3230,20 @@
         </p:nvSpPr>
         <p:spPr>
           <a:xfrm>
-            <a:off x="566928" y="4937760"/>
-            <a:ext cx="11057839" cy="804672"/>
+            <a:off x="566928" y="1417320"/>
+            <a:ext cx="11057839" cy="3657600"/>
           </a:xfrm>
           <a:prstGeom prst="roundRect">
             <a:avLst>
-              <a:gd name="adj" fmla="val 6818"/>
+              <a:gd name="adj" fmla="val 1500"/>
             </a:avLst>
           </a:prstGeom>
           <a:solidFill>
-            <a:srgbClr val="F3EBDA"/>
+            <a:srgbClr val="F7FAFC"/>
           </a:solidFill>
-          <a:ln w="10160">
+          <a:ln w="6350">
             <a:solidFill>
-              <a:srgbClr val="D9B668"/>
+              <a:srgbClr val="CBD5E0"/>
             </a:solidFill>
             <a:prstDash val="solid"/>
           </a:ln>
@@ -5750,14 +3251,34 @@
       </p:sp>
       <p:sp>
         <p:nvSpPr>
-          <p:cNvPr id="7" name="Text 5"/>
-          <p:cNvSpPr/>
-          <p:nvPr/>
-        </p:nvSpPr>
-        <p:spPr>
-          <a:xfrm>
-            <a:off x="749808" y="5047488"/>
-            <a:ext cx="1691640" cy="256032"/>
+          <p:cNvPr id="7" name="Shape 5"/>
+          <p:cNvSpPr/>
+          <p:nvPr/>
+        </p:nvSpPr>
+        <p:spPr>
+          <a:xfrm>
+            <a:off x="566928" y="1417320"/>
+            <a:ext cx="11057839" cy="45720"/>
+          </a:xfrm>
+          <a:prstGeom prst="rect">
+            <a:avLst/>
+          </a:prstGeom>
+          <a:solidFill>
+            <a:srgbClr val="B98A2E"/>
+          </a:solidFill>
+          <a:ln/>
+        </p:spPr>
+      </p:sp>
+      <p:sp>
+        <p:nvSpPr>
+          <p:cNvPr id="8" name="Text 6"/>
+          <p:cNvSpPr/>
+          <p:nvPr/>
+        </p:nvSpPr>
+        <p:spPr>
+          <a:xfrm>
+            <a:off x="795528" y="1618488"/>
+            <a:ext cx="10600639" cy="292608"/>
           </a:xfrm>
           <a:prstGeom prst="rect">
             <a:avLst/>
@@ -5773,7 +3294,7 @@
               <a:buNone/>
             </a:pPr>
             <a:r>
-              <a:rPr lang="en-US" sz="1050" b="1" dirty="0">
+              <a:rPr lang="en-US" sz="1350" b="1" dirty="0">
                 <a:solidFill>
                   <a:srgbClr val="977024"/>
                 </a:solidFill>
@@ -5781,22 +3302,135 @@
                 <a:ea typeface="Pretendard" pitchFamily="34" charset="-122"/>
                 <a:cs typeface="Pretendard" pitchFamily="34" charset="-120"/>
               </a:rPr>
-              <a:t>종합 가치 제안</a:t>
-            </a:r>
-            <a:endParaRPr lang="en-US" sz="1050" dirty="0"/>
-          </a:p>
-        </p:txBody>
-      </p:sp>
-      <p:sp>
-        <p:nvSpPr>
-          <p:cNvPr id="8" name="Text 6"/>
-          <p:cNvSpPr/>
-          <p:nvPr/>
-        </p:nvSpPr>
-        <p:spPr>
-          <a:xfrm>
-            <a:off x="2487168" y="5010912"/>
-            <a:ext cx="8954719" cy="658368"/>
+              <a:t>단일 임차인</a:t>
+            </a:r>
+            <a:endParaRPr lang="en-US" sz="1350" dirty="0"/>
+          </a:p>
+        </p:txBody>
+      </p:sp>
+      <p:sp>
+        <p:nvSpPr>
+          <p:cNvPr id="9" name="Text 7"/>
+          <p:cNvSpPr/>
+          <p:nvPr/>
+        </p:nvSpPr>
+        <p:spPr>
+          <a:xfrm>
+            <a:off x="795528" y="1947672"/>
+            <a:ext cx="10600639" cy="365760"/>
+          </a:xfrm>
+          <a:prstGeom prst="rect">
+            <a:avLst/>
+          </a:prstGeom>
+          <a:noFill/>
+          <a:ln/>
+        </p:spPr>
+        <p:txBody>
+          <a:bodyPr wrap="square" lIns="0" tIns="0" rIns="0" bIns="0" rtlCol="0" anchor="ctr">
+            <a:normAutofit/>
+          </a:bodyPr>
+          <a:lstStyle/>
+          <a:p>
+            <a:pPr indent="0" marL="0">
+              <a:buNone/>
+            </a:pPr>
+            <a:r>
+              <a:rPr lang="en-US" sz="1250" b="1" dirty="0">
+                <a:solidFill>
+                  <a:srgbClr val="10161F"/>
+                </a:solidFill>
+                <a:latin typeface="Pretendard" pitchFamily="34" charset="0"/>
+                <a:ea typeface="Pretendard" pitchFamily="34" charset="-122"/>
+                <a:cs typeface="Pretendard" pitchFamily="34" charset="-120"/>
+              </a:rPr>
+              <a:t>CJ 10년</a:t>
+            </a:r>
+            <a:endParaRPr lang="en-US" sz="1250" dirty="0"/>
+          </a:p>
+        </p:txBody>
+      </p:sp>
+      <p:sp>
+        <p:nvSpPr>
+          <p:cNvPr id="10" name="Text 8"/>
+          <p:cNvSpPr/>
+          <p:nvPr/>
+        </p:nvSpPr>
+        <p:spPr>
+          <a:xfrm>
+            <a:off x="795528" y="2377440"/>
+            <a:ext cx="10600639" cy="2606040"/>
+          </a:xfrm>
+          <a:prstGeom prst="rect">
+            <a:avLst/>
+          </a:prstGeom>
+          <a:noFill/>
+          <a:ln/>
+        </p:spPr>
+        <p:txBody>
+          <a:bodyPr wrap="square" lIns="0" tIns="0" rIns="0" bIns="0" rtlCol="0" anchor="t">
+            <a:normAutofit/>
+          </a:bodyPr>
+          <a:lstStyle/>
+          <a:p>
+            <a:pPr marL="342900" indent="-342900">
+              <a:lnSpc>
+                <a:spcPct val="115000"/>
+              </a:lnSpc>
+              <a:buSzPct val="100000"/>
+              <a:buChar char="•"/>
+            </a:pPr>
+            <a:r>
+              <a:rPr lang="en-US" sz="1100" dirty="0">
+                <a:solidFill>
+                  <a:srgbClr val="10161F"/>
+                </a:solidFill>
+                <a:latin typeface="Pretendard" pitchFamily="34" charset="0"/>
+                <a:ea typeface="Pretendard" pitchFamily="34" charset="-122"/>
+                <a:cs typeface="Pretendard" pitchFamily="34" charset="-120"/>
+              </a:rPr>
+              <a:t>장기계약 보장</a:t>
+            </a:r>
+            <a:endParaRPr lang="en-US" sz="1100" dirty="0"/>
+          </a:p>
+        </p:txBody>
+      </p:sp>
+      <p:sp>
+        <p:nvSpPr>
+          <p:cNvPr id="11" name="Shape 9"/>
+          <p:cNvSpPr/>
+          <p:nvPr/>
+        </p:nvSpPr>
+        <p:spPr>
+          <a:xfrm>
+            <a:off x="566928" y="5193792"/>
+            <a:ext cx="11057839" cy="621792"/>
+          </a:xfrm>
+          <a:prstGeom prst="roundRect">
+            <a:avLst>
+              <a:gd name="adj" fmla="val 8824"/>
+            </a:avLst>
+          </a:prstGeom>
+          <a:solidFill>
+            <a:srgbClr val="F7FAFC"/>
+          </a:solidFill>
+          <a:ln w="6350">
+            <a:solidFill>
+              <a:srgbClr val="CBD5E0"/>
+            </a:solidFill>
+            <a:prstDash val="solid"/>
+          </a:ln>
+        </p:spPr>
+      </p:sp>
+      <p:sp>
+        <p:nvSpPr>
+          <p:cNvPr id="12" name="Text 10"/>
+          <p:cNvSpPr/>
+          <p:nvPr/>
+        </p:nvSpPr>
+        <p:spPr>
+          <a:xfrm>
+            <a:off x="795528" y="5193792"/>
+            <a:ext cx="10600639" cy="621792"/>
           </a:xfrm>
           <a:prstGeom prst="rect">
             <a:avLst/>
@@ -5809,9 +3443,6 @@
           <a:lstStyle/>
           <a:p>
             <a:pPr indent="0" marL="0">
-              <a:lnSpc>
-                <a:spcPct val="125000"/>
-              </a:lnSpc>
               <a:buNone/>
             </a:pPr>
             <a:r>
@@ -5823,7 +3454,7 @@
                 <a:ea typeface="Pretendard" pitchFamily="34" charset="-122"/>
                 <a:cs typeface="Pretendard" pitchFamily="34" charset="-120"/>
               </a:rPr>
-              <a:t>3PL 대형 임차인의 장기 안정수익과 냉동냉장 특화 시설의 희소성이 핵심입니다.</a:t>
+              <a:t>※ 본 리스크 체크는 공부 및 브로커 확인 기반이며, 매수 전 전문 실사팀(변호사/건축사)을 통한 정밀 실사가 필요합니다.</a:t>
             </a:r>
             <a:endParaRPr lang="en-US" sz="1100" dirty="0"/>
           </a:p>
@@ -5831,7 +3462,7 @@
       </p:sp>
       <p:sp>
         <p:nvSpPr>
-          <p:cNvPr id="9" name="Text 7"/>
+          <p:cNvPr id="13" name="Text 11"/>
           <p:cNvSpPr/>
           <p:nvPr/>
         </p:nvSpPr>
@@ -5870,7 +3501,7 @@
       </p:sp>
       <p:sp>
         <p:nvSpPr>
-          <p:cNvPr id="10" name="Text 8"/>
+          <p:cNvPr id="14" name="Text 12"/>
           <p:cNvSpPr/>
           <p:nvPr/>
         </p:nvSpPr>
@@ -6031,7 +3662,7 @@
                 <a:ea typeface="Arial" pitchFamily="34" charset="-122"/>
                 <a:cs typeface="Arial" pitchFamily="34" charset="-120"/>
               </a:rPr>
-              <a:t>Risk</a:t>
+              <a:t>Checklist</a:t>
             </a:r>
             <a:endParaRPr lang="en-US" sz="950" dirty="0"/>
           </a:p>
@@ -6072,7 +3703,7 @@
                 <a:ea typeface="Pretendard" pitchFamily="34" charset="-122"/>
                 <a:cs typeface="Pretendard" pitchFamily="34" charset="-120"/>
               </a:rPr>
-              <a:t>리스크</a:t>
+              <a:t>실사 체크리스트</a:t>
             </a:r>
             <a:endParaRPr lang="en-US" sz="2300" dirty="0"/>
           </a:p>
@@ -6080,26 +3711,63 @@
       </p:sp>
       <p:sp>
         <p:nvSpPr>
-          <p:cNvPr id="6" name="Shape 4"/>
-          <p:cNvSpPr/>
-          <p:nvPr/>
-        </p:nvSpPr>
-        <p:spPr>
-          <a:xfrm>
-            <a:off x="566928" y="1417320"/>
-            <a:ext cx="11057839" cy="3657600"/>
-          </a:xfrm>
-          <a:prstGeom prst="roundRect">
-            <a:avLst>
-              <a:gd name="adj" fmla="val 1500"/>
-            </a:avLst>
+          <p:cNvPr id="6" name="Text 4"/>
+          <p:cNvSpPr/>
+          <p:nvPr/>
+        </p:nvSpPr>
+        <p:spPr>
+          <a:xfrm>
+            <a:off x="566928" y="1371600"/>
+            <a:ext cx="11057839" cy="237744"/>
+          </a:xfrm>
+          <a:prstGeom prst="rect">
+            <a:avLst/>
+          </a:prstGeom>
+          <a:noFill/>
+          <a:ln/>
+        </p:spPr>
+        <p:txBody>
+          <a:bodyPr wrap="square" lIns="0" tIns="0" rIns="0" bIns="0" rtlCol="0" anchor="ctr"/>
+          <a:lstStyle/>
+          <a:p>
+            <a:pPr indent="0" marL="0">
+              <a:buNone/>
+            </a:pPr>
+            <a:r>
+              <a:rPr lang="en-US" sz="1100" b="1" dirty="0">
+                <a:solidFill>
+                  <a:srgbClr val="10161F"/>
+                </a:solidFill>
+                <a:latin typeface="Pretendard" pitchFamily="34" charset="0"/>
+                <a:ea typeface="Pretendard" pitchFamily="34" charset="-122"/>
+                <a:cs typeface="Pretendard" pitchFamily="34" charset="-120"/>
+              </a:rPr>
+              <a:t>거래 안정성 확보를 위한 필수 법률·물리·임대차 실사 점검 항목 (총 6건)</a:t>
+            </a:r>
+            <a:endParaRPr lang="en-US" sz="1100" dirty="0"/>
+          </a:p>
+        </p:txBody>
+      </p:sp>
+      <p:sp>
+        <p:nvSpPr>
+          <p:cNvPr id="7" name="Shape 5"/>
+          <p:cNvSpPr/>
+          <p:nvPr/>
+        </p:nvSpPr>
+        <p:spPr>
+          <a:xfrm>
+            <a:off x="566928" y="1719072"/>
+            <a:ext cx="5368900" cy="749808"/>
+          </a:xfrm>
+          <a:prstGeom prst="rect">
+            <a:avLst/>
           </a:prstGeom>
           <a:solidFill>
             <a:srgbClr val="F7FAFC"/>
           </a:solidFill>
           <a:ln w="6350">
             <a:solidFill>
-              <a:srgbClr val="CBD5E0"/>
+              <a:srgbClr val="D9B668"/>
             </a:solidFill>
             <a:prstDash val="solid"/>
           </a:ln>
@@ -6107,91 +3775,92 @@
       </p:sp>
       <p:sp>
         <p:nvSpPr>
-          <p:cNvPr id="7" name="Shape 5"/>
-          <p:cNvSpPr/>
-          <p:nvPr/>
-        </p:nvSpPr>
-        <p:spPr>
-          <a:xfrm>
-            <a:off x="566928" y="1417320"/>
-            <a:ext cx="11057839" cy="45720"/>
+          <p:cNvPr id="8" name="Shape 6"/>
+          <p:cNvSpPr/>
+          <p:nvPr/>
+        </p:nvSpPr>
+        <p:spPr>
+          <a:xfrm>
+            <a:off x="704088" y="1947672"/>
+            <a:ext cx="292608" cy="292608"/>
           </a:xfrm>
           <a:prstGeom prst="rect">
             <a:avLst/>
           </a:prstGeom>
           <a:solidFill>
-            <a:srgbClr val="B98A2E"/>
+            <a:srgbClr val="977024"/>
           </a:solidFill>
           <a:ln/>
         </p:spPr>
       </p:sp>
       <p:sp>
         <p:nvSpPr>
-          <p:cNvPr id="8" name="Text 6"/>
-          <p:cNvSpPr/>
-          <p:nvPr/>
-        </p:nvSpPr>
-        <p:spPr>
-          <a:xfrm>
-            <a:off x="795528" y="1618488"/>
-            <a:ext cx="10600639" cy="292608"/>
-          </a:xfrm>
-          <a:prstGeom prst="rect">
-            <a:avLst/>
-          </a:prstGeom>
-          <a:noFill/>
-          <a:ln/>
-        </p:spPr>
-        <p:txBody>
-          <a:bodyPr wrap="square" lIns="0" tIns="0" rIns="0" bIns="0" rtlCol="0" anchor="ctr"/>
-          <a:lstStyle/>
-          <a:p>
-            <a:pPr indent="0" marL="0">
-              <a:buNone/>
-            </a:pPr>
-            <a:r>
-              <a:rPr lang="en-US" sz="1350" b="1" dirty="0">
-                <a:solidFill>
-                  <a:srgbClr val="977024"/>
-                </a:solidFill>
-                <a:latin typeface="Pretendard" pitchFamily="34" charset="0"/>
-                <a:ea typeface="Pretendard" pitchFamily="34" charset="-122"/>
-                <a:cs typeface="Pretendard" pitchFamily="34" charset="-120"/>
-              </a:rPr>
-              <a:t>단일 임차인</a:t>
-            </a:r>
-            <a:endParaRPr lang="en-US" sz="1350" dirty="0"/>
-          </a:p>
-        </p:txBody>
-      </p:sp>
-      <p:sp>
-        <p:nvSpPr>
           <p:cNvPr id="9" name="Text 7"/>
           <p:cNvSpPr/>
           <p:nvPr/>
         </p:nvSpPr>
         <p:spPr>
           <a:xfrm>
-            <a:off x="795528" y="1947672"/>
-            <a:ext cx="10600639" cy="365760"/>
-          </a:xfrm>
-          <a:prstGeom prst="rect">
-            <a:avLst/>
-          </a:prstGeom>
-          <a:noFill/>
-          <a:ln/>
-        </p:spPr>
-        <p:txBody>
-          <a:bodyPr wrap="square" lIns="0" tIns="0" rIns="0" bIns="0" rtlCol="0" anchor="ctr">
-            <a:normAutofit/>
-          </a:bodyPr>
-          <a:lstStyle/>
-          <a:p>
-            <a:pPr indent="0" marL="0">
-              <a:buNone/>
-            </a:pPr>
-            <a:r>
-              <a:rPr lang="en-US" sz="1250" b="1" dirty="0">
+            <a:off x="704088" y="1947672"/>
+            <a:ext cx="292608" cy="292608"/>
+          </a:xfrm>
+          <a:prstGeom prst="rect">
+            <a:avLst/>
+          </a:prstGeom>
+          <a:noFill/>
+          <a:ln/>
+        </p:spPr>
+        <p:txBody>
+          <a:bodyPr wrap="square" rtlCol="0" anchor="ctr"/>
+          <a:lstStyle/>
+          <a:p>
+            <a:pPr algn="ctr" indent="0" marL="0">
+              <a:buNone/>
+            </a:pPr>
+            <a:r>
+              <a:rPr lang="en-US" sz="1050" b="1" dirty="0">
+                <a:solidFill>
+                  <a:srgbClr val="FFFFFF"/>
+                </a:solidFill>
+                <a:latin typeface="Pretendard" pitchFamily="34" charset="0"/>
+                <a:ea typeface="Pretendard" pitchFamily="34" charset="-122"/>
+                <a:cs typeface="Pretendard" pitchFamily="34" charset="-120"/>
+              </a:rPr>
+              <a:t>✓</a:t>
+            </a:r>
+            <a:endParaRPr lang="en-US" sz="1050" dirty="0"/>
+          </a:p>
+        </p:txBody>
+      </p:sp>
+      <p:sp>
+        <p:nvSpPr>
+          <p:cNvPr id="10" name="Text 8"/>
+          <p:cNvSpPr/>
+          <p:nvPr/>
+        </p:nvSpPr>
+        <p:spPr>
+          <a:xfrm>
+            <a:off x="1097280" y="1792224"/>
+            <a:ext cx="4710532" cy="603504"/>
+          </a:xfrm>
+          <a:prstGeom prst="rect">
+            <a:avLst/>
+          </a:prstGeom>
+          <a:noFill/>
+          <a:ln/>
+        </p:spPr>
+        <p:txBody>
+          <a:bodyPr wrap="square" rtlCol="0" anchor="ctr"/>
+          <a:lstStyle/>
+          <a:p>
+            <a:pPr indent="0" marL="0">
+              <a:lnSpc>
+                <a:spcPct val="110000"/>
+              </a:lnSpc>
+              <a:buNone/>
+            </a:pPr>
+            <a:r>
+              <a:rPr lang="en-US" sz="950" dirty="0">
                 <a:solidFill>
                   <a:srgbClr val="10161F"/>
                 </a:solidFill>
@@ -6199,54 +3868,9 @@
                 <a:ea typeface="Pretendard" pitchFamily="34" charset="-122"/>
                 <a:cs typeface="Pretendard" pitchFamily="34" charset="-120"/>
               </a:rPr>
-              <a:t>CJ 10년</a:t>
-            </a:r>
-            <a:endParaRPr lang="en-US" sz="1250" dirty="0"/>
-          </a:p>
-        </p:txBody>
-      </p:sp>
-      <p:sp>
-        <p:nvSpPr>
-          <p:cNvPr id="10" name="Text 8"/>
-          <p:cNvSpPr/>
-          <p:nvPr/>
-        </p:nvSpPr>
-        <p:spPr>
-          <a:xfrm>
-            <a:off x="795528" y="2377440"/>
-            <a:ext cx="10600639" cy="2606040"/>
-          </a:xfrm>
-          <a:prstGeom prst="rect">
-            <a:avLst/>
-          </a:prstGeom>
-          <a:noFill/>
-          <a:ln/>
-        </p:spPr>
-        <p:txBody>
-          <a:bodyPr wrap="square" lIns="0" tIns="0" rIns="0" bIns="0" rtlCol="0" anchor="t">
-            <a:normAutofit/>
-          </a:bodyPr>
-          <a:lstStyle/>
-          <a:p>
-            <a:pPr marL="342900" indent="-342900">
-              <a:lnSpc>
-                <a:spcPct val="115000"/>
-              </a:lnSpc>
-              <a:buSzPct val="100000"/>
-              <a:buChar char="•"/>
-            </a:pPr>
-            <a:r>
-              <a:rPr lang="en-US" sz="1100" dirty="0">
-                <a:solidFill>
-                  <a:srgbClr val="10161F"/>
-                </a:solidFill>
-                <a:latin typeface="Pretendard" pitchFamily="34" charset="0"/>
-                <a:ea typeface="Pretendard" pitchFamily="34" charset="-122"/>
-                <a:cs typeface="Pretendard" pitchFamily="34" charset="-120"/>
-              </a:rPr>
-              <a:t>장기계약 보장</a:t>
-            </a:r>
-            <a:endParaRPr lang="en-US" sz="1100" dirty="0"/>
+              <a:t>등기부등본 갑구/을구 권리관계 및 근저당 채권최고액 전액 말소 조건 원본 대조</a:t>
+            </a:r>
+            <a:endParaRPr lang="en-US" sz="950" dirty="0"/>
           </a:p>
         </p:txBody>
       </p:sp>
@@ -6258,20 +3882,18 @@
         </p:nvSpPr>
         <p:spPr>
           <a:xfrm>
-            <a:off x="566928" y="5193792"/>
-            <a:ext cx="11057839" cy="621792"/>
-          </a:xfrm>
-          <a:prstGeom prst="roundRect">
-            <a:avLst>
-              <a:gd name="adj" fmla="val 8824"/>
-            </a:avLst>
+            <a:off x="566928" y="2542032"/>
+            <a:ext cx="5368900" cy="749808"/>
+          </a:xfrm>
+          <a:prstGeom prst="rect">
+            <a:avLst/>
           </a:prstGeom>
           <a:solidFill>
             <a:srgbClr val="F7FAFC"/>
           </a:solidFill>
           <a:ln w="6350">
             <a:solidFill>
-              <a:srgbClr val="CBD5E0"/>
+              <a:srgbClr val="D9B668"/>
             </a:solidFill>
             <a:prstDash val="solid"/>
           </a:ln>
@@ -6279,30 +3901,92 @@
       </p:sp>
       <p:sp>
         <p:nvSpPr>
-          <p:cNvPr id="12" name="Text 10"/>
-          <p:cNvSpPr/>
-          <p:nvPr/>
-        </p:nvSpPr>
-        <p:spPr>
-          <a:xfrm>
-            <a:off x="795528" y="5193792"/>
-            <a:ext cx="10600639" cy="621792"/>
-          </a:xfrm>
-          <a:prstGeom prst="rect">
-            <a:avLst/>
-          </a:prstGeom>
-          <a:noFill/>
-          <a:ln/>
-        </p:spPr>
-        <p:txBody>
-          <a:bodyPr wrap="square" lIns="0" tIns="0" rIns="0" bIns="0" rtlCol="0" anchor="ctr"/>
-          <a:lstStyle/>
-          <a:p>
-            <a:pPr indent="0" marL="0">
-              <a:buNone/>
-            </a:pPr>
-            <a:r>
-              <a:rPr lang="en-US" sz="1100" dirty="0">
+          <p:cNvPr id="12" name="Shape 10"/>
+          <p:cNvSpPr/>
+          <p:nvPr/>
+        </p:nvSpPr>
+        <p:spPr>
+          <a:xfrm>
+            <a:off x="704088" y="2770632"/>
+            <a:ext cx="292608" cy="292608"/>
+          </a:xfrm>
+          <a:prstGeom prst="rect">
+            <a:avLst/>
+          </a:prstGeom>
+          <a:solidFill>
+            <a:srgbClr val="977024"/>
+          </a:solidFill>
+          <a:ln/>
+        </p:spPr>
+      </p:sp>
+      <p:sp>
+        <p:nvSpPr>
+          <p:cNvPr id="13" name="Text 11"/>
+          <p:cNvSpPr/>
+          <p:nvPr/>
+        </p:nvSpPr>
+        <p:spPr>
+          <a:xfrm>
+            <a:off x="704088" y="2770632"/>
+            <a:ext cx="292608" cy="292608"/>
+          </a:xfrm>
+          <a:prstGeom prst="rect">
+            <a:avLst/>
+          </a:prstGeom>
+          <a:noFill/>
+          <a:ln/>
+        </p:spPr>
+        <p:txBody>
+          <a:bodyPr wrap="square" rtlCol="0" anchor="ctr"/>
+          <a:lstStyle/>
+          <a:p>
+            <a:pPr algn="ctr" indent="0" marL="0">
+              <a:buNone/>
+            </a:pPr>
+            <a:r>
+              <a:rPr lang="en-US" sz="1050" b="1" dirty="0">
+                <a:solidFill>
+                  <a:srgbClr val="FFFFFF"/>
+                </a:solidFill>
+                <a:latin typeface="Pretendard" pitchFamily="34" charset="0"/>
+                <a:ea typeface="Pretendard" pitchFamily="34" charset="-122"/>
+                <a:cs typeface="Pretendard" pitchFamily="34" charset="-120"/>
+              </a:rPr>
+              <a:t>✓</a:t>
+            </a:r>
+            <a:endParaRPr lang="en-US" sz="1050" dirty="0"/>
+          </a:p>
+        </p:txBody>
+      </p:sp>
+      <p:sp>
+        <p:nvSpPr>
+          <p:cNvPr id="14" name="Text 12"/>
+          <p:cNvSpPr/>
+          <p:nvPr/>
+        </p:nvSpPr>
+        <p:spPr>
+          <a:xfrm>
+            <a:off x="1097280" y="2615184"/>
+            <a:ext cx="4710532" cy="603504"/>
+          </a:xfrm>
+          <a:prstGeom prst="rect">
+            <a:avLst/>
+          </a:prstGeom>
+          <a:noFill/>
+          <a:ln/>
+        </p:spPr>
+        <p:txBody>
+          <a:bodyPr wrap="square" rtlCol="0" anchor="ctr"/>
+          <a:lstStyle/>
+          <a:p>
+            <a:pPr indent="0" marL="0">
+              <a:lnSpc>
+                <a:spcPct val="110000"/>
+              </a:lnSpc>
+              <a:buNone/>
+            </a:pPr>
+            <a:r>
+              <a:rPr lang="en-US" sz="950" dirty="0">
                 <a:solidFill>
                   <a:srgbClr val="10161F"/>
                 </a:solidFill>
@@ -6310,15 +3994,578 @@
                 <a:ea typeface="Pretendard" pitchFamily="34" charset="-122"/>
                 <a:cs typeface="Pretendard" pitchFamily="34" charset="-120"/>
               </a:rPr>
-              <a:t>※ 본 리스크 체크는 공부 및 브로커 확인 기반이며, 매수 전 전문 실사팀(변호사/건축사)을 통한 정밀 실사가 필요합니다.</a:t>
-            </a:r>
-            <a:endParaRPr lang="en-US" sz="1100" dirty="0"/>
-          </a:p>
-        </p:txBody>
-      </p:sp>
-      <p:sp>
-        <p:nvSpPr>
-          <p:cNvPr id="13" name="Text 11"/>
+              <a:t>임대차 원본 계약서 검토 (보증금, 월임대료, 관리비 실입금 내역 및 제소전화해조서)</a:t>
+            </a:r>
+            <a:endParaRPr lang="en-US" sz="950" dirty="0"/>
+          </a:p>
+        </p:txBody>
+      </p:sp>
+      <p:sp>
+        <p:nvSpPr>
+          <p:cNvPr id="15" name="Shape 13"/>
+          <p:cNvSpPr/>
+          <p:nvPr/>
+        </p:nvSpPr>
+        <p:spPr>
+          <a:xfrm>
+            <a:off x="566928" y="3364992"/>
+            <a:ext cx="5368900" cy="749808"/>
+          </a:xfrm>
+          <a:prstGeom prst="rect">
+            <a:avLst/>
+          </a:prstGeom>
+          <a:solidFill>
+            <a:srgbClr val="F7FAFC"/>
+          </a:solidFill>
+          <a:ln w="6350">
+            <a:solidFill>
+              <a:srgbClr val="D9B668"/>
+            </a:solidFill>
+            <a:prstDash val="solid"/>
+          </a:ln>
+        </p:spPr>
+      </p:sp>
+      <p:sp>
+        <p:nvSpPr>
+          <p:cNvPr id="16" name="Shape 14"/>
+          <p:cNvSpPr/>
+          <p:nvPr/>
+        </p:nvSpPr>
+        <p:spPr>
+          <a:xfrm>
+            <a:off x="704088" y="3593592"/>
+            <a:ext cx="292608" cy="292608"/>
+          </a:xfrm>
+          <a:prstGeom prst="rect">
+            <a:avLst/>
+          </a:prstGeom>
+          <a:solidFill>
+            <a:srgbClr val="977024"/>
+          </a:solidFill>
+          <a:ln/>
+        </p:spPr>
+      </p:sp>
+      <p:sp>
+        <p:nvSpPr>
+          <p:cNvPr id="17" name="Text 15"/>
+          <p:cNvSpPr/>
+          <p:nvPr/>
+        </p:nvSpPr>
+        <p:spPr>
+          <a:xfrm>
+            <a:off x="704088" y="3593592"/>
+            <a:ext cx="292608" cy="292608"/>
+          </a:xfrm>
+          <a:prstGeom prst="rect">
+            <a:avLst/>
+          </a:prstGeom>
+          <a:noFill/>
+          <a:ln/>
+        </p:spPr>
+        <p:txBody>
+          <a:bodyPr wrap="square" rtlCol="0" anchor="ctr"/>
+          <a:lstStyle/>
+          <a:p>
+            <a:pPr algn="ctr" indent="0" marL="0">
+              <a:buNone/>
+            </a:pPr>
+            <a:r>
+              <a:rPr lang="en-US" sz="1050" b="1" dirty="0">
+                <a:solidFill>
+                  <a:srgbClr val="FFFFFF"/>
+                </a:solidFill>
+                <a:latin typeface="Pretendard" pitchFamily="34" charset="0"/>
+                <a:ea typeface="Pretendard" pitchFamily="34" charset="-122"/>
+                <a:cs typeface="Pretendard" pitchFamily="34" charset="-120"/>
+              </a:rPr>
+              <a:t>✓</a:t>
+            </a:r>
+            <a:endParaRPr lang="en-US" sz="1050" dirty="0"/>
+          </a:p>
+        </p:txBody>
+      </p:sp>
+      <p:sp>
+        <p:nvSpPr>
+          <p:cNvPr id="18" name="Text 16"/>
+          <p:cNvSpPr/>
+          <p:nvPr/>
+        </p:nvSpPr>
+        <p:spPr>
+          <a:xfrm>
+            <a:off x="1097280" y="3438144"/>
+            <a:ext cx="4710532" cy="603504"/>
+          </a:xfrm>
+          <a:prstGeom prst="rect">
+            <a:avLst/>
+          </a:prstGeom>
+          <a:noFill/>
+          <a:ln/>
+        </p:spPr>
+        <p:txBody>
+          <a:bodyPr wrap="square" rtlCol="0" anchor="ctr"/>
+          <a:lstStyle/>
+          <a:p>
+            <a:pPr indent="0" marL="0">
+              <a:lnSpc>
+                <a:spcPct val="110000"/>
+              </a:lnSpc>
+              <a:buNone/>
+            </a:pPr>
+            <a:r>
+              <a:rPr lang="en-US" sz="950" dirty="0">
+                <a:solidFill>
+                  <a:srgbClr val="10161F"/>
+                </a:solidFill>
+                <a:latin typeface="Pretendard" pitchFamily="34" charset="0"/>
+                <a:ea typeface="Pretendard" pitchFamily="34" charset="-122"/>
+                <a:cs typeface="Pretendard" pitchFamily="34" charset="-120"/>
+              </a:rPr>
+              <a:t>건축물대장상 위반건축물 등재 여부 및 불법 증축·용도변경 이행강제금 납부 이력 점검</a:t>
+            </a:r>
+            <a:endParaRPr lang="en-US" sz="950" dirty="0"/>
+          </a:p>
+        </p:txBody>
+      </p:sp>
+      <p:sp>
+        <p:nvSpPr>
+          <p:cNvPr id="19" name="Shape 17"/>
+          <p:cNvSpPr/>
+          <p:nvPr/>
+        </p:nvSpPr>
+        <p:spPr>
+          <a:xfrm>
+            <a:off x="6255868" y="1719072"/>
+            <a:ext cx="5368900" cy="749808"/>
+          </a:xfrm>
+          <a:prstGeom prst="rect">
+            <a:avLst/>
+          </a:prstGeom>
+          <a:solidFill>
+            <a:srgbClr val="F7FAFC"/>
+          </a:solidFill>
+          <a:ln w="6350">
+            <a:solidFill>
+              <a:srgbClr val="D9B668"/>
+            </a:solidFill>
+            <a:prstDash val="solid"/>
+          </a:ln>
+        </p:spPr>
+      </p:sp>
+      <p:sp>
+        <p:nvSpPr>
+          <p:cNvPr id="20" name="Shape 18"/>
+          <p:cNvSpPr/>
+          <p:nvPr/>
+        </p:nvSpPr>
+        <p:spPr>
+          <a:xfrm>
+            <a:off x="6393028" y="1947672"/>
+            <a:ext cx="292608" cy="292608"/>
+          </a:xfrm>
+          <a:prstGeom prst="rect">
+            <a:avLst/>
+          </a:prstGeom>
+          <a:solidFill>
+            <a:srgbClr val="977024"/>
+          </a:solidFill>
+          <a:ln/>
+        </p:spPr>
+      </p:sp>
+      <p:sp>
+        <p:nvSpPr>
+          <p:cNvPr id="21" name="Text 19"/>
+          <p:cNvSpPr/>
+          <p:nvPr/>
+        </p:nvSpPr>
+        <p:spPr>
+          <a:xfrm>
+            <a:off x="6393028" y="1947672"/>
+            <a:ext cx="292608" cy="292608"/>
+          </a:xfrm>
+          <a:prstGeom prst="rect">
+            <a:avLst/>
+          </a:prstGeom>
+          <a:noFill/>
+          <a:ln/>
+        </p:spPr>
+        <p:txBody>
+          <a:bodyPr wrap="square" rtlCol="0" anchor="ctr"/>
+          <a:lstStyle/>
+          <a:p>
+            <a:pPr algn="ctr" indent="0" marL="0">
+              <a:buNone/>
+            </a:pPr>
+            <a:r>
+              <a:rPr lang="en-US" sz="1050" b="1" dirty="0">
+                <a:solidFill>
+                  <a:srgbClr val="FFFFFF"/>
+                </a:solidFill>
+                <a:latin typeface="Pretendard" pitchFamily="34" charset="0"/>
+                <a:ea typeface="Pretendard" pitchFamily="34" charset="-122"/>
+                <a:cs typeface="Pretendard" pitchFamily="34" charset="-120"/>
+              </a:rPr>
+              <a:t>✓</a:t>
+            </a:r>
+            <a:endParaRPr lang="en-US" sz="1050" dirty="0"/>
+          </a:p>
+        </p:txBody>
+      </p:sp>
+      <p:sp>
+        <p:nvSpPr>
+          <p:cNvPr id="22" name="Text 20"/>
+          <p:cNvSpPr/>
+          <p:nvPr/>
+        </p:nvSpPr>
+        <p:spPr>
+          <a:xfrm>
+            <a:off x="6786220" y="1792224"/>
+            <a:ext cx="4710532" cy="603504"/>
+          </a:xfrm>
+          <a:prstGeom prst="rect">
+            <a:avLst/>
+          </a:prstGeom>
+          <a:noFill/>
+          <a:ln/>
+        </p:spPr>
+        <p:txBody>
+          <a:bodyPr wrap="square" rtlCol="0" anchor="ctr"/>
+          <a:lstStyle/>
+          <a:p>
+            <a:pPr indent="0" marL="0">
+              <a:lnSpc>
+                <a:spcPct val="110000"/>
+              </a:lnSpc>
+              <a:buNone/>
+            </a:pPr>
+            <a:r>
+              <a:rPr lang="en-US" sz="950" dirty="0">
+                <a:solidFill>
+                  <a:srgbClr val="10161F"/>
+                </a:solidFill>
+                <a:latin typeface="Pretendard" pitchFamily="34" charset="0"/>
+                <a:ea typeface="Pretendard" pitchFamily="34" charset="-122"/>
+                <a:cs typeface="Pretendard" pitchFamily="34" charset="-120"/>
+              </a:rPr>
+              <a:t>토지이용계획확인원상 도시계획시설 저촉, 건축선 후퇴, 지구단위계획 특별계획구역 확인</a:t>
+            </a:r>
+            <a:endParaRPr lang="en-US" sz="950" dirty="0"/>
+          </a:p>
+        </p:txBody>
+      </p:sp>
+      <p:sp>
+        <p:nvSpPr>
+          <p:cNvPr id="23" name="Shape 21"/>
+          <p:cNvSpPr/>
+          <p:nvPr/>
+        </p:nvSpPr>
+        <p:spPr>
+          <a:xfrm>
+            <a:off x="6255868" y="2542032"/>
+            <a:ext cx="5368900" cy="749808"/>
+          </a:xfrm>
+          <a:prstGeom prst="rect">
+            <a:avLst/>
+          </a:prstGeom>
+          <a:solidFill>
+            <a:srgbClr val="F7FAFC"/>
+          </a:solidFill>
+          <a:ln w="6350">
+            <a:solidFill>
+              <a:srgbClr val="D9B668"/>
+            </a:solidFill>
+            <a:prstDash val="solid"/>
+          </a:ln>
+        </p:spPr>
+      </p:sp>
+      <p:sp>
+        <p:nvSpPr>
+          <p:cNvPr id="24" name="Shape 22"/>
+          <p:cNvSpPr/>
+          <p:nvPr/>
+        </p:nvSpPr>
+        <p:spPr>
+          <a:xfrm>
+            <a:off x="6393028" y="2770632"/>
+            <a:ext cx="292608" cy="292608"/>
+          </a:xfrm>
+          <a:prstGeom prst="rect">
+            <a:avLst/>
+          </a:prstGeom>
+          <a:solidFill>
+            <a:srgbClr val="977024"/>
+          </a:solidFill>
+          <a:ln/>
+        </p:spPr>
+      </p:sp>
+      <p:sp>
+        <p:nvSpPr>
+          <p:cNvPr id="25" name="Text 23"/>
+          <p:cNvSpPr/>
+          <p:nvPr/>
+        </p:nvSpPr>
+        <p:spPr>
+          <a:xfrm>
+            <a:off x="6393028" y="2770632"/>
+            <a:ext cx="292608" cy="292608"/>
+          </a:xfrm>
+          <a:prstGeom prst="rect">
+            <a:avLst/>
+          </a:prstGeom>
+          <a:noFill/>
+          <a:ln/>
+        </p:spPr>
+        <p:txBody>
+          <a:bodyPr wrap="square" rtlCol="0" anchor="ctr"/>
+          <a:lstStyle/>
+          <a:p>
+            <a:pPr algn="ctr" indent="0" marL="0">
+              <a:buNone/>
+            </a:pPr>
+            <a:r>
+              <a:rPr lang="en-US" sz="1050" b="1" dirty="0">
+                <a:solidFill>
+                  <a:srgbClr val="FFFFFF"/>
+                </a:solidFill>
+                <a:latin typeface="Pretendard" pitchFamily="34" charset="0"/>
+                <a:ea typeface="Pretendard" pitchFamily="34" charset="-122"/>
+                <a:cs typeface="Pretendard" pitchFamily="34" charset="-120"/>
+              </a:rPr>
+              <a:t>✓</a:t>
+            </a:r>
+            <a:endParaRPr lang="en-US" sz="1050" dirty="0"/>
+          </a:p>
+        </p:txBody>
+      </p:sp>
+      <p:sp>
+        <p:nvSpPr>
+          <p:cNvPr id="26" name="Text 24"/>
+          <p:cNvSpPr/>
+          <p:nvPr/>
+        </p:nvSpPr>
+        <p:spPr>
+          <a:xfrm>
+            <a:off x="6786220" y="2615184"/>
+            <a:ext cx="4710532" cy="603504"/>
+          </a:xfrm>
+          <a:prstGeom prst="rect">
+            <a:avLst/>
+          </a:prstGeom>
+          <a:noFill/>
+          <a:ln/>
+        </p:spPr>
+        <p:txBody>
+          <a:bodyPr wrap="square" rtlCol="0" anchor="ctr"/>
+          <a:lstStyle/>
+          <a:p>
+            <a:pPr indent="0" marL="0">
+              <a:lnSpc>
+                <a:spcPct val="110000"/>
+              </a:lnSpc>
+              <a:buNone/>
+            </a:pPr>
+            <a:r>
+              <a:rPr lang="en-US" sz="950" dirty="0">
+                <a:solidFill>
+                  <a:srgbClr val="10161F"/>
+                </a:solidFill>
+                <a:latin typeface="Pretendard" pitchFamily="34" charset="0"/>
+                <a:ea typeface="Pretendard" pitchFamily="34" charset="-122"/>
+                <a:cs typeface="Pretendard" pitchFamily="34" charset="-120"/>
+              </a:rPr>
+              <a:t>기계식 주차기 정기 안전점검 합격증, 승강기 검사필증, 소방 완비증명서 실물 실사</a:t>
+            </a:r>
+            <a:endParaRPr lang="en-US" sz="950" dirty="0"/>
+          </a:p>
+        </p:txBody>
+      </p:sp>
+      <p:sp>
+        <p:nvSpPr>
+          <p:cNvPr id="27" name="Shape 25"/>
+          <p:cNvSpPr/>
+          <p:nvPr/>
+        </p:nvSpPr>
+        <p:spPr>
+          <a:xfrm>
+            <a:off x="6255868" y="3364992"/>
+            <a:ext cx="5368900" cy="749808"/>
+          </a:xfrm>
+          <a:prstGeom prst="rect">
+            <a:avLst/>
+          </a:prstGeom>
+          <a:solidFill>
+            <a:srgbClr val="F7FAFC"/>
+          </a:solidFill>
+          <a:ln w="6350">
+            <a:solidFill>
+              <a:srgbClr val="D9B668"/>
+            </a:solidFill>
+            <a:prstDash val="solid"/>
+          </a:ln>
+        </p:spPr>
+      </p:sp>
+      <p:sp>
+        <p:nvSpPr>
+          <p:cNvPr id="28" name="Shape 26"/>
+          <p:cNvSpPr/>
+          <p:nvPr/>
+        </p:nvSpPr>
+        <p:spPr>
+          <a:xfrm>
+            <a:off x="6393028" y="3593592"/>
+            <a:ext cx="292608" cy="292608"/>
+          </a:xfrm>
+          <a:prstGeom prst="rect">
+            <a:avLst/>
+          </a:prstGeom>
+          <a:solidFill>
+            <a:srgbClr val="977024"/>
+          </a:solidFill>
+          <a:ln/>
+        </p:spPr>
+      </p:sp>
+      <p:sp>
+        <p:nvSpPr>
+          <p:cNvPr id="29" name="Text 27"/>
+          <p:cNvSpPr/>
+          <p:nvPr/>
+        </p:nvSpPr>
+        <p:spPr>
+          <a:xfrm>
+            <a:off x="6393028" y="3593592"/>
+            <a:ext cx="292608" cy="292608"/>
+          </a:xfrm>
+          <a:prstGeom prst="rect">
+            <a:avLst/>
+          </a:prstGeom>
+          <a:noFill/>
+          <a:ln/>
+        </p:spPr>
+        <p:txBody>
+          <a:bodyPr wrap="square" rtlCol="0" anchor="ctr"/>
+          <a:lstStyle/>
+          <a:p>
+            <a:pPr algn="ctr" indent="0" marL="0">
+              <a:buNone/>
+            </a:pPr>
+            <a:r>
+              <a:rPr lang="en-US" sz="1050" b="1" dirty="0">
+                <a:solidFill>
+                  <a:srgbClr val="FFFFFF"/>
+                </a:solidFill>
+                <a:latin typeface="Pretendard" pitchFamily="34" charset="0"/>
+                <a:ea typeface="Pretendard" pitchFamily="34" charset="-122"/>
+                <a:cs typeface="Pretendard" pitchFamily="34" charset="-120"/>
+              </a:rPr>
+              <a:t>✓</a:t>
+            </a:r>
+            <a:endParaRPr lang="en-US" sz="1050" dirty="0"/>
+          </a:p>
+        </p:txBody>
+      </p:sp>
+      <p:sp>
+        <p:nvSpPr>
+          <p:cNvPr id="30" name="Text 28"/>
+          <p:cNvSpPr/>
+          <p:nvPr/>
+        </p:nvSpPr>
+        <p:spPr>
+          <a:xfrm>
+            <a:off x="6786220" y="3438144"/>
+            <a:ext cx="4710532" cy="603504"/>
+          </a:xfrm>
+          <a:prstGeom prst="rect">
+            <a:avLst/>
+          </a:prstGeom>
+          <a:noFill/>
+          <a:ln/>
+        </p:spPr>
+        <p:txBody>
+          <a:bodyPr wrap="square" rtlCol="0" anchor="ctr"/>
+          <a:lstStyle/>
+          <a:p>
+            <a:pPr indent="0" marL="0">
+              <a:lnSpc>
+                <a:spcPct val="110000"/>
+              </a:lnSpc>
+              <a:buNone/>
+            </a:pPr>
+            <a:r>
+              <a:rPr lang="en-US" sz="950" dirty="0">
+                <a:solidFill>
+                  <a:srgbClr val="10161F"/>
+                </a:solidFill>
+                <a:latin typeface="Pretendard" pitchFamily="34" charset="0"/>
+                <a:ea typeface="Pretendard" pitchFamily="34" charset="-122"/>
+                <a:cs typeface="Pretendard" pitchFamily="34" charset="-120"/>
+              </a:rPr>
+              <a:t>정화조 용량 대비 현 업종 적합성 및 하수도 원인자부담금 추가 부과 대상 여부 확인</a:t>
+            </a:r>
+            <a:endParaRPr lang="en-US" sz="950" dirty="0"/>
+          </a:p>
+        </p:txBody>
+      </p:sp>
+      <p:sp>
+        <p:nvSpPr>
+          <p:cNvPr id="31" name="Shape 29"/>
+          <p:cNvSpPr/>
+          <p:nvPr/>
+        </p:nvSpPr>
+        <p:spPr>
+          <a:xfrm>
+            <a:off x="566928" y="5349240"/>
+            <a:ext cx="11057839" cy="457200"/>
+          </a:xfrm>
+          <a:prstGeom prst="rect">
+            <a:avLst/>
+          </a:prstGeom>
+          <a:solidFill>
+            <a:srgbClr val="D9B668"/>
+          </a:solidFill>
+          <a:ln/>
+        </p:spPr>
+      </p:sp>
+      <p:sp>
+        <p:nvSpPr>
+          <p:cNvPr id="32" name="Text 30"/>
+          <p:cNvSpPr/>
+          <p:nvPr/>
+        </p:nvSpPr>
+        <p:spPr>
+          <a:xfrm>
+            <a:off x="749808" y="5422392"/>
+            <a:ext cx="10692079" cy="310896"/>
+          </a:xfrm>
+          <a:prstGeom prst="rect">
+            <a:avLst/>
+          </a:prstGeom>
+          <a:noFill/>
+          <a:ln/>
+        </p:spPr>
+        <p:txBody>
+          <a:bodyPr wrap="square" rtlCol="0" anchor="ctr"/>
+          <a:lstStyle/>
+          <a:p>
+            <a:pPr indent="0" marL="0">
+              <a:buNone/>
+            </a:pPr>
+            <a:r>
+              <a:rPr lang="en-US" sz="950" b="1" dirty="0">
+                <a:solidFill>
+                  <a:srgbClr val="977024"/>
+                </a:solidFill>
+                <a:latin typeface="Pretendard" pitchFamily="34" charset="0"/>
+                <a:ea typeface="Pretendard" pitchFamily="34" charset="-122"/>
+                <a:cs typeface="Pretendard" pitchFamily="34" charset="-120"/>
+              </a:rPr>
+              <a:t>※ 본 체크리스트는 계약 전 매수인의 안전한 자산 인수를 위한 필수 확인 사항이며, 실사(Due Diligence) 결과에 따라 매매 조건 및 잔금 일정이 조정될 수 있습니다.</a:t>
+            </a:r>
+            <a:endParaRPr lang="en-US" sz="950" dirty="0"/>
+          </a:p>
+        </p:txBody>
+      </p:sp>
+      <p:sp>
+        <p:nvSpPr>
+          <p:cNvPr id="33" name="Text 31"/>
           <p:cNvSpPr/>
           <p:nvPr/>
         </p:nvSpPr>
@@ -6357,7 +4604,7 @@
       </p:sp>
       <p:sp>
         <p:nvSpPr>
-          <p:cNvPr id="14" name="Text 12"/>
+          <p:cNvPr id="34" name="Text 32"/>
           <p:cNvSpPr/>
           <p:nvPr/>
         </p:nvSpPr>
@@ -6518,7 +4765,7 @@
                 <a:ea typeface="Arial" pitchFamily="34" charset="-122"/>
                 <a:cs typeface="Arial" pitchFamily="34" charset="-120"/>
               </a:rPr>
-              <a:t>Checklist</a:t>
+              <a:t>Process</a:t>
             </a:r>
             <a:endParaRPr lang="en-US" sz="950" dirty="0"/>
           </a:p>
@@ -6559,7 +4806,7 @@
                 <a:ea typeface="Pretendard" pitchFamily="34" charset="-122"/>
                 <a:cs typeface="Pretendard" pitchFamily="34" charset="-120"/>
               </a:rPr>
-              <a:t>실사 체크리스트</a:t>
+              <a:t>진행 절차</a:t>
             </a:r>
             <a:endParaRPr lang="en-US" sz="2300" dirty="0"/>
           </a:p>
@@ -6567,63 +4814,26 @@
       </p:sp>
       <p:sp>
         <p:nvSpPr>
-          <p:cNvPr id="6" name="Text 4"/>
-          <p:cNvSpPr/>
-          <p:nvPr/>
-        </p:nvSpPr>
-        <p:spPr>
-          <a:xfrm>
-            <a:off x="566928" y="1371600"/>
-            <a:ext cx="11057839" cy="237744"/>
-          </a:xfrm>
-          <a:prstGeom prst="rect">
-            <a:avLst/>
-          </a:prstGeom>
-          <a:noFill/>
-          <a:ln/>
-        </p:spPr>
-        <p:txBody>
-          <a:bodyPr wrap="square" lIns="0" tIns="0" rIns="0" bIns="0" rtlCol="0" anchor="ctr"/>
-          <a:lstStyle/>
-          <a:p>
-            <a:pPr indent="0" marL="0">
-              <a:buNone/>
-            </a:pPr>
-            <a:r>
-              <a:rPr lang="en-US" sz="1100" b="1" dirty="0">
-                <a:solidFill>
-                  <a:srgbClr val="10161F"/>
-                </a:solidFill>
-                <a:latin typeface="Pretendard" pitchFamily="34" charset="0"/>
-                <a:ea typeface="Pretendard" pitchFamily="34" charset="-122"/>
-                <a:cs typeface="Pretendard" pitchFamily="34" charset="-120"/>
-              </a:rPr>
-              <a:t>거래 안정성 확보를 위한 필수 법률·물리·임대차 실사 점검 항목 (총 6건)</a:t>
-            </a:r>
-            <a:endParaRPr lang="en-US" sz="1100" dirty="0"/>
-          </a:p>
-        </p:txBody>
-      </p:sp>
-      <p:sp>
-        <p:nvSpPr>
-          <p:cNvPr id="7" name="Shape 5"/>
-          <p:cNvSpPr/>
-          <p:nvPr/>
-        </p:nvSpPr>
-        <p:spPr>
-          <a:xfrm>
-            <a:off x="566928" y="1719072"/>
-            <a:ext cx="5368900" cy="749808"/>
-          </a:xfrm>
-          <a:prstGeom prst="rect">
-            <a:avLst/>
+          <p:cNvPr id="6" name="Shape 4"/>
+          <p:cNvSpPr/>
+          <p:nvPr/>
+        </p:nvSpPr>
+        <p:spPr>
+          <a:xfrm>
+            <a:off x="566928" y="1572768"/>
+            <a:ext cx="11057839" cy="3200400"/>
+          </a:xfrm>
+          <a:prstGeom prst="roundRect">
+            <a:avLst>
+              <a:gd name="adj" fmla="val 1714"/>
+            </a:avLst>
           </a:prstGeom>
           <a:solidFill>
             <a:srgbClr val="F7FAFC"/>
           </a:solidFill>
           <a:ln w="6350">
             <a:solidFill>
-              <a:srgbClr val="D9B668"/>
+              <a:srgbClr val="CBD5E0"/>
             </a:solidFill>
             <a:prstDash val="solid"/>
           </a:ln>
@@ -6631,34 +4841,73 @@
       </p:sp>
       <p:sp>
         <p:nvSpPr>
-          <p:cNvPr id="8" name="Shape 6"/>
-          <p:cNvSpPr/>
-          <p:nvPr/>
-        </p:nvSpPr>
-        <p:spPr>
-          <a:xfrm>
-            <a:off x="704088" y="1947672"/>
-            <a:ext cx="292608" cy="292608"/>
-          </a:xfrm>
-          <a:prstGeom prst="rect">
+          <p:cNvPr id="7" name="Shape 5"/>
+          <p:cNvSpPr/>
+          <p:nvPr/>
+        </p:nvSpPr>
+        <p:spPr>
+          <a:xfrm>
+            <a:off x="786384" y="1792224"/>
+            <a:ext cx="438912" cy="438912"/>
+          </a:xfrm>
+          <a:prstGeom prst="ellipse">
             <a:avLst/>
           </a:prstGeom>
           <a:solidFill>
-            <a:srgbClr val="977024"/>
+            <a:srgbClr val="B98A2E"/>
           </a:solidFill>
           <a:ln/>
         </p:spPr>
       </p:sp>
       <p:sp>
         <p:nvSpPr>
+          <p:cNvPr id="8" name="Text 6"/>
+          <p:cNvSpPr/>
+          <p:nvPr/>
+        </p:nvSpPr>
+        <p:spPr>
+          <a:xfrm>
+            <a:off x="786384" y="1792224"/>
+            <a:ext cx="438912" cy="438912"/>
+          </a:xfrm>
+          <a:prstGeom prst="rect">
+            <a:avLst/>
+          </a:prstGeom>
+          <a:noFill/>
+          <a:ln/>
+        </p:spPr>
+        <p:txBody>
+          <a:bodyPr wrap="square" lIns="0" tIns="0" rIns="0" bIns="0" rtlCol="0" anchor="ctr"/>
+          <a:lstStyle/>
+          <a:p>
+            <a:pPr algn="ctr" indent="0" marL="0">
+              <a:buNone/>
+            </a:pPr>
+            <a:r>
+              <a:rPr lang="en-US" sz="1400" b="1" dirty="0">
+                <a:solidFill>
+                  <a:srgbClr val="FFFFFF"/>
+                </a:solidFill>
+                <a:latin typeface="Arial" pitchFamily="34" charset="0"/>
+                <a:ea typeface="Arial" pitchFamily="34" charset="-122"/>
+                <a:cs typeface="Arial" pitchFamily="34" charset="-120"/>
+              </a:rPr>
+              <a:t>01</a:t>
+            </a:r>
+            <a:endParaRPr lang="en-US" sz="1400" dirty="0"/>
+          </a:p>
+        </p:txBody>
+      </p:sp>
+      <p:sp>
+        <p:nvSpPr>
           <p:cNvPr id="9" name="Text 7"/>
           <p:cNvSpPr/>
           <p:nvPr/>
         </p:nvSpPr>
         <p:spPr>
           <a:xfrm>
-            <a:off x="704088" y="1947672"/>
-            <a:ext cx="292608" cy="292608"/>
+            <a:off x="786384" y="2304288"/>
+            <a:ext cx="10618927" cy="365760"/>
           </a:xfrm>
           <a:prstGeom prst="rect">
             <a:avLst/>
@@ -6670,21 +4919,21 @@
           <a:bodyPr wrap="square" rtlCol="0" anchor="ctr"/>
           <a:lstStyle/>
           <a:p>
-            <a:pPr algn="ctr" indent="0" marL="0">
-              <a:buNone/>
-            </a:pPr>
-            <a:r>
-              <a:rPr lang="en-US" sz="1050" b="1" dirty="0">
-                <a:solidFill>
-                  <a:srgbClr val="FFFFFF"/>
-                </a:solidFill>
-                <a:latin typeface="Pretendard" pitchFamily="34" charset="0"/>
-                <a:ea typeface="Pretendard" pitchFamily="34" charset="-122"/>
-                <a:cs typeface="Pretendard" pitchFamily="34" charset="-120"/>
-              </a:rPr>
-              <a:t>✓</a:t>
-            </a:r>
-            <a:endParaRPr lang="en-US" sz="1050" dirty="0"/>
+            <a:pPr indent="0" marL="0">
+              <a:buNone/>
+            </a:pPr>
+            <a:r>
+              <a:rPr lang="en-US" sz="1600" b="1" dirty="0">
+                <a:solidFill>
+                  <a:srgbClr val="10161F"/>
+                </a:solidFill>
+                <a:latin typeface="Pretendard" pitchFamily="34" charset="0"/>
+                <a:ea typeface="Pretendard" pitchFamily="34" charset="-122"/>
+                <a:cs typeface="Pretendard" pitchFamily="34" charset="-120"/>
+              </a:rPr>
+              <a:t>1단계</a:t>
+            </a:r>
+            <a:endParaRPr lang="en-US" sz="1600" dirty="0"/>
           </a:p>
         </p:txBody>
       </p:sp>
@@ -6696,27 +4945,24 @@
         </p:nvSpPr>
         <p:spPr>
           <a:xfrm>
-            <a:off x="1097280" y="1792224"/>
-            <a:ext cx="4710532" cy="603504"/>
-          </a:xfrm>
-          <a:prstGeom prst="rect">
-            <a:avLst/>
-          </a:prstGeom>
-          <a:noFill/>
-          <a:ln/>
-        </p:spPr>
-        <p:txBody>
-          <a:bodyPr wrap="square" rtlCol="0" anchor="ctr"/>
-          <a:lstStyle/>
-          <a:p>
-            <a:pPr indent="0" marL="0">
-              <a:lnSpc>
-                <a:spcPct val="110000"/>
-              </a:lnSpc>
-              <a:buNone/>
-            </a:pPr>
-            <a:r>
-              <a:rPr lang="en-US" sz="950" dirty="0">
+            <a:off x="786384" y="2761488"/>
+            <a:ext cx="10618927" cy="1828800"/>
+          </a:xfrm>
+          <a:prstGeom prst="rect">
+            <a:avLst/>
+          </a:prstGeom>
+          <a:noFill/>
+          <a:ln/>
+        </p:spPr>
+        <p:txBody>
+          <a:bodyPr wrap="square" rtlCol="0" anchor="t"/>
+          <a:lstStyle/>
+          <a:p>
+            <a:pPr indent="0" marL="0">
+              <a:buNone/>
+            </a:pPr>
+            <a:r>
+              <a:rPr lang="en-US" sz="1100" dirty="0">
                 <a:solidFill>
                   <a:srgbClr val="10161F"/>
                 </a:solidFill>
@@ -6724,125 +4970,16 @@
                 <a:ea typeface="Pretendard" pitchFamily="34" charset="-122"/>
                 <a:cs typeface="Pretendard" pitchFamily="34" charset="-120"/>
               </a:rPr>
-              <a:t>등기부등본 갑구/을구 권리관계 및 근저당 채권최고액 전액 말소 조건 원본 대조</a:t>
-            </a:r>
-            <a:endParaRPr lang="en-US" sz="950" dirty="0"/>
-          </a:p>
-        </p:txBody>
-      </p:sp>
-      <p:sp>
-        <p:nvSpPr>
-          <p:cNvPr id="11" name="Shape 9"/>
-          <p:cNvSpPr/>
-          <p:nvPr/>
-        </p:nvSpPr>
-        <p:spPr>
-          <a:xfrm>
-            <a:off x="566928" y="2542032"/>
-            <a:ext cx="5368900" cy="749808"/>
-          </a:xfrm>
-          <a:prstGeom prst="rect">
-            <a:avLst/>
-          </a:prstGeom>
-          <a:solidFill>
-            <a:srgbClr val="F7FAFC"/>
-          </a:solidFill>
-          <a:ln w="6350">
-            <a:solidFill>
-              <a:srgbClr val="D9B668"/>
-            </a:solidFill>
-            <a:prstDash val="solid"/>
-          </a:ln>
-        </p:spPr>
-      </p:sp>
-      <p:sp>
-        <p:nvSpPr>
-          <p:cNvPr id="12" name="Shape 10"/>
-          <p:cNvSpPr/>
-          <p:nvPr/>
-        </p:nvSpPr>
-        <p:spPr>
-          <a:xfrm>
-            <a:off x="704088" y="2770632"/>
-            <a:ext cx="292608" cy="292608"/>
-          </a:xfrm>
-          <a:prstGeom prst="rect">
-            <a:avLst/>
-          </a:prstGeom>
-          <a:solidFill>
-            <a:srgbClr val="977024"/>
-          </a:solidFill>
-          <a:ln/>
-        </p:spPr>
-      </p:sp>
-      <p:sp>
-        <p:nvSpPr>
-          <p:cNvPr id="13" name="Text 11"/>
-          <p:cNvSpPr/>
-          <p:nvPr/>
-        </p:nvSpPr>
-        <p:spPr>
-          <a:xfrm>
-            <a:off x="704088" y="2770632"/>
-            <a:ext cx="292608" cy="292608"/>
-          </a:xfrm>
-          <a:prstGeom prst="rect">
-            <a:avLst/>
-          </a:prstGeom>
-          <a:noFill/>
-          <a:ln/>
-        </p:spPr>
-        <p:txBody>
-          <a:bodyPr wrap="square" rtlCol="0" anchor="ctr"/>
-          <a:lstStyle/>
-          <a:p>
-            <a:pPr algn="ctr" indent="0" marL="0">
-              <a:buNone/>
-            </a:pPr>
-            <a:r>
-              <a:rPr lang="en-US" sz="1050" b="1" dirty="0">
-                <a:solidFill>
-                  <a:srgbClr val="FFFFFF"/>
-                </a:solidFill>
-                <a:latin typeface="Pretendard" pitchFamily="34" charset="0"/>
-                <a:ea typeface="Pretendard" pitchFamily="34" charset="-122"/>
-                <a:cs typeface="Pretendard" pitchFamily="34" charset="-120"/>
-              </a:rPr>
-              <a:t>✓</a:t>
-            </a:r>
-            <a:endParaRPr lang="en-US" sz="1050" dirty="0"/>
-          </a:p>
-        </p:txBody>
-      </p:sp>
-      <p:sp>
-        <p:nvSpPr>
-          <p:cNvPr id="14" name="Text 12"/>
-          <p:cNvSpPr/>
-          <p:nvPr/>
-        </p:nvSpPr>
-        <p:spPr>
-          <a:xfrm>
-            <a:off x="1097280" y="2615184"/>
-            <a:ext cx="4710532" cy="603504"/>
-          </a:xfrm>
-          <a:prstGeom prst="rect">
-            <a:avLst/>
-          </a:prstGeom>
-          <a:noFill/>
-          <a:ln/>
-        </p:spPr>
-        <p:txBody>
-          <a:bodyPr wrap="square" rtlCol="0" anchor="ctr"/>
-          <a:lstStyle/>
-          <a:p>
-            <a:pPr indent="0" marL="0">
-              <a:lnSpc>
-                <a:spcPct val="110000"/>
-              </a:lnSpc>
-              <a:buNone/>
-            </a:pPr>
-            <a:r>
-              <a:rPr lang="en-US" sz="950" dirty="0">
+              <a:t>임대차계약서 원본 및 시설 점검 보고서 확인을 권장합니</a:t>
+            </a:r>
+            <a:endParaRPr lang="en-US" sz="1100" dirty="0"/>
+          </a:p>
+          <a:p>
+            <a:pPr indent="0" marL="0">
+              <a:buNone/>
+            </a:pPr>
+            <a:r>
+              <a:rPr lang="en-US" sz="1100" dirty="0">
                 <a:solidFill>
                   <a:srgbClr val="10161F"/>
                 </a:solidFill>
@@ -6850,578 +4987,15 @@
                 <a:ea typeface="Pretendard" pitchFamily="34" charset="-122"/>
                 <a:cs typeface="Pretendard" pitchFamily="34" charset="-120"/>
               </a:rPr>
-              <a:t>임대차 원본 계약서 검토 (보증금, 월임대료, 관리비 실입금 내역 및 제소전화해조서)</a:t>
-            </a:r>
-            <a:endParaRPr lang="en-US" sz="950" dirty="0"/>
-          </a:p>
-        </p:txBody>
-      </p:sp>
-      <p:sp>
-        <p:nvSpPr>
-          <p:cNvPr id="15" name="Shape 13"/>
-          <p:cNvSpPr/>
-          <p:nvPr/>
-        </p:nvSpPr>
-        <p:spPr>
-          <a:xfrm>
-            <a:off x="566928" y="3364992"/>
-            <a:ext cx="5368900" cy="749808"/>
-          </a:xfrm>
-          <a:prstGeom prst="rect">
-            <a:avLst/>
-          </a:prstGeom>
-          <a:solidFill>
-            <a:srgbClr val="F7FAFC"/>
-          </a:solidFill>
-          <a:ln w="6350">
-            <a:solidFill>
-              <a:srgbClr val="D9B668"/>
-            </a:solidFill>
-            <a:prstDash val="solid"/>
-          </a:ln>
-        </p:spPr>
-      </p:sp>
-      <p:sp>
-        <p:nvSpPr>
-          <p:cNvPr id="16" name="Shape 14"/>
-          <p:cNvSpPr/>
-          <p:nvPr/>
-        </p:nvSpPr>
-        <p:spPr>
-          <a:xfrm>
-            <a:off x="704088" y="3593592"/>
-            <a:ext cx="292608" cy="292608"/>
-          </a:xfrm>
-          <a:prstGeom prst="rect">
-            <a:avLst/>
-          </a:prstGeom>
-          <a:solidFill>
-            <a:srgbClr val="977024"/>
-          </a:solidFill>
-          <a:ln/>
-        </p:spPr>
-      </p:sp>
-      <p:sp>
-        <p:nvSpPr>
-          <p:cNvPr id="17" name="Text 15"/>
-          <p:cNvSpPr/>
-          <p:nvPr/>
-        </p:nvSpPr>
-        <p:spPr>
-          <a:xfrm>
-            <a:off x="704088" y="3593592"/>
-            <a:ext cx="292608" cy="292608"/>
-          </a:xfrm>
-          <a:prstGeom prst="rect">
-            <a:avLst/>
-          </a:prstGeom>
-          <a:noFill/>
-          <a:ln/>
-        </p:spPr>
-        <p:txBody>
-          <a:bodyPr wrap="square" rtlCol="0" anchor="ctr"/>
-          <a:lstStyle/>
-          <a:p>
-            <a:pPr algn="ctr" indent="0" marL="0">
-              <a:buNone/>
-            </a:pPr>
-            <a:r>
-              <a:rPr lang="en-US" sz="1050" b="1" dirty="0">
-                <a:solidFill>
-                  <a:srgbClr val="FFFFFF"/>
-                </a:solidFill>
-                <a:latin typeface="Pretendard" pitchFamily="34" charset="0"/>
-                <a:ea typeface="Pretendard" pitchFamily="34" charset="-122"/>
-                <a:cs typeface="Pretendard" pitchFamily="34" charset="-120"/>
-              </a:rPr>
-              <a:t>✓</a:t>
-            </a:r>
-            <a:endParaRPr lang="en-US" sz="1050" dirty="0"/>
-          </a:p>
-        </p:txBody>
-      </p:sp>
-      <p:sp>
-        <p:nvSpPr>
-          <p:cNvPr id="18" name="Text 16"/>
-          <p:cNvSpPr/>
-          <p:nvPr/>
-        </p:nvSpPr>
-        <p:spPr>
-          <a:xfrm>
-            <a:off x="1097280" y="3438144"/>
-            <a:ext cx="4710532" cy="603504"/>
-          </a:xfrm>
-          <a:prstGeom prst="rect">
-            <a:avLst/>
-          </a:prstGeom>
-          <a:noFill/>
-          <a:ln/>
-        </p:spPr>
-        <p:txBody>
-          <a:bodyPr wrap="square" rtlCol="0" anchor="ctr"/>
-          <a:lstStyle/>
-          <a:p>
-            <a:pPr indent="0" marL="0">
-              <a:lnSpc>
-                <a:spcPct val="110000"/>
-              </a:lnSpc>
-              <a:buNone/>
-            </a:pPr>
-            <a:r>
-              <a:rPr lang="en-US" sz="950" dirty="0">
-                <a:solidFill>
-                  <a:srgbClr val="10161F"/>
-                </a:solidFill>
-                <a:latin typeface="Pretendard" pitchFamily="34" charset="0"/>
-                <a:ea typeface="Pretendard" pitchFamily="34" charset="-122"/>
-                <a:cs typeface="Pretendard" pitchFamily="34" charset="-120"/>
-              </a:rPr>
-              <a:t>건축물대장상 위반건축물 등재 여부 및 불법 증축·용도변경 이행강제금 납부 이력 점검</a:t>
-            </a:r>
-            <a:endParaRPr lang="en-US" sz="950" dirty="0"/>
-          </a:p>
-        </p:txBody>
-      </p:sp>
-      <p:sp>
-        <p:nvSpPr>
-          <p:cNvPr id="19" name="Shape 17"/>
-          <p:cNvSpPr/>
-          <p:nvPr/>
-        </p:nvSpPr>
-        <p:spPr>
-          <a:xfrm>
-            <a:off x="6255868" y="1719072"/>
-            <a:ext cx="5368900" cy="749808"/>
-          </a:xfrm>
-          <a:prstGeom prst="rect">
-            <a:avLst/>
-          </a:prstGeom>
-          <a:solidFill>
-            <a:srgbClr val="F7FAFC"/>
-          </a:solidFill>
-          <a:ln w="6350">
-            <a:solidFill>
-              <a:srgbClr val="D9B668"/>
-            </a:solidFill>
-            <a:prstDash val="solid"/>
-          </a:ln>
-        </p:spPr>
-      </p:sp>
-      <p:sp>
-        <p:nvSpPr>
-          <p:cNvPr id="20" name="Shape 18"/>
-          <p:cNvSpPr/>
-          <p:nvPr/>
-        </p:nvSpPr>
-        <p:spPr>
-          <a:xfrm>
-            <a:off x="6393028" y="1947672"/>
-            <a:ext cx="292608" cy="292608"/>
-          </a:xfrm>
-          <a:prstGeom prst="rect">
-            <a:avLst/>
-          </a:prstGeom>
-          <a:solidFill>
-            <a:srgbClr val="977024"/>
-          </a:solidFill>
-          <a:ln/>
-        </p:spPr>
-      </p:sp>
-      <p:sp>
-        <p:nvSpPr>
-          <p:cNvPr id="21" name="Text 19"/>
-          <p:cNvSpPr/>
-          <p:nvPr/>
-        </p:nvSpPr>
-        <p:spPr>
-          <a:xfrm>
-            <a:off x="6393028" y="1947672"/>
-            <a:ext cx="292608" cy="292608"/>
-          </a:xfrm>
-          <a:prstGeom prst="rect">
-            <a:avLst/>
-          </a:prstGeom>
-          <a:noFill/>
-          <a:ln/>
-        </p:spPr>
-        <p:txBody>
-          <a:bodyPr wrap="square" rtlCol="0" anchor="ctr"/>
-          <a:lstStyle/>
-          <a:p>
-            <a:pPr algn="ctr" indent="0" marL="0">
-              <a:buNone/>
-            </a:pPr>
-            <a:r>
-              <a:rPr lang="en-US" sz="1050" b="1" dirty="0">
-                <a:solidFill>
-                  <a:srgbClr val="FFFFFF"/>
-                </a:solidFill>
-                <a:latin typeface="Pretendard" pitchFamily="34" charset="0"/>
-                <a:ea typeface="Pretendard" pitchFamily="34" charset="-122"/>
-                <a:cs typeface="Pretendard" pitchFamily="34" charset="-120"/>
-              </a:rPr>
-              <a:t>✓</a:t>
-            </a:r>
-            <a:endParaRPr lang="en-US" sz="1050" dirty="0"/>
-          </a:p>
-        </p:txBody>
-      </p:sp>
-      <p:sp>
-        <p:nvSpPr>
-          <p:cNvPr id="22" name="Text 20"/>
-          <p:cNvSpPr/>
-          <p:nvPr/>
-        </p:nvSpPr>
-        <p:spPr>
-          <a:xfrm>
-            <a:off x="6786220" y="1792224"/>
-            <a:ext cx="4710532" cy="603504"/>
-          </a:xfrm>
-          <a:prstGeom prst="rect">
-            <a:avLst/>
-          </a:prstGeom>
-          <a:noFill/>
-          <a:ln/>
-        </p:spPr>
-        <p:txBody>
-          <a:bodyPr wrap="square" rtlCol="0" anchor="ctr"/>
-          <a:lstStyle/>
-          <a:p>
-            <a:pPr indent="0" marL="0">
-              <a:lnSpc>
-                <a:spcPct val="110000"/>
-              </a:lnSpc>
-              <a:buNone/>
-            </a:pPr>
-            <a:r>
-              <a:rPr lang="en-US" sz="950" dirty="0">
-                <a:solidFill>
-                  <a:srgbClr val="10161F"/>
-                </a:solidFill>
-                <a:latin typeface="Pretendard" pitchFamily="34" charset="0"/>
-                <a:ea typeface="Pretendard" pitchFamily="34" charset="-122"/>
-                <a:cs typeface="Pretendard" pitchFamily="34" charset="-120"/>
-              </a:rPr>
-              <a:t>토지이용계획확인원상 도시계획시설 저촉, 건축선 후퇴, 지구단위계획 특별계획구역 확인</a:t>
-            </a:r>
-            <a:endParaRPr lang="en-US" sz="950" dirty="0"/>
-          </a:p>
-        </p:txBody>
-      </p:sp>
-      <p:sp>
-        <p:nvSpPr>
-          <p:cNvPr id="23" name="Shape 21"/>
-          <p:cNvSpPr/>
-          <p:nvPr/>
-        </p:nvSpPr>
-        <p:spPr>
-          <a:xfrm>
-            <a:off x="6255868" y="2542032"/>
-            <a:ext cx="5368900" cy="749808"/>
-          </a:xfrm>
-          <a:prstGeom prst="rect">
-            <a:avLst/>
-          </a:prstGeom>
-          <a:solidFill>
-            <a:srgbClr val="F7FAFC"/>
-          </a:solidFill>
-          <a:ln w="6350">
-            <a:solidFill>
-              <a:srgbClr val="D9B668"/>
-            </a:solidFill>
-            <a:prstDash val="solid"/>
-          </a:ln>
-        </p:spPr>
-      </p:sp>
-      <p:sp>
-        <p:nvSpPr>
-          <p:cNvPr id="24" name="Shape 22"/>
-          <p:cNvSpPr/>
-          <p:nvPr/>
-        </p:nvSpPr>
-        <p:spPr>
-          <a:xfrm>
-            <a:off x="6393028" y="2770632"/>
-            <a:ext cx="292608" cy="292608"/>
-          </a:xfrm>
-          <a:prstGeom prst="rect">
-            <a:avLst/>
-          </a:prstGeom>
-          <a:solidFill>
-            <a:srgbClr val="977024"/>
-          </a:solidFill>
-          <a:ln/>
-        </p:spPr>
-      </p:sp>
-      <p:sp>
-        <p:nvSpPr>
-          <p:cNvPr id="25" name="Text 23"/>
-          <p:cNvSpPr/>
-          <p:nvPr/>
-        </p:nvSpPr>
-        <p:spPr>
-          <a:xfrm>
-            <a:off x="6393028" y="2770632"/>
-            <a:ext cx="292608" cy="292608"/>
-          </a:xfrm>
-          <a:prstGeom prst="rect">
-            <a:avLst/>
-          </a:prstGeom>
-          <a:noFill/>
-          <a:ln/>
-        </p:spPr>
-        <p:txBody>
-          <a:bodyPr wrap="square" rtlCol="0" anchor="ctr"/>
-          <a:lstStyle/>
-          <a:p>
-            <a:pPr algn="ctr" indent="0" marL="0">
-              <a:buNone/>
-            </a:pPr>
-            <a:r>
-              <a:rPr lang="en-US" sz="1050" b="1" dirty="0">
-                <a:solidFill>
-                  <a:srgbClr val="FFFFFF"/>
-                </a:solidFill>
-                <a:latin typeface="Pretendard" pitchFamily="34" charset="0"/>
-                <a:ea typeface="Pretendard" pitchFamily="34" charset="-122"/>
-                <a:cs typeface="Pretendard" pitchFamily="34" charset="-120"/>
-              </a:rPr>
-              <a:t>✓</a:t>
-            </a:r>
-            <a:endParaRPr lang="en-US" sz="1050" dirty="0"/>
-          </a:p>
-        </p:txBody>
-      </p:sp>
-      <p:sp>
-        <p:nvSpPr>
-          <p:cNvPr id="26" name="Text 24"/>
-          <p:cNvSpPr/>
-          <p:nvPr/>
-        </p:nvSpPr>
-        <p:spPr>
-          <a:xfrm>
-            <a:off x="6786220" y="2615184"/>
-            <a:ext cx="4710532" cy="603504"/>
-          </a:xfrm>
-          <a:prstGeom prst="rect">
-            <a:avLst/>
-          </a:prstGeom>
-          <a:noFill/>
-          <a:ln/>
-        </p:spPr>
-        <p:txBody>
-          <a:bodyPr wrap="square" rtlCol="0" anchor="ctr"/>
-          <a:lstStyle/>
-          <a:p>
-            <a:pPr indent="0" marL="0">
-              <a:lnSpc>
-                <a:spcPct val="110000"/>
-              </a:lnSpc>
-              <a:buNone/>
-            </a:pPr>
-            <a:r>
-              <a:rPr lang="en-US" sz="950" dirty="0">
-                <a:solidFill>
-                  <a:srgbClr val="10161F"/>
-                </a:solidFill>
-                <a:latin typeface="Pretendard" pitchFamily="34" charset="0"/>
-                <a:ea typeface="Pretendard" pitchFamily="34" charset="-122"/>
-                <a:cs typeface="Pretendard" pitchFamily="34" charset="-120"/>
-              </a:rPr>
-              <a:t>기계식 주차기 정기 안전점검 합격증, 승강기 검사필증, 소방 완비증명서 실물 실사</a:t>
-            </a:r>
-            <a:endParaRPr lang="en-US" sz="950" dirty="0"/>
-          </a:p>
-        </p:txBody>
-      </p:sp>
-      <p:sp>
-        <p:nvSpPr>
-          <p:cNvPr id="27" name="Shape 25"/>
-          <p:cNvSpPr/>
-          <p:nvPr/>
-        </p:nvSpPr>
-        <p:spPr>
-          <a:xfrm>
-            <a:off x="6255868" y="3364992"/>
-            <a:ext cx="5368900" cy="749808"/>
-          </a:xfrm>
-          <a:prstGeom prst="rect">
-            <a:avLst/>
-          </a:prstGeom>
-          <a:solidFill>
-            <a:srgbClr val="F7FAFC"/>
-          </a:solidFill>
-          <a:ln w="6350">
-            <a:solidFill>
-              <a:srgbClr val="D9B668"/>
-            </a:solidFill>
-            <a:prstDash val="solid"/>
-          </a:ln>
-        </p:spPr>
-      </p:sp>
-      <p:sp>
-        <p:nvSpPr>
-          <p:cNvPr id="28" name="Shape 26"/>
-          <p:cNvSpPr/>
-          <p:nvPr/>
-        </p:nvSpPr>
-        <p:spPr>
-          <a:xfrm>
-            <a:off x="6393028" y="3593592"/>
-            <a:ext cx="292608" cy="292608"/>
-          </a:xfrm>
-          <a:prstGeom prst="rect">
-            <a:avLst/>
-          </a:prstGeom>
-          <a:solidFill>
-            <a:srgbClr val="977024"/>
-          </a:solidFill>
-          <a:ln/>
-        </p:spPr>
-      </p:sp>
-      <p:sp>
-        <p:nvSpPr>
-          <p:cNvPr id="29" name="Text 27"/>
-          <p:cNvSpPr/>
-          <p:nvPr/>
-        </p:nvSpPr>
-        <p:spPr>
-          <a:xfrm>
-            <a:off x="6393028" y="3593592"/>
-            <a:ext cx="292608" cy="292608"/>
-          </a:xfrm>
-          <a:prstGeom prst="rect">
-            <a:avLst/>
-          </a:prstGeom>
-          <a:noFill/>
-          <a:ln/>
-        </p:spPr>
-        <p:txBody>
-          <a:bodyPr wrap="square" rtlCol="0" anchor="ctr"/>
-          <a:lstStyle/>
-          <a:p>
-            <a:pPr algn="ctr" indent="0" marL="0">
-              <a:buNone/>
-            </a:pPr>
-            <a:r>
-              <a:rPr lang="en-US" sz="1050" b="1" dirty="0">
-                <a:solidFill>
-                  <a:srgbClr val="FFFFFF"/>
-                </a:solidFill>
-                <a:latin typeface="Pretendard" pitchFamily="34" charset="0"/>
-                <a:ea typeface="Pretendard" pitchFamily="34" charset="-122"/>
-                <a:cs typeface="Pretendard" pitchFamily="34" charset="-120"/>
-              </a:rPr>
-              <a:t>✓</a:t>
-            </a:r>
-            <a:endParaRPr lang="en-US" sz="1050" dirty="0"/>
-          </a:p>
-        </p:txBody>
-      </p:sp>
-      <p:sp>
-        <p:nvSpPr>
-          <p:cNvPr id="30" name="Text 28"/>
-          <p:cNvSpPr/>
-          <p:nvPr/>
-        </p:nvSpPr>
-        <p:spPr>
-          <a:xfrm>
-            <a:off x="6786220" y="3438144"/>
-            <a:ext cx="4710532" cy="603504"/>
-          </a:xfrm>
-          <a:prstGeom prst="rect">
-            <a:avLst/>
-          </a:prstGeom>
-          <a:noFill/>
-          <a:ln/>
-        </p:spPr>
-        <p:txBody>
-          <a:bodyPr wrap="square" rtlCol="0" anchor="ctr"/>
-          <a:lstStyle/>
-          <a:p>
-            <a:pPr indent="0" marL="0">
-              <a:lnSpc>
-                <a:spcPct val="110000"/>
-              </a:lnSpc>
-              <a:buNone/>
-            </a:pPr>
-            <a:r>
-              <a:rPr lang="en-US" sz="950" dirty="0">
-                <a:solidFill>
-                  <a:srgbClr val="10161F"/>
-                </a:solidFill>
-                <a:latin typeface="Pretendard" pitchFamily="34" charset="0"/>
-                <a:ea typeface="Pretendard" pitchFamily="34" charset="-122"/>
-                <a:cs typeface="Pretendard" pitchFamily="34" charset="-120"/>
-              </a:rPr>
-              <a:t>정화조 용량 대비 현 업종 적합성 및 하수도 원인자부담금 추가 부과 대상 여부 확인</a:t>
-            </a:r>
-            <a:endParaRPr lang="en-US" sz="950" dirty="0"/>
-          </a:p>
-        </p:txBody>
-      </p:sp>
-      <p:sp>
-        <p:nvSpPr>
-          <p:cNvPr id="31" name="Shape 29"/>
-          <p:cNvSpPr/>
-          <p:nvPr/>
-        </p:nvSpPr>
-        <p:spPr>
-          <a:xfrm>
-            <a:off x="566928" y="5349240"/>
-            <a:ext cx="11057839" cy="457200"/>
-          </a:xfrm>
-          <a:prstGeom prst="rect">
-            <a:avLst/>
-          </a:prstGeom>
-          <a:solidFill>
-            <a:srgbClr val="D9B668"/>
-          </a:solidFill>
-          <a:ln/>
-        </p:spPr>
-      </p:sp>
-      <p:sp>
-        <p:nvSpPr>
-          <p:cNvPr id="32" name="Text 30"/>
-          <p:cNvSpPr/>
-          <p:nvPr/>
-        </p:nvSpPr>
-        <p:spPr>
-          <a:xfrm>
-            <a:off x="749808" y="5422392"/>
-            <a:ext cx="10692079" cy="310896"/>
-          </a:xfrm>
-          <a:prstGeom prst="rect">
-            <a:avLst/>
-          </a:prstGeom>
-          <a:noFill/>
-          <a:ln/>
-        </p:spPr>
-        <p:txBody>
-          <a:bodyPr wrap="square" rtlCol="0" anchor="ctr"/>
-          <a:lstStyle/>
-          <a:p>
-            <a:pPr indent="0" marL="0">
-              <a:buNone/>
-            </a:pPr>
-            <a:r>
-              <a:rPr lang="en-US" sz="950" b="1" dirty="0">
-                <a:solidFill>
-                  <a:srgbClr val="977024"/>
-                </a:solidFill>
-                <a:latin typeface="Pretendard" pitchFamily="34" charset="0"/>
-                <a:ea typeface="Pretendard" pitchFamily="34" charset="-122"/>
-                <a:cs typeface="Pretendard" pitchFamily="34" charset="-120"/>
-              </a:rPr>
-              <a:t>※ 본 체크리스트는 계약 전 매수인의 안전한 자산 인수를 위한 필수 확인 사항이며, 실사(Due Diligence) 결과에 따라 매매 조건 및 잔금 일정이 조정될 수 있습니다.</a:t>
-            </a:r>
-            <a:endParaRPr lang="en-US" sz="950" dirty="0"/>
-          </a:p>
-        </p:txBody>
-      </p:sp>
-      <p:sp>
-        <p:nvSpPr>
-          <p:cNvPr id="33" name="Text 31"/>
+              <a:t>임대차계약서 원본 및 시설 점검 보고서 확인을 권장합니다.</a:t>
+            </a:r>
+            <a:endParaRPr lang="en-US" sz="1100" dirty="0"/>
+          </a:p>
+        </p:txBody>
+      </p:sp>
+      <p:sp>
+        <p:nvSpPr>
+          <p:cNvPr id="11" name="Text 9"/>
           <p:cNvSpPr/>
           <p:nvPr/>
         </p:nvSpPr>
@@ -7460,7 +5034,7 @@
       </p:sp>
       <p:sp>
         <p:nvSpPr>
-          <p:cNvPr id="34" name="Text 32"/>
+          <p:cNvPr id="12" name="Text 10"/>
           <p:cNvSpPr/>
           <p:nvPr/>
         </p:nvSpPr>
@@ -7508,436 +5082,6 @@
 <file path=ppt/slides/slide14.xml><?xml version="1.0" encoding="utf-8"?>
 <p:sld xmlns:a="http://schemas.openxmlformats.org/drawingml/2006/main" xmlns:r="http://schemas.openxmlformats.org/officeDocument/2006/relationships" xmlns:p="http://schemas.openxmlformats.org/presentationml/2006/main">
   <p:cSld name="Slide 14">
-    <p:bg>
-      <p:bgPr>
-        <a:solidFill>
-          <a:srgbClr val="FFFFFF"/>
-        </a:solidFill>
-      </p:bgPr>
-    </p:bg>
-    <p:spTree>
-      <p:nvGrpSpPr>
-        <p:cNvPr id="1" name=""/>
-        <p:cNvGrpSpPr/>
-        <p:nvPr/>
-      </p:nvGrpSpPr>
-      <p:grpSpPr>
-        <a:xfrm>
-          <a:off x="0" y="0"/>
-          <a:ext cx="0" cy="0"/>
-          <a:chOff x="0" y="0"/>
-          <a:chExt cx="0" cy="0"/>
-        </a:xfrm>
-      </p:grpSpPr>
-      <p:sp>
-        <p:nvSpPr>
-          <p:cNvPr id="2" name="Shape 0"/>
-          <p:cNvSpPr/>
-          <p:nvPr/>
-        </p:nvSpPr>
-        <p:spPr>
-          <a:xfrm>
-            <a:off x="566928" y="457200"/>
-            <a:ext cx="384048" cy="384048"/>
-          </a:xfrm>
-          <a:prstGeom prst="ellipse">
-            <a:avLst/>
-          </a:prstGeom>
-          <a:solidFill>
-            <a:srgbClr val="B98A2E"/>
-          </a:solidFill>
-          <a:ln/>
-        </p:spPr>
-      </p:sp>
-      <p:sp>
-        <p:nvSpPr>
-          <p:cNvPr id="3" name="Text 1"/>
-          <p:cNvSpPr/>
-          <p:nvPr/>
-        </p:nvSpPr>
-        <p:spPr>
-          <a:xfrm>
-            <a:off x="566928" y="457200"/>
-            <a:ext cx="384048" cy="384048"/>
-          </a:xfrm>
-          <a:prstGeom prst="rect">
-            <a:avLst/>
-          </a:prstGeom>
-          <a:noFill/>
-          <a:ln/>
-        </p:spPr>
-        <p:txBody>
-          <a:bodyPr wrap="square" lIns="0" tIns="0" rIns="0" bIns="0" rtlCol="0" anchor="ctr"/>
-          <a:lstStyle/>
-          <a:p>
-            <a:pPr algn="ctr" indent="0" marL="0">
-              <a:buNone/>
-            </a:pPr>
-            <a:r>
-              <a:rPr lang="en-US" sz="1300" b="1" dirty="0">
-                <a:solidFill>
-                  <a:srgbClr val="FFFFFF"/>
-                </a:solidFill>
-                <a:latin typeface="Arial" pitchFamily="34" charset="0"/>
-                <a:ea typeface="Arial" pitchFamily="34" charset="-122"/>
-                <a:cs typeface="Arial" pitchFamily="34" charset="-120"/>
-              </a:rPr>
-              <a:t>14</a:t>
-            </a:r>
-            <a:endParaRPr lang="en-US" sz="1300" dirty="0"/>
-          </a:p>
-        </p:txBody>
-      </p:sp>
-      <p:sp>
-        <p:nvSpPr>
-          <p:cNvPr id="4" name="Text 2"/>
-          <p:cNvSpPr/>
-          <p:nvPr/>
-        </p:nvSpPr>
-        <p:spPr>
-          <a:xfrm>
-            <a:off x="1133856" y="457200"/>
-            <a:ext cx="10490911" cy="182880"/>
-          </a:xfrm>
-          <a:prstGeom prst="rect">
-            <a:avLst/>
-          </a:prstGeom>
-          <a:noFill/>
-          <a:ln/>
-        </p:spPr>
-        <p:txBody>
-          <a:bodyPr wrap="square" lIns="0" tIns="0" rIns="0" bIns="0" rtlCol="0" anchor="ctr"/>
-          <a:lstStyle/>
-          <a:p>
-            <a:pPr indent="0" marL="0">
-              <a:buNone/>
-            </a:pPr>
-            <a:r>
-              <a:rPr lang="en-US" sz="950" b="1" spc="200" kern="0" dirty="0">
-                <a:solidFill>
-                  <a:srgbClr val="B98A2E"/>
-                </a:solidFill>
-                <a:latin typeface="Arial" pitchFamily="34" charset="0"/>
-                <a:ea typeface="Arial" pitchFamily="34" charset="-122"/>
-                <a:cs typeface="Arial" pitchFamily="34" charset="-120"/>
-              </a:rPr>
-              <a:t>Process</a:t>
-            </a:r>
-            <a:endParaRPr lang="en-US" sz="950" dirty="0"/>
-          </a:p>
-        </p:txBody>
-      </p:sp>
-      <p:sp>
-        <p:nvSpPr>
-          <p:cNvPr id="5" name="Text 3"/>
-          <p:cNvSpPr/>
-          <p:nvPr/>
-        </p:nvSpPr>
-        <p:spPr>
-          <a:xfrm>
-            <a:off x="1133856" y="640080"/>
-            <a:ext cx="10490911" cy="365760"/>
-          </a:xfrm>
-          <a:prstGeom prst="rect">
-            <a:avLst/>
-          </a:prstGeom>
-          <a:noFill/>
-          <a:ln/>
-        </p:spPr>
-        <p:txBody>
-          <a:bodyPr wrap="square" lIns="0" tIns="0" rIns="0" bIns="0" rtlCol="0" anchor="ctr">
-            <a:normAutofit/>
-          </a:bodyPr>
-          <a:lstStyle/>
-          <a:p>
-            <a:pPr indent="0" marL="0">
-              <a:buNone/>
-            </a:pPr>
-            <a:r>
-              <a:rPr lang="en-US" sz="2300" b="1" dirty="0">
-                <a:solidFill>
-                  <a:srgbClr val="10161F"/>
-                </a:solidFill>
-                <a:latin typeface="Pretendard" pitchFamily="34" charset="0"/>
-                <a:ea typeface="Pretendard" pitchFamily="34" charset="-122"/>
-                <a:cs typeface="Pretendard" pitchFamily="34" charset="-120"/>
-              </a:rPr>
-              <a:t>진행 절차</a:t>
-            </a:r>
-            <a:endParaRPr lang="en-US" sz="2300" dirty="0"/>
-          </a:p>
-        </p:txBody>
-      </p:sp>
-      <p:sp>
-        <p:nvSpPr>
-          <p:cNvPr id="6" name="Shape 4"/>
-          <p:cNvSpPr/>
-          <p:nvPr/>
-        </p:nvSpPr>
-        <p:spPr>
-          <a:xfrm>
-            <a:off x="566928" y="1572768"/>
-            <a:ext cx="11057839" cy="3200400"/>
-          </a:xfrm>
-          <a:prstGeom prst="roundRect">
-            <a:avLst>
-              <a:gd name="adj" fmla="val 1714"/>
-            </a:avLst>
-          </a:prstGeom>
-          <a:solidFill>
-            <a:srgbClr val="F7FAFC"/>
-          </a:solidFill>
-          <a:ln w="6350">
-            <a:solidFill>
-              <a:srgbClr val="CBD5E0"/>
-            </a:solidFill>
-            <a:prstDash val="solid"/>
-          </a:ln>
-        </p:spPr>
-      </p:sp>
-      <p:sp>
-        <p:nvSpPr>
-          <p:cNvPr id="7" name="Shape 5"/>
-          <p:cNvSpPr/>
-          <p:nvPr/>
-        </p:nvSpPr>
-        <p:spPr>
-          <a:xfrm>
-            <a:off x="786384" y="1792224"/>
-            <a:ext cx="438912" cy="438912"/>
-          </a:xfrm>
-          <a:prstGeom prst="ellipse">
-            <a:avLst/>
-          </a:prstGeom>
-          <a:solidFill>
-            <a:srgbClr val="B98A2E"/>
-          </a:solidFill>
-          <a:ln/>
-        </p:spPr>
-      </p:sp>
-      <p:sp>
-        <p:nvSpPr>
-          <p:cNvPr id="8" name="Text 6"/>
-          <p:cNvSpPr/>
-          <p:nvPr/>
-        </p:nvSpPr>
-        <p:spPr>
-          <a:xfrm>
-            <a:off x="786384" y="1792224"/>
-            <a:ext cx="438912" cy="438912"/>
-          </a:xfrm>
-          <a:prstGeom prst="rect">
-            <a:avLst/>
-          </a:prstGeom>
-          <a:noFill/>
-          <a:ln/>
-        </p:spPr>
-        <p:txBody>
-          <a:bodyPr wrap="square" lIns="0" tIns="0" rIns="0" bIns="0" rtlCol="0" anchor="ctr"/>
-          <a:lstStyle/>
-          <a:p>
-            <a:pPr algn="ctr" indent="0" marL="0">
-              <a:buNone/>
-            </a:pPr>
-            <a:r>
-              <a:rPr lang="en-US" sz="1400" b="1" dirty="0">
-                <a:solidFill>
-                  <a:srgbClr val="FFFFFF"/>
-                </a:solidFill>
-                <a:latin typeface="Arial" pitchFamily="34" charset="0"/>
-                <a:ea typeface="Arial" pitchFamily="34" charset="-122"/>
-                <a:cs typeface="Arial" pitchFamily="34" charset="-120"/>
-              </a:rPr>
-              <a:t>01</a:t>
-            </a:r>
-            <a:endParaRPr lang="en-US" sz="1400" dirty="0"/>
-          </a:p>
-        </p:txBody>
-      </p:sp>
-      <p:sp>
-        <p:nvSpPr>
-          <p:cNvPr id="9" name="Text 7"/>
-          <p:cNvSpPr/>
-          <p:nvPr/>
-        </p:nvSpPr>
-        <p:spPr>
-          <a:xfrm>
-            <a:off x="786384" y="2304288"/>
-            <a:ext cx="10618927" cy="365760"/>
-          </a:xfrm>
-          <a:prstGeom prst="rect">
-            <a:avLst/>
-          </a:prstGeom>
-          <a:noFill/>
-          <a:ln/>
-        </p:spPr>
-        <p:txBody>
-          <a:bodyPr wrap="square" rtlCol="0" anchor="ctr"/>
-          <a:lstStyle/>
-          <a:p>
-            <a:pPr indent="0" marL="0">
-              <a:buNone/>
-            </a:pPr>
-            <a:r>
-              <a:rPr lang="en-US" sz="1600" b="1" dirty="0">
-                <a:solidFill>
-                  <a:srgbClr val="10161F"/>
-                </a:solidFill>
-                <a:latin typeface="Pretendard" pitchFamily="34" charset="0"/>
-                <a:ea typeface="Pretendard" pitchFamily="34" charset="-122"/>
-                <a:cs typeface="Pretendard" pitchFamily="34" charset="-120"/>
-              </a:rPr>
-              <a:t>1단계</a:t>
-            </a:r>
-            <a:endParaRPr lang="en-US" sz="1600" dirty="0"/>
-          </a:p>
-        </p:txBody>
-      </p:sp>
-      <p:sp>
-        <p:nvSpPr>
-          <p:cNvPr id="10" name="Text 8"/>
-          <p:cNvSpPr/>
-          <p:nvPr/>
-        </p:nvSpPr>
-        <p:spPr>
-          <a:xfrm>
-            <a:off x="786384" y="2761488"/>
-            <a:ext cx="10618927" cy="1828800"/>
-          </a:xfrm>
-          <a:prstGeom prst="rect">
-            <a:avLst/>
-          </a:prstGeom>
-          <a:noFill/>
-          <a:ln/>
-        </p:spPr>
-        <p:txBody>
-          <a:bodyPr wrap="square" rtlCol="0" anchor="t"/>
-          <a:lstStyle/>
-          <a:p>
-            <a:pPr indent="0" marL="0">
-              <a:buNone/>
-            </a:pPr>
-            <a:r>
-              <a:rPr lang="en-US" sz="1100" dirty="0">
-                <a:solidFill>
-                  <a:srgbClr val="10161F"/>
-                </a:solidFill>
-                <a:latin typeface="Pretendard" pitchFamily="34" charset="0"/>
-                <a:ea typeface="Pretendard" pitchFamily="34" charset="-122"/>
-                <a:cs typeface="Pretendard" pitchFamily="34" charset="-120"/>
-              </a:rPr>
-              <a:t>임대차계약서 원본 및 시설 점검 보고서 확인을 권장합니</a:t>
-            </a:r>
-            <a:endParaRPr lang="en-US" sz="1100" dirty="0"/>
-          </a:p>
-          <a:p>
-            <a:pPr indent="0" marL="0">
-              <a:buNone/>
-            </a:pPr>
-            <a:r>
-              <a:rPr lang="en-US" sz="1100" dirty="0">
-                <a:solidFill>
-                  <a:srgbClr val="10161F"/>
-                </a:solidFill>
-                <a:latin typeface="Pretendard" pitchFamily="34" charset="0"/>
-                <a:ea typeface="Pretendard" pitchFamily="34" charset="-122"/>
-                <a:cs typeface="Pretendard" pitchFamily="34" charset="-120"/>
-              </a:rPr>
-              <a:t>임대차계약서 원본 및 시설 점검 보고서 확인을 권장합니다.</a:t>
-            </a:r>
-            <a:endParaRPr lang="en-US" sz="1100" dirty="0"/>
-          </a:p>
-        </p:txBody>
-      </p:sp>
-      <p:sp>
-        <p:nvSpPr>
-          <p:cNvPr id="11" name="Text 9"/>
-          <p:cNvSpPr/>
-          <p:nvPr/>
-        </p:nvSpPr>
-        <p:spPr>
-          <a:xfrm>
-            <a:off x="566928" y="6382512"/>
-            <a:ext cx="7315200" cy="219456"/>
-          </a:xfrm>
-          <a:prstGeom prst="rect">
-            <a:avLst/>
-          </a:prstGeom>
-          <a:noFill/>
-          <a:ln/>
-        </p:spPr>
-        <p:txBody>
-          <a:bodyPr wrap="square" lIns="0" tIns="0" rIns="0" bIns="0" rtlCol="0" anchor="ctr"/>
-          <a:lstStyle/>
-          <a:p>
-            <a:pPr indent="0" marL="0">
-              <a:buNone/>
-            </a:pPr>
-            <a:r>
-              <a:rPr lang="en-US" sz="800" dirty="0">
-                <a:solidFill>
-                  <a:srgbClr val="718096"/>
-                </a:solidFill>
-                <a:latin typeface="Pretendard" pitchFamily="34" charset="0"/>
-                <a:ea typeface="Pretendard" pitchFamily="34" charset="-122"/>
-                <a:cs typeface="Pretendard" pitchFamily="34" charset="-120"/>
-              </a:rPr>
-              <a:t>크리딜</a:t>
-            </a:r>
-            <a:endParaRPr lang="en-US" sz="800" dirty="0"/>
-          </a:p>
-        </p:txBody>
-      </p:sp>
-      <p:sp>
-        <p:nvSpPr>
-          <p:cNvPr id="12" name="Text 10"/>
-          <p:cNvSpPr/>
-          <p:nvPr/>
-        </p:nvSpPr>
-        <p:spPr>
-          <a:xfrm>
-            <a:off x="10710367" y="6382512"/>
-            <a:ext cx="914400" cy="219456"/>
-          </a:xfrm>
-          <a:prstGeom prst="rect">
-            <a:avLst/>
-          </a:prstGeom>
-          <a:noFill/>
-          <a:ln/>
-        </p:spPr>
-        <p:txBody>
-          <a:bodyPr wrap="square" lIns="0" tIns="0" rIns="0" bIns="0" rtlCol="0" anchor="ctr"/>
-          <a:lstStyle/>
-          <a:p>
-            <a:pPr algn="r" indent="0" marL="0">
-              <a:buNone/>
-            </a:pPr>
-            <a:r>
-              <a:rPr lang="en-US" sz="900" b="1" dirty="0">
-                <a:solidFill>
-                  <a:srgbClr val="B98A2E"/>
-                </a:solidFill>
-                <a:latin typeface="Arial" pitchFamily="34" charset="0"/>
-                <a:ea typeface="Arial" pitchFamily="34" charset="-122"/>
-                <a:cs typeface="Arial" pitchFamily="34" charset="-120"/>
-              </a:rPr>
-              <a:t>14</a:t>
-            </a:r>
-            <a:endParaRPr lang="en-US" sz="900" dirty="0"/>
-          </a:p>
-        </p:txBody>
-      </p:sp>
-    </p:spTree>
-  </p:cSld>
-  <p:clrMapOvr>
-    <a:masterClrMapping/>
-  </p:clrMapOvr>
-</p:sld>
-</file>
-
-<file path=ppt/slides/slide15.xml><?xml version="1.0" encoding="utf-8"?>
-<p:sld xmlns:a="http://schemas.openxmlformats.org/drawingml/2006/main" xmlns:r="http://schemas.openxmlformats.org/officeDocument/2006/relationships" xmlns:p="http://schemas.openxmlformats.org/presentationml/2006/main">
-  <p:cSld name="Slide 15">
     <p:bg>
       <p:bgPr>
         <a:solidFill>
@@ -8012,7 +5156,7 @@
                 <a:ea typeface="Arial" pitchFamily="34" charset="-122"/>
                 <a:cs typeface="Arial" pitchFamily="34" charset="-120"/>
               </a:rPr>
-              <a:t>15</a:t>
+              <a:t>14</a:t>
             </a:r>
             <a:endParaRPr lang="en-US" sz="1300" dirty="0"/>
           </a:p>
@@ -9426,7 +6570,7 @@
                 <a:ea typeface="Arial" pitchFamily="34" charset="-122"/>
                 <a:cs typeface="Arial" pitchFamily="34" charset="-120"/>
               </a:rPr>
-              <a:t>15</a:t>
+              <a:t>14</a:t>
             </a:r>
             <a:endParaRPr lang="en-US" sz="900" dirty="0"/>
           </a:p>
@@ -10281,7 +7425,7 @@
               <a:buNone/>
             </a:pPr>
             <a:r>
-              <a:rPr lang="en-US" sz="850" dirty="0">
+              <a:rPr lang="en-US" sz="950" dirty="0">
                 <a:solidFill>
                   <a:srgbClr val="718096"/>
                 </a:solidFill>
@@ -10289,9 +7433,9 @@
                 <a:ea typeface="Pretendard" pitchFamily="34" charset="-122"/>
                 <a:cs typeface="Pretendard" pitchFamily="34" charset="-120"/>
               </a:rPr>
-              <a:t>연 수익률(Cap Rate)</a:t>
-            </a:r>
-            <a:endParaRPr lang="en-US" sz="850" dirty="0"/>
+              <a:t>연 수익률</a:t>
+            </a:r>
+            <a:endParaRPr lang="en-US" sz="950" dirty="0"/>
           </a:p>
         </p:txBody>
       </p:sp>
@@ -10393,7 +7537,7 @@
               <a:buNone/>
             </a:pPr>
             <a:r>
-              <a:rPr lang="en-US" sz="950" dirty="0">
+              <a:rPr lang="en-US" sz="850" dirty="0">
                 <a:solidFill>
                   <a:srgbClr val="718096"/>
                 </a:solidFill>
@@ -10401,9 +7545,9 @@
                 <a:ea typeface="Pretendard" pitchFamily="34" charset="-122"/>
                 <a:cs typeface="Pretendard" pitchFamily="34" charset="-120"/>
               </a:rPr>
-              <a:t>실투자금</a:t>
-            </a:r>
-            <a:endParaRPr lang="en-US" sz="950" dirty="0"/>
+              <a:t>실투자금 (취득비용 포함)</a:t>
+            </a:r>
+            <a:endParaRPr lang="en-US" sz="850" dirty="0"/>
           </a:p>
         </p:txBody>
       </p:sp>
@@ -10713,7 +7857,9 @@
           <a:ln/>
         </p:spPr>
         <p:txBody>
-          <a:bodyPr wrap="square" lIns="0" tIns="0" rIns="0" bIns="0" rtlCol="0" anchor="ctr"/>
+          <a:bodyPr wrap="square" lIns="0" tIns="0" rIns="0" bIns="0" rtlCol="0" anchor="ctr">
+            <a:normAutofit/>
+          </a:bodyPr>
           <a:lstStyle/>
           <a:p>
             <a:pPr indent="0" marL="0">
@@ -10845,7 +7991,9 @@
           <a:ln/>
         </p:spPr>
         <p:txBody>
-          <a:bodyPr wrap="square" lIns="0" tIns="0" rIns="0" bIns="0" rtlCol="0" anchor="ctr"/>
+          <a:bodyPr wrap="square" lIns="0" tIns="0" rIns="0" bIns="0" rtlCol="0" anchor="ctr">
+            <a:normAutofit/>
+          </a:bodyPr>
           <a:lstStyle/>
           <a:p>
             <a:pPr indent="0" marL="0">
@@ -10860,7 +8008,7 @@
                 <a:ea typeface="Pretendard" pitchFamily="34" charset="-122"/>
                 <a:cs typeface="Pretendard" pitchFamily="34" charset="-120"/>
               </a:rPr>
-              <a:t>자산 규모: 해당 권역 소재 단독 빌딩 매입 기회</a:t>
+              <a:t>안정적 현금흐름: 전 층 임차인 운영 기반의 안정적 월 임대수익 창출</a:t>
             </a:r>
             <a:endParaRPr lang="en-US" sz="1150" dirty="0"/>
           </a:p>
@@ -10977,7 +8125,9 @@
           <a:ln/>
         </p:spPr>
         <p:txBody>
-          <a:bodyPr wrap="square" lIns="0" tIns="0" rIns="0" bIns="0" rtlCol="0" anchor="ctr"/>
+          <a:bodyPr wrap="square" lIns="0" tIns="0" rIns="0" bIns="0" rtlCol="0" anchor="ctr">
+            <a:normAutofit/>
+          </a:bodyPr>
           <a:lstStyle/>
           <a:p>
             <a:pPr indent="0" marL="0">
@@ -10992,7 +8142,7 @@
                 <a:ea typeface="Pretendard" pitchFamily="34" charset="-122"/>
                 <a:cs typeface="Pretendard" pitchFamily="34" charset="-120"/>
               </a:rPr>
-              <a:t>수익 안정성: 안정적 임대수익 기반 투자 매물</a:t>
+              <a:t>자산 규모: 해당 권역 소재 단독 빌딩 매입 기회</a:t>
             </a:r>
             <a:endParaRPr lang="en-US" sz="1150" dirty="0"/>
           </a:p>
@@ -11273,7 +8423,183 @@
       </p:pic>
       <p:sp>
         <p:nvSpPr>
-          <p:cNvPr id="7" name="Text 4"/>
+          <p:cNvPr id="7" name="Shape 4"/>
+          <p:cNvSpPr/>
+          <p:nvPr/>
+        </p:nvSpPr>
+        <p:spPr>
+          <a:xfrm>
+            <a:off x="704088" y="5184648"/>
+            <a:ext cx="3200400" cy="320040"/>
+          </a:xfrm>
+          <a:prstGeom prst="roundRect">
+            <a:avLst>
+              <a:gd name="adj" fmla="val 11429"/>
+            </a:avLst>
+          </a:prstGeom>
+          <a:solidFill>
+            <a:srgbClr val="FFFFFF">
+              <a:alpha val="90000"/>
+            </a:srgbClr>
+          </a:solidFill>
+          <a:ln w="10160">
+            <a:solidFill>
+              <a:srgbClr val="CBD5E1"/>
+            </a:solidFill>
+            <a:prstDash val="solid"/>
+          </a:ln>
+        </p:spPr>
+      </p:sp>
+      <p:sp>
+        <p:nvSpPr>
+          <p:cNvPr id="8" name="Text 5"/>
+          <p:cNvSpPr/>
+          <p:nvPr/>
+        </p:nvSpPr>
+        <p:spPr>
+          <a:xfrm>
+            <a:off x="749808" y="5202936"/>
+            <a:ext cx="3108960" cy="274320"/>
+          </a:xfrm>
+          <a:prstGeom prst="rect">
+            <a:avLst/>
+          </a:prstGeom>
+          <a:noFill/>
+          <a:ln/>
+        </p:spPr>
+        <p:txBody>
+          <a:bodyPr wrap="square" rtlCol="0" anchor="ctr"/>
+          <a:lstStyle/>
+          <a:p>
+            <a:pPr indent="0" marL="0">
+              <a:buNone/>
+            </a:pPr>
+            <a:r>
+              <a:rPr lang="en-US" sz="900" b="1" dirty="0">
+                <a:solidFill>
+                  <a:srgbClr val="B8860B"/>
+                </a:solidFill>
+                <a:latin typeface="Pretendard" pitchFamily="34" charset="0"/>
+                <a:ea typeface="Pretendard" pitchFamily="34" charset="-122"/>
+                <a:cs typeface="Pretendard" pitchFamily="34" charset="-120"/>
+              </a:rPr>
+              <a:t>★ </a:t>
+            </a:r>
+            <a:pPr indent="0" marL="0">
+              <a:buNone/>
+            </a:pPr>
+            <a:r>
+              <a:rPr lang="en-US" sz="850" b="1" dirty="0">
+                <a:solidFill>
+                  <a:srgbClr val="1E293B"/>
+                </a:solidFill>
+                <a:latin typeface="Pretendard" pitchFamily="34" charset="0"/>
+                <a:ea typeface="Pretendard" pitchFamily="34" charset="-122"/>
+                <a:cs typeface="Pretendard" pitchFamily="34" charset="-120"/>
+              </a:rPr>
+              <a:t>대상 자산(본건)   </a:t>
+            </a:r>
+            <a:pPr indent="0" marL="0">
+              <a:buNone/>
+            </a:pPr>
+            <a:r>
+              <a:rPr lang="en-US" sz="1000" b="1" dirty="0">
+                <a:solidFill>
+                  <a:srgbClr val="B8860B"/>
+                </a:solidFill>
+                <a:latin typeface="Pretendard" pitchFamily="34" charset="0"/>
+                <a:ea typeface="Pretendard" pitchFamily="34" charset="-122"/>
+                <a:cs typeface="Pretendard" pitchFamily="34" charset="-120"/>
+              </a:rPr>
+              <a:t>╌ </a:t>
+            </a:r>
+            <a:pPr indent="0" marL="0">
+              <a:buNone/>
+            </a:pPr>
+            <a:r>
+              <a:rPr lang="en-US" sz="850" dirty="0">
+                <a:solidFill>
+                  <a:srgbClr val="475569"/>
+                </a:solidFill>
+                <a:latin typeface="Pretendard" pitchFamily="34" charset="0"/>
+                <a:ea typeface="Pretendard" pitchFamily="34" charset="-122"/>
+                <a:cs typeface="Pretendard" pitchFamily="34" charset="-120"/>
+              </a:rPr>
+              <a:t>도보 5분 반경 (약 400m)</a:t>
+            </a:r>
+            <a:endParaRPr lang="en-US" sz="900" dirty="0"/>
+          </a:p>
+        </p:txBody>
+      </p:sp>
+      <p:sp>
+        <p:nvSpPr>
+          <p:cNvPr id="9" name="Shape 6"/>
+          <p:cNvSpPr/>
+          <p:nvPr/>
+        </p:nvSpPr>
+        <p:spPr>
+          <a:xfrm>
+            <a:off x="2715768" y="3739896"/>
+            <a:ext cx="822960" cy="219456"/>
+          </a:xfrm>
+          <a:prstGeom prst="roundRect">
+            <a:avLst>
+              <a:gd name="adj" fmla="val 16667"/>
+            </a:avLst>
+          </a:prstGeom>
+          <a:solidFill>
+            <a:srgbClr val="132A3A"/>
+          </a:solidFill>
+          <a:ln w="12700">
+            <a:solidFill>
+              <a:srgbClr val="FFFFFF"/>
+            </a:solidFill>
+            <a:prstDash val="solid"/>
+          </a:ln>
+        </p:spPr>
+      </p:sp>
+      <p:sp>
+        <p:nvSpPr>
+          <p:cNvPr id="10" name="Text 7"/>
+          <p:cNvSpPr/>
+          <p:nvPr/>
+        </p:nvSpPr>
+        <p:spPr>
+          <a:xfrm>
+            <a:off x="2715768" y="3739896"/>
+            <a:ext cx="822960" cy="219456"/>
+          </a:xfrm>
+          <a:prstGeom prst="rect">
+            <a:avLst/>
+          </a:prstGeom>
+          <a:noFill/>
+          <a:ln/>
+        </p:spPr>
+        <p:txBody>
+          <a:bodyPr wrap="square" rtlCol="0" anchor="ctr"/>
+          <a:lstStyle/>
+          <a:p>
+            <a:pPr algn="ctr" indent="0" marL="0">
+              <a:buNone/>
+            </a:pPr>
+            <a:r>
+              <a:rPr lang="en-US" sz="900" b="1" dirty="0">
+                <a:solidFill>
+                  <a:srgbClr val="FFFFFF"/>
+                </a:solidFill>
+                <a:latin typeface="Pretendard" pitchFamily="34" charset="0"/>
+                <a:ea typeface="Pretendard" pitchFamily="34" charset="-122"/>
+                <a:cs typeface="Pretendard" pitchFamily="34" charset="-120"/>
+              </a:rPr>
+              <a:t>★ 본건</a:t>
+            </a:r>
+            <a:endParaRPr lang="en-US" sz="900" dirty="0"/>
+          </a:p>
+        </p:txBody>
+      </p:sp>
+      <p:sp>
+        <p:nvSpPr>
+          <p:cNvPr id="11" name="Text 8"/>
           <p:cNvSpPr/>
           <p:nvPr/>
         </p:nvSpPr>
@@ -11317,7 +8643,7 @@
       </p:sp>
       <p:sp>
         <p:nvSpPr>
-          <p:cNvPr id="8" name="Text 5"/>
+          <p:cNvPr id="12" name="Text 9"/>
           <p:cNvSpPr/>
           <p:nvPr/>
         </p:nvSpPr>
@@ -11361,7 +8687,7 @@
       </p:sp>
       <p:sp>
         <p:nvSpPr>
-          <p:cNvPr id="9" name="Shape 6"/>
+          <p:cNvPr id="13" name="Shape 10"/>
           <p:cNvSpPr/>
           <p:nvPr/>
         </p:nvSpPr>
@@ -11384,7 +8710,7 @@
       </p:sp>
       <p:sp>
         <p:nvSpPr>
-          <p:cNvPr id="10" name="Text 7"/>
+          <p:cNvPr id="14" name="Text 11"/>
           <p:cNvSpPr/>
           <p:nvPr/>
         </p:nvSpPr>
@@ -11428,7 +8754,7 @@
       </p:sp>
       <p:sp>
         <p:nvSpPr>
-          <p:cNvPr id="11" name="Text 8"/>
+          <p:cNvPr id="15" name="Text 12"/>
           <p:cNvSpPr/>
           <p:nvPr/>
         </p:nvSpPr>
@@ -11472,7 +8798,7 @@
       </p:sp>
       <p:sp>
         <p:nvSpPr>
-          <p:cNvPr id="12" name="Shape 9"/>
+          <p:cNvPr id="16" name="Shape 13"/>
           <p:cNvSpPr/>
           <p:nvPr/>
         </p:nvSpPr>
@@ -11494,7 +8820,7 @@
       </p:sp>
       <p:sp>
         <p:nvSpPr>
-          <p:cNvPr id="13" name="Shape 10"/>
+          <p:cNvPr id="17" name="Shape 14"/>
           <p:cNvSpPr/>
           <p:nvPr/>
         </p:nvSpPr>
@@ -11514,7 +8840,7 @@
       </p:sp>
       <p:sp>
         <p:nvSpPr>
-          <p:cNvPr id="14" name="Text 11"/>
+          <p:cNvPr id="18" name="Text 15"/>
           <p:cNvSpPr/>
           <p:nvPr/>
         </p:nvSpPr>
@@ -11553,7 +8879,7 @@
       </p:sp>
       <p:sp>
         <p:nvSpPr>
-          <p:cNvPr id="15" name="Text 12"/>
+          <p:cNvPr id="19" name="Text 16"/>
           <p:cNvSpPr/>
           <p:nvPr/>
         </p:nvSpPr>
@@ -11596,7 +8922,7 @@
       </p:sp>
       <p:sp>
         <p:nvSpPr>
-          <p:cNvPr id="16" name="Text 13"/>
+          <p:cNvPr id="20" name="Text 17"/>
           <p:cNvSpPr/>
           <p:nvPr/>
         </p:nvSpPr>
@@ -11635,7 +8961,7 @@
       </p:sp>
       <p:sp>
         <p:nvSpPr>
-          <p:cNvPr id="17" name="Text 14"/>
+          <p:cNvPr id="21" name="Text 18"/>
           <p:cNvSpPr/>
           <p:nvPr/>
         </p:nvSpPr>
@@ -14315,11 +11641,11 @@
                 <a:solidFill>
                   <a:srgbClr val="10161F"/>
                 </a:solidFill>
-                <a:latin typeface="Pretendard" pitchFamily="34" charset="0"/>
-                <a:ea typeface="Pretendard" pitchFamily="34" charset="-122"/>
-                <a:cs typeface="Pretendard" pitchFamily="34" charset="-120"/>
-              </a:rPr>
-              <a:t>산출 중</a:t>
+                <a:latin typeface="Arial" pitchFamily="34" charset="0"/>
+                <a:ea typeface="Arial" pitchFamily="34" charset="-122"/>
+                <a:cs typeface="Arial" pitchFamily="34" charset="-120"/>
+              </a:rPr>
+              <a:t>-</a:t>
             </a:r>
             <a:endParaRPr lang="en-US" sz="2200" dirty="0"/>
           </a:p>
@@ -14566,7 +11892,7 @@
                 <a:ea typeface="Pretendard" pitchFamily="34" charset="-122"/>
                 <a:cs typeface="Pretendard" pitchFamily="34" charset="-120"/>
               </a:rPr>
-              <a:t>운영 실적 데이터 기반 GOP Cap Rate 산출</a:t>
+              <a:t>미제공 항목: 연간 매출, GOP(또는 GOP 마진), 매각 희망가 — 운영 실적(P&amp;L) 제출 시 GOP Cap Rate 산출</a:t>
             </a:r>
             <a:endParaRPr lang="en-US" sz="980" dirty="0"/>
           </a:p>
